--- a/docs/presentation/PARAKH_SIH26103_Idea_Submission.pptx
+++ b/docs/presentation/PARAKH_SIH26103_Idea_Submission.pptx
@@ -2,18 +2,18 @@
 <file path=ppt/presentation.xml><?xml version="1.0" encoding="utf-8"?>
 <p:presentation xmlns:p="http://schemas.openxmlformats.org/presentationml/2006/main">
   <p:sldMasterIdLst>
-    <p:sldMasterId xmlns:r="http://schemas.openxmlformats.org/officeDocument/2006/relationships" id="2147483648" r:id="R80712824615e4faa"/>
+    <p:sldMasterId xmlns:r="http://schemas.openxmlformats.org/officeDocument/2006/relationships" id="2147483648" r:id="Rb069fa655e134f1a"/>
   </p:sldMasterIdLst>
   <p:notesMasterIdLst>
-    <p:notesMasterId xmlns:r="http://schemas.openxmlformats.org/officeDocument/2006/relationships" r:id="R5a30c59acc854dcb"/>
+    <p:notesMasterId xmlns:r="http://schemas.openxmlformats.org/officeDocument/2006/relationships" r:id="R501b2760dbaa400f"/>
   </p:notesMasterIdLst>
   <p:sldIdLst>
-    <p:sldId xmlns:r="http://schemas.openxmlformats.org/officeDocument/2006/relationships" id="256" r:id="Rb240ade04500444a"/>
-    <p:sldId xmlns:r="http://schemas.openxmlformats.org/officeDocument/2006/relationships" id="257" r:id="R84384c57d5be48b5"/>
-    <p:sldId xmlns:r="http://schemas.openxmlformats.org/officeDocument/2006/relationships" id="258" r:id="Re5789420d1744268"/>
-    <p:sldId xmlns:r="http://schemas.openxmlformats.org/officeDocument/2006/relationships" id="259" r:id="Rcc2a05eb426e4f79"/>
-    <p:sldId xmlns:r="http://schemas.openxmlformats.org/officeDocument/2006/relationships" id="260" r:id="R3a190e5198f04df2"/>
-    <p:sldId xmlns:r="http://schemas.openxmlformats.org/officeDocument/2006/relationships" id="261" r:id="R0a86da46911046ea"/>
+    <p:sldId xmlns:r="http://schemas.openxmlformats.org/officeDocument/2006/relationships" id="256" r:id="R909dc44294f747eb"/>
+    <p:sldId xmlns:r="http://schemas.openxmlformats.org/officeDocument/2006/relationships" id="257" r:id="R1415622861034d9c"/>
+    <p:sldId xmlns:r="http://schemas.openxmlformats.org/officeDocument/2006/relationships" id="258" r:id="Re112b81941224fe9"/>
+    <p:sldId xmlns:r="http://schemas.openxmlformats.org/officeDocument/2006/relationships" id="259" r:id="Re2d94e8875b842ed"/>
+    <p:sldId xmlns:r="http://schemas.openxmlformats.org/officeDocument/2006/relationships" id="260" r:id="R8753df40dbc34468"/>
+    <p:sldId xmlns:r="http://schemas.openxmlformats.org/officeDocument/2006/relationships" id="261" r:id="R4d0d4f37d12a4ea3"/>
   </p:sldIdLst>
   <p:sldSz cx="12192000" cy="6858000"/>
   <p:notesSz cx="6858000" cy="9144000"/>
@@ -602,7 +602,7 @@
           <a:lstStyle xmlns:a="http://schemas.openxmlformats.org/drawingml/2006/main"/>
           <a:p xmlns:a="http://schemas.openxmlformats.org/drawingml/2006/main">
             <a:r>
-              <a:t>SIH 2026 Problem Statement 26103 (MoSPI / DIID), supplied by the team. Portfolio figures on later slides are specifically from the April 2026 PAIMANA Flash Report, pp. 1–3. Team ID and registered team name are intentionally left for the team to supply.</a:t>
+              <a:t>SIH 2026 Problem Statement 26103 and category/theme details supplied by the team. Team ID and registered team name intentionally remain placeholders.</a:t>
             </a:r>
           </a:p>
         </p:txBody>
@@ -678,7 +678,7 @@
               <a:buNone/>
             </a:pPr>
             <a:r>
-              <a:t>Prototype screenshot captured from the current PARAKH project directory test artifact for the July 2026 snapshot. April report evidence: data/pdfs/FlashReport_April2026.pdf. The current checker is a separate script and its review workflow is proposed work.</a:t>
+              <a:t>Official scale figures are from the MoSPI PAIMANA April 2026 Flash Report, pp. 1–3. The proposed workflow is a target state; current work is separately labeled in the prototype proof strip. Prediction is never an official decision.</a:t>
             </a:r>
             <a:endParaRPr/>
           </a:p>
@@ -755,7 +755,7 @@
               <a:buNone/>
             </a:pPr>
             <a:r>
-              <a:t>Workflow and metric values are from the checked-in code and artifacts: src/pdf_extracter.py, src/data_loader.py, src/model_train.py, src/checker.py, data/processed/model_metrics.json, and data/processed/portfolio_kpis.json. The temporal test month is June 2026 predicting July outcomes. There is one temporal holdout; no probability calibration. April portfolio reconciliation checks project count, original cost, revised cost and expenditure; exact match at displayed precision does not establish row-level correctness.</a:t>
+              <a:t>Current panel/model evidence: 17 reports from March 2025–July 2026; 25,116 project-month rows; 3,950 project histories. Evaluation JSON shows schedule gradient boosting mean PR-AUC 0.376 across ordered tests Apr–Jun 2026 versus logistic 0.340 and rule score 0.201. Cost June-only ordered test has 1,732 rows/72 positives; logistic PR-AUC 0.131, gradient boosting 0.076, rule 0.064. Probabilities are uncalibrated. Model drivers are predictive signals, not causal explanations. Current checker run: 24,257 VERIFIED, 859 REVIEW_REQUIRED, 0 hard failures, seven warning categories; April count and three portfolio totals reconcile at displayed precision.</a:t>
             </a:r>
             <a:endParaRPr/>
           </a:p>
@@ -832,7 +832,7 @@
               <a:buNone/>
             </a:pPr>
             <a:r>
-              <a:t>Feasibility facts describe the current open-source local prototype. Proposed controls are future work. Cost-risk estimates should not guide decisions: in the single June-to-July temporal holdout gradient boosting achieved ROC-AUC 0.436 and PR-AUC 0.039.</a:t>
+              <a:t>Feasibility and 30-day milestones are planned work. The review queue, notifications, and operational escalation are not an official ministry integration. External notifications wait for defined roles and thresholds.</a:t>
             </a:r>
             <a:endParaRPr/>
           </a:p>
@@ -909,7 +909,7 @@
               <a:buNone/>
             </a:pPr>
             <a:r>
-              <a:t>MoSPI PAIMANA Flash Report, April 2026, pp. 1–3. The July 2026 count comes from the generated prototype snapshot. No time savings, cost savings, delay reduction or environmental impact has been measured. The inspection-triage analogy is explanatory only.</a:t>
+              <a:t>Impact is a hypothesis to evaluate. Pilot measures are precision at review capacity, lead time, and reviewer effort/disposition. No savings or delay reductions have been measured.</a:t>
             </a:r>
             <a:endParaRPr/>
           </a:p>
@@ -986,7 +986,7 @@
               <a:buNone/>
             </a:pPr>
             <a:r>
-              <a:t>Sources: MoSPI PAIMANA Flash Report, April 2026, pp. 1–3 and Table 6 (https://paimana-proj.mospi.gov.in/ReportPage); MoSPI PAIMANA public dashboard (https://ipm.mospi.gov.in/Home/PublicDashboard); SIH 2026 Problem Statement 26103, MoSPI / DIID (brief supplied by the team); PARAKH project source remote https://github.com/Pratyush83078/Parakh and local evidence in src/checker.py, src/model_train.py, data/processed/model_metrics.json, and data/processed/portfolio_kpis.json. Confirm the repository is public before final submission.</a:t>
+              <a:t>Sources: MoSPI PAIMANA Flash Report April 2026 (https://paimana-proj.mospi.gov.in/ReportPage); PAIMANA public dashboard (https://ipm.mospi.gov.in/Home/PublicDashboard); SIH 2026 PS 26103 supplied by the team; prototype artifacts src/checker.py, src/model_train.py, data/processed/model_metrics.json, data/processed/portfolio_kpis.json. Confirm repository visibility before final submission.</a:t>
             </a:r>
             <a:endParaRPr/>
           </a:p>
@@ -1034,7 +1034,7 @@
           <p:cNvPr id="2" name="Title 1">
             <a:extLst xmlns:a="http://schemas.openxmlformats.org/drawingml/2006/main">
               <a:ext uri="{FF2B5EF4-FFF2-40B4-BE49-F238E27FC236}">
-                <a16:creationId xmlns:a16="http://schemas.microsoft.com/office/drawing/2014/main" id="{616978AF-0D3D-4D59-922C-74441CCC480F}"/>
+                <a16:creationId xmlns:a16="http://schemas.microsoft.com/office/drawing/2014/main" id="{F82AE234-6410-4E5C-A1A4-849D025FFF06}"/>
               </a:ext>
             </a:extLst>
           </p:cNvPr>
@@ -1066,7 +1066,7 @@
           <p:cNvPr id="3" name="Subtitle 2">
             <a:extLst xmlns:a="http://schemas.openxmlformats.org/drawingml/2006/main">
               <a:ext uri="{FF2B5EF4-FFF2-40B4-BE49-F238E27FC236}">
-                <a16:creationId xmlns:a16="http://schemas.microsoft.com/office/drawing/2014/main" id="{E47429B7-C1CD-4492-9662-AD374D19A519}"/>
+                <a16:creationId xmlns:a16="http://schemas.microsoft.com/office/drawing/2014/main" id="{7FA4D144-1B4A-49DA-9972-DDA602572FA0}"/>
               </a:ext>
             </a:extLst>
           </p:cNvPr>
@@ -1189,7 +1189,7 @@
           <p:cNvPr id="4" name="Date Placeholder 3">
             <a:extLst xmlns:a="http://schemas.openxmlformats.org/drawingml/2006/main">
               <a:ext uri="{FF2B5EF4-FFF2-40B4-BE49-F238E27FC236}">
-                <a16:creationId xmlns:a16="http://schemas.microsoft.com/office/drawing/2014/main" id="{9CA07506-31A0-4E51-9EC4-FBB81E266771}"/>
+                <a16:creationId xmlns:a16="http://schemas.microsoft.com/office/drawing/2014/main" id="{145A5BDA-D3F2-4D25-8BF7-A4801AFD0E95}"/>
               </a:ext>
             </a:extLst>
           </p:cNvPr>
@@ -1222,7 +1222,7 @@
           <p:cNvPr id="5" name="Footer Placeholder 4">
             <a:extLst xmlns:a="http://schemas.openxmlformats.org/drawingml/2006/main">
               <a:ext uri="{FF2B5EF4-FFF2-40B4-BE49-F238E27FC236}">
-                <a16:creationId xmlns:a16="http://schemas.microsoft.com/office/drawing/2014/main" id="{3B004834-C928-4186-B4EE-493731E0DD4B}"/>
+                <a16:creationId xmlns:a16="http://schemas.microsoft.com/office/drawing/2014/main" id="{FEC3A3EA-093F-43F5-933E-E6CBCC4EB542}"/>
               </a:ext>
             </a:extLst>
           </p:cNvPr>
@@ -1257,7 +1257,7 @@
           <p:cNvPr id="6" name="Slide Number Placeholder 5">
             <a:extLst xmlns:a="http://schemas.openxmlformats.org/drawingml/2006/main">
               <a:ext uri="{FF2B5EF4-FFF2-40B4-BE49-F238E27FC236}">
-                <a16:creationId xmlns:a16="http://schemas.microsoft.com/office/drawing/2014/main" id="{548BADE0-D0D5-4296-9789-7C254D36EB60}"/>
+                <a16:creationId xmlns:a16="http://schemas.microsoft.com/office/drawing/2014/main" id="{1B42C62C-67C3-4E1D-B834-54233EFDD227}"/>
               </a:ext>
             </a:extLst>
           </p:cNvPr>
@@ -1307,7 +1307,7 @@
           <p:cNvPr id="2" name="Title 1">
             <a:extLst xmlns:a="http://schemas.openxmlformats.org/drawingml/2006/main">
               <a:ext uri="{FF2B5EF4-FFF2-40B4-BE49-F238E27FC236}">
-                <a16:creationId xmlns:a16="http://schemas.microsoft.com/office/drawing/2014/main" id="{44821000-FA97-4A44-ADAE-5A68D5518745}"/>
+                <a16:creationId xmlns:a16="http://schemas.microsoft.com/office/drawing/2014/main" id="{C00DA4E4-4E68-4FB8-95B1-6E14CAB91F4F}"/>
               </a:ext>
             </a:extLst>
           </p:cNvPr>
@@ -1334,7 +1334,7 @@
           <p:cNvPr id="3" name="Vertical Text Placeholder 2">
             <a:extLst xmlns:a="http://schemas.openxmlformats.org/drawingml/2006/main">
               <a:ext uri="{FF2B5EF4-FFF2-40B4-BE49-F238E27FC236}">
-                <a16:creationId xmlns:a16="http://schemas.microsoft.com/office/drawing/2014/main" id="{8143EAAD-49FC-4183-AEE3-F847A245440B}"/>
+                <a16:creationId xmlns:a16="http://schemas.microsoft.com/office/drawing/2014/main" id="{9864B2B5-F0FA-45E6-A04D-99EDF60DAAA0}"/>
               </a:ext>
             </a:extLst>
           </p:cNvPr>
@@ -1396,7 +1396,7 @@
           <p:cNvPr id="4" name="Date Placeholder 3">
             <a:extLst xmlns:a="http://schemas.openxmlformats.org/drawingml/2006/main">
               <a:ext uri="{FF2B5EF4-FFF2-40B4-BE49-F238E27FC236}">
-                <a16:creationId xmlns:a16="http://schemas.microsoft.com/office/drawing/2014/main" id="{241C0452-BB20-4D41-BA28-461389376A14}"/>
+                <a16:creationId xmlns:a16="http://schemas.microsoft.com/office/drawing/2014/main" id="{5A2D3D05-F2FF-4C51-848F-30193F316DEE}"/>
               </a:ext>
             </a:extLst>
           </p:cNvPr>
@@ -1429,7 +1429,7 @@
           <p:cNvPr id="5" name="Footer Placeholder 4">
             <a:extLst xmlns:a="http://schemas.openxmlformats.org/drawingml/2006/main">
               <a:ext uri="{FF2B5EF4-FFF2-40B4-BE49-F238E27FC236}">
-                <a16:creationId xmlns:a16="http://schemas.microsoft.com/office/drawing/2014/main" id="{49F727B0-C245-4C6B-85D1-ED9E57E35CB7}"/>
+                <a16:creationId xmlns:a16="http://schemas.microsoft.com/office/drawing/2014/main" id="{2DBDB15F-1066-4104-8BE7-E12053CFA967}"/>
               </a:ext>
             </a:extLst>
           </p:cNvPr>
@@ -1464,7 +1464,7 @@
           <p:cNvPr id="6" name="Slide Number Placeholder 5">
             <a:extLst xmlns:a="http://schemas.openxmlformats.org/drawingml/2006/main">
               <a:ext uri="{FF2B5EF4-FFF2-40B4-BE49-F238E27FC236}">
-                <a16:creationId xmlns:a16="http://schemas.microsoft.com/office/drawing/2014/main" id="{8BE7EF3A-F380-4C6C-BBEA-41437052940F}"/>
+                <a16:creationId xmlns:a16="http://schemas.microsoft.com/office/drawing/2014/main" id="{5B6EA5A5-1E76-456D-9923-4E01022E583D}"/>
               </a:ext>
             </a:extLst>
           </p:cNvPr>
@@ -1514,7 +1514,7 @@
           <p:cNvPr id="2" name="Vertical Title 1">
             <a:extLst xmlns:a="http://schemas.openxmlformats.org/drawingml/2006/main">
               <a:ext uri="{FF2B5EF4-FFF2-40B4-BE49-F238E27FC236}">
-                <a16:creationId xmlns:a16="http://schemas.microsoft.com/office/drawing/2014/main" id="{89B57FAB-3200-4C12-B9C3-8834FE909DA5}"/>
+                <a16:creationId xmlns:a16="http://schemas.microsoft.com/office/drawing/2014/main" id="{6C977958-04A5-44EA-8D0A-47286009F731}"/>
               </a:ext>
             </a:extLst>
           </p:cNvPr>
@@ -1546,7 +1546,7 @@
           <p:cNvPr id="3" name="Vertical Text Placeholder 2">
             <a:extLst xmlns:a="http://schemas.openxmlformats.org/drawingml/2006/main">
               <a:ext uri="{FF2B5EF4-FFF2-40B4-BE49-F238E27FC236}">
-                <a16:creationId xmlns:a16="http://schemas.microsoft.com/office/drawing/2014/main" id="{687EBB80-2D42-4B0D-9D42-37634C448251}"/>
+                <a16:creationId xmlns:a16="http://schemas.microsoft.com/office/drawing/2014/main" id="{0D45F89F-C149-4813-9E7C-8C3D50DF7D24}"/>
               </a:ext>
             </a:extLst>
           </p:cNvPr>
@@ -1613,7 +1613,7 @@
           <p:cNvPr id="4" name="Date Placeholder 3">
             <a:extLst xmlns:a="http://schemas.openxmlformats.org/drawingml/2006/main">
               <a:ext uri="{FF2B5EF4-FFF2-40B4-BE49-F238E27FC236}">
-                <a16:creationId xmlns:a16="http://schemas.microsoft.com/office/drawing/2014/main" id="{0707EBD3-895F-4A8E-A146-97B8C232E19B}"/>
+                <a16:creationId xmlns:a16="http://schemas.microsoft.com/office/drawing/2014/main" id="{8D9A52D9-2A77-4D95-8A20-CDD376B89545}"/>
               </a:ext>
             </a:extLst>
           </p:cNvPr>
@@ -1646,7 +1646,7 @@
           <p:cNvPr id="5" name="Footer Placeholder 4">
             <a:extLst xmlns:a="http://schemas.openxmlformats.org/drawingml/2006/main">
               <a:ext uri="{FF2B5EF4-FFF2-40B4-BE49-F238E27FC236}">
-                <a16:creationId xmlns:a16="http://schemas.microsoft.com/office/drawing/2014/main" id="{0DB30902-4704-46E8-9F1B-066C6CEC5E2A}"/>
+                <a16:creationId xmlns:a16="http://schemas.microsoft.com/office/drawing/2014/main" id="{81446C40-5E42-4D0E-B03E-51F348957831}"/>
               </a:ext>
             </a:extLst>
           </p:cNvPr>
@@ -1681,7 +1681,7 @@
           <p:cNvPr id="6" name="Slide Number Placeholder 5">
             <a:extLst xmlns:a="http://schemas.openxmlformats.org/drawingml/2006/main">
               <a:ext uri="{FF2B5EF4-FFF2-40B4-BE49-F238E27FC236}">
-                <a16:creationId xmlns:a16="http://schemas.microsoft.com/office/drawing/2014/main" id="{E65D15BE-D3B8-418F-8236-8B207E453E71}"/>
+                <a16:creationId xmlns:a16="http://schemas.microsoft.com/office/drawing/2014/main" id="{7D31D7DC-5167-4709-8B6B-20A09021636D}"/>
               </a:ext>
             </a:extLst>
           </p:cNvPr>
@@ -1731,7 +1731,7 @@
           <p:cNvPr id="2" name="Title 1">
             <a:extLst xmlns:a="http://schemas.openxmlformats.org/drawingml/2006/main">
               <a:ext uri="{FF2B5EF4-FFF2-40B4-BE49-F238E27FC236}">
-                <a16:creationId xmlns:a16="http://schemas.microsoft.com/office/drawing/2014/main" id="{B7836FD1-55ED-4194-A386-E882492EEEBC}"/>
+                <a16:creationId xmlns:a16="http://schemas.microsoft.com/office/drawing/2014/main" id="{7ABFE76E-2B50-49FD-9154-9EEC295F156E}"/>
               </a:ext>
             </a:extLst>
           </p:cNvPr>
@@ -1758,7 +1758,7 @@
           <p:cNvPr id="3" name="Content Placeholder 2">
             <a:extLst xmlns:a="http://schemas.openxmlformats.org/drawingml/2006/main">
               <a:ext uri="{FF2B5EF4-FFF2-40B4-BE49-F238E27FC236}">
-                <a16:creationId xmlns:a16="http://schemas.microsoft.com/office/drawing/2014/main" id="{F9286593-C755-454D-9D5C-CCEFB8282205}"/>
+                <a16:creationId xmlns:a16="http://schemas.microsoft.com/office/drawing/2014/main" id="{C3940DD2-255B-4F4E-A411-0F1DA2DDB33E}"/>
               </a:ext>
             </a:extLst>
           </p:cNvPr>
@@ -1820,7 +1820,7 @@
           <p:cNvPr id="4" name="Date Placeholder 3">
             <a:extLst xmlns:a="http://schemas.openxmlformats.org/drawingml/2006/main">
               <a:ext uri="{FF2B5EF4-FFF2-40B4-BE49-F238E27FC236}">
-                <a16:creationId xmlns:a16="http://schemas.microsoft.com/office/drawing/2014/main" id="{1F831728-B0AA-49D9-8AED-35A62978B9A4}"/>
+                <a16:creationId xmlns:a16="http://schemas.microsoft.com/office/drawing/2014/main" id="{0EA9E1FB-F0CC-4CF0-9ACA-E28DCE1D1BF7}"/>
               </a:ext>
             </a:extLst>
           </p:cNvPr>
@@ -1853,7 +1853,7 @@
           <p:cNvPr id="5" name="Footer Placeholder 4">
             <a:extLst xmlns:a="http://schemas.openxmlformats.org/drawingml/2006/main">
               <a:ext uri="{FF2B5EF4-FFF2-40B4-BE49-F238E27FC236}">
-                <a16:creationId xmlns:a16="http://schemas.microsoft.com/office/drawing/2014/main" id="{01868047-0A38-49FA-AD20-0328322BAE76}"/>
+                <a16:creationId xmlns:a16="http://schemas.microsoft.com/office/drawing/2014/main" id="{CB982141-9540-4967-ACC3-88B7FE77336A}"/>
               </a:ext>
             </a:extLst>
           </p:cNvPr>
@@ -1888,7 +1888,7 @@
           <p:cNvPr id="6" name="Slide Number Placeholder 5">
             <a:extLst xmlns:a="http://schemas.openxmlformats.org/drawingml/2006/main">
               <a:ext uri="{FF2B5EF4-FFF2-40B4-BE49-F238E27FC236}">
-                <a16:creationId xmlns:a16="http://schemas.microsoft.com/office/drawing/2014/main" id="{E9400430-21E1-47D5-88F0-AA73102B637B}"/>
+                <a16:creationId xmlns:a16="http://schemas.microsoft.com/office/drawing/2014/main" id="{9E4D18DA-31CE-4EE7-AD20-458E37888CF1}"/>
               </a:ext>
             </a:extLst>
           </p:cNvPr>
@@ -1938,7 +1938,7 @@
           <p:cNvPr id="2" name="Title 1">
             <a:extLst xmlns:a="http://schemas.openxmlformats.org/drawingml/2006/main">
               <a:ext uri="{FF2B5EF4-FFF2-40B4-BE49-F238E27FC236}">
-                <a16:creationId xmlns:a16="http://schemas.microsoft.com/office/drawing/2014/main" id="{F2C30B1D-235B-4AA9-9074-295D4BCFB54F}"/>
+                <a16:creationId xmlns:a16="http://schemas.microsoft.com/office/drawing/2014/main" id="{98CADC07-5218-4719-B2AE-9735A0A3E40F}"/>
               </a:ext>
             </a:extLst>
           </p:cNvPr>
@@ -1975,7 +1975,7 @@
           <p:cNvPr id="3" name="Text Placeholder 2">
             <a:extLst xmlns:a="http://schemas.openxmlformats.org/drawingml/2006/main">
               <a:ext uri="{FF2B5EF4-FFF2-40B4-BE49-F238E27FC236}">
-                <a16:creationId xmlns:a16="http://schemas.microsoft.com/office/drawing/2014/main" id="{322BF82D-6CE1-4E74-9465-E97950C7DF66}"/>
+                <a16:creationId xmlns:a16="http://schemas.microsoft.com/office/drawing/2014/main" id="{59339822-B954-416D-8FFE-E2F0708C3ADE}"/>
               </a:ext>
             </a:extLst>
           </p:cNvPr>
@@ -2101,7 +2101,7 @@
           <p:cNvPr id="4" name="Date Placeholder 3">
             <a:extLst xmlns:a="http://schemas.openxmlformats.org/drawingml/2006/main">
               <a:ext uri="{FF2B5EF4-FFF2-40B4-BE49-F238E27FC236}">
-                <a16:creationId xmlns:a16="http://schemas.microsoft.com/office/drawing/2014/main" id="{3F2E0157-2106-4ED8-BCF0-49385D80EAE6}"/>
+                <a16:creationId xmlns:a16="http://schemas.microsoft.com/office/drawing/2014/main" id="{747ED0CC-9566-4B44-A951-DFEA18328587}"/>
               </a:ext>
             </a:extLst>
           </p:cNvPr>
@@ -2134,7 +2134,7 @@
           <p:cNvPr id="5" name="Footer Placeholder 4">
             <a:extLst xmlns:a="http://schemas.openxmlformats.org/drawingml/2006/main">
               <a:ext uri="{FF2B5EF4-FFF2-40B4-BE49-F238E27FC236}">
-                <a16:creationId xmlns:a16="http://schemas.microsoft.com/office/drawing/2014/main" id="{EEDF0778-F227-4F96-8516-1471663EC5A4}"/>
+                <a16:creationId xmlns:a16="http://schemas.microsoft.com/office/drawing/2014/main" id="{034AE937-A990-455A-87FE-0F7F776598C9}"/>
               </a:ext>
             </a:extLst>
           </p:cNvPr>
@@ -2169,7 +2169,7 @@
           <p:cNvPr id="6" name="Slide Number Placeholder 5">
             <a:extLst xmlns:a="http://schemas.openxmlformats.org/drawingml/2006/main">
               <a:ext uri="{FF2B5EF4-FFF2-40B4-BE49-F238E27FC236}">
-                <a16:creationId xmlns:a16="http://schemas.microsoft.com/office/drawing/2014/main" id="{8D3E0E80-1A5F-4554-98F1-67D6ED47F7C8}"/>
+                <a16:creationId xmlns:a16="http://schemas.microsoft.com/office/drawing/2014/main" id="{8E309EF1-2C06-4EE5-98F9-F9105D827E04}"/>
               </a:ext>
             </a:extLst>
           </p:cNvPr>
@@ -2219,7 +2219,7 @@
           <p:cNvPr id="2" name="Title 1">
             <a:extLst xmlns:a="http://schemas.openxmlformats.org/drawingml/2006/main">
               <a:ext uri="{FF2B5EF4-FFF2-40B4-BE49-F238E27FC236}">
-                <a16:creationId xmlns:a16="http://schemas.microsoft.com/office/drawing/2014/main" id="{8DD5C75C-D394-4B89-BB0D-ED902628302F}"/>
+                <a16:creationId xmlns:a16="http://schemas.microsoft.com/office/drawing/2014/main" id="{15704328-3CA2-413A-AA61-17B90D34BFB1}"/>
               </a:ext>
             </a:extLst>
           </p:cNvPr>
@@ -2246,7 +2246,7 @@
           <p:cNvPr id="3" name="Content Placeholder 2">
             <a:extLst xmlns:a="http://schemas.openxmlformats.org/drawingml/2006/main">
               <a:ext uri="{FF2B5EF4-FFF2-40B4-BE49-F238E27FC236}">
-                <a16:creationId xmlns:a16="http://schemas.microsoft.com/office/drawing/2014/main" id="{FD11B351-06BC-4CCE-947D-CB6D6A036B70}"/>
+                <a16:creationId xmlns:a16="http://schemas.microsoft.com/office/drawing/2014/main" id="{DB12093C-F857-4C2E-AFA5-D4DDCC22E86A}"/>
               </a:ext>
             </a:extLst>
           </p:cNvPr>
@@ -2350,7 +2350,7 @@
           <p:cNvPr id="4" name="Content Placeholder 3">
             <a:extLst xmlns:a="http://schemas.openxmlformats.org/drawingml/2006/main">
               <a:ext uri="{FF2B5EF4-FFF2-40B4-BE49-F238E27FC236}">
-                <a16:creationId xmlns:a16="http://schemas.microsoft.com/office/drawing/2014/main" id="{8E86E06D-C5D1-4FCF-91F3-A6FE44073782}"/>
+                <a16:creationId xmlns:a16="http://schemas.microsoft.com/office/drawing/2014/main" id="{803792A7-13CA-48BA-B18C-A4E53822CA42}"/>
               </a:ext>
             </a:extLst>
           </p:cNvPr>
@@ -2454,7 +2454,7 @@
           <p:cNvPr id="5" name="Date Placeholder 3">
             <a:extLst xmlns:a="http://schemas.openxmlformats.org/drawingml/2006/main">
               <a:ext uri="{FF2B5EF4-FFF2-40B4-BE49-F238E27FC236}">
-                <a16:creationId xmlns:a16="http://schemas.microsoft.com/office/drawing/2014/main" id="{38F66108-6EFD-4DF2-956C-D7FE24D626AE}"/>
+                <a16:creationId xmlns:a16="http://schemas.microsoft.com/office/drawing/2014/main" id="{A00E3C23-0B4C-4E6D-B2B2-92CB6BC63212}"/>
               </a:ext>
             </a:extLst>
           </p:cNvPr>
@@ -2487,7 +2487,7 @@
           <p:cNvPr id="6" name="Footer Placeholder 4">
             <a:extLst xmlns:a="http://schemas.openxmlformats.org/drawingml/2006/main">
               <a:ext uri="{FF2B5EF4-FFF2-40B4-BE49-F238E27FC236}">
-                <a16:creationId xmlns:a16="http://schemas.microsoft.com/office/drawing/2014/main" id="{25389704-AC26-4420-B6C2-FF840E0772A8}"/>
+                <a16:creationId xmlns:a16="http://schemas.microsoft.com/office/drawing/2014/main" id="{C89FABEA-61D1-4B66-803E-A0D6FC445394}"/>
               </a:ext>
             </a:extLst>
           </p:cNvPr>
@@ -2522,7 +2522,7 @@
           <p:cNvPr id="7" name="Slide Number Placeholder 5">
             <a:extLst xmlns:a="http://schemas.openxmlformats.org/drawingml/2006/main">
               <a:ext uri="{FF2B5EF4-FFF2-40B4-BE49-F238E27FC236}">
-                <a16:creationId xmlns:a16="http://schemas.microsoft.com/office/drawing/2014/main" id="{03448FEA-BE99-44D5-91C3-A553C78C8FA1}"/>
+                <a16:creationId xmlns:a16="http://schemas.microsoft.com/office/drawing/2014/main" id="{A1A01405-CCD2-4024-ADCC-D058008E6E44}"/>
               </a:ext>
             </a:extLst>
           </p:cNvPr>
@@ -2572,7 +2572,7 @@
           <p:cNvPr id="2" name="Title 1">
             <a:extLst xmlns:a="http://schemas.openxmlformats.org/drawingml/2006/main">
               <a:ext uri="{FF2B5EF4-FFF2-40B4-BE49-F238E27FC236}">
-                <a16:creationId xmlns:a16="http://schemas.microsoft.com/office/drawing/2014/main" id="{0F4B0B23-4020-402E-A6EC-890126549BA0}"/>
+                <a16:creationId xmlns:a16="http://schemas.microsoft.com/office/drawing/2014/main" id="{31A56F98-68E0-4B7C-898E-1C8973E0D851}"/>
               </a:ext>
             </a:extLst>
           </p:cNvPr>
@@ -2604,7 +2604,7 @@
           <p:cNvPr id="3" name="Text Placeholder 2">
             <a:extLst xmlns:a="http://schemas.openxmlformats.org/drawingml/2006/main">
               <a:ext uri="{FF2B5EF4-FFF2-40B4-BE49-F238E27FC236}">
-                <a16:creationId xmlns:a16="http://schemas.microsoft.com/office/drawing/2014/main" id="{A9468BCB-383A-4983-966C-076E00B064BC}"/>
+                <a16:creationId xmlns:a16="http://schemas.microsoft.com/office/drawing/2014/main" id="{31D8FB32-02F3-4BF7-B80B-D8DA65216746}"/>
               </a:ext>
             </a:extLst>
           </p:cNvPr>
@@ -2676,7 +2676,7 @@
           <p:cNvPr id="4" name="Content Placeholder 3">
             <a:extLst xmlns:a="http://schemas.openxmlformats.org/drawingml/2006/main">
               <a:ext uri="{FF2B5EF4-FFF2-40B4-BE49-F238E27FC236}">
-                <a16:creationId xmlns:a16="http://schemas.microsoft.com/office/drawing/2014/main" id="{B54739A8-0DD5-43B7-8EBE-A86E5FA78625}"/>
+                <a16:creationId xmlns:a16="http://schemas.microsoft.com/office/drawing/2014/main" id="{A55EB117-EFB9-432B-BE1F-7142B68646EC}"/>
               </a:ext>
             </a:extLst>
           </p:cNvPr>
@@ -2780,7 +2780,7 @@
           <p:cNvPr id="5" name="Text Placeholder 4">
             <a:extLst xmlns:a="http://schemas.openxmlformats.org/drawingml/2006/main">
               <a:ext uri="{FF2B5EF4-FFF2-40B4-BE49-F238E27FC236}">
-                <a16:creationId xmlns:a16="http://schemas.microsoft.com/office/drawing/2014/main" id="{8762465B-7BAA-4938-B074-CB4F3125933E}"/>
+                <a16:creationId xmlns:a16="http://schemas.microsoft.com/office/drawing/2014/main" id="{71B7F056-FB69-434A-AAFE-A95F1E308802}"/>
               </a:ext>
             </a:extLst>
           </p:cNvPr>
@@ -2852,7 +2852,7 @@
           <p:cNvPr id="6" name="Content Placeholder 5">
             <a:extLst xmlns:a="http://schemas.openxmlformats.org/drawingml/2006/main">
               <a:ext uri="{FF2B5EF4-FFF2-40B4-BE49-F238E27FC236}">
-                <a16:creationId xmlns:a16="http://schemas.microsoft.com/office/drawing/2014/main" id="{54D1EC22-9B06-4872-819F-EA558EC64F6C}"/>
+                <a16:creationId xmlns:a16="http://schemas.microsoft.com/office/drawing/2014/main" id="{7A48D572-57E1-4F67-8292-785CA4177390}"/>
               </a:ext>
             </a:extLst>
           </p:cNvPr>
@@ -2956,7 +2956,7 @@
           <p:cNvPr id="7" name="Date Placeholder 3">
             <a:extLst xmlns:a="http://schemas.openxmlformats.org/drawingml/2006/main">
               <a:ext uri="{FF2B5EF4-FFF2-40B4-BE49-F238E27FC236}">
-                <a16:creationId xmlns:a16="http://schemas.microsoft.com/office/drawing/2014/main" id="{222CB9B8-AE9F-408F-928C-B1394C784F0B}"/>
+                <a16:creationId xmlns:a16="http://schemas.microsoft.com/office/drawing/2014/main" id="{4DB94FBB-42A4-47D8-A3EA-0CDA1A601F80}"/>
               </a:ext>
             </a:extLst>
           </p:cNvPr>
@@ -2989,7 +2989,7 @@
           <p:cNvPr id="8" name="Footer Placeholder 4">
             <a:extLst xmlns:a="http://schemas.openxmlformats.org/drawingml/2006/main">
               <a:ext uri="{FF2B5EF4-FFF2-40B4-BE49-F238E27FC236}">
-                <a16:creationId xmlns:a16="http://schemas.microsoft.com/office/drawing/2014/main" id="{08C967D1-65B0-4BB0-8717-0F6A38C7C0FF}"/>
+                <a16:creationId xmlns:a16="http://schemas.microsoft.com/office/drawing/2014/main" id="{EEF294EC-0682-4527-A1E6-24D66F07A347}"/>
               </a:ext>
             </a:extLst>
           </p:cNvPr>
@@ -3024,7 +3024,7 @@
           <p:cNvPr id="9" name="Slide Number Placeholder 5">
             <a:extLst xmlns:a="http://schemas.openxmlformats.org/drawingml/2006/main">
               <a:ext uri="{FF2B5EF4-FFF2-40B4-BE49-F238E27FC236}">
-                <a16:creationId xmlns:a16="http://schemas.microsoft.com/office/drawing/2014/main" id="{432EDD63-6501-4D46-95DF-5DEDDD3A35FD}"/>
+                <a16:creationId xmlns:a16="http://schemas.microsoft.com/office/drawing/2014/main" id="{810C581E-90BF-48EE-AB84-DD7CFF1834B9}"/>
               </a:ext>
             </a:extLst>
           </p:cNvPr>
@@ -3074,7 +3074,7 @@
           <p:cNvPr id="2" name="Title 1">
             <a:extLst xmlns:a="http://schemas.openxmlformats.org/drawingml/2006/main">
               <a:ext uri="{FF2B5EF4-FFF2-40B4-BE49-F238E27FC236}">
-                <a16:creationId xmlns:a16="http://schemas.microsoft.com/office/drawing/2014/main" id="{7B704525-62C8-4772-AB45-4844DEE3FC6F}"/>
+                <a16:creationId xmlns:a16="http://schemas.microsoft.com/office/drawing/2014/main" id="{416EB72F-7511-424B-A7E3-C08FC524D88A}"/>
               </a:ext>
             </a:extLst>
           </p:cNvPr>
@@ -3101,7 +3101,7 @@
           <p:cNvPr id="3" name="Date Placeholder 3">
             <a:extLst xmlns:a="http://schemas.openxmlformats.org/drawingml/2006/main">
               <a:ext uri="{FF2B5EF4-FFF2-40B4-BE49-F238E27FC236}">
-                <a16:creationId xmlns:a16="http://schemas.microsoft.com/office/drawing/2014/main" id="{3F0E659C-4312-4E3B-92A1-C0EB875CB74F}"/>
+                <a16:creationId xmlns:a16="http://schemas.microsoft.com/office/drawing/2014/main" id="{8F20704A-106F-4D71-9F6B-D2A86F2DA291}"/>
               </a:ext>
             </a:extLst>
           </p:cNvPr>
@@ -3134,7 +3134,7 @@
           <p:cNvPr id="4" name="Footer Placeholder 4">
             <a:extLst xmlns:a="http://schemas.openxmlformats.org/drawingml/2006/main">
               <a:ext uri="{FF2B5EF4-FFF2-40B4-BE49-F238E27FC236}">
-                <a16:creationId xmlns:a16="http://schemas.microsoft.com/office/drawing/2014/main" id="{43AA3944-D704-4F29-92B8-A11157B53A6A}"/>
+                <a16:creationId xmlns:a16="http://schemas.microsoft.com/office/drawing/2014/main" id="{6D4353C0-A189-4096-B54C-B51393A5D829}"/>
               </a:ext>
             </a:extLst>
           </p:cNvPr>
@@ -3169,7 +3169,7 @@
           <p:cNvPr id="5" name="Slide Number Placeholder 5">
             <a:extLst xmlns:a="http://schemas.openxmlformats.org/drawingml/2006/main">
               <a:ext uri="{FF2B5EF4-FFF2-40B4-BE49-F238E27FC236}">
-                <a16:creationId xmlns:a16="http://schemas.microsoft.com/office/drawing/2014/main" id="{98299F0B-8BD8-41DD-A717-C7DB9D78F8BB}"/>
+                <a16:creationId xmlns:a16="http://schemas.microsoft.com/office/drawing/2014/main" id="{4463E5E6-7D8E-44F5-9E87-925AFD21CF17}"/>
               </a:ext>
             </a:extLst>
           </p:cNvPr>
@@ -3219,7 +3219,7 @@
           <p:cNvPr id="2" name="Date Placeholder 3">
             <a:extLst xmlns:a="http://schemas.openxmlformats.org/drawingml/2006/main">
               <a:ext uri="{FF2B5EF4-FFF2-40B4-BE49-F238E27FC236}">
-                <a16:creationId xmlns:a16="http://schemas.microsoft.com/office/drawing/2014/main" id="{3F26D526-F337-45B6-BC87-B96B41EEE993}"/>
+                <a16:creationId xmlns:a16="http://schemas.microsoft.com/office/drawing/2014/main" id="{E0E75E3C-AB1F-4858-81CD-3CAAE8D8B275}"/>
               </a:ext>
             </a:extLst>
           </p:cNvPr>
@@ -3252,7 +3252,7 @@
           <p:cNvPr id="3" name="Footer Placeholder 4">
             <a:extLst xmlns:a="http://schemas.openxmlformats.org/drawingml/2006/main">
               <a:ext uri="{FF2B5EF4-FFF2-40B4-BE49-F238E27FC236}">
-                <a16:creationId xmlns:a16="http://schemas.microsoft.com/office/drawing/2014/main" id="{0A9380AB-B837-4350-93DE-3A534340C85B}"/>
+                <a16:creationId xmlns:a16="http://schemas.microsoft.com/office/drawing/2014/main" id="{DE67A292-5B35-44CD-AD7B-8840A4C094BF}"/>
               </a:ext>
             </a:extLst>
           </p:cNvPr>
@@ -3287,7 +3287,7 @@
           <p:cNvPr id="4" name="Slide Number Placeholder 5">
             <a:extLst xmlns:a="http://schemas.openxmlformats.org/drawingml/2006/main">
               <a:ext uri="{FF2B5EF4-FFF2-40B4-BE49-F238E27FC236}">
-                <a16:creationId xmlns:a16="http://schemas.microsoft.com/office/drawing/2014/main" id="{ADDA1EE8-16AF-49A8-9D87-69D8F5DD2954}"/>
+                <a16:creationId xmlns:a16="http://schemas.microsoft.com/office/drawing/2014/main" id="{013D6B2E-4A98-4EB6-BD76-D5AF7F5EEB47}"/>
               </a:ext>
             </a:extLst>
           </p:cNvPr>
@@ -3337,7 +3337,7 @@
           <p:cNvPr id="2" name="Title 1">
             <a:extLst xmlns:a="http://schemas.openxmlformats.org/drawingml/2006/main">
               <a:ext uri="{FF2B5EF4-FFF2-40B4-BE49-F238E27FC236}">
-                <a16:creationId xmlns:a16="http://schemas.microsoft.com/office/drawing/2014/main" id="{A72FC026-52F0-488B-B778-AD4E634809C1}"/>
+                <a16:creationId xmlns:a16="http://schemas.microsoft.com/office/drawing/2014/main" id="{2D7428D5-676D-4146-B312-A8CA49C5012C}"/>
               </a:ext>
             </a:extLst>
           </p:cNvPr>
@@ -3374,7 +3374,7 @@
           <p:cNvPr id="3" name="Content Placeholder 2">
             <a:extLst xmlns:a="http://schemas.openxmlformats.org/drawingml/2006/main">
               <a:ext uri="{FF2B5EF4-FFF2-40B4-BE49-F238E27FC236}">
-                <a16:creationId xmlns:a16="http://schemas.microsoft.com/office/drawing/2014/main" id="{5807B598-8373-4F6F-BDC3-6E38F4290ACA}"/>
+                <a16:creationId xmlns:a16="http://schemas.microsoft.com/office/drawing/2014/main" id="{2EAAA863-9DF5-4054-985A-2AB31B77CCCC}"/>
               </a:ext>
             </a:extLst>
           </p:cNvPr>
@@ -3478,7 +3478,7 @@
           <p:cNvPr id="4" name="Text Placeholder 3">
             <a:extLst xmlns:a="http://schemas.openxmlformats.org/drawingml/2006/main">
               <a:ext uri="{FF2B5EF4-FFF2-40B4-BE49-F238E27FC236}">
-                <a16:creationId xmlns:a16="http://schemas.microsoft.com/office/drawing/2014/main" id="{491FD2BC-42B9-4C8C-994A-007AE9AD2CA4}"/>
+                <a16:creationId xmlns:a16="http://schemas.microsoft.com/office/drawing/2014/main" id="{EB3F76D7-FC7C-4636-A692-0BA9119B5826}"/>
               </a:ext>
             </a:extLst>
           </p:cNvPr>
@@ -3550,7 +3550,7 @@
           <p:cNvPr id="5" name="Date Placeholder 3">
             <a:extLst xmlns:a="http://schemas.openxmlformats.org/drawingml/2006/main">
               <a:ext uri="{FF2B5EF4-FFF2-40B4-BE49-F238E27FC236}">
-                <a16:creationId xmlns:a16="http://schemas.microsoft.com/office/drawing/2014/main" id="{547E55F8-BCD2-4811-85CD-D7D55F20BCD4}"/>
+                <a16:creationId xmlns:a16="http://schemas.microsoft.com/office/drawing/2014/main" id="{686D572D-2C4A-4257-AA2F-91BC3ACE6B93}"/>
               </a:ext>
             </a:extLst>
           </p:cNvPr>
@@ -3583,7 +3583,7 @@
           <p:cNvPr id="6" name="Footer Placeholder 4">
             <a:extLst xmlns:a="http://schemas.openxmlformats.org/drawingml/2006/main">
               <a:ext uri="{FF2B5EF4-FFF2-40B4-BE49-F238E27FC236}">
-                <a16:creationId xmlns:a16="http://schemas.microsoft.com/office/drawing/2014/main" id="{A5261E21-7D4C-407B-AB18-B05AB8E8FEEC}"/>
+                <a16:creationId xmlns:a16="http://schemas.microsoft.com/office/drawing/2014/main" id="{3BF4BE30-CBAB-4E94-8806-250055AC2BFC}"/>
               </a:ext>
             </a:extLst>
           </p:cNvPr>
@@ -3618,7 +3618,7 @@
           <p:cNvPr id="7" name="Slide Number Placeholder 5">
             <a:extLst xmlns:a="http://schemas.openxmlformats.org/drawingml/2006/main">
               <a:ext uri="{FF2B5EF4-FFF2-40B4-BE49-F238E27FC236}">
-                <a16:creationId xmlns:a16="http://schemas.microsoft.com/office/drawing/2014/main" id="{78B94140-7442-465D-8235-D43DA4321A24}"/>
+                <a16:creationId xmlns:a16="http://schemas.microsoft.com/office/drawing/2014/main" id="{E967CBD6-4AEF-41D8-9D09-6BF9278FA317}"/>
               </a:ext>
             </a:extLst>
           </p:cNvPr>
@@ -3668,7 +3668,7 @@
           <p:cNvPr id="2" name="Title 1">
             <a:extLst xmlns:a="http://schemas.openxmlformats.org/drawingml/2006/main">
               <a:ext uri="{FF2B5EF4-FFF2-40B4-BE49-F238E27FC236}">
-                <a16:creationId xmlns:a16="http://schemas.microsoft.com/office/drawing/2014/main" id="{EC720160-A330-411B-9D60-C702E30A1220}"/>
+                <a16:creationId xmlns:a16="http://schemas.microsoft.com/office/drawing/2014/main" id="{729EBFF1-6366-4156-A0FD-378BC341B289}"/>
               </a:ext>
             </a:extLst>
           </p:cNvPr>
@@ -3705,7 +3705,7 @@
           <p:cNvPr id="3" name="Picture Placeholder 2">
             <a:extLst xmlns:a="http://schemas.openxmlformats.org/drawingml/2006/main">
               <a:ext uri="{FF2B5EF4-FFF2-40B4-BE49-F238E27FC236}">
-                <a16:creationId xmlns:a16="http://schemas.microsoft.com/office/drawing/2014/main" id="{89D3C02C-5744-446F-800C-2B0C7B3A17EC}"/>
+                <a16:creationId xmlns:a16="http://schemas.microsoft.com/office/drawing/2014/main" id="{0496B5C6-2491-4E45-B25C-A35B2B5A3B02}"/>
               </a:ext>
             </a:extLst>
           </p:cNvPr>
@@ -3777,7 +3777,7 @@
           <p:cNvPr id="4" name="Text Placeholder 3">
             <a:extLst xmlns:a="http://schemas.openxmlformats.org/drawingml/2006/main">
               <a:ext uri="{FF2B5EF4-FFF2-40B4-BE49-F238E27FC236}">
-                <a16:creationId xmlns:a16="http://schemas.microsoft.com/office/drawing/2014/main" id="{3221991C-0E96-44AB-9A4F-21B5E2C2583D}"/>
+                <a16:creationId xmlns:a16="http://schemas.microsoft.com/office/drawing/2014/main" id="{B3112398-69AB-45A7-A9BB-6659B1C2E745}"/>
               </a:ext>
             </a:extLst>
           </p:cNvPr>
@@ -3849,7 +3849,7 @@
           <p:cNvPr id="5" name="Date Placeholder 3">
             <a:extLst xmlns:a="http://schemas.openxmlformats.org/drawingml/2006/main">
               <a:ext uri="{FF2B5EF4-FFF2-40B4-BE49-F238E27FC236}">
-                <a16:creationId xmlns:a16="http://schemas.microsoft.com/office/drawing/2014/main" id="{0CED8E5F-D6C9-4E6C-8AA2-9554C5D897FE}"/>
+                <a16:creationId xmlns:a16="http://schemas.microsoft.com/office/drawing/2014/main" id="{D3927AF5-AFB4-450C-9E78-3A00E500C8E7}"/>
               </a:ext>
             </a:extLst>
           </p:cNvPr>
@@ -3882,7 +3882,7 @@
           <p:cNvPr id="6" name="Footer Placeholder 4">
             <a:extLst xmlns:a="http://schemas.openxmlformats.org/drawingml/2006/main">
               <a:ext uri="{FF2B5EF4-FFF2-40B4-BE49-F238E27FC236}">
-                <a16:creationId xmlns:a16="http://schemas.microsoft.com/office/drawing/2014/main" id="{5ED0BE3A-99D5-46B2-9B3A-4457592B29AA}"/>
+                <a16:creationId xmlns:a16="http://schemas.microsoft.com/office/drawing/2014/main" id="{74DD3582-5AFA-4294-B669-22876E55A763}"/>
               </a:ext>
             </a:extLst>
           </p:cNvPr>
@@ -3917,7 +3917,7 @@
           <p:cNvPr id="7" name="Slide Number Placeholder 5">
             <a:extLst xmlns:a="http://schemas.openxmlformats.org/drawingml/2006/main">
               <a:ext uri="{FF2B5EF4-FFF2-40B4-BE49-F238E27FC236}">
-                <a16:creationId xmlns:a16="http://schemas.microsoft.com/office/drawing/2014/main" id="{56996A3C-9B09-4760-A434-E5C559AA5BD8}"/>
+                <a16:creationId xmlns:a16="http://schemas.microsoft.com/office/drawing/2014/main" id="{774711BB-A798-49DD-8C51-6A6DDE6BEC87}"/>
               </a:ext>
             </a:extLst>
           </p:cNvPr>
@@ -3972,7 +3972,7 @@
           <p:cNvPr id="1026" name="Title Placeholder 1">
             <a:extLst xmlns:a="http://schemas.openxmlformats.org/drawingml/2006/main">
               <a:ext uri="{FF2B5EF4-FFF2-40B4-BE49-F238E27FC236}">
-                <a16:creationId xmlns:a16="http://schemas.microsoft.com/office/drawing/2014/main" id="{2E050C1A-F34B-4580-B306-FB5965D5AC34}"/>
+                <a16:creationId xmlns:a16="http://schemas.microsoft.com/office/drawing/2014/main" id="{881EB5C0-A451-4F11-8C86-9E11371146CA}"/>
               </a:ext>
             </a:extLst>
           </p:cNvPr>
@@ -4015,7 +4015,7 @@
           <p:cNvPr id="1027" name="Text Placeholder 2">
             <a:extLst xmlns:a="http://schemas.openxmlformats.org/drawingml/2006/main">
               <a:ext uri="{FF2B5EF4-FFF2-40B4-BE49-F238E27FC236}">
-                <a16:creationId xmlns:a16="http://schemas.microsoft.com/office/drawing/2014/main" id="{2A75E93D-76D8-4925-A80E-5036BCBC1B81}"/>
+                <a16:creationId xmlns:a16="http://schemas.microsoft.com/office/drawing/2014/main" id="{21905D63-CEB6-4945-9708-C8701C6288CD}"/>
               </a:ext>
             </a:extLst>
           </p:cNvPr>
@@ -4090,7 +4090,7 @@
           <p:cNvPr id="4" name="Date Placeholder 3">
             <a:extLst xmlns:a="http://schemas.openxmlformats.org/drawingml/2006/main">
               <a:ext uri="{FF2B5EF4-FFF2-40B4-BE49-F238E27FC236}">
-                <a16:creationId xmlns:a16="http://schemas.microsoft.com/office/drawing/2014/main" id="{781AFF58-E28B-4933-8E23-C9A4065A899E}"/>
+                <a16:creationId xmlns:a16="http://schemas.microsoft.com/office/drawing/2014/main" id="{D2A60099-8991-47D5-9A07-A02319F7D2A6}"/>
               </a:ext>
             </a:extLst>
           </p:cNvPr>
@@ -4138,7 +4138,7 @@
           <p:cNvPr id="5" name="Footer Placeholder 4">
             <a:extLst xmlns:a="http://schemas.openxmlformats.org/drawingml/2006/main">
               <a:ext uri="{FF2B5EF4-FFF2-40B4-BE49-F238E27FC236}">
-                <a16:creationId xmlns:a16="http://schemas.microsoft.com/office/drawing/2014/main" id="{A2A19B17-F748-4019-8340-0DD558574D2B}"/>
+                <a16:creationId xmlns:a16="http://schemas.microsoft.com/office/drawing/2014/main" id="{A57D70CC-ED16-4AEF-A5F3-77A9618247BF}"/>
               </a:ext>
             </a:extLst>
           </p:cNvPr>
@@ -4196,7 +4196,7 @@
           <p:cNvPr id="6" name="Slide Number Placeholder 5">
             <a:extLst xmlns:a="http://schemas.openxmlformats.org/drawingml/2006/main">
               <a:ext uri="{FF2B5EF4-FFF2-40B4-BE49-F238E27FC236}">
-                <a16:creationId xmlns:a16="http://schemas.microsoft.com/office/drawing/2014/main" id="{85137001-4BE5-4610-80BD-BF23B67626C1}"/>
+                <a16:creationId xmlns:a16="http://schemas.microsoft.com/office/drawing/2014/main" id="{AB4254F9-62F4-491F-9097-697E1C3B211A}"/>
               </a:ext>
             </a:extLst>
           </p:cNvPr>
@@ -4243,17 +4243,17 @@
   </p:cSld>
   <p:clrMap bg1="lt1" tx1="dk1" bg2="lt2" tx2="dk2" accent1="accent1" accent2="accent2" accent3="accent3" accent4="accent4" accent5="accent5" accent6="accent6" hlink="hlink" folHlink="folHlink"/>
   <p:sldLayoutIdLst>
-    <p:sldLayoutId xmlns:r="http://schemas.openxmlformats.org/officeDocument/2006/relationships" id="2147483649" r:id="Re34cd1b923bb4a7a"/>
-    <p:sldLayoutId xmlns:r="http://schemas.openxmlformats.org/officeDocument/2006/relationships" id="2147483650" r:id="Rba21603066904dd6"/>
-    <p:sldLayoutId xmlns:r="http://schemas.openxmlformats.org/officeDocument/2006/relationships" id="2147483651" r:id="Re6947c0825124424"/>
-    <p:sldLayoutId xmlns:r="http://schemas.openxmlformats.org/officeDocument/2006/relationships" id="2147483652" r:id="R37abc289b9544f34"/>
-    <p:sldLayoutId xmlns:r="http://schemas.openxmlformats.org/officeDocument/2006/relationships" id="2147483653" r:id="R2e89177a33464b47"/>
-    <p:sldLayoutId xmlns:r="http://schemas.openxmlformats.org/officeDocument/2006/relationships" id="2147483654" r:id="R2188063eced744a9"/>
-    <p:sldLayoutId xmlns:r="http://schemas.openxmlformats.org/officeDocument/2006/relationships" id="2147483655" r:id="R00d5bc9dea9a4471"/>
-    <p:sldLayoutId xmlns:r="http://schemas.openxmlformats.org/officeDocument/2006/relationships" id="2147483656" r:id="R9f85c5f26cf24c7e"/>
-    <p:sldLayoutId xmlns:r="http://schemas.openxmlformats.org/officeDocument/2006/relationships" id="2147483657" r:id="R52050bc1c12a43dc"/>
-    <p:sldLayoutId xmlns:r="http://schemas.openxmlformats.org/officeDocument/2006/relationships" id="2147483658" r:id="Ra281a3711b7c45fa"/>
-    <p:sldLayoutId xmlns:r="http://schemas.openxmlformats.org/officeDocument/2006/relationships" id="2147483659" r:id="R74d79258da6d4151"/>
+    <p:sldLayoutId xmlns:r="http://schemas.openxmlformats.org/officeDocument/2006/relationships" id="2147483649" r:id="R90821035f5d7460c"/>
+    <p:sldLayoutId xmlns:r="http://schemas.openxmlformats.org/officeDocument/2006/relationships" id="2147483650" r:id="R550d7611a09f4dc3"/>
+    <p:sldLayoutId xmlns:r="http://schemas.openxmlformats.org/officeDocument/2006/relationships" id="2147483651" r:id="R37ac949b48af44cd"/>
+    <p:sldLayoutId xmlns:r="http://schemas.openxmlformats.org/officeDocument/2006/relationships" id="2147483652" r:id="R86628e39223d4fe0"/>
+    <p:sldLayoutId xmlns:r="http://schemas.openxmlformats.org/officeDocument/2006/relationships" id="2147483653" r:id="R4bc7af53c7894bc4"/>
+    <p:sldLayoutId xmlns:r="http://schemas.openxmlformats.org/officeDocument/2006/relationships" id="2147483654" r:id="R4e354847d3a8447e"/>
+    <p:sldLayoutId xmlns:r="http://schemas.openxmlformats.org/officeDocument/2006/relationships" id="2147483655" r:id="R894499bb248047b3"/>
+    <p:sldLayoutId xmlns:r="http://schemas.openxmlformats.org/officeDocument/2006/relationships" id="2147483656" r:id="Rb0dd77a8651e460d"/>
+    <p:sldLayoutId xmlns:r="http://schemas.openxmlformats.org/officeDocument/2006/relationships" id="2147483657" r:id="R72bd15bee79a4a8f"/>
+    <p:sldLayoutId xmlns:r="http://schemas.openxmlformats.org/officeDocument/2006/relationships" id="2147483658" r:id="Re32b16d1d37c4cce"/>
+    <p:sldLayoutId xmlns:r="http://schemas.openxmlformats.org/officeDocument/2006/relationships" id="2147483659" r:id="R779404caee864564"/>
   </p:sldLayoutIdLst>
   <p:hf hdr="0" dt="0"/>
   <p:txStyles>
@@ -5560,7 +5560,7 @@
           <p:nvPr/>
         </p:nvPicPr>
         <p:blipFill rotWithShape="1">
-          <a:blip xmlns:r="http://schemas.openxmlformats.org/officeDocument/2006/relationships" xmlns:a="http://schemas.openxmlformats.org/drawingml/2006/main" r:embed="Rdcea77416be54f1f"/>
+          <a:blip xmlns:r="http://schemas.openxmlformats.org/officeDocument/2006/relationships" xmlns:a="http://schemas.openxmlformats.org/drawingml/2006/main" r:embed="Ref0ea7b21d954bc1"/>
           <a:srcRect xmlns:a="http://schemas.openxmlformats.org/drawingml/2006/main" l="0" t="0" r="59916" b="0"/>
           <a:stretch xmlns:a="http://schemas.openxmlformats.org/drawingml/2006/main"/>
         </p:blipFill>
@@ -5579,7 +5579,7 @@
           <p:cNvPr id="4" name="Subtitle 3">
             <a:extLst xmlns:a="http://schemas.openxmlformats.org/drawingml/2006/main">
               <a:ext uri="{FF2B5EF4-FFF2-40B4-BE49-F238E27FC236}">
-                <a16:creationId xmlns:a16="http://schemas.microsoft.com/office/drawing/2014/main" id="{3BF51FC6-064D-4AA4-902B-4098A6AAD823}"/>
+                <a16:creationId xmlns:a16="http://schemas.microsoft.com/office/drawing/2014/main" id="{E27DB25A-D7D7-404C-9032-E5D1468A0F2F}"/>
               </a:ext>
             </a:extLst>
           </p:cNvPr>
@@ -5637,7 +5637,7 @@
           <p:cNvPr id="8" name="Title 7">
             <a:extLst xmlns:a="http://schemas.openxmlformats.org/drawingml/2006/main">
               <a:ext uri="{FF2B5EF4-FFF2-40B4-BE49-F238E27FC236}">
-                <a16:creationId xmlns:a16="http://schemas.microsoft.com/office/drawing/2014/main" id="{13950730-CB6B-4496-9FB2-79B9B9E89D7C}"/>
+                <a16:creationId xmlns:a16="http://schemas.microsoft.com/office/drawing/2014/main" id="{51351A12-0FB7-46E7-AE59-2A0BC336A49A}"/>
               </a:ext>
             </a:extLst>
           </p:cNvPr>
@@ -5696,7 +5696,7 @@
           <p:cNvPr id="10" name="TextBox 9">
             <a:extLst xmlns:a="http://schemas.openxmlformats.org/drawingml/2006/main">
               <a:ext uri="{FF2B5EF4-FFF2-40B4-BE49-F238E27FC236}">
-                <a16:creationId xmlns:a16="http://schemas.microsoft.com/office/drawing/2014/main" id="{F2324B3A-9B2B-4793-9CCE-EE999127A6E9}"/>
+                <a16:creationId xmlns:a16="http://schemas.microsoft.com/office/drawing/2014/main" id="{1E52B46B-CDC8-4263-9850-A7B1D4492378}"/>
               </a:ext>
             </a:extLst>
           </p:cNvPr>
@@ -5900,7 +5900,7 @@
           <p:nvPr/>
         </p:nvPicPr>
         <p:blipFill>
-          <a:blip xmlns:r="http://schemas.openxmlformats.org/officeDocument/2006/relationships" xmlns:a="http://schemas.openxmlformats.org/drawingml/2006/main" r:embed="R7ae774f10fd346e9"/>
+          <a:blip xmlns:r="http://schemas.openxmlformats.org/officeDocument/2006/relationships" xmlns:a="http://schemas.openxmlformats.org/drawingml/2006/main" r:embed="R25b39dfba8584ad3"/>
           <a:stretch xmlns:a="http://schemas.openxmlformats.org/drawingml/2006/main">
             <a:fillRect l="0" t="0" r="0" b="0"/>
           </a:stretch>
@@ -5918,7 +5918,7 @@
     </p:spTree>
     <p:extLst>
       <p:ext uri="{BB962C8B-B14F-4D97-AF65-F5344CB8AC3E}">
-        <p14:creationId xmlns:p14="http://schemas.microsoft.com/office/powerpoint/2010/main" val="1847082511"/>
+        <p14:creationId xmlns:p14="http://schemas.microsoft.com/office/powerpoint/2010/main" val="187819952"/>
       </p:ext>
     </p:extLst>
   </p:cSld>
@@ -5942,7 +5942,7 @@
           <p:cNvPr id="9" name="Rectangle 8">
             <a:extLst xmlns:a="http://schemas.openxmlformats.org/drawingml/2006/main">
               <a:ext uri="{FF2B5EF4-FFF2-40B4-BE49-F238E27FC236}">
-                <a16:creationId xmlns:a16="http://schemas.microsoft.com/office/drawing/2014/main" id="{3225A1AF-D099-4292-B689-03A6DC781794}"/>
+                <a16:creationId xmlns:a16="http://schemas.microsoft.com/office/drawing/2014/main" id="{2CC55274-6797-410B-B1A7-131D5CCA333F}"/>
               </a:ext>
             </a:extLst>
           </p:cNvPr>
@@ -6005,7 +6005,7 @@
           <p:cNvPr id="15361" name="Title 1">
             <a:extLst xmlns:a="http://schemas.openxmlformats.org/drawingml/2006/main">
               <a:ext uri="{FF2B5EF4-FFF2-40B4-BE49-F238E27FC236}">
-                <a16:creationId xmlns:a16="http://schemas.microsoft.com/office/drawing/2014/main" id="{ABB1AFD6-8224-4248-BAD9-5520E9E91CAA}"/>
+                <a16:creationId xmlns:a16="http://schemas.microsoft.com/office/drawing/2014/main" id="{74DD9325-CFF0-4BD4-BB50-9F0F40971E86}"/>
               </a:ext>
             </a:extLst>
           </p:cNvPr>
@@ -6050,7 +6050,7 @@
                 <a:ea typeface="Times New Roman"/>
                 <a:cs typeface="Times New Roman"/>
               </a:rPr>
-              <a:t>PARAKH: Evidence-led early warning</a:t>
+              <a:t>PARAKH: Evidence before alert</a:t>
             </a:r>
           </a:p>
         </p:txBody>
@@ -6060,19 +6060,19 @@
           <p:cNvPr id="15362" name="TextBox 8">
             <a:extLst xmlns:a="http://schemas.openxmlformats.org/drawingml/2006/main">
               <a:ext uri="{FF2B5EF4-FFF2-40B4-BE49-F238E27FC236}">
-                <a16:creationId xmlns:a16="http://schemas.microsoft.com/office/drawing/2014/main" id="{9514D330-DFD2-4AF8-BCA9-BF96F619D221}"/>
-              </a:ext>
-            </a:extLst>
-          </p:cNvPr>
-          <p:cNvSpPr>
-            <a:spLocks xmlns:a="http://schemas.openxmlformats.org/drawingml/2006/main" noGrp="1"/>
-          </p:cNvSpPr>
-          <p:nvPr/>
-        </p:nvSpPr>
-        <p:spPr>
-          <a:xfrm xmlns:a="http://schemas.openxmlformats.org/drawingml/2006/main">
-            <a:off x="609600" y="1295400"/>
-            <a:ext cx="10972800" cy="354330"/>
+                <a16:creationId xmlns:a16="http://schemas.microsoft.com/office/drawing/2014/main" id="{A9E52E15-934B-4AC7-BFED-3F42573F67B2}"/>
+              </a:ext>
+            </a:extLst>
+          </p:cNvPr>
+          <p:cNvSpPr>
+            <a:spLocks xmlns:a="http://schemas.openxmlformats.org/drawingml/2006/main" noGrp="1"/>
+          </p:cNvSpPr>
+          <p:nvPr/>
+        </p:nvSpPr>
+        <p:spPr>
+          <a:xfrm xmlns:a="http://schemas.openxmlformats.org/drawingml/2006/main">
+            <a:off x="609600" y="1257300"/>
+            <a:ext cx="10972800" cy="342900"/>
           </a:xfrm>
           <a:prstGeom xmlns:a="http://schemas.openxmlformats.org/drawingml/2006/main" prst="rect">
             <a:avLst/>
@@ -6092,7 +6092,7 @@
             <a:pPr marL="342900" indent="-342900" algn="l">
               <a:buFont typeface="Wingdings"/>
               <a:buChar char="v"/>
-              <a:defRPr sz="1725" b="1" u="sng">
+              <a:defRPr sz="1650" b="1" u="sng">
                 <a:solidFill>
                   <a:srgbClr val="1F497D"/>
                 </a:solidFill>
@@ -6102,7 +6102,7 @@
               </a:defRPr>
             </a:pPr>
             <a:r>
-              <a:rPr sz="1725" b="1" u="sng">
+              <a:rPr sz="1650" b="1" u="sng">
                 <a:solidFill>
                   <a:srgbClr val="1F497D"/>
                 </a:solidFill>
@@ -6110,7 +6110,7 @@
                 <a:ea typeface="Arial"/>
                 <a:cs typeface="Arial"/>
               </a:rPr>
-              <a:t>Proposed Solution (Describe your Idea/Solution/Prototype)</a:t>
+              <a:t>A warning is useful only when its evidence can be trusted.</a:t>
             </a:r>
             <a:endParaRPr sz="3200" u="sng">
               <a:solidFill>
@@ -6128,7 +6128,7 @@
           <p:cNvPr id="6" name="Slide Number Placeholder 5">
             <a:extLst xmlns:a="http://schemas.openxmlformats.org/drawingml/2006/main">
               <a:ext uri="{FF2B5EF4-FFF2-40B4-BE49-F238E27FC236}">
-                <a16:creationId xmlns:a16="http://schemas.microsoft.com/office/drawing/2014/main" id="{A1C5490E-FD72-4A3B-97E3-74EB78D07ED0}"/>
+                <a16:creationId xmlns:a16="http://schemas.microsoft.com/office/drawing/2014/main" id="{47F8CF00-6ACC-4E15-9FBF-6C5526CE00D0}"/>
               </a:ext>
             </a:extLst>
           </p:cNvPr>
@@ -6165,7 +6165,7 @@
           <p:cNvPr id="7" name="Footer Placeholder 6">
             <a:extLst xmlns:a="http://schemas.openxmlformats.org/drawingml/2006/main">
               <a:ext uri="{FF2B5EF4-FFF2-40B4-BE49-F238E27FC236}">
-                <a16:creationId xmlns:a16="http://schemas.microsoft.com/office/drawing/2014/main" id="{DC6A90E6-60AC-45A2-A256-4300EC41E5DC}"/>
+                <a16:creationId xmlns:a16="http://schemas.microsoft.com/office/drawing/2014/main" id="{2ECE7FF7-CED0-43B6-BA74-CE5E6083C9EA}"/>
               </a:ext>
             </a:extLst>
           </p:cNvPr>
@@ -6268,7 +6268,7 @@
                 <a:ea typeface="Arial"/>
                 <a:cs typeface="Arial"/>
               </a:rPr>
-              <a:t>[TEAM]</a:t>
+              <a:t>PARAKH</a:t>
             </a:r>
             <a:endParaRPr/>
           </a:p>
@@ -6276,14 +6276,14 @@
       </p:sp>
       <p:pic>
         <p:nvPicPr>
-          <p:cNvPr id="15381" name="Picture 10"/>
+          <p:cNvPr id="15412" name="Picture 10"/>
           <p:cNvPicPr>
             <a:picLocks xmlns:a="http://schemas.openxmlformats.org/drawingml/2006/main" noChangeAspect="1"/>
           </p:cNvPicPr>
           <p:nvPr/>
         </p:nvPicPr>
         <p:blipFill>
-          <a:blip xmlns:r="http://schemas.openxmlformats.org/officeDocument/2006/relationships" xmlns:a="http://schemas.openxmlformats.org/drawingml/2006/main" r:embed="Ra02e47d93c5b4c27"/>
+          <a:blip xmlns:r="http://schemas.openxmlformats.org/officeDocument/2006/relationships" xmlns:a="http://schemas.openxmlformats.org/drawingml/2006/main" r:embed="Re3defc6b10f244c9"/>
           <a:stretch xmlns:a="http://schemas.openxmlformats.org/drawingml/2006/main">
             <a:fillRect l="0" t="0" r="0" b="0"/>
           </a:stretch>
@@ -6300,22 +6300,55 @@
       </p:pic>
       <p:sp>
         <p:nvSpPr>
-          <p:cNvPr id="15364" name="idea-summary">
-            <a:extLst xmlns:a="http://schemas.openxmlformats.org/drawingml/2006/main">
-              <a:ext uri="{FF2B5EF4-FFF2-40B4-BE49-F238E27FC236}">
-                <a16:creationId xmlns:a16="http://schemas.microsoft.com/office/drawing/2014/main" id="{FE64DDE8-C9ED-40F2-ABB0-732B9CA8DF00}"/>
-              </a:ext>
-            </a:extLst>
-          </p:cNvPr>
-          <p:cNvSpPr>
-            <a:spLocks xmlns:a="http://schemas.openxmlformats.org/drawingml/2006/main" noGrp="1"/>
-          </p:cNvSpPr>
-          <p:nvPr/>
-        </p:nvSpPr>
-        <p:spPr>
-          <a:xfrm xmlns:a="http://schemas.openxmlformats.org/drawingml/2006/main">
-            <a:off x="609600" y="1924050"/>
-            <a:ext cx="5238750" cy="1104900"/>
+          <p:cNvPr id="15364" name="idea-stat-projects-surface">
+            <a:extLst xmlns:a="http://schemas.openxmlformats.org/drawingml/2006/main">
+              <a:ext uri="{FF2B5EF4-FFF2-40B4-BE49-F238E27FC236}">
+                <a16:creationId xmlns:a16="http://schemas.microsoft.com/office/drawing/2014/main" id="{16C33996-928F-4BAF-A7DE-D0B11E4D972A}"/>
+              </a:ext>
+            </a:extLst>
+          </p:cNvPr>
+          <p:cNvSpPr>
+            <a:spLocks xmlns:a="http://schemas.openxmlformats.org/drawingml/2006/main" noGrp="1"/>
+          </p:cNvSpPr>
+          <p:nvPr/>
+        </p:nvSpPr>
+        <p:spPr>
+          <a:xfrm xmlns:a="http://schemas.openxmlformats.org/drawingml/2006/main">
+            <a:off x="609600" y="1762125"/>
+            <a:ext cx="3409950" cy="609600"/>
+          </a:xfrm>
+          <a:prstGeom xmlns:a="http://schemas.openxmlformats.org/drawingml/2006/main" prst="rect">
+            <a:avLst/>
+          </a:prstGeom>
+          <a:solidFill xmlns:a="http://schemas.openxmlformats.org/drawingml/2006/main">
+            <a:srgbClr val="F4F7FA"/>
+          </a:solidFill>
+          <a:ln xmlns:a="http://schemas.openxmlformats.org/drawingml/2006/main" w="9525">
+            <a:solidFill>
+              <a:srgbClr val="C4D2DD"/>
+            </a:solidFill>
+            <a:prstDash val="solid"/>
+          </a:ln>
+        </p:spPr>
+      </p:sp>
+      <p:sp>
+        <p:nvSpPr>
+          <p:cNvPr id="15365" name="idea-stat-projects-value">
+            <a:extLst xmlns:a="http://schemas.openxmlformats.org/drawingml/2006/main">
+              <a:ext uri="{FF2B5EF4-FFF2-40B4-BE49-F238E27FC236}">
+                <a16:creationId xmlns:a16="http://schemas.microsoft.com/office/drawing/2014/main" id="{2BD04DDE-6AD3-4C8B-8EEA-CA4C471D4FE1}"/>
+              </a:ext>
+            </a:extLst>
+          </p:cNvPr>
+          <p:cNvSpPr>
+            <a:spLocks xmlns:a="http://schemas.openxmlformats.org/drawingml/2006/main" noGrp="1"/>
+          </p:cNvSpPr>
+          <p:nvPr/>
+        </p:nvSpPr>
+        <p:spPr>
+          <a:xfrm xmlns:a="http://schemas.openxmlformats.org/drawingml/2006/main">
+            <a:off x="723900" y="1819275"/>
+            <a:ext cx="3181350" cy="314325"/>
           </a:xfrm>
           <a:prstGeom xmlns:a="http://schemas.openxmlformats.org/drawingml/2006/main" prst="rect">
             <a:avLst/>
@@ -6327,15 +6360,15 @@
           </a:ln>
         </p:spPr>
         <p:txBody>
-          <a:bodyPr xmlns:a="http://schemas.openxmlformats.org/drawingml/2006/main" wrap="square" lIns="0" tIns="0" rIns="0" bIns="0" anchor="t">
+          <a:bodyPr xmlns:a="http://schemas.openxmlformats.org/drawingml/2006/main" wrap="square" lIns="0" tIns="0" rIns="0" bIns="0" anchor="ctr">
             <a:normAutofit fontScale="100000"/>
           </a:bodyPr>
           <a:lstStyle xmlns:a="http://schemas.openxmlformats.org/drawingml/2006/main"/>
           <a:p xmlns:a="http://schemas.openxmlformats.org/drawingml/2006/main">
-            <a:pPr algn="l">
-              <a:defRPr sz="1613">
-                <a:solidFill>
-                  <a:srgbClr val="242424"/>
+            <a:pPr algn="ctr">
+              <a:defRPr sz="2025" b="1">
+                <a:solidFill>
+                  <a:srgbClr val="1F497D"/>
                 </a:solidFill>
                 <a:latin typeface="Arial"/>
                 <a:ea typeface="Arial"/>
@@ -6343,37 +6376,37 @@
               </a:defRPr>
             </a:pPr>
             <a:r>
-              <a:rPr sz="1613">
-                <a:solidFill>
-                  <a:srgbClr val="242424"/>
+              <a:rPr sz="2025" b="1">
+                <a:solidFill>
+                  <a:srgbClr val="1F497D"/>
                 </a:solidFill>
                 <a:latin typeface="Arial"/>
                 <a:ea typeface="Arial"/>
                 <a:cs typeface="Arial"/>
               </a:rPr>
-              <a:t>PARAKH turns monthly PAIMANA Flash Reports into a searchable project portfolio. A transparent rule score describes current signals; experimental models estimate cost or schedule changes by the next report.</a:t>
-            </a:r>
-          </a:p>
-        </p:txBody>
-      </p:sp>
-      <p:sp>
-        <p:nvSpPr>
-          <p:cNvPr id="15365" name="audience-label">
-            <a:extLst xmlns:a="http://schemas.openxmlformats.org/drawingml/2006/main">
-              <a:ext uri="{FF2B5EF4-FFF2-40B4-BE49-F238E27FC236}">
-                <a16:creationId xmlns:a16="http://schemas.microsoft.com/office/drawing/2014/main" id="{CE295C9B-94DB-4D23-A681-06F20EFBC71B}"/>
-              </a:ext>
-            </a:extLst>
-          </p:cNvPr>
-          <p:cNvSpPr>
-            <a:spLocks xmlns:a="http://schemas.openxmlformats.org/drawingml/2006/main" noGrp="1"/>
-          </p:cNvSpPr>
-          <p:nvPr/>
-        </p:nvSpPr>
-        <p:spPr>
-          <a:xfrm xmlns:a="http://schemas.openxmlformats.org/drawingml/2006/main">
-            <a:off x="609600" y="3124200"/>
-            <a:ext cx="5219700" cy="238125"/>
+              <a:t>1,981</a:t>
+            </a:r>
+          </a:p>
+        </p:txBody>
+      </p:sp>
+      <p:sp>
+        <p:nvSpPr>
+          <p:cNvPr id="15366" name="idea-stat-projects-label">
+            <a:extLst xmlns:a="http://schemas.openxmlformats.org/drawingml/2006/main">
+              <a:ext uri="{FF2B5EF4-FFF2-40B4-BE49-F238E27FC236}">
+                <a16:creationId xmlns:a16="http://schemas.microsoft.com/office/drawing/2014/main" id="{84AAB134-DCF7-444D-A77D-CFD33726968F}"/>
+              </a:ext>
+            </a:extLst>
+          </p:cNvPr>
+          <p:cNvSpPr>
+            <a:spLocks xmlns:a="http://schemas.openxmlformats.org/drawingml/2006/main" noGrp="1"/>
+          </p:cNvSpPr>
+          <p:nvPr/>
+        </p:nvSpPr>
+        <p:spPr>
+          <a:xfrm xmlns:a="http://schemas.openxmlformats.org/drawingml/2006/main">
+            <a:off x="723900" y="2143125"/>
+            <a:ext cx="3181350" cy="180975"/>
           </a:xfrm>
           <a:prstGeom xmlns:a="http://schemas.openxmlformats.org/drawingml/2006/main" prst="rect">
             <a:avLst/>
@@ -6385,15 +6418,15 @@
           </a:ln>
         </p:spPr>
         <p:txBody>
-          <a:bodyPr xmlns:a="http://schemas.openxmlformats.org/drawingml/2006/main" wrap="square" lIns="0" tIns="0" rIns="0" bIns="0" anchor="t">
+          <a:bodyPr xmlns:a="http://schemas.openxmlformats.org/drawingml/2006/main" wrap="square" lIns="0" tIns="0" rIns="0" bIns="0" anchor="ctr">
             <a:normAutofit fontScale="100000"/>
           </a:bodyPr>
           <a:lstStyle xmlns:a="http://schemas.openxmlformats.org/drawingml/2006/main"/>
           <a:p xmlns:a="http://schemas.openxmlformats.org/drawingml/2006/main">
-            <a:pPr algn="l">
-              <a:defRPr sz="1350" b="1">
-                <a:solidFill>
-                  <a:srgbClr val="1F497D"/>
+            <a:pPr algn="ctr">
+              <a:defRPr sz="1125">
+                <a:solidFill>
+                  <a:srgbClr val="373737"/>
                 </a:solidFill>
                 <a:latin typeface="Arial"/>
                 <a:ea typeface="Arial"/>
@@ -6401,37 +6434,70 @@
               </a:defRPr>
             </a:pPr>
             <a:r>
-              <a:rPr sz="1350" b="1">
-                <a:solidFill>
-                  <a:srgbClr val="1F497D"/>
+              <a:rPr sz="1125">
+                <a:solidFill>
+                  <a:srgbClr val="373737"/>
                 </a:solidFill>
                 <a:latin typeface="Arial"/>
                 <a:ea typeface="Arial"/>
                 <a:cs typeface="Arial"/>
               </a:rPr>
-              <a:t>WHO USES IT</a:t>
-            </a:r>
-          </a:p>
-        </p:txBody>
-      </p:sp>
-      <p:sp>
-        <p:nvSpPr>
-          <p:cNvPr id="15366" name="audience-detail">
-            <a:extLst xmlns:a="http://schemas.openxmlformats.org/drawingml/2006/main">
-              <a:ext uri="{FF2B5EF4-FFF2-40B4-BE49-F238E27FC236}">
-                <a16:creationId xmlns:a16="http://schemas.microsoft.com/office/drawing/2014/main" id="{912C8B4F-B502-4C8E-9BCE-75E7E99D0E36}"/>
-              </a:ext>
-            </a:extLst>
-          </p:cNvPr>
-          <p:cNvSpPr>
-            <a:spLocks xmlns:a="http://schemas.openxmlformats.org/drawingml/2006/main" noGrp="1"/>
-          </p:cNvSpPr>
-          <p:nvPr/>
-        </p:nvSpPr>
-        <p:spPr>
-          <a:xfrm xmlns:a="http://schemas.openxmlformats.org/drawingml/2006/main">
-            <a:off x="609600" y="3381375"/>
-            <a:ext cx="5219700" cy="514350"/>
+              <a:t>ongoing projects • April 2026</a:t>
+            </a:r>
+          </a:p>
+        </p:txBody>
+      </p:sp>
+      <p:sp>
+        <p:nvSpPr>
+          <p:cNvPr id="15367" name="idea-stat-ministries-surface">
+            <a:extLst xmlns:a="http://schemas.openxmlformats.org/drawingml/2006/main">
+              <a:ext uri="{FF2B5EF4-FFF2-40B4-BE49-F238E27FC236}">
+                <a16:creationId xmlns:a16="http://schemas.microsoft.com/office/drawing/2014/main" id="{7CE459D6-2B7C-40C9-AC9C-37EAC98044A5}"/>
+              </a:ext>
+            </a:extLst>
+          </p:cNvPr>
+          <p:cNvSpPr>
+            <a:spLocks xmlns:a="http://schemas.openxmlformats.org/drawingml/2006/main" noGrp="1"/>
+          </p:cNvSpPr>
+          <p:nvPr/>
+        </p:nvSpPr>
+        <p:spPr>
+          <a:xfrm xmlns:a="http://schemas.openxmlformats.org/drawingml/2006/main">
+            <a:off x="4391025" y="1762125"/>
+            <a:ext cx="3409950" cy="609600"/>
+          </a:xfrm>
+          <a:prstGeom xmlns:a="http://schemas.openxmlformats.org/drawingml/2006/main" prst="rect">
+            <a:avLst/>
+          </a:prstGeom>
+          <a:solidFill xmlns:a="http://schemas.openxmlformats.org/drawingml/2006/main">
+            <a:srgbClr val="F4F7FA"/>
+          </a:solidFill>
+          <a:ln xmlns:a="http://schemas.openxmlformats.org/drawingml/2006/main" w="9525">
+            <a:solidFill>
+              <a:srgbClr val="C4D2DD"/>
+            </a:solidFill>
+            <a:prstDash val="solid"/>
+          </a:ln>
+        </p:spPr>
+      </p:sp>
+      <p:sp>
+        <p:nvSpPr>
+          <p:cNvPr id="15368" name="idea-stat-ministries-value">
+            <a:extLst xmlns:a="http://schemas.openxmlformats.org/drawingml/2006/main">
+              <a:ext uri="{FF2B5EF4-FFF2-40B4-BE49-F238E27FC236}">
+                <a16:creationId xmlns:a16="http://schemas.microsoft.com/office/drawing/2014/main" id="{FF821832-3D2B-45E6-8C2A-4234C4BD246C}"/>
+              </a:ext>
+            </a:extLst>
+          </p:cNvPr>
+          <p:cNvSpPr>
+            <a:spLocks xmlns:a="http://schemas.openxmlformats.org/drawingml/2006/main" noGrp="1"/>
+          </p:cNvSpPr>
+          <p:nvPr/>
+        </p:nvSpPr>
+        <p:spPr>
+          <a:xfrm xmlns:a="http://schemas.openxmlformats.org/drawingml/2006/main">
+            <a:off x="4505325" y="1819275"/>
+            <a:ext cx="3181350" cy="314325"/>
           </a:xfrm>
           <a:prstGeom xmlns:a="http://schemas.openxmlformats.org/drawingml/2006/main" prst="rect">
             <a:avLst/>
@@ -6443,15 +6509,15 @@
           </a:ln>
         </p:spPr>
         <p:txBody>
-          <a:bodyPr xmlns:a="http://schemas.openxmlformats.org/drawingml/2006/main" wrap="square" lIns="0" tIns="0" rIns="0" bIns="0" anchor="t">
+          <a:bodyPr xmlns:a="http://schemas.openxmlformats.org/drawingml/2006/main" wrap="square" lIns="0" tIns="0" rIns="0" bIns="0" anchor="ctr">
             <a:normAutofit fontScale="100000"/>
           </a:bodyPr>
           <a:lstStyle xmlns:a="http://schemas.openxmlformats.org/drawingml/2006/main"/>
           <a:p xmlns:a="http://schemas.openxmlformats.org/drawingml/2006/main">
-            <a:pPr algn="l">
-              <a:defRPr sz="1500">
-                <a:solidFill>
-                  <a:srgbClr val="202020"/>
+            <a:pPr algn="ctr">
+              <a:defRPr sz="2025" b="1">
+                <a:solidFill>
+                  <a:srgbClr val="1F497D"/>
                 </a:solidFill>
                 <a:latin typeface="Arial"/>
                 <a:ea typeface="Arial"/>
@@ -6459,37 +6525,37 @@
               </a:defRPr>
             </a:pPr>
             <a:r>
-              <a:rPr sz="1500">
-                <a:solidFill>
-                  <a:srgbClr val="202020"/>
+              <a:rPr sz="2025" b="1">
+                <a:solidFill>
+                  <a:srgbClr val="1F497D"/>
                 </a:solidFill>
                 <a:latin typeface="Arial"/>
                 <a:ea typeface="Arial"/>
                 <a:cs typeface="Arial"/>
               </a:rPr>
-              <a:t>MoSPI/IPMD analysts • line ministry reviewers • project administrators</a:t>
-            </a:r>
-          </a:p>
-        </p:txBody>
-      </p:sp>
-      <p:sp>
-        <p:nvSpPr>
-          <p:cNvPr id="15367" name="prototype-label">
-            <a:extLst xmlns:a="http://schemas.openxmlformats.org/drawingml/2006/main">
-              <a:ext uri="{FF2B5EF4-FFF2-40B4-BE49-F238E27FC236}">
-                <a16:creationId xmlns:a16="http://schemas.microsoft.com/office/drawing/2014/main" id="{7510F740-81D6-4209-9F19-4E9F34C375C5}"/>
-              </a:ext>
-            </a:extLst>
-          </p:cNvPr>
-          <p:cNvSpPr>
-            <a:spLocks xmlns:a="http://schemas.openxmlformats.org/drawingml/2006/main" noGrp="1"/>
-          </p:cNvSpPr>
-          <p:nvPr/>
-        </p:nvSpPr>
-        <p:spPr>
-          <a:xfrm xmlns:a="http://schemas.openxmlformats.org/drawingml/2006/main">
-            <a:off x="609600" y="3990975"/>
-            <a:ext cx="5219700" cy="238125"/>
+              <a:t>17</a:t>
+            </a:r>
+          </a:p>
+        </p:txBody>
+      </p:sp>
+      <p:sp>
+        <p:nvSpPr>
+          <p:cNvPr id="15369" name="idea-stat-ministries-label">
+            <a:extLst xmlns:a="http://schemas.openxmlformats.org/drawingml/2006/main">
+              <a:ext uri="{FF2B5EF4-FFF2-40B4-BE49-F238E27FC236}">
+                <a16:creationId xmlns:a16="http://schemas.microsoft.com/office/drawing/2014/main" id="{CA1889A0-FBF0-450A-A4FD-EC94A92738BB}"/>
+              </a:ext>
+            </a:extLst>
+          </p:cNvPr>
+          <p:cNvSpPr>
+            <a:spLocks xmlns:a="http://schemas.openxmlformats.org/drawingml/2006/main" noGrp="1"/>
+          </p:cNvSpPr>
+          <p:nvPr/>
+        </p:nvSpPr>
+        <p:spPr>
+          <a:xfrm xmlns:a="http://schemas.openxmlformats.org/drawingml/2006/main">
+            <a:off x="4505325" y="2143125"/>
+            <a:ext cx="3181350" cy="180975"/>
           </a:xfrm>
           <a:prstGeom xmlns:a="http://schemas.openxmlformats.org/drawingml/2006/main" prst="rect">
             <a:avLst/>
@@ -6501,15 +6567,15 @@
           </a:ln>
         </p:spPr>
         <p:txBody>
-          <a:bodyPr xmlns:a="http://schemas.openxmlformats.org/drawingml/2006/main" wrap="square" lIns="0" tIns="0" rIns="0" bIns="0" anchor="t">
+          <a:bodyPr xmlns:a="http://schemas.openxmlformats.org/drawingml/2006/main" wrap="square" lIns="0" tIns="0" rIns="0" bIns="0" anchor="ctr">
             <a:normAutofit fontScale="100000"/>
           </a:bodyPr>
           <a:lstStyle xmlns:a="http://schemas.openxmlformats.org/drawingml/2006/main"/>
           <a:p xmlns:a="http://schemas.openxmlformats.org/drawingml/2006/main">
-            <a:pPr algn="l">
-              <a:defRPr sz="1350" b="1">
-                <a:solidFill>
-                  <a:srgbClr val="1F497D"/>
+            <a:pPr algn="ctr">
+              <a:defRPr sz="1125">
+                <a:solidFill>
+                  <a:srgbClr val="373737"/>
                 </a:solidFill>
                 <a:latin typeface="Arial"/>
                 <a:ea typeface="Arial"/>
@@ -6517,37 +6583,70 @@
               </a:defRPr>
             </a:pPr>
             <a:r>
-              <a:rPr sz="1350" b="1">
-                <a:solidFill>
-                  <a:srgbClr val="1F497D"/>
+              <a:rPr sz="1125">
+                <a:solidFill>
+                  <a:srgbClr val="373737"/>
                 </a:solidFill>
                 <a:latin typeface="Arial"/>
                 <a:ea typeface="Arial"/>
                 <a:cs typeface="Arial"/>
               </a:rPr>
-              <a:t>PROTOTYPE TODAY</a:t>
-            </a:r>
-          </a:p>
-        </p:txBody>
-      </p:sp>
-      <p:sp>
-        <p:nvSpPr>
-          <p:cNvPr id="15368" name="prototype-detail">
-            <a:extLst xmlns:a="http://schemas.openxmlformats.org/drawingml/2006/main">
-              <a:ext uri="{FF2B5EF4-FFF2-40B4-BE49-F238E27FC236}">
-                <a16:creationId xmlns:a16="http://schemas.microsoft.com/office/drawing/2014/main" id="{39D20755-5D37-49DE-8357-C069F14E5F55}"/>
-              </a:ext>
-            </a:extLst>
-          </p:cNvPr>
-          <p:cNvSpPr>
-            <a:spLocks xmlns:a="http://schemas.openxmlformats.org/drawingml/2006/main" noGrp="1"/>
-          </p:cNvSpPr>
-          <p:nvPr/>
-        </p:nvSpPr>
-        <p:spPr>
-          <a:xfrm xmlns:a="http://schemas.openxmlformats.org/drawingml/2006/main">
-            <a:off x="609600" y="4248150"/>
-            <a:ext cx="5219700" cy="495300"/>
+              <a:t>Central ministries / departments</a:t>
+            </a:r>
+          </a:p>
+        </p:txBody>
+      </p:sp>
+      <p:sp>
+        <p:nvSpPr>
+          <p:cNvPr id="15370" name="idea-stat-cost-surface">
+            <a:extLst xmlns:a="http://schemas.openxmlformats.org/drawingml/2006/main">
+              <a:ext uri="{FF2B5EF4-FFF2-40B4-BE49-F238E27FC236}">
+                <a16:creationId xmlns:a16="http://schemas.microsoft.com/office/drawing/2014/main" id="{57D4EFB8-96F0-4461-9FC1-E28213C53514}"/>
+              </a:ext>
+            </a:extLst>
+          </p:cNvPr>
+          <p:cNvSpPr>
+            <a:spLocks xmlns:a="http://schemas.openxmlformats.org/drawingml/2006/main" noGrp="1"/>
+          </p:cNvSpPr>
+          <p:nvPr/>
+        </p:nvSpPr>
+        <p:spPr>
+          <a:xfrm xmlns:a="http://schemas.openxmlformats.org/drawingml/2006/main">
+            <a:off x="8172450" y="1762125"/>
+            <a:ext cx="3409950" cy="609600"/>
+          </a:xfrm>
+          <a:prstGeom xmlns:a="http://schemas.openxmlformats.org/drawingml/2006/main" prst="rect">
+            <a:avLst/>
+          </a:prstGeom>
+          <a:solidFill xmlns:a="http://schemas.openxmlformats.org/drawingml/2006/main">
+            <a:srgbClr val="F4F7FA"/>
+          </a:solidFill>
+          <a:ln xmlns:a="http://schemas.openxmlformats.org/drawingml/2006/main" w="9525">
+            <a:solidFill>
+              <a:srgbClr val="C4D2DD"/>
+            </a:solidFill>
+            <a:prstDash val="solid"/>
+          </a:ln>
+        </p:spPr>
+      </p:sp>
+      <p:sp>
+        <p:nvSpPr>
+          <p:cNvPr id="15371" name="idea-stat-cost-value">
+            <a:extLst xmlns:a="http://schemas.openxmlformats.org/drawingml/2006/main">
+              <a:ext uri="{FF2B5EF4-FFF2-40B4-BE49-F238E27FC236}">
+                <a16:creationId xmlns:a16="http://schemas.microsoft.com/office/drawing/2014/main" id="{8B0FBF50-AAB0-49F5-9ADB-7AA330DDC015}"/>
+              </a:ext>
+            </a:extLst>
+          </p:cNvPr>
+          <p:cNvSpPr>
+            <a:spLocks xmlns:a="http://schemas.openxmlformats.org/drawingml/2006/main" noGrp="1"/>
+          </p:cNvSpPr>
+          <p:nvPr/>
+        </p:nvSpPr>
+        <p:spPr>
+          <a:xfrm xmlns:a="http://schemas.openxmlformats.org/drawingml/2006/main">
+            <a:off x="8286750" y="1819275"/>
+            <a:ext cx="3181350" cy="314325"/>
           </a:xfrm>
           <a:prstGeom xmlns:a="http://schemas.openxmlformats.org/drawingml/2006/main" prst="rect">
             <a:avLst/>
@@ -6559,15 +6658,15 @@
           </a:ln>
         </p:spPr>
         <p:txBody>
-          <a:bodyPr xmlns:a="http://schemas.openxmlformats.org/drawingml/2006/main" wrap="square" lIns="0" tIns="0" rIns="0" bIns="0" anchor="t">
+          <a:bodyPr xmlns:a="http://schemas.openxmlformats.org/drawingml/2006/main" wrap="square" lIns="0" tIns="0" rIns="0" bIns="0" anchor="ctr">
             <a:normAutofit fontScale="100000"/>
           </a:bodyPr>
           <a:lstStyle xmlns:a="http://schemas.openxmlformats.org/drawingml/2006/main"/>
           <a:p xmlns:a="http://schemas.openxmlformats.org/drawingml/2006/main">
-            <a:pPr algn="l">
-              <a:defRPr sz="1500">
-                <a:solidFill>
-                  <a:srgbClr val="202020"/>
+            <a:pPr algn="ctr">
+              <a:defRPr sz="2025" b="1">
+                <a:solidFill>
+                  <a:srgbClr val="1F497D"/>
                 </a:solidFill>
                 <a:latin typeface="Arial"/>
                 <a:ea typeface="Arial"/>
@@ -6575,37 +6674,37 @@
               </a:defRPr>
             </a:pPr>
             <a:r>
-              <a:rPr sz="1500">
-                <a:solidFill>
-                  <a:srgbClr val="202020"/>
+              <a:rPr sz="2025" b="1">
+                <a:solidFill>
+                  <a:srgbClr val="1F497D"/>
                 </a:solidFill>
                 <a:latin typeface="Arial"/>
                 <a:ea typeface="Arial"/>
                 <a:cs typeface="Arial"/>
               </a:rPr>
-              <a:t>Four reports (Apr–Jul 2026); the July snapshot contains 1,775 projects.</a:t>
-            </a:r>
-          </a:p>
-        </p:txBody>
-      </p:sp>
-      <p:sp>
-        <p:nvSpPr>
-          <p:cNvPr id="15369" name="roadmap-label">
-            <a:extLst xmlns:a="http://schemas.openxmlformats.org/drawingml/2006/main">
-              <a:ext uri="{FF2B5EF4-FFF2-40B4-BE49-F238E27FC236}">
-                <a16:creationId xmlns:a16="http://schemas.microsoft.com/office/drawing/2014/main" id="{B828592A-58A3-4C64-8B9A-D31AC8E5DB1D}"/>
-              </a:ext>
-            </a:extLst>
-          </p:cNvPr>
-          <p:cNvSpPr>
-            <a:spLocks xmlns:a="http://schemas.openxmlformats.org/drawingml/2006/main" noGrp="1"/>
-          </p:cNvSpPr>
-          <p:nvPr/>
-        </p:nvSpPr>
-        <p:spPr>
-          <a:xfrm xmlns:a="http://schemas.openxmlformats.org/drawingml/2006/main">
-            <a:off x="609600" y="4819650"/>
-            <a:ext cx="5219700" cy="238125"/>
+              <a:t>₹42.78 lakh cr</a:t>
+            </a:r>
+          </a:p>
+        </p:txBody>
+      </p:sp>
+      <p:sp>
+        <p:nvSpPr>
+          <p:cNvPr id="15372" name="idea-stat-cost-label">
+            <a:extLst xmlns:a="http://schemas.openxmlformats.org/drawingml/2006/main">
+              <a:ext uri="{FF2B5EF4-FFF2-40B4-BE49-F238E27FC236}">
+                <a16:creationId xmlns:a16="http://schemas.microsoft.com/office/drawing/2014/main" id="{455FBB64-7623-4A91-BDB8-66ED38D6FD0B}"/>
+              </a:ext>
+            </a:extLst>
+          </p:cNvPr>
+          <p:cNvSpPr>
+            <a:spLocks xmlns:a="http://schemas.openxmlformats.org/drawingml/2006/main" noGrp="1"/>
+          </p:cNvSpPr>
+          <p:nvPr/>
+        </p:nvSpPr>
+        <p:spPr>
+          <a:xfrm xmlns:a="http://schemas.openxmlformats.org/drawingml/2006/main">
+            <a:off x="8286750" y="2143125"/>
+            <a:ext cx="3181350" cy="180975"/>
           </a:xfrm>
           <a:prstGeom xmlns:a="http://schemas.openxmlformats.org/drawingml/2006/main" prst="rect">
             <a:avLst/>
@@ -6617,15 +6716,15 @@
           </a:ln>
         </p:spPr>
         <p:txBody>
-          <a:bodyPr xmlns:a="http://schemas.openxmlformats.org/drawingml/2006/main" wrap="square" lIns="0" tIns="0" rIns="0" bIns="0" anchor="t">
+          <a:bodyPr xmlns:a="http://schemas.openxmlformats.org/drawingml/2006/main" wrap="square" lIns="0" tIns="0" rIns="0" bIns="0" anchor="ctr">
             <a:normAutofit fontScale="100000"/>
           </a:bodyPr>
           <a:lstStyle xmlns:a="http://schemas.openxmlformats.org/drawingml/2006/main"/>
           <a:p xmlns:a="http://schemas.openxmlformats.org/drawingml/2006/main">
-            <a:pPr algn="l">
-              <a:defRPr sz="1350" b="1">
-                <a:solidFill>
-                  <a:srgbClr val="1F497D"/>
+            <a:pPr algn="ctr">
+              <a:defRPr sz="1125">
+                <a:solidFill>
+                  <a:srgbClr val="373737"/>
                 </a:solidFill>
                 <a:latin typeface="Arial"/>
                 <a:ea typeface="Arial"/>
@@ -6633,37 +6732,37 @@
               </a:defRPr>
             </a:pPr>
             <a:r>
-              <a:rPr sz="1350" b="1">
-                <a:solidFill>
-                  <a:srgbClr val="1F497D"/>
+              <a:rPr sz="1125">
+                <a:solidFill>
+                  <a:srgbClr val="373737"/>
                 </a:solidFill>
                 <a:latin typeface="Arial"/>
                 <a:ea typeface="Arial"/>
                 <a:cs typeface="Arial"/>
               </a:rPr>
-              <a:t>NEXT BUILD</a:t>
-            </a:r>
-          </a:p>
-        </p:txBody>
-      </p:sp>
-      <p:sp>
-        <p:nvSpPr>
-          <p:cNvPr id="15370" name="roadmap-detail">
-            <a:extLst xmlns:a="http://schemas.openxmlformats.org/drawingml/2006/main">
-              <a:ext uri="{FF2B5EF4-FFF2-40B4-BE49-F238E27FC236}">
-                <a16:creationId xmlns:a16="http://schemas.microsoft.com/office/drawing/2014/main" id="{3FE4D717-E3E1-42C0-878F-3D7D7477A602}"/>
-              </a:ext>
-            </a:extLst>
-          </p:cNvPr>
-          <p:cNvSpPr>
-            <a:spLocks xmlns:a="http://schemas.openxmlformats.org/drawingml/2006/main" noGrp="1"/>
-          </p:cNvSpPr>
-          <p:nvPr/>
-        </p:nvSpPr>
-        <p:spPr>
-          <a:xfrm xmlns:a="http://schemas.openxmlformats.org/drawingml/2006/main">
-            <a:off x="609600" y="5076825"/>
-            <a:ext cx="5219700" cy="523875"/>
+              <a:t>revised cost • April 2026</a:t>
+            </a:r>
+          </a:p>
+        </p:txBody>
+      </p:sp>
+      <p:sp>
+        <p:nvSpPr>
+          <p:cNvPr id="15373" name="idea-source-line">
+            <a:extLst xmlns:a="http://schemas.openxmlformats.org/drawingml/2006/main">
+              <a:ext uri="{FF2B5EF4-FFF2-40B4-BE49-F238E27FC236}">
+                <a16:creationId xmlns:a16="http://schemas.microsoft.com/office/drawing/2014/main" id="{198DE715-5A9C-4C68-ABF8-5E576EBB2678}"/>
+              </a:ext>
+            </a:extLst>
+          </p:cNvPr>
+          <p:cNvSpPr>
+            <a:spLocks xmlns:a="http://schemas.openxmlformats.org/drawingml/2006/main" noGrp="1"/>
+          </p:cNvSpPr>
+          <p:nvPr/>
+        </p:nvSpPr>
+        <p:spPr>
+          <a:xfrm xmlns:a="http://schemas.openxmlformats.org/drawingml/2006/main">
+            <a:off x="609600" y="2390775"/>
+            <a:ext cx="10972800" cy="161925"/>
           </a:xfrm>
           <a:prstGeom xmlns:a="http://schemas.openxmlformats.org/drawingml/2006/main" prst="rect">
             <a:avLst/>
@@ -6681,9 +6780,9 @@
           <a:lstStyle xmlns:a="http://schemas.openxmlformats.org/drawingml/2006/main"/>
           <a:p xmlns:a="http://schemas.openxmlformats.org/drawingml/2006/main">
             <a:pPr algn="l">
-              <a:defRPr sz="1500">
-                <a:solidFill>
-                  <a:srgbClr val="202020"/>
+              <a:defRPr sz="1013">
+                <a:solidFill>
+                  <a:srgbClr val="555555"/>
                 </a:solidFill>
                 <a:latin typeface="Arial"/>
                 <a:ea typeface="Arial"/>
@@ -6691,37 +6790,38 @@
               </a:defRPr>
             </a:pPr>
             <a:r>
-              <a:rPr sz="1500">
-                <a:solidFill>
-                  <a:srgbClr val="202020"/>
-                </a:solidFill>
-                <a:latin typeface="Arial"/>
-                <a:ea typeface="Arial"/>
-                <a:cs typeface="Arial"/>
+              <a:rPr sz="1013" u="sng">
+                <a:solidFill>
+                  <a:srgbClr val="555555"/>
+                </a:solidFill>
+                <a:latin typeface="Arial"/>
+                <a:ea typeface="Arial"/>
+                <a:cs typeface="Arial"/>
+                <a:hlinkClick xmlns:r="http://schemas.openxmlformats.org/officeDocument/2006/relationships" r:id="R69e26ce5552a4c67"/>
               </a:rPr>
-              <a:t>Automatic quality gate, source-page evidence, and a human review queue.</a:t>
-            </a:r>
-          </a:p>
-        </p:txBody>
-      </p:sp>
-      <p:sp>
-        <p:nvSpPr>
-          <p:cNvPr id="15371" name="prototype-screenshot-label">
-            <a:extLst xmlns:a="http://schemas.openxmlformats.org/drawingml/2006/main">
-              <a:ext uri="{FF2B5EF4-FFF2-40B4-BE49-F238E27FC236}">
-                <a16:creationId xmlns:a16="http://schemas.microsoft.com/office/drawing/2014/main" id="{10D19732-DE08-4204-9B43-1AE29A5B288C}"/>
-              </a:ext>
-            </a:extLst>
-          </p:cNvPr>
-          <p:cNvSpPr>
-            <a:spLocks xmlns:a="http://schemas.openxmlformats.org/drawingml/2006/main" noGrp="1"/>
-          </p:cNvSpPr>
-          <p:nvPr/>
-        </p:nvSpPr>
-        <p:spPr>
-          <a:xfrm xmlns:a="http://schemas.openxmlformats.org/drawingml/2006/main">
-            <a:off x="6334125" y="1562100"/>
-            <a:ext cx="5191125" cy="228600"/>
+              <a:t>SOURCE: MoSPI PAIMANA FLASH REPORT • APRIL 2026 • TABLE 6</a:t>
+            </a:r>
+          </a:p>
+        </p:txBody>
+      </p:sp>
+      <p:sp>
+        <p:nvSpPr>
+          <p:cNvPr id="15374" name="idea-solution-copy">
+            <a:extLst xmlns:a="http://schemas.openxmlformats.org/drawingml/2006/main">
+              <a:ext uri="{FF2B5EF4-FFF2-40B4-BE49-F238E27FC236}">
+                <a16:creationId xmlns:a16="http://schemas.microsoft.com/office/drawing/2014/main" id="{0F2E9619-1A79-49D0-80E9-915E5DE8A670}"/>
+              </a:ext>
+            </a:extLst>
+          </p:cNvPr>
+          <p:cNvSpPr>
+            <a:spLocks xmlns:a="http://schemas.openxmlformats.org/drawingml/2006/main" noGrp="1"/>
+          </p:cNvSpPr>
+          <p:nvPr/>
+        </p:nvSpPr>
+        <p:spPr>
+          <a:xfrm xmlns:a="http://schemas.openxmlformats.org/drawingml/2006/main">
+            <a:off x="609600" y="2552700"/>
+            <a:ext cx="10972800" cy="666750"/>
           </a:xfrm>
           <a:prstGeom xmlns:a="http://schemas.openxmlformats.org/drawingml/2006/main" prst="rect">
             <a:avLst/>
@@ -6739,9 +6839,9 @@
           <a:lstStyle xmlns:a="http://schemas.openxmlformats.org/drawingml/2006/main"/>
           <a:p xmlns:a="http://schemas.openxmlformats.org/drawingml/2006/main">
             <a:pPr algn="l">
-              <a:defRPr sz="1238" b="1">
-                <a:solidFill>
-                  <a:srgbClr val="1F497D"/>
+              <a:defRPr sz="1388">
+                <a:solidFill>
+                  <a:srgbClr val="252525"/>
                 </a:solidFill>
                 <a:latin typeface="Arial"/>
                 <a:ea typeface="Arial"/>
@@ -6749,95 +6849,70 @@
               </a:defRPr>
             </a:pPr>
             <a:r>
-              <a:rPr sz="1238" b="1">
-                <a:solidFill>
-                  <a:srgbClr val="1F497D"/>
+              <a:rPr sz="1388">
+                <a:solidFill>
+                  <a:srgbClr val="252525"/>
                 </a:solidFill>
                 <a:latin typeface="Arial"/>
                 <a:ea typeface="Arial"/>
                 <a:cs typeface="Arial"/>
               </a:rPr>
-              <a:t>CURRENT PROJECT EXPLORER • JULY 2026</a:t>
-            </a:r>
-          </a:p>
-        </p:txBody>
-      </p:sp>
-      <p:sp>
-        <p:nvSpPr>
-          <p:cNvPr id="15372" name="prototype-screenshot-frame">
-            <a:extLst xmlns:a="http://schemas.openxmlformats.org/drawingml/2006/main">
-              <a:ext uri="{FF2B5EF4-FFF2-40B4-BE49-F238E27FC236}">
-                <a16:creationId xmlns:a16="http://schemas.microsoft.com/office/drawing/2014/main" id="{0D5F3E76-803A-4DDA-B0B8-6490F2A67B09}"/>
-              </a:ext>
-            </a:extLst>
-          </p:cNvPr>
-          <p:cNvSpPr>
-            <a:spLocks xmlns:a="http://schemas.openxmlformats.org/drawingml/2006/main" noGrp="1"/>
-          </p:cNvSpPr>
-          <p:nvPr/>
-        </p:nvSpPr>
-        <p:spPr>
-          <a:xfrm xmlns:a="http://schemas.openxmlformats.org/drawingml/2006/main">
-            <a:off x="6296025" y="1819275"/>
-            <a:ext cx="5286375" cy="3371850"/>
+              <a:t>The target workflow for MoSPI and ministry monitoring teams compares each project’s monthly cost, schedule, expenditure and progress to surface emerging risks for review. A quality gate holds inconsistent records; each reviewed flag shows its source page, changed fields, model drivers and uncertainty, and lets an analyst record a decision.</a:t>
+            </a:r>
+          </a:p>
+        </p:txBody>
+      </p:sp>
+      <p:sp>
+        <p:nvSpPr>
+          <p:cNvPr id="15375" name="idea-flow-reports-surface">
+            <a:extLst xmlns:a="http://schemas.openxmlformats.org/drawingml/2006/main">
+              <a:ext uri="{FF2B5EF4-FFF2-40B4-BE49-F238E27FC236}">
+                <a16:creationId xmlns:a16="http://schemas.microsoft.com/office/drawing/2014/main" id="{E64A7136-F224-441E-A1A7-04B2A829476A}"/>
+              </a:ext>
+            </a:extLst>
+          </p:cNvPr>
+          <p:cNvSpPr>
+            <a:spLocks xmlns:a="http://schemas.openxmlformats.org/drawingml/2006/main" noGrp="1"/>
+          </p:cNvSpPr>
+          <p:nvPr/>
+        </p:nvSpPr>
+        <p:spPr>
+          <a:xfrm xmlns:a="http://schemas.openxmlformats.org/drawingml/2006/main">
+            <a:off x="609600" y="3305175"/>
+            <a:ext cx="2352675" cy="781050"/>
           </a:xfrm>
           <a:prstGeom xmlns:a="http://schemas.openxmlformats.org/drawingml/2006/main" prst="rect">
             <a:avLst/>
           </a:prstGeom>
           <a:solidFill xmlns:a="http://schemas.openxmlformats.org/drawingml/2006/main">
-            <a:srgbClr val="FFFFFF"/>
+            <a:srgbClr val="F4F7FA"/>
           </a:solidFill>
           <a:ln xmlns:a="http://schemas.openxmlformats.org/drawingml/2006/main" w="9525">
             <a:solidFill>
-              <a:srgbClr val="B7C8D8"/>
+              <a:srgbClr val="AFC4D6"/>
             </a:solidFill>
             <a:prstDash val="solid"/>
           </a:ln>
         </p:spPr>
       </p:sp>
-      <p:pic>
-        <p:nvPicPr>
-          <p:cNvPr id="15391" name=""/>
-          <p:cNvPicPr>
-            <a:picLocks xmlns:a="http://schemas.openxmlformats.org/drawingml/2006/main" noChangeAspect="1"/>
-          </p:cNvPicPr>
-          <p:nvPr/>
-        </p:nvPicPr>
-        <p:blipFill>
-          <a:blip xmlns:r="http://schemas.openxmlformats.org/officeDocument/2006/relationships" xmlns:a="http://schemas.openxmlformats.org/drawingml/2006/main" r:embed="R47c0b05452d549bc"/>
-          <a:srcRect xmlns:a="http://schemas.openxmlformats.org/drawingml/2006/main" l="384" t="0" r="384" b="0"/>
-          <a:stretch xmlns:a="http://schemas.openxmlformats.org/drawingml/2006/main">
-            <a:fillRect l="0" t="0" r="0" b="0"/>
-          </a:stretch>
-        </p:blipFill>
-        <p:spPr>
-          <a:xfrm xmlns:a="http://schemas.openxmlformats.org/drawingml/2006/main">
-            <a:off x="6353175" y="1876425"/>
-            <a:ext cx="5172075" cy="3257550"/>
-          </a:xfrm>
-          <a:prstGeom xmlns:a="http://schemas.openxmlformats.org/drawingml/2006/main" prst="rect">
-            <a:avLst/>
-          </a:prstGeom>
-        </p:spPr>
-      </p:pic>
-      <p:sp>
-        <p:nvSpPr>
-          <p:cNvPr id="15374" name="prototype-screenshot-caption">
-            <a:extLst xmlns:a="http://schemas.openxmlformats.org/drawingml/2006/main">
-              <a:ext uri="{FF2B5EF4-FFF2-40B4-BE49-F238E27FC236}">
-                <a16:creationId xmlns:a16="http://schemas.microsoft.com/office/drawing/2014/main" id="{019F4A49-53FD-4C95-96D8-E64F9A0B9261}"/>
-              </a:ext>
-            </a:extLst>
-          </p:cNvPr>
-          <p:cNvSpPr>
-            <a:spLocks xmlns:a="http://schemas.openxmlformats.org/drawingml/2006/main" noGrp="1"/>
-          </p:cNvSpPr>
-          <p:nvPr/>
-        </p:nvSpPr>
-        <p:spPr>
-          <a:xfrm xmlns:a="http://schemas.openxmlformats.org/drawingml/2006/main">
-            <a:off x="6353175" y="5238750"/>
-            <a:ext cx="5172075" cy="419100"/>
+      <p:sp>
+        <p:nvSpPr>
+          <p:cNvPr id="15376" name="idea-flow-reports-title">
+            <a:extLst xmlns:a="http://schemas.openxmlformats.org/drawingml/2006/main">
+              <a:ext uri="{FF2B5EF4-FFF2-40B4-BE49-F238E27FC236}">
+                <a16:creationId xmlns:a16="http://schemas.microsoft.com/office/drawing/2014/main" id="{D5A7E289-5D18-43A8-A625-DF94C66D4DE1}"/>
+              </a:ext>
+            </a:extLst>
+          </p:cNvPr>
+          <p:cNvSpPr>
+            <a:spLocks xmlns:a="http://schemas.openxmlformats.org/drawingml/2006/main" noGrp="1"/>
+          </p:cNvSpPr>
+          <p:nvPr/>
+        </p:nvSpPr>
+        <p:spPr>
+          <a:xfrm xmlns:a="http://schemas.openxmlformats.org/drawingml/2006/main">
+            <a:off x="685800" y="3400425"/>
+            <a:ext cx="2200275" cy="228600"/>
           </a:xfrm>
           <a:prstGeom xmlns:a="http://schemas.openxmlformats.org/drawingml/2006/main" prst="rect">
             <a:avLst/>
@@ -6849,15 +6924,694 @@
           </a:ln>
         </p:spPr>
         <p:txBody>
+          <a:bodyPr xmlns:a="http://schemas.openxmlformats.org/drawingml/2006/main" wrap="square" lIns="0" tIns="0" rIns="0" bIns="0" anchor="ctr">
+            <a:normAutofit fontScale="100000"/>
+          </a:bodyPr>
+          <a:lstStyle xmlns:a="http://schemas.openxmlformats.org/drawingml/2006/main"/>
+          <a:p xmlns:a="http://schemas.openxmlformats.org/drawingml/2006/main">
+            <a:pPr algn="ctr">
+              <a:defRPr sz="1275" b="1">
+                <a:solidFill>
+                  <a:srgbClr val="1F497D"/>
+                </a:solidFill>
+                <a:latin typeface="Arial"/>
+                <a:ea typeface="Arial"/>
+                <a:cs typeface="Arial"/>
+              </a:defRPr>
+            </a:pPr>
+            <a:r>
+              <a:rPr sz="1275" b="1">
+                <a:solidFill>
+                  <a:srgbClr val="1F497D"/>
+                </a:solidFill>
+                <a:latin typeface="Arial"/>
+                <a:ea typeface="Arial"/>
+                <a:cs typeface="Arial"/>
+              </a:rPr>
+              <a:t>MONTHLY REPORTS</a:t>
+            </a:r>
+          </a:p>
+        </p:txBody>
+      </p:sp>
+      <p:sp>
+        <p:nvSpPr>
+          <p:cNvPr id="15377" name="idea-flow-reports-detail">
+            <a:extLst xmlns:a="http://schemas.openxmlformats.org/drawingml/2006/main">
+              <a:ext uri="{FF2B5EF4-FFF2-40B4-BE49-F238E27FC236}">
+                <a16:creationId xmlns:a16="http://schemas.microsoft.com/office/drawing/2014/main" id="{B88652B0-5056-45E2-AFED-D337F3E2AAD5}"/>
+              </a:ext>
+            </a:extLst>
+          </p:cNvPr>
+          <p:cNvSpPr>
+            <a:spLocks xmlns:a="http://schemas.openxmlformats.org/drawingml/2006/main" noGrp="1"/>
+          </p:cNvSpPr>
+          <p:nvPr/>
+        </p:nvSpPr>
+        <p:spPr>
+          <a:xfrm xmlns:a="http://schemas.openxmlformats.org/drawingml/2006/main">
+            <a:off x="685800" y="3657600"/>
+            <a:ext cx="2200275" cy="361950"/>
+          </a:xfrm>
+          <a:prstGeom xmlns:a="http://schemas.openxmlformats.org/drawingml/2006/main" prst="rect">
+            <a:avLst/>
+          </a:prstGeom>
+          <a:noFill xmlns:a="http://schemas.openxmlformats.org/drawingml/2006/main"/>
+          <a:ln xmlns:a="http://schemas.openxmlformats.org/drawingml/2006/main" w="0">
+            <a:noFill/>
+            <a:prstDash val="solid"/>
+          </a:ln>
+        </p:spPr>
+        <p:txBody>
+          <a:bodyPr xmlns:a="http://schemas.openxmlformats.org/drawingml/2006/main" wrap="square" lIns="0" tIns="0" rIns="0" bIns="0" anchor="ctr">
+            <a:normAutofit fontScale="100000"/>
+          </a:bodyPr>
+          <a:lstStyle xmlns:a="http://schemas.openxmlformats.org/drawingml/2006/main"/>
+          <a:p xmlns:a="http://schemas.openxmlformats.org/drawingml/2006/main">
+            <a:pPr algn="ctr">
+              <a:defRPr sz="1163">
+                <a:solidFill>
+                  <a:srgbClr val="252525"/>
+                </a:solidFill>
+                <a:latin typeface="Arial"/>
+                <a:ea typeface="Arial"/>
+                <a:cs typeface="Arial"/>
+              </a:defRPr>
+            </a:pPr>
+            <a:r>
+              <a:rPr sz="1163">
+                <a:solidFill>
+                  <a:srgbClr val="252525"/>
+                </a:solidFill>
+                <a:latin typeface="Arial"/>
+                <a:ea typeface="Arial"/>
+                <a:cs typeface="Arial"/>
+              </a:rPr>
+              <a:t>17 months • OCMS + PAIMANA</a:t>
+            </a:r>
+          </a:p>
+        </p:txBody>
+      </p:sp>
+      <p:sp>
+        <p:nvSpPr>
+          <p:cNvPr id="15378" name="idea-flow-quality-surface">
+            <a:extLst xmlns:a="http://schemas.openxmlformats.org/drawingml/2006/main">
+              <a:ext uri="{FF2B5EF4-FFF2-40B4-BE49-F238E27FC236}">
+                <a16:creationId xmlns:a16="http://schemas.microsoft.com/office/drawing/2014/main" id="{AAA273A4-88FE-47B3-A156-20A9E132A60F}"/>
+              </a:ext>
+            </a:extLst>
+          </p:cNvPr>
+          <p:cNvSpPr>
+            <a:spLocks xmlns:a="http://schemas.openxmlformats.org/drawingml/2006/main" noGrp="1"/>
+          </p:cNvSpPr>
+          <p:nvPr/>
+        </p:nvSpPr>
+        <p:spPr>
+          <a:xfrm xmlns:a="http://schemas.openxmlformats.org/drawingml/2006/main">
+            <a:off x="3381375" y="3305175"/>
+            <a:ext cx="2352675" cy="781050"/>
+          </a:xfrm>
+          <a:prstGeom xmlns:a="http://schemas.openxmlformats.org/drawingml/2006/main" prst="rect">
+            <a:avLst/>
+          </a:prstGeom>
+          <a:solidFill xmlns:a="http://schemas.openxmlformats.org/drawingml/2006/main">
+            <a:srgbClr val="F4F7FA"/>
+          </a:solidFill>
+          <a:ln xmlns:a="http://schemas.openxmlformats.org/drawingml/2006/main" w="9525">
+            <a:solidFill>
+              <a:srgbClr val="AFC4D6"/>
+            </a:solidFill>
+            <a:prstDash val="solid"/>
+          </a:ln>
+        </p:spPr>
+      </p:sp>
+      <p:sp>
+        <p:nvSpPr>
+          <p:cNvPr id="15379" name="idea-flow-quality-title">
+            <a:extLst xmlns:a="http://schemas.openxmlformats.org/drawingml/2006/main">
+              <a:ext uri="{FF2B5EF4-FFF2-40B4-BE49-F238E27FC236}">
+                <a16:creationId xmlns:a16="http://schemas.microsoft.com/office/drawing/2014/main" id="{4911D5FB-B2A1-4422-B5F4-D9D8953DA4FE}"/>
+              </a:ext>
+            </a:extLst>
+          </p:cNvPr>
+          <p:cNvSpPr>
+            <a:spLocks xmlns:a="http://schemas.openxmlformats.org/drawingml/2006/main" noGrp="1"/>
+          </p:cNvSpPr>
+          <p:nvPr/>
+        </p:nvSpPr>
+        <p:spPr>
+          <a:xfrm xmlns:a="http://schemas.openxmlformats.org/drawingml/2006/main">
+            <a:off x="3457575" y="3400425"/>
+            <a:ext cx="2200275" cy="228600"/>
+          </a:xfrm>
+          <a:prstGeom xmlns:a="http://schemas.openxmlformats.org/drawingml/2006/main" prst="rect">
+            <a:avLst/>
+          </a:prstGeom>
+          <a:noFill xmlns:a="http://schemas.openxmlformats.org/drawingml/2006/main"/>
+          <a:ln xmlns:a="http://schemas.openxmlformats.org/drawingml/2006/main" w="0">
+            <a:noFill/>
+            <a:prstDash val="solid"/>
+          </a:ln>
+        </p:spPr>
+        <p:txBody>
+          <a:bodyPr xmlns:a="http://schemas.openxmlformats.org/drawingml/2006/main" wrap="square" lIns="0" tIns="0" rIns="0" bIns="0" anchor="ctr">
+            <a:normAutofit fontScale="100000"/>
+          </a:bodyPr>
+          <a:lstStyle xmlns:a="http://schemas.openxmlformats.org/drawingml/2006/main"/>
+          <a:p xmlns:a="http://schemas.openxmlformats.org/drawingml/2006/main">
+            <a:pPr algn="ctr">
+              <a:defRPr sz="1275" b="1">
+                <a:solidFill>
+                  <a:srgbClr val="1F497D"/>
+                </a:solidFill>
+                <a:latin typeface="Arial"/>
+                <a:ea typeface="Arial"/>
+                <a:cs typeface="Arial"/>
+              </a:defRPr>
+            </a:pPr>
+            <a:r>
+              <a:rPr sz="1275" b="1">
+                <a:solidFill>
+                  <a:srgbClr val="1F497D"/>
+                </a:solidFill>
+                <a:latin typeface="Arial"/>
+                <a:ea typeface="Arial"/>
+                <a:cs typeface="Arial"/>
+              </a:rPr>
+              <a:t>VALIDATE + TRACE</a:t>
+            </a:r>
+          </a:p>
+        </p:txBody>
+      </p:sp>
+      <p:sp>
+        <p:nvSpPr>
+          <p:cNvPr id="15380" name="idea-flow-quality-detail">
+            <a:extLst xmlns:a="http://schemas.openxmlformats.org/drawingml/2006/main">
+              <a:ext uri="{FF2B5EF4-FFF2-40B4-BE49-F238E27FC236}">
+                <a16:creationId xmlns:a16="http://schemas.microsoft.com/office/drawing/2014/main" id="{FBF0DBA9-A441-41C9-9E6D-26D8A6739EF3}"/>
+              </a:ext>
+            </a:extLst>
+          </p:cNvPr>
+          <p:cNvSpPr>
+            <a:spLocks xmlns:a="http://schemas.openxmlformats.org/drawingml/2006/main" noGrp="1"/>
+          </p:cNvSpPr>
+          <p:nvPr/>
+        </p:nvSpPr>
+        <p:spPr>
+          <a:xfrm xmlns:a="http://schemas.openxmlformats.org/drawingml/2006/main">
+            <a:off x="3457575" y="3657600"/>
+            <a:ext cx="2200275" cy="361950"/>
+          </a:xfrm>
+          <a:prstGeom xmlns:a="http://schemas.openxmlformats.org/drawingml/2006/main" prst="rect">
+            <a:avLst/>
+          </a:prstGeom>
+          <a:noFill xmlns:a="http://schemas.openxmlformats.org/drawingml/2006/main"/>
+          <a:ln xmlns:a="http://schemas.openxmlformats.org/drawingml/2006/main" w="0">
+            <a:noFill/>
+            <a:prstDash val="solid"/>
+          </a:ln>
+        </p:spPr>
+        <p:txBody>
+          <a:bodyPr xmlns:a="http://schemas.openxmlformats.org/drawingml/2006/main" wrap="square" lIns="0" tIns="0" rIns="0" bIns="0" anchor="ctr">
+            <a:normAutofit fontScale="100000"/>
+          </a:bodyPr>
+          <a:lstStyle xmlns:a="http://schemas.openxmlformats.org/drawingml/2006/main"/>
+          <a:p xmlns:a="http://schemas.openxmlformats.org/drawingml/2006/main">
+            <a:pPr algn="ctr">
+              <a:defRPr sz="1163">
+                <a:solidFill>
+                  <a:srgbClr val="252525"/>
+                </a:solidFill>
+                <a:latin typeface="Arial"/>
+                <a:ea typeface="Arial"/>
+                <a:cs typeface="Arial"/>
+              </a:defRPr>
+            </a:pPr>
+            <a:r>
+              <a:rPr sz="1163">
+                <a:solidFill>
+                  <a:srgbClr val="252525"/>
+                </a:solidFill>
+                <a:latin typeface="Arial"/>
+                <a:ea typeface="Arial"/>
+                <a:cs typeface="Arial"/>
+              </a:rPr>
+              <a:t>field checks • source page</a:t>
+            </a:r>
+          </a:p>
+        </p:txBody>
+      </p:sp>
+      <p:sp>
+        <p:nvSpPr>
+          <p:cNvPr id="15381" name="idea-flow-assess-surface">
+            <a:extLst xmlns:a="http://schemas.openxmlformats.org/drawingml/2006/main">
+              <a:ext uri="{FF2B5EF4-FFF2-40B4-BE49-F238E27FC236}">
+                <a16:creationId xmlns:a16="http://schemas.microsoft.com/office/drawing/2014/main" id="{5905EE49-31C8-49C6-86FC-8C75DA0D8204}"/>
+              </a:ext>
+            </a:extLst>
+          </p:cNvPr>
+          <p:cNvSpPr>
+            <a:spLocks xmlns:a="http://schemas.openxmlformats.org/drawingml/2006/main" noGrp="1"/>
+          </p:cNvSpPr>
+          <p:nvPr/>
+        </p:nvSpPr>
+        <p:spPr>
+          <a:xfrm xmlns:a="http://schemas.openxmlformats.org/drawingml/2006/main">
+            <a:off x="6153150" y="3305175"/>
+            <a:ext cx="2352675" cy="781050"/>
+          </a:xfrm>
+          <a:prstGeom xmlns:a="http://schemas.openxmlformats.org/drawingml/2006/main" prst="rect">
+            <a:avLst/>
+          </a:prstGeom>
+          <a:solidFill xmlns:a="http://schemas.openxmlformats.org/drawingml/2006/main">
+            <a:srgbClr val="F4F7FA"/>
+          </a:solidFill>
+          <a:ln xmlns:a="http://schemas.openxmlformats.org/drawingml/2006/main" w="9525">
+            <a:solidFill>
+              <a:srgbClr val="AFC4D6"/>
+            </a:solidFill>
+            <a:prstDash val="solid"/>
+          </a:ln>
+        </p:spPr>
+      </p:sp>
+      <p:sp>
+        <p:nvSpPr>
+          <p:cNvPr id="15382" name="idea-flow-assess-title">
+            <a:extLst xmlns:a="http://schemas.openxmlformats.org/drawingml/2006/main">
+              <a:ext uri="{FF2B5EF4-FFF2-40B4-BE49-F238E27FC236}">
+                <a16:creationId xmlns:a16="http://schemas.microsoft.com/office/drawing/2014/main" id="{AE598059-A0ED-41E3-905A-A170754157F5}"/>
+              </a:ext>
+            </a:extLst>
+          </p:cNvPr>
+          <p:cNvSpPr>
+            <a:spLocks xmlns:a="http://schemas.openxmlformats.org/drawingml/2006/main" noGrp="1"/>
+          </p:cNvSpPr>
+          <p:nvPr/>
+        </p:nvSpPr>
+        <p:spPr>
+          <a:xfrm xmlns:a="http://schemas.openxmlformats.org/drawingml/2006/main">
+            <a:off x="6229350" y="3400425"/>
+            <a:ext cx="2200275" cy="228600"/>
+          </a:xfrm>
+          <a:prstGeom xmlns:a="http://schemas.openxmlformats.org/drawingml/2006/main" prst="rect">
+            <a:avLst/>
+          </a:prstGeom>
+          <a:noFill xmlns:a="http://schemas.openxmlformats.org/drawingml/2006/main"/>
+          <a:ln xmlns:a="http://schemas.openxmlformats.org/drawingml/2006/main" w="0">
+            <a:noFill/>
+            <a:prstDash val="solid"/>
+          </a:ln>
+        </p:spPr>
+        <p:txBody>
+          <a:bodyPr xmlns:a="http://schemas.openxmlformats.org/drawingml/2006/main" wrap="square" lIns="0" tIns="0" rIns="0" bIns="0" anchor="ctr">
+            <a:normAutofit fontScale="100000"/>
+          </a:bodyPr>
+          <a:lstStyle xmlns:a="http://schemas.openxmlformats.org/drawingml/2006/main"/>
+          <a:p xmlns:a="http://schemas.openxmlformats.org/drawingml/2006/main">
+            <a:pPr algn="ctr">
+              <a:defRPr sz="1275" b="1">
+                <a:solidFill>
+                  <a:srgbClr val="1F497D"/>
+                </a:solidFill>
+                <a:latin typeface="Arial"/>
+                <a:ea typeface="Arial"/>
+                <a:cs typeface="Arial"/>
+              </a:defRPr>
+            </a:pPr>
+            <a:r>
+              <a:rPr sz="1275" b="1">
+                <a:solidFill>
+                  <a:srgbClr val="1F497D"/>
+                </a:solidFill>
+                <a:latin typeface="Arial"/>
+                <a:ea typeface="Arial"/>
+                <a:cs typeface="Arial"/>
+              </a:rPr>
+              <a:t>ASSESS SEPARATELY</a:t>
+            </a:r>
+          </a:p>
+        </p:txBody>
+      </p:sp>
+      <p:sp>
+        <p:nvSpPr>
+          <p:cNvPr id="15383" name="idea-flow-assess-detail">
+            <a:extLst xmlns:a="http://schemas.openxmlformats.org/drawingml/2006/main">
+              <a:ext uri="{FF2B5EF4-FFF2-40B4-BE49-F238E27FC236}">
+                <a16:creationId xmlns:a16="http://schemas.microsoft.com/office/drawing/2014/main" id="{D15F5D26-0381-4AB5-B9BB-C89085D48CFD}"/>
+              </a:ext>
+            </a:extLst>
+          </p:cNvPr>
+          <p:cNvSpPr>
+            <a:spLocks xmlns:a="http://schemas.openxmlformats.org/drawingml/2006/main" noGrp="1"/>
+          </p:cNvSpPr>
+          <p:nvPr/>
+        </p:nvSpPr>
+        <p:spPr>
+          <a:xfrm xmlns:a="http://schemas.openxmlformats.org/drawingml/2006/main">
+            <a:off x="6229350" y="3657600"/>
+            <a:ext cx="2200275" cy="361950"/>
+          </a:xfrm>
+          <a:prstGeom xmlns:a="http://schemas.openxmlformats.org/drawingml/2006/main" prst="rect">
+            <a:avLst/>
+          </a:prstGeom>
+          <a:noFill xmlns:a="http://schemas.openxmlformats.org/drawingml/2006/main"/>
+          <a:ln xmlns:a="http://schemas.openxmlformats.org/drawingml/2006/main" w="0">
+            <a:noFill/>
+            <a:prstDash val="solid"/>
+          </a:ln>
+        </p:spPr>
+        <p:txBody>
+          <a:bodyPr xmlns:a="http://schemas.openxmlformats.org/drawingml/2006/main" wrap="square" lIns="0" tIns="0" rIns="0" bIns="0" anchor="ctr">
+            <a:normAutofit fontScale="100000"/>
+          </a:bodyPr>
+          <a:lstStyle xmlns:a="http://schemas.openxmlformats.org/drawingml/2006/main"/>
+          <a:p xmlns:a="http://schemas.openxmlformats.org/drawingml/2006/main">
+            <a:pPr algn="ctr">
+              <a:defRPr sz="1163">
+                <a:solidFill>
+                  <a:srgbClr val="252525"/>
+                </a:solidFill>
+                <a:latin typeface="Arial"/>
+                <a:ea typeface="Arial"/>
+                <a:cs typeface="Arial"/>
+              </a:defRPr>
+            </a:pPr>
+            <a:r>
+              <a:rPr sz="1163">
+                <a:solidFill>
+                  <a:srgbClr val="252525"/>
+                </a:solidFill>
+                <a:latin typeface="Arial"/>
+                <a:ea typeface="Arial"/>
+                <a:cs typeface="Arial"/>
+              </a:rPr>
+              <a:t>cost / schedule models</a:t>
+            </a:r>
+          </a:p>
+          <a:p xmlns:a="http://schemas.openxmlformats.org/drawingml/2006/main">
+            <a:pPr algn="ctr">
+              <a:defRPr sz="1163">
+                <a:solidFill>
+                  <a:srgbClr val="252525"/>
+                </a:solidFill>
+                <a:latin typeface="Arial"/>
+                <a:ea typeface="Arial"/>
+                <a:cs typeface="Arial"/>
+              </a:defRPr>
+            </a:pPr>
+            <a:r>
+              <a:rPr sz="1163">
+                <a:solidFill>
+                  <a:srgbClr val="252525"/>
+                </a:solidFill>
+                <a:latin typeface="Arial"/>
+                <a:ea typeface="Arial"/>
+                <a:cs typeface="Arial"/>
+              </a:rPr>
+              <a:t>implementation signals</a:t>
+            </a:r>
+          </a:p>
+        </p:txBody>
+      </p:sp>
+      <p:sp>
+        <p:nvSpPr>
+          <p:cNvPr id="15384" name="idea-flow-review-surface">
+            <a:extLst xmlns:a="http://schemas.openxmlformats.org/drawingml/2006/main">
+              <a:ext uri="{FF2B5EF4-FFF2-40B4-BE49-F238E27FC236}">
+                <a16:creationId xmlns:a16="http://schemas.microsoft.com/office/drawing/2014/main" id="{6E4C7064-348E-48FC-9BF2-5DFFE596712E}"/>
+              </a:ext>
+            </a:extLst>
+          </p:cNvPr>
+          <p:cNvSpPr>
+            <a:spLocks xmlns:a="http://schemas.openxmlformats.org/drawingml/2006/main" noGrp="1"/>
+          </p:cNvSpPr>
+          <p:nvPr/>
+        </p:nvSpPr>
+        <p:spPr>
+          <a:xfrm xmlns:a="http://schemas.openxmlformats.org/drawingml/2006/main">
+            <a:off x="8924925" y="3305175"/>
+            <a:ext cx="2352675" cy="781050"/>
+          </a:xfrm>
+          <a:prstGeom xmlns:a="http://schemas.openxmlformats.org/drawingml/2006/main" prst="rect">
+            <a:avLst/>
+          </a:prstGeom>
+          <a:solidFill xmlns:a="http://schemas.openxmlformats.org/drawingml/2006/main">
+            <a:srgbClr val="F4F7FA"/>
+          </a:solidFill>
+          <a:ln xmlns:a="http://schemas.openxmlformats.org/drawingml/2006/main" w="9525">
+            <a:solidFill>
+              <a:srgbClr val="AFC4D6"/>
+            </a:solidFill>
+            <a:prstDash val="solid"/>
+          </a:ln>
+        </p:spPr>
+      </p:sp>
+      <p:sp>
+        <p:nvSpPr>
+          <p:cNvPr id="15385" name="idea-flow-review-title">
+            <a:extLst xmlns:a="http://schemas.openxmlformats.org/drawingml/2006/main">
+              <a:ext uri="{FF2B5EF4-FFF2-40B4-BE49-F238E27FC236}">
+                <a16:creationId xmlns:a16="http://schemas.microsoft.com/office/drawing/2014/main" id="{9F7EA79E-0C59-4C94-AA52-873309B5661C}"/>
+              </a:ext>
+            </a:extLst>
+          </p:cNvPr>
+          <p:cNvSpPr>
+            <a:spLocks xmlns:a="http://schemas.openxmlformats.org/drawingml/2006/main" noGrp="1"/>
+          </p:cNvSpPr>
+          <p:nvPr/>
+        </p:nvSpPr>
+        <p:spPr>
+          <a:xfrm xmlns:a="http://schemas.openxmlformats.org/drawingml/2006/main">
+            <a:off x="9001125" y="3400425"/>
+            <a:ext cx="2200275" cy="228600"/>
+          </a:xfrm>
+          <a:prstGeom xmlns:a="http://schemas.openxmlformats.org/drawingml/2006/main" prst="rect">
+            <a:avLst/>
+          </a:prstGeom>
+          <a:noFill xmlns:a="http://schemas.openxmlformats.org/drawingml/2006/main"/>
+          <a:ln xmlns:a="http://schemas.openxmlformats.org/drawingml/2006/main" w="0">
+            <a:noFill/>
+            <a:prstDash val="solid"/>
+          </a:ln>
+        </p:spPr>
+        <p:txBody>
+          <a:bodyPr xmlns:a="http://schemas.openxmlformats.org/drawingml/2006/main" wrap="square" lIns="0" tIns="0" rIns="0" bIns="0" anchor="ctr">
+            <a:normAutofit fontScale="100000"/>
+          </a:bodyPr>
+          <a:lstStyle xmlns:a="http://schemas.openxmlformats.org/drawingml/2006/main"/>
+          <a:p xmlns:a="http://schemas.openxmlformats.org/drawingml/2006/main">
+            <a:pPr algn="ctr">
+              <a:defRPr sz="1275" b="1">
+                <a:solidFill>
+                  <a:srgbClr val="1F497D"/>
+                </a:solidFill>
+                <a:latin typeface="Arial"/>
+                <a:ea typeface="Arial"/>
+                <a:cs typeface="Arial"/>
+              </a:defRPr>
+            </a:pPr>
+            <a:r>
+              <a:rPr sz="1275" b="1">
+                <a:solidFill>
+                  <a:srgbClr val="1F497D"/>
+                </a:solidFill>
+                <a:latin typeface="Arial"/>
+                <a:ea typeface="Arial"/>
+                <a:cs typeface="Arial"/>
+              </a:rPr>
+              <a:t>HUMAN REVIEW</a:t>
+            </a:r>
+          </a:p>
+        </p:txBody>
+      </p:sp>
+      <p:sp>
+        <p:nvSpPr>
+          <p:cNvPr id="15386" name="idea-flow-review-detail">
+            <a:extLst xmlns:a="http://schemas.openxmlformats.org/drawingml/2006/main">
+              <a:ext uri="{FF2B5EF4-FFF2-40B4-BE49-F238E27FC236}">
+                <a16:creationId xmlns:a16="http://schemas.microsoft.com/office/drawing/2014/main" id="{1AC81324-F674-47B2-8CB9-8AD0E8D8AE0F}"/>
+              </a:ext>
+            </a:extLst>
+          </p:cNvPr>
+          <p:cNvSpPr>
+            <a:spLocks xmlns:a="http://schemas.openxmlformats.org/drawingml/2006/main" noGrp="1"/>
+          </p:cNvSpPr>
+          <p:nvPr/>
+        </p:nvSpPr>
+        <p:spPr>
+          <a:xfrm xmlns:a="http://schemas.openxmlformats.org/drawingml/2006/main">
+            <a:off x="9001125" y="3657600"/>
+            <a:ext cx="2200275" cy="361950"/>
+          </a:xfrm>
+          <a:prstGeom xmlns:a="http://schemas.openxmlformats.org/drawingml/2006/main" prst="rect">
+            <a:avLst/>
+          </a:prstGeom>
+          <a:noFill xmlns:a="http://schemas.openxmlformats.org/drawingml/2006/main"/>
+          <a:ln xmlns:a="http://schemas.openxmlformats.org/drawingml/2006/main" w="0">
+            <a:noFill/>
+            <a:prstDash val="solid"/>
+          </a:ln>
+        </p:spPr>
+        <p:txBody>
+          <a:bodyPr xmlns:a="http://schemas.openxmlformats.org/drawingml/2006/main" wrap="square" lIns="0" tIns="0" rIns="0" bIns="0" anchor="ctr">
+            <a:normAutofit fontScale="100000"/>
+          </a:bodyPr>
+          <a:lstStyle xmlns:a="http://schemas.openxmlformats.org/drawingml/2006/main"/>
+          <a:p xmlns:a="http://schemas.openxmlformats.org/drawingml/2006/main">
+            <a:pPr algn="ctr">
+              <a:defRPr sz="1163">
+                <a:solidFill>
+                  <a:srgbClr val="252525"/>
+                </a:solidFill>
+                <a:latin typeface="Arial"/>
+                <a:ea typeface="Arial"/>
+                <a:cs typeface="Arial"/>
+              </a:defRPr>
+            </a:pPr>
+            <a:r>
+              <a:rPr sz="1163">
+                <a:solidFill>
+                  <a:srgbClr val="252525"/>
+                </a:solidFill>
+                <a:latin typeface="Arial"/>
+                <a:ea typeface="Arial"/>
+                <a:cs typeface="Arial"/>
+              </a:rPr>
+              <a:t>reason • uncertainty • decision</a:t>
+            </a:r>
+          </a:p>
+        </p:txBody>
+      </p:sp>
+      <p:sp>
+        <p:nvSpPr>
+          <p:cNvPr id="15387" name="idea-flow-arrow-1">
+            <a:extLst xmlns:a="http://schemas.openxmlformats.org/drawingml/2006/main">
+              <a:ext uri="{FF2B5EF4-FFF2-40B4-BE49-F238E27FC236}">
+                <a16:creationId xmlns:a16="http://schemas.microsoft.com/office/drawing/2014/main" id="{9C6204E9-0608-4E04-BADA-D101C2079D7E}"/>
+              </a:ext>
+            </a:extLst>
+          </p:cNvPr>
+          <p:cNvSpPr>
+            <a:spLocks xmlns:a="http://schemas.openxmlformats.org/drawingml/2006/main" noGrp="1"/>
+          </p:cNvSpPr>
+          <p:nvPr/>
+        </p:nvSpPr>
+        <p:spPr>
+          <a:xfrm xmlns:a="http://schemas.openxmlformats.org/drawingml/2006/main">
+            <a:off x="3105150" y="3581400"/>
+            <a:ext cx="190500" cy="228600"/>
+          </a:xfrm>
+          <a:prstGeom xmlns:a="http://schemas.openxmlformats.org/drawingml/2006/main" prst="rightArrow">
+            <a:avLst/>
+          </a:prstGeom>
+          <a:solidFill xmlns:a="http://schemas.openxmlformats.org/drawingml/2006/main">
+            <a:srgbClr val="0070C0"/>
+          </a:solidFill>
+          <a:ln xmlns:a="http://schemas.openxmlformats.org/drawingml/2006/main" w="0">
+            <a:noFill/>
+            <a:prstDash val="solid"/>
+          </a:ln>
+        </p:spPr>
+      </p:sp>
+      <p:sp>
+        <p:nvSpPr>
+          <p:cNvPr id="15388" name="idea-flow-arrow-2">
+            <a:extLst xmlns:a="http://schemas.openxmlformats.org/drawingml/2006/main">
+              <a:ext uri="{FF2B5EF4-FFF2-40B4-BE49-F238E27FC236}">
+                <a16:creationId xmlns:a16="http://schemas.microsoft.com/office/drawing/2014/main" id="{0A2B712C-A3D9-4DBD-9DF1-492C72087B5E}"/>
+              </a:ext>
+            </a:extLst>
+          </p:cNvPr>
+          <p:cNvSpPr>
+            <a:spLocks xmlns:a="http://schemas.openxmlformats.org/drawingml/2006/main" noGrp="1"/>
+          </p:cNvSpPr>
+          <p:nvPr/>
+        </p:nvSpPr>
+        <p:spPr>
+          <a:xfrm xmlns:a="http://schemas.openxmlformats.org/drawingml/2006/main">
+            <a:off x="5876925" y="3581400"/>
+            <a:ext cx="190500" cy="228600"/>
+          </a:xfrm>
+          <a:prstGeom xmlns:a="http://schemas.openxmlformats.org/drawingml/2006/main" prst="rightArrow">
+            <a:avLst/>
+          </a:prstGeom>
+          <a:solidFill xmlns:a="http://schemas.openxmlformats.org/drawingml/2006/main">
+            <a:srgbClr val="0070C0"/>
+          </a:solidFill>
+          <a:ln xmlns:a="http://schemas.openxmlformats.org/drawingml/2006/main" w="0">
+            <a:noFill/>
+            <a:prstDash val="solid"/>
+          </a:ln>
+        </p:spPr>
+      </p:sp>
+      <p:sp>
+        <p:nvSpPr>
+          <p:cNvPr id="15389" name="idea-flow-arrow-3">
+            <a:extLst xmlns:a="http://schemas.openxmlformats.org/drawingml/2006/main">
+              <a:ext uri="{FF2B5EF4-FFF2-40B4-BE49-F238E27FC236}">
+                <a16:creationId xmlns:a16="http://schemas.microsoft.com/office/drawing/2014/main" id="{3EA0D4C4-14C5-4BB9-BB92-02D24277B16B}"/>
+              </a:ext>
+            </a:extLst>
+          </p:cNvPr>
+          <p:cNvSpPr>
+            <a:spLocks xmlns:a="http://schemas.openxmlformats.org/drawingml/2006/main" noGrp="1"/>
+          </p:cNvSpPr>
+          <p:nvPr/>
+        </p:nvSpPr>
+        <p:spPr>
+          <a:xfrm xmlns:a="http://schemas.openxmlformats.org/drawingml/2006/main">
+            <a:off x="8648700" y="3581400"/>
+            <a:ext cx="190500" cy="228600"/>
+          </a:xfrm>
+          <a:prstGeom xmlns:a="http://schemas.openxmlformats.org/drawingml/2006/main" prst="rightArrow">
+            <a:avLst/>
+          </a:prstGeom>
+          <a:solidFill xmlns:a="http://schemas.openxmlformats.org/drawingml/2006/main">
+            <a:srgbClr val="0070C0"/>
+          </a:solidFill>
+          <a:ln xmlns:a="http://schemas.openxmlformats.org/drawingml/2006/main" w="0">
+            <a:noFill/>
+            <a:prstDash val="solid"/>
+          </a:ln>
+        </p:spPr>
+      </p:sp>
+      <p:sp>
+        <p:nvSpPr>
+          <p:cNvPr id="15390" name="idea-hold-branch">
+            <a:extLst xmlns:a="http://schemas.openxmlformats.org/drawingml/2006/main">
+              <a:ext uri="{FF2B5EF4-FFF2-40B4-BE49-F238E27FC236}">
+                <a16:creationId xmlns:a16="http://schemas.microsoft.com/office/drawing/2014/main" id="{71B2A437-8B94-49A7-8ED2-5EEC52664ABF}"/>
+              </a:ext>
+            </a:extLst>
+          </p:cNvPr>
+          <p:cNvSpPr>
+            <a:spLocks xmlns:a="http://schemas.openxmlformats.org/drawingml/2006/main" noGrp="1"/>
+          </p:cNvSpPr>
+          <p:nvPr/>
+        </p:nvSpPr>
+        <p:spPr>
+          <a:xfrm xmlns:a="http://schemas.openxmlformats.org/drawingml/2006/main">
+            <a:off x="3381375" y="4133850"/>
+            <a:ext cx="5095875" cy="238125"/>
+          </a:xfrm>
+          <a:prstGeom xmlns:a="http://schemas.openxmlformats.org/drawingml/2006/main" prst="rect">
+            <a:avLst/>
+          </a:prstGeom>
+          <a:noFill xmlns:a="http://schemas.openxmlformats.org/drawingml/2006/main"/>
+          <a:ln xmlns:a="http://schemas.openxmlformats.org/drawingml/2006/main" w="0">
+            <a:noFill/>
+            <a:prstDash val="solid"/>
+          </a:ln>
+        </p:spPr>
+        <p:txBody>
           <a:bodyPr xmlns:a="http://schemas.openxmlformats.org/drawingml/2006/main" wrap="square" lIns="0" tIns="0" rIns="0" bIns="0" anchor="t">
             <a:normAutofit fontScale="100000"/>
           </a:bodyPr>
           <a:lstStyle xmlns:a="http://schemas.openxmlformats.org/drawingml/2006/main"/>
           <a:p xmlns:a="http://schemas.openxmlformats.org/drawingml/2006/main">
             <a:pPr algn="l">
-              <a:defRPr sz="1238">
-                <a:solidFill>
-                  <a:srgbClr val="424242"/>
+              <a:defRPr sz="1238" b="1">
+                <a:solidFill>
+                  <a:srgbClr val="A33A2B"/>
                 </a:solidFill>
                 <a:latin typeface="Arial"/>
                 <a:ea typeface="Arial"/>
@@ -6865,15 +7619,785 @@
               </a:defRPr>
             </a:pPr>
             <a:r>
-              <a:rPr sz="1238">
-                <a:solidFill>
-                  <a:srgbClr val="424242"/>
+              <a:rPr sz="1238" b="1">
+                <a:solidFill>
+                  <a:srgbClr val="A33A2B"/>
                 </a:solidFill>
                 <a:latin typeface="Arial"/>
                 <a:ea typeface="Arial"/>
                 <a:cs typeface="Arial"/>
               </a:rPr>
-              <a:t>Working screen: search, filters, project measures and rule score. Model estimates remain experimental.</a:t>
+              <a:t>IF CHECKS FAIL  →  HOLD FOR REVIEW; NO SILENT PREDICTION</a:t>
+            </a:r>
+          </a:p>
+        </p:txBody>
+      </p:sp>
+      <p:sp>
+        <p:nvSpPr>
+          <p:cNvPr id="15391" name="idea-designed-to-title">
+            <a:extLst xmlns:a="http://schemas.openxmlformats.org/drawingml/2006/main">
+              <a:ext uri="{FF2B5EF4-FFF2-40B4-BE49-F238E27FC236}">
+                <a16:creationId xmlns:a16="http://schemas.microsoft.com/office/drawing/2014/main" id="{B8FD3055-8DB9-44DE-9F5F-CD4649CCBECD}"/>
+              </a:ext>
+            </a:extLst>
+          </p:cNvPr>
+          <p:cNvSpPr>
+            <a:spLocks xmlns:a="http://schemas.openxmlformats.org/drawingml/2006/main" noGrp="1"/>
+          </p:cNvSpPr>
+          <p:nvPr/>
+        </p:nvSpPr>
+        <p:spPr>
+          <a:xfrm xmlns:a="http://schemas.openxmlformats.org/drawingml/2006/main">
+            <a:off x="609600" y="4495800"/>
+            <a:ext cx="10972800" cy="228600"/>
+          </a:xfrm>
+          <a:prstGeom xmlns:a="http://schemas.openxmlformats.org/drawingml/2006/main" prst="rect">
+            <a:avLst/>
+          </a:prstGeom>
+          <a:noFill xmlns:a="http://schemas.openxmlformats.org/drawingml/2006/main"/>
+          <a:ln xmlns:a="http://schemas.openxmlformats.org/drawingml/2006/main" w="0">
+            <a:noFill/>
+            <a:prstDash val="solid"/>
+          </a:ln>
+        </p:spPr>
+        <p:txBody>
+          <a:bodyPr xmlns:a="http://schemas.openxmlformats.org/drawingml/2006/main" wrap="square" lIns="0" tIns="0" rIns="0" bIns="0" anchor="t">
+            <a:normAutofit fontScale="100000"/>
+          </a:bodyPr>
+          <a:lstStyle xmlns:a="http://schemas.openxmlformats.org/drawingml/2006/main"/>
+          <a:p xmlns:a="http://schemas.openxmlformats.org/drawingml/2006/main">
+            <a:pPr algn="l">
+              <a:defRPr sz="1275" b="1">
+                <a:solidFill>
+                  <a:srgbClr val="1F497D"/>
+                </a:solidFill>
+                <a:latin typeface="Arial"/>
+                <a:ea typeface="Arial"/>
+                <a:cs typeface="Arial"/>
+              </a:defRPr>
+            </a:pPr>
+            <a:r>
+              <a:rPr sz="1275" b="1">
+                <a:solidFill>
+                  <a:srgbClr val="1F497D"/>
+                </a:solidFill>
+                <a:latin typeface="Arial"/>
+                <a:ea typeface="Arial"/>
+                <a:cs typeface="Arial"/>
+              </a:rPr>
+              <a:t>DESIGNED TO DELIVER</a:t>
+            </a:r>
+          </a:p>
+        </p:txBody>
+      </p:sp>
+      <p:sp>
+        <p:nvSpPr>
+          <p:cNvPr id="15392" name="idea-promise-1-surface">
+            <a:extLst xmlns:a="http://schemas.openxmlformats.org/drawingml/2006/main">
+              <a:ext uri="{FF2B5EF4-FFF2-40B4-BE49-F238E27FC236}">
+                <a16:creationId xmlns:a16="http://schemas.microsoft.com/office/drawing/2014/main" id="{3B74E323-6920-4DBE-AD3E-D4B1BB57E075}"/>
+              </a:ext>
+            </a:extLst>
+          </p:cNvPr>
+          <p:cNvSpPr>
+            <a:spLocks xmlns:a="http://schemas.openxmlformats.org/drawingml/2006/main" noGrp="1"/>
+          </p:cNvSpPr>
+          <p:nvPr/>
+        </p:nvSpPr>
+        <p:spPr>
+          <a:xfrm xmlns:a="http://schemas.openxmlformats.org/drawingml/2006/main">
+            <a:off x="609600" y="4772025"/>
+            <a:ext cx="2543175" cy="552450"/>
+          </a:xfrm>
+          <a:prstGeom xmlns:a="http://schemas.openxmlformats.org/drawingml/2006/main" prst="rect">
+            <a:avLst/>
+          </a:prstGeom>
+          <a:solidFill xmlns:a="http://schemas.openxmlformats.org/drawingml/2006/main">
+            <a:srgbClr val="F4F7FA"/>
+          </a:solidFill>
+          <a:ln xmlns:a="http://schemas.openxmlformats.org/drawingml/2006/main" w="9525">
+            <a:solidFill>
+              <a:srgbClr val="C4D2DD"/>
+            </a:solidFill>
+            <a:prstDash val="solid"/>
+          </a:ln>
+        </p:spPr>
+      </p:sp>
+      <p:sp>
+        <p:nvSpPr>
+          <p:cNvPr id="15393" name="idea-promise-1-title">
+            <a:extLst xmlns:a="http://schemas.openxmlformats.org/drawingml/2006/main">
+              <a:ext uri="{FF2B5EF4-FFF2-40B4-BE49-F238E27FC236}">
+                <a16:creationId xmlns:a16="http://schemas.microsoft.com/office/drawing/2014/main" id="{BC07DF2B-9776-4B63-AB55-DEF89AC0CBCC}"/>
+              </a:ext>
+            </a:extLst>
+          </p:cNvPr>
+          <p:cNvSpPr>
+            <a:spLocks xmlns:a="http://schemas.openxmlformats.org/drawingml/2006/main" noGrp="1"/>
+          </p:cNvSpPr>
+          <p:nvPr/>
+        </p:nvSpPr>
+        <p:spPr>
+          <a:xfrm xmlns:a="http://schemas.openxmlformats.org/drawingml/2006/main">
+            <a:off x="685800" y="4838700"/>
+            <a:ext cx="2390775" cy="190500"/>
+          </a:xfrm>
+          <a:prstGeom xmlns:a="http://schemas.openxmlformats.org/drawingml/2006/main" prst="rect">
+            <a:avLst/>
+          </a:prstGeom>
+          <a:noFill xmlns:a="http://schemas.openxmlformats.org/drawingml/2006/main"/>
+          <a:ln xmlns:a="http://schemas.openxmlformats.org/drawingml/2006/main" w="0">
+            <a:noFill/>
+            <a:prstDash val="solid"/>
+          </a:ln>
+        </p:spPr>
+        <p:txBody>
+          <a:bodyPr xmlns:a="http://schemas.openxmlformats.org/drawingml/2006/main" wrap="square" lIns="0" tIns="0" rIns="0" bIns="0" anchor="t">
+            <a:normAutofit fontScale="100000"/>
+          </a:bodyPr>
+          <a:lstStyle xmlns:a="http://schemas.openxmlformats.org/drawingml/2006/main"/>
+          <a:p xmlns:a="http://schemas.openxmlformats.org/drawingml/2006/main">
+            <a:pPr algn="ctr">
+              <a:defRPr sz="1238" b="1">
+                <a:solidFill>
+                  <a:srgbClr val="1F497D"/>
+                </a:solidFill>
+                <a:latin typeface="Arial"/>
+                <a:ea typeface="Arial"/>
+                <a:cs typeface="Arial"/>
+              </a:defRPr>
+            </a:pPr>
+            <a:r>
+              <a:rPr sz="1238" b="1">
+                <a:solidFill>
+                  <a:srgbClr val="1F497D"/>
+                </a:solidFill>
+                <a:latin typeface="Arial"/>
+                <a:ea typeface="Arial"/>
+                <a:cs typeface="Arial"/>
+              </a:rPr>
+              <a:t>PRIORITISE</a:t>
+            </a:r>
+          </a:p>
+        </p:txBody>
+      </p:sp>
+      <p:sp>
+        <p:nvSpPr>
+          <p:cNvPr id="15394" name="idea-promise-1-detail">
+            <a:extLst xmlns:a="http://schemas.openxmlformats.org/drawingml/2006/main">
+              <a:ext uri="{FF2B5EF4-FFF2-40B4-BE49-F238E27FC236}">
+                <a16:creationId xmlns:a16="http://schemas.microsoft.com/office/drawing/2014/main" id="{AA277BD6-0843-41B7-871A-BDA114C4F388}"/>
+              </a:ext>
+            </a:extLst>
+          </p:cNvPr>
+          <p:cNvSpPr>
+            <a:spLocks xmlns:a="http://schemas.openxmlformats.org/drawingml/2006/main" noGrp="1"/>
+          </p:cNvSpPr>
+          <p:nvPr/>
+        </p:nvSpPr>
+        <p:spPr>
+          <a:xfrm xmlns:a="http://schemas.openxmlformats.org/drawingml/2006/main">
+            <a:off x="685800" y="5048250"/>
+            <a:ext cx="2390775" cy="209550"/>
+          </a:xfrm>
+          <a:prstGeom xmlns:a="http://schemas.openxmlformats.org/drawingml/2006/main" prst="rect">
+            <a:avLst/>
+          </a:prstGeom>
+          <a:noFill xmlns:a="http://schemas.openxmlformats.org/drawingml/2006/main"/>
+          <a:ln xmlns:a="http://schemas.openxmlformats.org/drawingml/2006/main" w="0">
+            <a:noFill/>
+            <a:prstDash val="solid"/>
+          </a:ln>
+        </p:spPr>
+        <p:txBody>
+          <a:bodyPr xmlns:a="http://schemas.openxmlformats.org/drawingml/2006/main" wrap="square" lIns="0" tIns="0" rIns="0" bIns="0" anchor="ctr">
+            <a:normAutofit fontScale="100000"/>
+          </a:bodyPr>
+          <a:lstStyle xmlns:a="http://schemas.openxmlformats.org/drawingml/2006/main"/>
+          <a:p xmlns:a="http://schemas.openxmlformats.org/drawingml/2006/main">
+            <a:pPr algn="ctr">
+              <a:defRPr sz="1088">
+                <a:solidFill>
+                  <a:srgbClr val="303030"/>
+                </a:solidFill>
+                <a:latin typeface="Arial"/>
+                <a:ea typeface="Arial"/>
+                <a:cs typeface="Arial"/>
+              </a:defRPr>
+            </a:pPr>
+            <a:r>
+              <a:rPr sz="1088">
+                <a:solidFill>
+                  <a:srgbClr val="303030"/>
+                </a:solidFill>
+                <a:latin typeface="Arial"/>
+                <a:ea typeface="Arial"/>
+                <a:cs typeface="Arial"/>
+              </a:rPr>
+              <a:t>emerging cost / schedule risks</a:t>
+            </a:r>
+          </a:p>
+        </p:txBody>
+      </p:sp>
+      <p:sp>
+        <p:nvSpPr>
+          <p:cNvPr id="15395" name="idea-promise-2-surface">
+            <a:extLst xmlns:a="http://schemas.openxmlformats.org/drawingml/2006/main">
+              <a:ext uri="{FF2B5EF4-FFF2-40B4-BE49-F238E27FC236}">
+                <a16:creationId xmlns:a16="http://schemas.microsoft.com/office/drawing/2014/main" id="{F1D860DF-54CD-4139-ADE4-E4142F0DC049}"/>
+              </a:ext>
+            </a:extLst>
+          </p:cNvPr>
+          <p:cNvSpPr>
+            <a:spLocks xmlns:a="http://schemas.openxmlformats.org/drawingml/2006/main" noGrp="1"/>
+          </p:cNvSpPr>
+          <p:nvPr/>
+        </p:nvSpPr>
+        <p:spPr>
+          <a:xfrm xmlns:a="http://schemas.openxmlformats.org/drawingml/2006/main">
+            <a:off x="3381375" y="4772025"/>
+            <a:ext cx="2543175" cy="552450"/>
+          </a:xfrm>
+          <a:prstGeom xmlns:a="http://schemas.openxmlformats.org/drawingml/2006/main" prst="rect">
+            <a:avLst/>
+          </a:prstGeom>
+          <a:solidFill xmlns:a="http://schemas.openxmlformats.org/drawingml/2006/main">
+            <a:srgbClr val="F4F7FA"/>
+          </a:solidFill>
+          <a:ln xmlns:a="http://schemas.openxmlformats.org/drawingml/2006/main" w="9525">
+            <a:solidFill>
+              <a:srgbClr val="C4D2DD"/>
+            </a:solidFill>
+            <a:prstDash val="solid"/>
+          </a:ln>
+        </p:spPr>
+      </p:sp>
+      <p:sp>
+        <p:nvSpPr>
+          <p:cNvPr id="15396" name="idea-promise-2-title">
+            <a:extLst xmlns:a="http://schemas.openxmlformats.org/drawingml/2006/main">
+              <a:ext uri="{FF2B5EF4-FFF2-40B4-BE49-F238E27FC236}">
+                <a16:creationId xmlns:a16="http://schemas.microsoft.com/office/drawing/2014/main" id="{FAA19200-F81D-457A-8AEA-00ABF7B1600F}"/>
+              </a:ext>
+            </a:extLst>
+          </p:cNvPr>
+          <p:cNvSpPr>
+            <a:spLocks xmlns:a="http://schemas.openxmlformats.org/drawingml/2006/main" noGrp="1"/>
+          </p:cNvSpPr>
+          <p:nvPr/>
+        </p:nvSpPr>
+        <p:spPr>
+          <a:xfrm xmlns:a="http://schemas.openxmlformats.org/drawingml/2006/main">
+            <a:off x="3457575" y="4838700"/>
+            <a:ext cx="2390775" cy="190500"/>
+          </a:xfrm>
+          <a:prstGeom xmlns:a="http://schemas.openxmlformats.org/drawingml/2006/main" prst="rect">
+            <a:avLst/>
+          </a:prstGeom>
+          <a:noFill xmlns:a="http://schemas.openxmlformats.org/drawingml/2006/main"/>
+          <a:ln xmlns:a="http://schemas.openxmlformats.org/drawingml/2006/main" w="0">
+            <a:noFill/>
+            <a:prstDash val="solid"/>
+          </a:ln>
+        </p:spPr>
+        <p:txBody>
+          <a:bodyPr xmlns:a="http://schemas.openxmlformats.org/drawingml/2006/main" wrap="square" lIns="0" tIns="0" rIns="0" bIns="0" anchor="t">
+            <a:normAutofit fontScale="100000"/>
+          </a:bodyPr>
+          <a:lstStyle xmlns:a="http://schemas.openxmlformats.org/drawingml/2006/main"/>
+          <a:p xmlns:a="http://schemas.openxmlformats.org/drawingml/2006/main">
+            <a:pPr algn="ctr">
+              <a:defRPr sz="1238" b="1">
+                <a:solidFill>
+                  <a:srgbClr val="1F497D"/>
+                </a:solidFill>
+                <a:latin typeface="Arial"/>
+                <a:ea typeface="Arial"/>
+                <a:cs typeface="Arial"/>
+              </a:defRPr>
+            </a:pPr>
+            <a:r>
+              <a:rPr sz="1238" b="1">
+                <a:solidFill>
+                  <a:srgbClr val="1F497D"/>
+                </a:solidFill>
+                <a:latin typeface="Arial"/>
+                <a:ea typeface="Arial"/>
+                <a:cs typeface="Arial"/>
+              </a:rPr>
+              <a:t>EXPLAIN</a:t>
+            </a:r>
+          </a:p>
+        </p:txBody>
+      </p:sp>
+      <p:sp>
+        <p:nvSpPr>
+          <p:cNvPr id="15397" name="idea-promise-2-detail">
+            <a:extLst xmlns:a="http://schemas.openxmlformats.org/drawingml/2006/main">
+              <a:ext uri="{FF2B5EF4-FFF2-40B4-BE49-F238E27FC236}">
+                <a16:creationId xmlns:a16="http://schemas.microsoft.com/office/drawing/2014/main" id="{7B72DA2B-220B-4C5B-AA3D-CD7DC8259680}"/>
+              </a:ext>
+            </a:extLst>
+          </p:cNvPr>
+          <p:cNvSpPr>
+            <a:spLocks xmlns:a="http://schemas.openxmlformats.org/drawingml/2006/main" noGrp="1"/>
+          </p:cNvSpPr>
+          <p:nvPr/>
+        </p:nvSpPr>
+        <p:spPr>
+          <a:xfrm xmlns:a="http://schemas.openxmlformats.org/drawingml/2006/main">
+            <a:off x="3457575" y="5048250"/>
+            <a:ext cx="2390775" cy="209550"/>
+          </a:xfrm>
+          <a:prstGeom xmlns:a="http://schemas.openxmlformats.org/drawingml/2006/main" prst="rect">
+            <a:avLst/>
+          </a:prstGeom>
+          <a:noFill xmlns:a="http://schemas.openxmlformats.org/drawingml/2006/main"/>
+          <a:ln xmlns:a="http://schemas.openxmlformats.org/drawingml/2006/main" w="0">
+            <a:noFill/>
+            <a:prstDash val="solid"/>
+          </a:ln>
+        </p:spPr>
+        <p:txBody>
+          <a:bodyPr xmlns:a="http://schemas.openxmlformats.org/drawingml/2006/main" wrap="square" lIns="0" tIns="0" rIns="0" bIns="0" anchor="ctr">
+            <a:normAutofit fontScale="100000"/>
+          </a:bodyPr>
+          <a:lstStyle xmlns:a="http://schemas.openxmlformats.org/drawingml/2006/main"/>
+          <a:p xmlns:a="http://schemas.openxmlformats.org/drawingml/2006/main">
+            <a:pPr algn="ctr">
+              <a:defRPr sz="1088">
+                <a:solidFill>
+                  <a:srgbClr val="303030"/>
+                </a:solidFill>
+                <a:latin typeface="Arial"/>
+                <a:ea typeface="Arial"/>
+                <a:cs typeface="Arial"/>
+              </a:defRPr>
+            </a:pPr>
+            <a:r>
+              <a:rPr sz="1088">
+                <a:solidFill>
+                  <a:srgbClr val="303030"/>
+                </a:solidFill>
+                <a:latin typeface="Arial"/>
+                <a:ea typeface="Arial"/>
+                <a:cs typeface="Arial"/>
+              </a:rPr>
+              <a:t>source, changed fields, drivers</a:t>
+            </a:r>
+          </a:p>
+        </p:txBody>
+      </p:sp>
+      <p:sp>
+        <p:nvSpPr>
+          <p:cNvPr id="15398" name="idea-promise-3-surface">
+            <a:extLst xmlns:a="http://schemas.openxmlformats.org/drawingml/2006/main">
+              <a:ext uri="{FF2B5EF4-FFF2-40B4-BE49-F238E27FC236}">
+                <a16:creationId xmlns:a16="http://schemas.microsoft.com/office/drawing/2014/main" id="{23D965DB-54CA-4E34-987C-CF1AC7BC5D39}"/>
+              </a:ext>
+            </a:extLst>
+          </p:cNvPr>
+          <p:cNvSpPr>
+            <a:spLocks xmlns:a="http://schemas.openxmlformats.org/drawingml/2006/main" noGrp="1"/>
+          </p:cNvSpPr>
+          <p:nvPr/>
+        </p:nvSpPr>
+        <p:spPr>
+          <a:xfrm xmlns:a="http://schemas.openxmlformats.org/drawingml/2006/main">
+            <a:off x="6153150" y="4772025"/>
+            <a:ext cx="2543175" cy="552450"/>
+          </a:xfrm>
+          <a:prstGeom xmlns:a="http://schemas.openxmlformats.org/drawingml/2006/main" prst="rect">
+            <a:avLst/>
+          </a:prstGeom>
+          <a:solidFill xmlns:a="http://schemas.openxmlformats.org/drawingml/2006/main">
+            <a:srgbClr val="F4F7FA"/>
+          </a:solidFill>
+          <a:ln xmlns:a="http://schemas.openxmlformats.org/drawingml/2006/main" w="9525">
+            <a:solidFill>
+              <a:srgbClr val="C4D2DD"/>
+            </a:solidFill>
+            <a:prstDash val="solid"/>
+          </a:ln>
+        </p:spPr>
+      </p:sp>
+      <p:sp>
+        <p:nvSpPr>
+          <p:cNvPr id="15399" name="idea-promise-3-title">
+            <a:extLst xmlns:a="http://schemas.openxmlformats.org/drawingml/2006/main">
+              <a:ext uri="{FF2B5EF4-FFF2-40B4-BE49-F238E27FC236}">
+                <a16:creationId xmlns:a16="http://schemas.microsoft.com/office/drawing/2014/main" id="{6D7AD5B4-04C1-409A-9982-DF72AFB44571}"/>
+              </a:ext>
+            </a:extLst>
+          </p:cNvPr>
+          <p:cNvSpPr>
+            <a:spLocks xmlns:a="http://schemas.openxmlformats.org/drawingml/2006/main" noGrp="1"/>
+          </p:cNvSpPr>
+          <p:nvPr/>
+        </p:nvSpPr>
+        <p:spPr>
+          <a:xfrm xmlns:a="http://schemas.openxmlformats.org/drawingml/2006/main">
+            <a:off x="6229350" y="4838700"/>
+            <a:ext cx="2390775" cy="190500"/>
+          </a:xfrm>
+          <a:prstGeom xmlns:a="http://schemas.openxmlformats.org/drawingml/2006/main" prst="rect">
+            <a:avLst/>
+          </a:prstGeom>
+          <a:noFill xmlns:a="http://schemas.openxmlformats.org/drawingml/2006/main"/>
+          <a:ln xmlns:a="http://schemas.openxmlformats.org/drawingml/2006/main" w="0">
+            <a:noFill/>
+            <a:prstDash val="solid"/>
+          </a:ln>
+        </p:spPr>
+        <p:txBody>
+          <a:bodyPr xmlns:a="http://schemas.openxmlformats.org/drawingml/2006/main" wrap="square" lIns="0" tIns="0" rIns="0" bIns="0" anchor="t">
+            <a:normAutofit fontScale="100000"/>
+          </a:bodyPr>
+          <a:lstStyle xmlns:a="http://schemas.openxmlformats.org/drawingml/2006/main"/>
+          <a:p xmlns:a="http://schemas.openxmlformats.org/drawingml/2006/main">
+            <a:pPr algn="ctr">
+              <a:defRPr sz="1238" b="1">
+                <a:solidFill>
+                  <a:srgbClr val="1F497D"/>
+                </a:solidFill>
+                <a:latin typeface="Arial"/>
+                <a:ea typeface="Arial"/>
+                <a:cs typeface="Arial"/>
+              </a:defRPr>
+            </a:pPr>
+            <a:r>
+              <a:rPr sz="1238" b="1">
+                <a:solidFill>
+                  <a:srgbClr val="1F497D"/>
+                </a:solidFill>
+                <a:latin typeface="Arial"/>
+                <a:ea typeface="Arial"/>
+                <a:cs typeface="Arial"/>
+              </a:rPr>
+              <a:t>HOLD</a:t>
+            </a:r>
+          </a:p>
+        </p:txBody>
+      </p:sp>
+      <p:sp>
+        <p:nvSpPr>
+          <p:cNvPr id="15400" name="idea-promise-3-detail">
+            <a:extLst xmlns:a="http://schemas.openxmlformats.org/drawingml/2006/main">
+              <a:ext uri="{FF2B5EF4-FFF2-40B4-BE49-F238E27FC236}">
+                <a16:creationId xmlns:a16="http://schemas.microsoft.com/office/drawing/2014/main" id="{A7F785EA-4F3E-4091-B531-62531BB81085}"/>
+              </a:ext>
+            </a:extLst>
+          </p:cNvPr>
+          <p:cNvSpPr>
+            <a:spLocks xmlns:a="http://schemas.openxmlformats.org/drawingml/2006/main" noGrp="1"/>
+          </p:cNvSpPr>
+          <p:nvPr/>
+        </p:nvSpPr>
+        <p:spPr>
+          <a:xfrm xmlns:a="http://schemas.openxmlformats.org/drawingml/2006/main">
+            <a:off x="6229350" y="5048250"/>
+            <a:ext cx="2390775" cy="209550"/>
+          </a:xfrm>
+          <a:prstGeom xmlns:a="http://schemas.openxmlformats.org/drawingml/2006/main" prst="rect">
+            <a:avLst/>
+          </a:prstGeom>
+          <a:noFill xmlns:a="http://schemas.openxmlformats.org/drawingml/2006/main"/>
+          <a:ln xmlns:a="http://schemas.openxmlformats.org/drawingml/2006/main" w="0">
+            <a:noFill/>
+            <a:prstDash val="solid"/>
+          </a:ln>
+        </p:spPr>
+        <p:txBody>
+          <a:bodyPr xmlns:a="http://schemas.openxmlformats.org/drawingml/2006/main" wrap="square" lIns="0" tIns="0" rIns="0" bIns="0" anchor="ctr">
+            <a:normAutofit fontScale="100000"/>
+          </a:bodyPr>
+          <a:lstStyle xmlns:a="http://schemas.openxmlformats.org/drawingml/2006/main"/>
+          <a:p xmlns:a="http://schemas.openxmlformats.org/drawingml/2006/main">
+            <a:pPr algn="ctr">
+              <a:defRPr sz="1088">
+                <a:solidFill>
+                  <a:srgbClr val="303030"/>
+                </a:solidFill>
+                <a:latin typeface="Arial"/>
+                <a:ea typeface="Arial"/>
+                <a:cs typeface="Arial"/>
+              </a:defRPr>
+            </a:pPr>
+            <a:r>
+              <a:rPr sz="1088">
+                <a:solidFill>
+                  <a:srgbClr val="303030"/>
+                </a:solidFill>
+                <a:latin typeface="Arial"/>
+                <a:ea typeface="Arial"/>
+                <a:cs typeface="Arial"/>
+              </a:rPr>
+              <a:t>questionable records for review</a:t>
+            </a:r>
+          </a:p>
+        </p:txBody>
+      </p:sp>
+      <p:sp>
+        <p:nvSpPr>
+          <p:cNvPr id="15401" name="idea-promise-4-surface">
+            <a:extLst xmlns:a="http://schemas.openxmlformats.org/drawingml/2006/main">
+              <a:ext uri="{FF2B5EF4-FFF2-40B4-BE49-F238E27FC236}">
+                <a16:creationId xmlns:a16="http://schemas.microsoft.com/office/drawing/2014/main" id="{8E9289DB-15B3-405E-9D8E-91B3E65138CB}"/>
+              </a:ext>
+            </a:extLst>
+          </p:cNvPr>
+          <p:cNvSpPr>
+            <a:spLocks xmlns:a="http://schemas.openxmlformats.org/drawingml/2006/main" noGrp="1"/>
+          </p:cNvSpPr>
+          <p:nvPr/>
+        </p:nvSpPr>
+        <p:spPr>
+          <a:xfrm xmlns:a="http://schemas.openxmlformats.org/drawingml/2006/main">
+            <a:off x="8924925" y="4772025"/>
+            <a:ext cx="2543175" cy="552450"/>
+          </a:xfrm>
+          <a:prstGeom xmlns:a="http://schemas.openxmlformats.org/drawingml/2006/main" prst="rect">
+            <a:avLst/>
+          </a:prstGeom>
+          <a:solidFill xmlns:a="http://schemas.openxmlformats.org/drawingml/2006/main">
+            <a:srgbClr val="F4F7FA"/>
+          </a:solidFill>
+          <a:ln xmlns:a="http://schemas.openxmlformats.org/drawingml/2006/main" w="9525">
+            <a:solidFill>
+              <a:srgbClr val="C4D2DD"/>
+            </a:solidFill>
+            <a:prstDash val="solid"/>
+          </a:ln>
+        </p:spPr>
+      </p:sp>
+      <p:sp>
+        <p:nvSpPr>
+          <p:cNvPr id="15402" name="idea-promise-4-title">
+            <a:extLst xmlns:a="http://schemas.openxmlformats.org/drawingml/2006/main">
+              <a:ext uri="{FF2B5EF4-FFF2-40B4-BE49-F238E27FC236}">
+                <a16:creationId xmlns:a16="http://schemas.microsoft.com/office/drawing/2014/main" id="{4DA5E1D4-3B16-47D1-85BF-87E459E4FC45}"/>
+              </a:ext>
+            </a:extLst>
+          </p:cNvPr>
+          <p:cNvSpPr>
+            <a:spLocks xmlns:a="http://schemas.openxmlformats.org/drawingml/2006/main" noGrp="1"/>
+          </p:cNvSpPr>
+          <p:nvPr/>
+        </p:nvSpPr>
+        <p:spPr>
+          <a:xfrm xmlns:a="http://schemas.openxmlformats.org/drawingml/2006/main">
+            <a:off x="9001125" y="4838700"/>
+            <a:ext cx="2390775" cy="190500"/>
+          </a:xfrm>
+          <a:prstGeom xmlns:a="http://schemas.openxmlformats.org/drawingml/2006/main" prst="rect">
+            <a:avLst/>
+          </a:prstGeom>
+          <a:noFill xmlns:a="http://schemas.openxmlformats.org/drawingml/2006/main"/>
+          <a:ln xmlns:a="http://schemas.openxmlformats.org/drawingml/2006/main" w="0">
+            <a:noFill/>
+            <a:prstDash val="solid"/>
+          </a:ln>
+        </p:spPr>
+        <p:txBody>
+          <a:bodyPr xmlns:a="http://schemas.openxmlformats.org/drawingml/2006/main" wrap="square" lIns="0" tIns="0" rIns="0" bIns="0" anchor="t">
+            <a:normAutofit fontScale="100000"/>
+          </a:bodyPr>
+          <a:lstStyle xmlns:a="http://schemas.openxmlformats.org/drawingml/2006/main"/>
+          <a:p xmlns:a="http://schemas.openxmlformats.org/drawingml/2006/main">
+            <a:pPr algn="ctr">
+              <a:defRPr sz="1238" b="1">
+                <a:solidFill>
+                  <a:srgbClr val="1F497D"/>
+                </a:solidFill>
+                <a:latin typeface="Arial"/>
+                <a:ea typeface="Arial"/>
+                <a:cs typeface="Arial"/>
+              </a:defRPr>
+            </a:pPr>
+            <a:r>
+              <a:rPr sz="1238" b="1">
+                <a:solidFill>
+                  <a:srgbClr val="1F497D"/>
+                </a:solidFill>
+                <a:latin typeface="Arial"/>
+                <a:ea typeface="Arial"/>
+                <a:cs typeface="Arial"/>
+              </a:rPr>
+              <a:t>MEASURE</a:t>
+            </a:r>
+          </a:p>
+        </p:txBody>
+      </p:sp>
+      <p:sp>
+        <p:nvSpPr>
+          <p:cNvPr id="15403" name="idea-promise-4-detail">
+            <a:extLst xmlns:a="http://schemas.openxmlformats.org/drawingml/2006/main">
+              <a:ext uri="{FF2B5EF4-FFF2-40B4-BE49-F238E27FC236}">
+                <a16:creationId xmlns:a16="http://schemas.microsoft.com/office/drawing/2014/main" id="{B0EF6943-99F3-4CB2-977B-A33CD20304C9}"/>
+              </a:ext>
+            </a:extLst>
+          </p:cNvPr>
+          <p:cNvSpPr>
+            <a:spLocks xmlns:a="http://schemas.openxmlformats.org/drawingml/2006/main" noGrp="1"/>
+          </p:cNvSpPr>
+          <p:nvPr/>
+        </p:nvSpPr>
+        <p:spPr>
+          <a:xfrm xmlns:a="http://schemas.openxmlformats.org/drawingml/2006/main">
+            <a:off x="9001125" y="5048250"/>
+            <a:ext cx="2390775" cy="209550"/>
+          </a:xfrm>
+          <a:prstGeom xmlns:a="http://schemas.openxmlformats.org/drawingml/2006/main" prst="rect">
+            <a:avLst/>
+          </a:prstGeom>
+          <a:noFill xmlns:a="http://schemas.openxmlformats.org/drawingml/2006/main"/>
+          <a:ln xmlns:a="http://schemas.openxmlformats.org/drawingml/2006/main" w="0">
+            <a:noFill/>
+            <a:prstDash val="solid"/>
+          </a:ln>
+        </p:spPr>
+        <p:txBody>
+          <a:bodyPr xmlns:a="http://schemas.openxmlformats.org/drawingml/2006/main" wrap="square" lIns="0" tIns="0" rIns="0" bIns="0" anchor="ctr">
+            <a:normAutofit fontScale="100000"/>
+          </a:bodyPr>
+          <a:lstStyle xmlns:a="http://schemas.openxmlformats.org/drawingml/2006/main"/>
+          <a:p xmlns:a="http://schemas.openxmlformats.org/drawingml/2006/main">
+            <a:pPr algn="ctr">
+              <a:defRPr sz="1088">
+                <a:solidFill>
+                  <a:srgbClr val="303030"/>
+                </a:solidFill>
+                <a:latin typeface="Arial"/>
+                <a:ea typeface="Arial"/>
+                <a:cs typeface="Arial"/>
+              </a:defRPr>
+            </a:pPr>
+            <a:r>
+              <a:rPr sz="1088">
+                <a:solidFill>
+                  <a:srgbClr val="303030"/>
+                </a:solidFill>
+                <a:latin typeface="Arial"/>
+                <a:ea typeface="Arial"/>
+                <a:cs typeface="Arial"/>
+              </a:rPr>
+              <a:t>precision@K + warning lead time</a:t>
+            </a:r>
+          </a:p>
+        </p:txBody>
+      </p:sp>
+      <p:sp>
+        <p:nvSpPr>
+          <p:cNvPr id="15404" name="idea-prototype-proof">
+            <a:extLst xmlns:a="http://schemas.openxmlformats.org/drawingml/2006/main">
+              <a:ext uri="{FF2B5EF4-FFF2-40B4-BE49-F238E27FC236}">
+                <a16:creationId xmlns:a16="http://schemas.microsoft.com/office/drawing/2014/main" id="{051A0BC8-249A-45D9-8B39-4EDD79A097F3}"/>
+              </a:ext>
+            </a:extLst>
+          </p:cNvPr>
+          <p:cNvSpPr>
+            <a:spLocks xmlns:a="http://schemas.openxmlformats.org/drawingml/2006/main" noGrp="1"/>
+          </p:cNvSpPr>
+          <p:nvPr/>
+        </p:nvSpPr>
+        <p:spPr>
+          <a:xfrm xmlns:a="http://schemas.openxmlformats.org/drawingml/2006/main">
+            <a:off x="609600" y="5438775"/>
+            <a:ext cx="10972800" cy="266700"/>
+          </a:xfrm>
+          <a:prstGeom xmlns:a="http://schemas.openxmlformats.org/drawingml/2006/main" prst="rect">
+            <a:avLst/>
+          </a:prstGeom>
+          <a:noFill xmlns:a="http://schemas.openxmlformats.org/drawingml/2006/main"/>
+          <a:ln xmlns:a="http://schemas.openxmlformats.org/drawingml/2006/main" w="0">
+            <a:noFill/>
+            <a:prstDash val="solid"/>
+          </a:ln>
+        </p:spPr>
+        <p:txBody>
+          <a:bodyPr xmlns:a="http://schemas.openxmlformats.org/drawingml/2006/main" wrap="square" lIns="0" tIns="0" rIns="0" bIns="0" anchor="t">
+            <a:normAutofit fontScale="100000"/>
+          </a:bodyPr>
+          <a:lstStyle xmlns:a="http://schemas.openxmlformats.org/drawingml/2006/main"/>
+          <a:p xmlns:a="http://schemas.openxmlformats.org/drawingml/2006/main">
+            <a:pPr algn="l">
+              <a:defRPr sz="1163">
+                <a:solidFill>
+                  <a:srgbClr val="303030"/>
+                </a:solidFill>
+                <a:latin typeface="Arial"/>
+                <a:ea typeface="Arial"/>
+                <a:cs typeface="Arial"/>
+              </a:defRPr>
+            </a:pPr>
+            <a:r>
+              <a:rPr sz="1163">
+                <a:solidFill>
+                  <a:srgbClr val="303030"/>
+                </a:solidFill>
+                <a:latin typeface="Arial"/>
+                <a:ea typeface="Arial"/>
+                <a:cs typeface="Arial"/>
+              </a:rPr>
+              <a:t>WORKING NOW  •  17 report months, source/page references, quality status and a transparent score  |  NEXT  •  connect the gate to the analyst queue</a:t>
+            </a:r>
+          </a:p>
+        </p:txBody>
+      </p:sp>
+      <p:sp>
+        <p:nvSpPr>
+          <p:cNvPr id="15405" name="idea-tech-stack">
+            <a:extLst xmlns:a="http://schemas.openxmlformats.org/drawingml/2006/main">
+              <a:ext uri="{FF2B5EF4-FFF2-40B4-BE49-F238E27FC236}">
+                <a16:creationId xmlns:a16="http://schemas.microsoft.com/office/drawing/2014/main" id="{07A854C0-5F26-4E87-BBE1-D5BCDE58662F}"/>
+              </a:ext>
+            </a:extLst>
+          </p:cNvPr>
+          <p:cNvSpPr>
+            <a:spLocks xmlns:a="http://schemas.openxmlformats.org/drawingml/2006/main" noGrp="1"/>
+          </p:cNvSpPr>
+          <p:nvPr/>
+        </p:nvSpPr>
+        <p:spPr>
+          <a:xfrm xmlns:a="http://schemas.openxmlformats.org/drawingml/2006/main">
+            <a:off x="609600" y="5829300"/>
+            <a:ext cx="10972800" cy="228600"/>
+          </a:xfrm>
+          <a:prstGeom xmlns:a="http://schemas.openxmlformats.org/drawingml/2006/main" prst="rect">
+            <a:avLst/>
+          </a:prstGeom>
+          <a:noFill xmlns:a="http://schemas.openxmlformats.org/drawingml/2006/main"/>
+          <a:ln xmlns:a="http://schemas.openxmlformats.org/drawingml/2006/main" w="0">
+            <a:noFill/>
+            <a:prstDash val="solid"/>
+          </a:ln>
+        </p:spPr>
+        <p:txBody>
+          <a:bodyPr xmlns:a="http://schemas.openxmlformats.org/drawingml/2006/main" wrap="square" lIns="0" tIns="0" rIns="0" bIns="0" anchor="t">
+            <a:normAutofit fontScale="100000"/>
+          </a:bodyPr>
+          <a:lstStyle xmlns:a="http://schemas.openxmlformats.org/drawingml/2006/main"/>
+          <a:p xmlns:a="http://schemas.openxmlformats.org/drawingml/2006/main">
+            <a:pPr algn="l">
+              <a:defRPr sz="1238" b="1">
+                <a:solidFill>
+                  <a:srgbClr val="1F497D"/>
+                </a:solidFill>
+                <a:latin typeface="Arial"/>
+                <a:ea typeface="Arial"/>
+                <a:cs typeface="Arial"/>
+              </a:defRPr>
+            </a:pPr>
+            <a:r>
+              <a:rPr sz="1238" b="1">
+                <a:solidFill>
+                  <a:srgbClr val="1F497D"/>
+                </a:solidFill>
+                <a:latin typeface="Arial"/>
+                <a:ea typeface="Arial"/>
+                <a:cs typeface="Arial"/>
+              </a:rPr>
+              <a:t>OPEN STACK  •  pdfplumber + pandas  •  scikit-learn  •  Next.js</a:t>
             </a:r>
           </a:p>
         </p:txBody>
@@ -6881,7 +8405,7 @@
     </p:spTree>
     <p:extLst>
       <p:ext uri="{BB962C8B-B14F-4D97-AF65-F5344CB8AC3E}">
-        <p14:creationId xmlns:p14="http://schemas.microsoft.com/office/powerpoint/2010/main" val="1285673339"/>
+        <p14:creationId xmlns:p14="http://schemas.microsoft.com/office/powerpoint/2010/main" val="2116157212"/>
       </p:ext>
     </p:extLst>
   </p:cSld>
@@ -6968,7 +8492,7 @@
           <p:cNvPr id="17409" name="Title 1">
             <a:extLst xmlns:a="http://schemas.openxmlformats.org/drawingml/2006/main">
               <a:ext uri="{FF2B5EF4-FFF2-40B4-BE49-F238E27FC236}">
-                <a16:creationId xmlns:a16="http://schemas.microsoft.com/office/drawing/2014/main" id="{09C826E5-56B3-4191-BD16-CF958F8A7B9D}"/>
+                <a16:creationId xmlns:a16="http://schemas.microsoft.com/office/drawing/2014/main" id="{8E62D608-BE94-45AE-9FF2-8C5E4F6C6EC5}"/>
               </a:ext>
             </a:extLst>
           </p:cNvPr>
@@ -7003,7 +8527,7 @@
           <p:cNvPr id="17410" name="TextBox 8">
             <a:extLst xmlns:a="http://schemas.openxmlformats.org/drawingml/2006/main">
               <a:ext uri="{FF2B5EF4-FFF2-40B4-BE49-F238E27FC236}">
-                <a16:creationId xmlns:a16="http://schemas.microsoft.com/office/drawing/2014/main" id="{C4A36F69-2591-4497-92CC-AECBB15F9A8E}"/>
+                <a16:creationId xmlns:a16="http://schemas.microsoft.com/office/drawing/2014/main" id="{A767B383-5F26-4FED-8D39-26B1E8F90332}"/>
               </a:ext>
             </a:extLst>
           </p:cNvPr>
@@ -7052,7 +8576,7 @@
           <p:cNvPr id="6" name="Slide Number Placeholder 5">
             <a:extLst xmlns:a="http://schemas.openxmlformats.org/drawingml/2006/main">
               <a:ext uri="{FF2B5EF4-FFF2-40B4-BE49-F238E27FC236}">
-                <a16:creationId xmlns:a16="http://schemas.microsoft.com/office/drawing/2014/main" id="{3ADB83B8-AD59-4796-9E37-3846AE04980C}"/>
+                <a16:creationId xmlns:a16="http://schemas.microsoft.com/office/drawing/2014/main" id="{B267ECDD-2BBE-4BB8-893A-969AD2A89CB3}"/>
               </a:ext>
             </a:extLst>
           </p:cNvPr>
@@ -7089,7 +8613,7 @@
           <p:cNvPr id="7" name="Footer Placeholder 6">
             <a:extLst xmlns:a="http://schemas.openxmlformats.org/drawingml/2006/main">
               <a:ext uri="{FF2B5EF4-FFF2-40B4-BE49-F238E27FC236}">
-                <a16:creationId xmlns:a16="http://schemas.microsoft.com/office/drawing/2014/main" id="{1D2663FB-CB9E-4D44-A9C2-FA2874008AC5}"/>
+                <a16:creationId xmlns:a16="http://schemas.microsoft.com/office/drawing/2014/main" id="{75BACECE-7F88-4704-A649-A5AFF26BAE65}"/>
               </a:ext>
             </a:extLst>
           </p:cNvPr>
@@ -7192,7 +8716,7 @@
                 <a:ea typeface="Arial"/>
                 <a:cs typeface="Arial"/>
               </a:rPr>
-              <a:t>[TEAM]</a:t>
+              <a:t>PARAKH</a:t>
             </a:r>
             <a:endParaRPr/>
           </a:p>
@@ -7200,14 +8724,14 @@
       </p:sp>
       <p:pic>
         <p:nvPicPr>
-          <p:cNvPr id="17447" name="Picture 11"/>
+          <p:cNvPr id="17448" name="Picture 11"/>
           <p:cNvPicPr>
             <a:picLocks xmlns:a="http://schemas.openxmlformats.org/drawingml/2006/main" noChangeAspect="1"/>
           </p:cNvPicPr>
           <p:nvPr/>
         </p:nvPicPr>
         <p:blipFill>
-          <a:blip xmlns:r="http://schemas.openxmlformats.org/officeDocument/2006/relationships" xmlns:a="http://schemas.openxmlformats.org/drawingml/2006/main" r:embed="Rd6d2244cd7dc4628"/>
+          <a:blip xmlns:r="http://schemas.openxmlformats.org/officeDocument/2006/relationships" xmlns:a="http://schemas.openxmlformats.org/drawingml/2006/main" r:embed="R35ed212a493a4b21"/>
           <a:stretch xmlns:a="http://schemas.openxmlformats.org/drawingml/2006/main">
             <a:fillRect l="0" t="0" r="0" b="0"/>
           </a:stretch>
@@ -7224,22 +8748,80 @@
       </p:pic>
       <p:sp>
         <p:nvSpPr>
-          <p:cNvPr id="17412" name="flow-reports-surface">
-            <a:extLst xmlns:a="http://schemas.openxmlformats.org/drawingml/2006/main">
-              <a:ext uri="{FF2B5EF4-FFF2-40B4-BE49-F238E27FC236}">
-                <a16:creationId xmlns:a16="http://schemas.microsoft.com/office/drawing/2014/main" id="{5CE2F243-33F3-4BF3-84F7-449DB790D510}"/>
-              </a:ext>
-            </a:extLst>
-          </p:cNvPr>
-          <p:cNvSpPr>
-            <a:spLocks xmlns:a="http://schemas.openxmlformats.org/drawingml/2006/main" noGrp="1"/>
-          </p:cNvSpPr>
-          <p:nvPr/>
-        </p:nvSpPr>
-        <p:spPr>
-          <a:xfrm xmlns:a="http://schemas.openxmlformats.org/drawingml/2006/main">
-            <a:off x="666750" y="1381125"/>
-            <a:ext cx="1943100" cy="1000125"/>
+          <p:cNvPr id="17412" name="technical-scope">
+            <a:extLst xmlns:a="http://schemas.openxmlformats.org/drawingml/2006/main">
+              <a:ext uri="{FF2B5EF4-FFF2-40B4-BE49-F238E27FC236}">
+                <a16:creationId xmlns:a16="http://schemas.microsoft.com/office/drawing/2014/main" id="{1CAA23D7-DC2F-4824-B255-DC0D3DAE80D4}"/>
+              </a:ext>
+            </a:extLst>
+          </p:cNvPr>
+          <p:cNvSpPr>
+            <a:spLocks xmlns:a="http://schemas.openxmlformats.org/drawingml/2006/main" noGrp="1"/>
+          </p:cNvSpPr>
+          <p:nvPr/>
+        </p:nvSpPr>
+        <p:spPr>
+          <a:xfrm xmlns:a="http://schemas.openxmlformats.org/drawingml/2006/main">
+            <a:off x="609600" y="1200150"/>
+            <a:ext cx="10972800" cy="228600"/>
+          </a:xfrm>
+          <a:prstGeom xmlns:a="http://schemas.openxmlformats.org/drawingml/2006/main" prst="rect">
+            <a:avLst/>
+          </a:prstGeom>
+          <a:noFill xmlns:a="http://schemas.openxmlformats.org/drawingml/2006/main"/>
+          <a:ln xmlns:a="http://schemas.openxmlformats.org/drawingml/2006/main" w="0">
+            <a:noFill/>
+            <a:prstDash val="solid"/>
+          </a:ln>
+        </p:spPr>
+        <p:txBody>
+          <a:bodyPr xmlns:a="http://schemas.openxmlformats.org/drawingml/2006/main" wrap="square" lIns="0" tIns="0" rIns="0" bIns="0" anchor="t">
+            <a:normAutofit fontScale="100000"/>
+          </a:bodyPr>
+          <a:lstStyle xmlns:a="http://schemas.openxmlformats.org/drawingml/2006/main"/>
+          <a:p xmlns:a="http://schemas.openxmlformats.org/drawingml/2006/main">
+            <a:pPr algn="l">
+              <a:defRPr sz="1238" b="1">
+                <a:solidFill>
+                  <a:srgbClr val="1F497D"/>
+                </a:solidFill>
+                <a:latin typeface="Arial"/>
+                <a:ea typeface="Arial"/>
+                <a:cs typeface="Arial"/>
+              </a:defRPr>
+            </a:pPr>
+            <a:r>
+              <a:rPr sz="1238" b="1">
+                <a:solidFill>
+                  <a:srgbClr val="1F497D"/>
+                </a:solidFill>
+                <a:latin typeface="Arial"/>
+                <a:ea typeface="Arial"/>
+                <a:cs typeface="Arial"/>
+              </a:rPr>
+              <a:t>CURRENT PANEL  •  17 reports (Mar 2025–Jul 2026)  •  25,116 project-month rows  •  3,950 project histories</a:t>
+            </a:r>
+          </a:p>
+        </p:txBody>
+      </p:sp>
+      <p:sp>
+        <p:nvSpPr>
+          <p:cNvPr id="17413" name="tech-reports-surface">
+            <a:extLst xmlns:a="http://schemas.openxmlformats.org/drawingml/2006/main">
+              <a:ext uri="{FF2B5EF4-FFF2-40B4-BE49-F238E27FC236}">
+                <a16:creationId xmlns:a16="http://schemas.microsoft.com/office/drawing/2014/main" id="{20C902F9-7C56-4555-B79B-65C68DAFF82A}"/>
+              </a:ext>
+            </a:extLst>
+          </p:cNvPr>
+          <p:cNvSpPr>
+            <a:spLocks xmlns:a="http://schemas.openxmlformats.org/drawingml/2006/main" noGrp="1"/>
+          </p:cNvSpPr>
+          <p:nvPr/>
+        </p:nvSpPr>
+        <p:spPr>
+          <a:xfrm xmlns:a="http://schemas.openxmlformats.org/drawingml/2006/main">
+            <a:off x="609600" y="1533525"/>
+            <a:ext cx="1885950" cy="781050"/>
           </a:xfrm>
           <a:prstGeom xmlns:a="http://schemas.openxmlformats.org/drawingml/2006/main" prst="rect">
             <a:avLst/>
@@ -7257,22 +8839,22 @@
       </p:sp>
       <p:sp>
         <p:nvSpPr>
-          <p:cNvPr id="17413" name="flow-reports-heading">
-            <a:extLst xmlns:a="http://schemas.openxmlformats.org/drawingml/2006/main">
-              <a:ext uri="{FF2B5EF4-FFF2-40B4-BE49-F238E27FC236}">
-                <a16:creationId xmlns:a16="http://schemas.microsoft.com/office/drawing/2014/main" id="{65AE45E7-F28F-4447-B2AB-FC5B508C304C}"/>
-              </a:ext>
-            </a:extLst>
-          </p:cNvPr>
-          <p:cNvSpPr>
-            <a:spLocks xmlns:a="http://schemas.openxmlformats.org/drawingml/2006/main" noGrp="1"/>
-          </p:cNvSpPr>
-          <p:nvPr/>
-        </p:nvSpPr>
-        <p:spPr>
-          <a:xfrm xmlns:a="http://schemas.openxmlformats.org/drawingml/2006/main">
-            <a:off x="752475" y="1495425"/>
-            <a:ext cx="1771650" cy="238125"/>
+          <p:cNvPr id="17414" name="tech-reports-title">
+            <a:extLst xmlns:a="http://schemas.openxmlformats.org/drawingml/2006/main">
+              <a:ext uri="{FF2B5EF4-FFF2-40B4-BE49-F238E27FC236}">
+                <a16:creationId xmlns:a16="http://schemas.microsoft.com/office/drawing/2014/main" id="{6C9B458A-FD46-4EBD-A935-33738606A667}"/>
+              </a:ext>
+            </a:extLst>
+          </p:cNvPr>
+          <p:cNvSpPr>
+            <a:spLocks xmlns:a="http://schemas.openxmlformats.org/drawingml/2006/main" noGrp="1"/>
+          </p:cNvSpPr>
+          <p:nvPr/>
+        </p:nvSpPr>
+        <p:spPr>
+          <a:xfrm xmlns:a="http://schemas.openxmlformats.org/drawingml/2006/main">
+            <a:off x="685800" y="1628775"/>
+            <a:ext cx="1733550" cy="228600"/>
           </a:xfrm>
           <a:prstGeom xmlns:a="http://schemas.openxmlformats.org/drawingml/2006/main" prst="rect">
             <a:avLst/>
@@ -7290,7 +8872,7 @@
           <a:lstStyle xmlns:a="http://schemas.openxmlformats.org/drawingml/2006/main"/>
           <a:p xmlns:a="http://schemas.openxmlformats.org/drawingml/2006/main">
             <a:pPr algn="ctr">
-              <a:defRPr sz="1425" b="1">
+              <a:defRPr sz="1275" b="1">
                 <a:solidFill>
                   <a:srgbClr val="1F497D"/>
                 </a:solidFill>
@@ -7300,7 +8882,7 @@
               </a:defRPr>
             </a:pPr>
             <a:r>
-              <a:rPr sz="1425" b="1">
+              <a:rPr sz="1275" b="1">
                 <a:solidFill>
                   <a:srgbClr val="1F497D"/>
                 </a:solidFill>
@@ -7308,29 +8890,29 @@
                 <a:ea typeface="Arial"/>
                 <a:cs typeface="Arial"/>
               </a:rPr>
-              <a:t>PAIMANA REPORTS</a:t>
-            </a:r>
-          </a:p>
-        </p:txBody>
-      </p:sp>
-      <p:sp>
-        <p:nvSpPr>
-          <p:cNvPr id="17414" name="flow-reports-detail">
-            <a:extLst xmlns:a="http://schemas.openxmlformats.org/drawingml/2006/main">
-              <a:ext uri="{FF2B5EF4-FFF2-40B4-BE49-F238E27FC236}">
-                <a16:creationId xmlns:a16="http://schemas.microsoft.com/office/drawing/2014/main" id="{AE9CF82C-1EC2-4A0D-B1A6-36F88DC8CDB4}"/>
-              </a:ext>
-            </a:extLst>
-          </p:cNvPr>
-          <p:cNvSpPr>
-            <a:spLocks xmlns:a="http://schemas.openxmlformats.org/drawingml/2006/main" noGrp="1"/>
-          </p:cNvSpPr>
-          <p:nvPr/>
-        </p:nvSpPr>
-        <p:spPr>
-          <a:xfrm xmlns:a="http://schemas.openxmlformats.org/drawingml/2006/main">
-            <a:off x="752475" y="1781175"/>
-            <a:ext cx="1771650" cy="504825"/>
+              <a:t>1  REPORTS</a:t>
+            </a:r>
+          </a:p>
+        </p:txBody>
+      </p:sp>
+      <p:sp>
+        <p:nvSpPr>
+          <p:cNvPr id="17415" name="tech-reports-detail">
+            <a:extLst xmlns:a="http://schemas.openxmlformats.org/drawingml/2006/main">
+              <a:ext uri="{FF2B5EF4-FFF2-40B4-BE49-F238E27FC236}">
+                <a16:creationId xmlns:a16="http://schemas.microsoft.com/office/drawing/2014/main" id="{EE755022-911C-4891-A931-C3E31ED879C8}"/>
+              </a:ext>
+            </a:extLst>
+          </p:cNvPr>
+          <p:cNvSpPr>
+            <a:spLocks xmlns:a="http://schemas.openxmlformats.org/drawingml/2006/main" noGrp="1"/>
+          </p:cNvSpPr>
+          <p:nvPr/>
+        </p:nvSpPr>
+        <p:spPr>
+          <a:xfrm xmlns:a="http://schemas.openxmlformats.org/drawingml/2006/main">
+            <a:off x="685800" y="1885950"/>
+            <a:ext cx="1733550" cy="361950"/>
           </a:xfrm>
           <a:prstGeom xmlns:a="http://schemas.openxmlformats.org/drawingml/2006/main" prst="rect">
             <a:avLst/>
@@ -7348,7 +8930,7 @@
           <a:lstStyle xmlns:a="http://schemas.openxmlformats.org/drawingml/2006/main"/>
           <a:p xmlns:a="http://schemas.openxmlformats.org/drawingml/2006/main">
             <a:pPr algn="ctr">
-              <a:defRPr sz="1313">
+              <a:defRPr sz="1163">
                 <a:solidFill>
                   <a:srgbClr val="252525"/>
                 </a:solidFill>
@@ -7358,7 +8940,7 @@
               </a:defRPr>
             </a:pPr>
             <a:r>
-              <a:rPr sz="1313">
+              <a:rPr sz="1163">
                 <a:solidFill>
                   <a:srgbClr val="252525"/>
                 </a:solidFill>
@@ -7366,12 +8948,12 @@
                 <a:ea typeface="Arial"/>
                 <a:cs typeface="Arial"/>
               </a:rPr>
-              <a:t>4 monthly PDFs</a:t>
+              <a:t>OCMS + PAIMANA</a:t>
             </a:r>
           </a:p>
           <a:p xmlns:a="http://schemas.openxmlformats.org/drawingml/2006/main">
             <a:pPr algn="ctr">
-              <a:defRPr sz="1313">
+              <a:defRPr sz="1163">
                 <a:solidFill>
                   <a:srgbClr val="252525"/>
                 </a:solidFill>
@@ -7381,7 +8963,7 @@
               </a:defRPr>
             </a:pPr>
             <a:r>
-              <a:rPr sz="1313">
+              <a:rPr sz="1163">
                 <a:solidFill>
                   <a:srgbClr val="252525"/>
                 </a:solidFill>
@@ -7389,29 +8971,29 @@
                 <a:ea typeface="Arial"/>
                 <a:cs typeface="Arial"/>
               </a:rPr>
-              <a:t>Apr–Jul 2026</a:t>
-            </a:r>
-          </a:p>
-        </p:txBody>
-      </p:sp>
-      <p:sp>
-        <p:nvSpPr>
-          <p:cNvPr id="17415" name="flow-extract-surface">
-            <a:extLst xmlns:a="http://schemas.openxmlformats.org/drawingml/2006/main">
-              <a:ext uri="{FF2B5EF4-FFF2-40B4-BE49-F238E27FC236}">
-                <a16:creationId xmlns:a16="http://schemas.microsoft.com/office/drawing/2014/main" id="{CF965453-1D2D-48D7-A5F7-A8CB323D899E}"/>
-              </a:ext>
-            </a:extLst>
-          </p:cNvPr>
-          <p:cNvSpPr>
-            <a:spLocks xmlns:a="http://schemas.openxmlformats.org/drawingml/2006/main" noGrp="1"/>
-          </p:cNvSpPr>
-          <p:nvPr/>
-        </p:nvSpPr>
-        <p:spPr>
-          <a:xfrm xmlns:a="http://schemas.openxmlformats.org/drawingml/2006/main">
-            <a:off x="2895600" y="1381125"/>
-            <a:ext cx="1943100" cy="1000125"/>
+              <a:t>monthly PDFs</a:t>
+            </a:r>
+          </a:p>
+        </p:txBody>
+      </p:sp>
+      <p:sp>
+        <p:nvSpPr>
+          <p:cNvPr id="17416" name="tech-extract-surface">
+            <a:extLst xmlns:a="http://schemas.openxmlformats.org/drawingml/2006/main">
+              <a:ext uri="{FF2B5EF4-FFF2-40B4-BE49-F238E27FC236}">
+                <a16:creationId xmlns:a16="http://schemas.microsoft.com/office/drawing/2014/main" id="{F23AFAF8-BC9F-4ACE-A229-72502525CA7D}"/>
+              </a:ext>
+            </a:extLst>
+          </p:cNvPr>
+          <p:cNvSpPr>
+            <a:spLocks xmlns:a="http://schemas.openxmlformats.org/drawingml/2006/main" noGrp="1"/>
+          </p:cNvSpPr>
+          <p:nvPr/>
+        </p:nvSpPr>
+        <p:spPr>
+          <a:xfrm xmlns:a="http://schemas.openxmlformats.org/drawingml/2006/main">
+            <a:off x="2867025" y="1533525"/>
+            <a:ext cx="1885950" cy="781050"/>
           </a:xfrm>
           <a:prstGeom xmlns:a="http://schemas.openxmlformats.org/drawingml/2006/main" prst="rect">
             <a:avLst/>
@@ -7429,22 +9011,22 @@
       </p:sp>
       <p:sp>
         <p:nvSpPr>
-          <p:cNvPr id="17416" name="flow-extract-heading">
-            <a:extLst xmlns:a="http://schemas.openxmlformats.org/drawingml/2006/main">
-              <a:ext uri="{FF2B5EF4-FFF2-40B4-BE49-F238E27FC236}">
-                <a16:creationId xmlns:a16="http://schemas.microsoft.com/office/drawing/2014/main" id="{29631BFD-91C5-48AD-A050-6B49661D0650}"/>
-              </a:ext>
-            </a:extLst>
-          </p:cNvPr>
-          <p:cNvSpPr>
-            <a:spLocks xmlns:a="http://schemas.openxmlformats.org/drawingml/2006/main" noGrp="1"/>
-          </p:cNvSpPr>
-          <p:nvPr/>
-        </p:nvSpPr>
-        <p:spPr>
-          <a:xfrm xmlns:a="http://schemas.openxmlformats.org/drawingml/2006/main">
-            <a:off x="2981325" y="1495425"/>
-            <a:ext cx="1771650" cy="238125"/>
+          <p:cNvPr id="17417" name="tech-extract-title">
+            <a:extLst xmlns:a="http://schemas.openxmlformats.org/drawingml/2006/main">
+              <a:ext uri="{FF2B5EF4-FFF2-40B4-BE49-F238E27FC236}">
+                <a16:creationId xmlns:a16="http://schemas.microsoft.com/office/drawing/2014/main" id="{086BBD49-8C73-40D9-BA6E-035141E7BEE7}"/>
+              </a:ext>
+            </a:extLst>
+          </p:cNvPr>
+          <p:cNvSpPr>
+            <a:spLocks xmlns:a="http://schemas.openxmlformats.org/drawingml/2006/main" noGrp="1"/>
+          </p:cNvSpPr>
+          <p:nvPr/>
+        </p:nvSpPr>
+        <p:spPr>
+          <a:xfrm xmlns:a="http://schemas.openxmlformats.org/drawingml/2006/main">
+            <a:off x="2943225" y="1628775"/>
+            <a:ext cx="1733550" cy="228600"/>
           </a:xfrm>
           <a:prstGeom xmlns:a="http://schemas.openxmlformats.org/drawingml/2006/main" prst="rect">
             <a:avLst/>
@@ -7462,7 +9044,7 @@
           <a:lstStyle xmlns:a="http://schemas.openxmlformats.org/drawingml/2006/main"/>
           <a:p xmlns:a="http://schemas.openxmlformats.org/drawingml/2006/main">
             <a:pPr algn="ctr">
-              <a:defRPr sz="1425" b="1">
+              <a:defRPr sz="1275" b="1">
                 <a:solidFill>
                   <a:srgbClr val="1F497D"/>
                 </a:solidFill>
@@ -7472,7 +9054,7 @@
               </a:defRPr>
             </a:pPr>
             <a:r>
-              <a:rPr sz="1425" b="1">
+              <a:rPr sz="1275" b="1">
                 <a:solidFill>
                   <a:srgbClr val="1F497D"/>
                 </a:solidFill>
@@ -7480,29 +9062,29 @@
                 <a:ea typeface="Arial"/>
                 <a:cs typeface="Arial"/>
               </a:rPr>
-              <a:t>EXTRACT + CLEAN</a:t>
-            </a:r>
-          </a:p>
-        </p:txBody>
-      </p:sp>
-      <p:sp>
-        <p:nvSpPr>
-          <p:cNvPr id="17417" name="flow-extract-detail">
-            <a:extLst xmlns:a="http://schemas.openxmlformats.org/drawingml/2006/main">
-              <a:ext uri="{FF2B5EF4-FFF2-40B4-BE49-F238E27FC236}">
-                <a16:creationId xmlns:a16="http://schemas.microsoft.com/office/drawing/2014/main" id="{6C17C2CB-B3AB-4AC5-BA78-00317088B3C2}"/>
-              </a:ext>
-            </a:extLst>
-          </p:cNvPr>
-          <p:cNvSpPr>
-            <a:spLocks xmlns:a="http://schemas.openxmlformats.org/drawingml/2006/main" noGrp="1"/>
-          </p:cNvSpPr>
-          <p:nvPr/>
-        </p:nvSpPr>
-        <p:spPr>
-          <a:xfrm xmlns:a="http://schemas.openxmlformats.org/drawingml/2006/main">
-            <a:off x="2981325" y="1781175"/>
-            <a:ext cx="1771650" cy="504825"/>
+              <a:t>2  EXTRACT</a:t>
+            </a:r>
+          </a:p>
+        </p:txBody>
+      </p:sp>
+      <p:sp>
+        <p:nvSpPr>
+          <p:cNvPr id="17418" name="tech-extract-detail">
+            <a:extLst xmlns:a="http://schemas.openxmlformats.org/drawingml/2006/main">
+              <a:ext uri="{FF2B5EF4-FFF2-40B4-BE49-F238E27FC236}">
+                <a16:creationId xmlns:a16="http://schemas.microsoft.com/office/drawing/2014/main" id="{E0A86F94-F06F-4F13-9F19-707855940684}"/>
+              </a:ext>
+            </a:extLst>
+          </p:cNvPr>
+          <p:cNvSpPr>
+            <a:spLocks xmlns:a="http://schemas.openxmlformats.org/drawingml/2006/main" noGrp="1"/>
+          </p:cNvSpPr>
+          <p:nvPr/>
+        </p:nvSpPr>
+        <p:spPr>
+          <a:xfrm xmlns:a="http://schemas.openxmlformats.org/drawingml/2006/main">
+            <a:off x="2943225" y="1885950"/>
+            <a:ext cx="1733550" cy="361950"/>
           </a:xfrm>
           <a:prstGeom xmlns:a="http://schemas.openxmlformats.org/drawingml/2006/main" prst="rect">
             <a:avLst/>
@@ -7520,7 +9102,7 @@
           <a:lstStyle xmlns:a="http://schemas.openxmlformats.org/drawingml/2006/main"/>
           <a:p xmlns:a="http://schemas.openxmlformats.org/drawingml/2006/main">
             <a:pPr algn="ctr">
-              <a:defRPr sz="1313">
+              <a:defRPr sz="1163">
                 <a:solidFill>
                   <a:srgbClr val="252525"/>
                 </a:solidFill>
@@ -7530,7 +9112,7 @@
               </a:defRPr>
             </a:pPr>
             <a:r>
-              <a:rPr sz="1313">
+              <a:rPr sz="1163">
                 <a:solidFill>
                   <a:srgbClr val="252525"/>
                 </a:solidFill>
@@ -7538,12 +9120,12 @@
                 <a:ea typeface="Arial"/>
                 <a:cs typeface="Arial"/>
               </a:rPr>
-              <a:t>pdfplumber</a:t>
+              <a:t>pdfplumber / pandas</a:t>
             </a:r>
           </a:p>
           <a:p xmlns:a="http://schemas.openxmlformats.org/drawingml/2006/main">
             <a:pPr algn="ctr">
-              <a:defRPr sz="1313">
+              <a:defRPr sz="1163">
                 <a:solidFill>
                   <a:srgbClr val="252525"/>
                 </a:solidFill>
@@ -7553,7 +9135,7 @@
               </a:defRPr>
             </a:pPr>
             <a:r>
-              <a:rPr sz="1313">
+              <a:rPr sz="1163">
                 <a:solidFill>
                   <a:srgbClr val="252525"/>
                 </a:solidFill>
@@ -7561,29 +9143,29 @@
                 <a:ea typeface="Arial"/>
                 <a:cs typeface="Arial"/>
               </a:rPr>
-              <a:t>pandas → project rows</a:t>
-            </a:r>
-          </a:p>
-        </p:txBody>
-      </p:sp>
-      <p:sp>
-        <p:nvSpPr>
-          <p:cNvPr id="17418" name="flow-models-surface">
-            <a:extLst xmlns:a="http://schemas.openxmlformats.org/drawingml/2006/main">
-              <a:ext uri="{FF2B5EF4-FFF2-40B4-BE49-F238E27FC236}">
-                <a16:creationId xmlns:a16="http://schemas.microsoft.com/office/drawing/2014/main" id="{EFCCFBC1-97AA-4755-85D5-53DD54205C00}"/>
-              </a:ext>
-            </a:extLst>
-          </p:cNvPr>
-          <p:cNvSpPr>
-            <a:spLocks xmlns:a="http://schemas.openxmlformats.org/drawingml/2006/main" noGrp="1"/>
-          </p:cNvSpPr>
-          <p:nvPr/>
-        </p:nvSpPr>
-        <p:spPr>
-          <a:xfrm xmlns:a="http://schemas.openxmlformats.org/drawingml/2006/main">
-            <a:off x="5124450" y="1381125"/>
-            <a:ext cx="1943100" cy="1000125"/>
+              <a:t>value + source_page</a:t>
+            </a:r>
+          </a:p>
+        </p:txBody>
+      </p:sp>
+      <p:sp>
+        <p:nvSpPr>
+          <p:cNvPr id="17419" name="tech-validate-surface">
+            <a:extLst xmlns:a="http://schemas.openxmlformats.org/drawingml/2006/main">
+              <a:ext uri="{FF2B5EF4-FFF2-40B4-BE49-F238E27FC236}">
+                <a16:creationId xmlns:a16="http://schemas.microsoft.com/office/drawing/2014/main" id="{BB377976-FC05-4357-B1E3-ECB1EBBEA4B0}"/>
+              </a:ext>
+            </a:extLst>
+          </p:cNvPr>
+          <p:cNvSpPr>
+            <a:spLocks xmlns:a="http://schemas.openxmlformats.org/drawingml/2006/main" noGrp="1"/>
+          </p:cNvSpPr>
+          <p:nvPr/>
+        </p:nvSpPr>
+        <p:spPr>
+          <a:xfrm xmlns:a="http://schemas.openxmlformats.org/drawingml/2006/main">
+            <a:off x="5124450" y="1533525"/>
+            <a:ext cx="1885950" cy="781050"/>
           </a:xfrm>
           <a:prstGeom xmlns:a="http://schemas.openxmlformats.org/drawingml/2006/main" prst="rect">
             <a:avLst/>
@@ -7601,22 +9183,22 @@
       </p:sp>
       <p:sp>
         <p:nvSpPr>
-          <p:cNvPr id="17419" name="flow-models-heading">
-            <a:extLst xmlns:a="http://schemas.openxmlformats.org/drawingml/2006/main">
-              <a:ext uri="{FF2B5EF4-FFF2-40B4-BE49-F238E27FC236}">
-                <a16:creationId xmlns:a16="http://schemas.microsoft.com/office/drawing/2014/main" id="{09581B7D-C773-42A6-9B0B-E972472BAC06}"/>
-              </a:ext>
-            </a:extLst>
-          </p:cNvPr>
-          <p:cNvSpPr>
-            <a:spLocks xmlns:a="http://schemas.openxmlformats.org/drawingml/2006/main" noGrp="1"/>
-          </p:cNvSpPr>
-          <p:nvPr/>
-        </p:nvSpPr>
-        <p:spPr>
-          <a:xfrm xmlns:a="http://schemas.openxmlformats.org/drawingml/2006/main">
-            <a:off x="5210175" y="1495425"/>
-            <a:ext cx="1771650" cy="238125"/>
+          <p:cNvPr id="17420" name="tech-validate-title">
+            <a:extLst xmlns:a="http://schemas.openxmlformats.org/drawingml/2006/main">
+              <a:ext uri="{FF2B5EF4-FFF2-40B4-BE49-F238E27FC236}">
+                <a16:creationId xmlns:a16="http://schemas.microsoft.com/office/drawing/2014/main" id="{F3B420E7-5D5D-4808-9DF9-A16D0AE21CC6}"/>
+              </a:ext>
+            </a:extLst>
+          </p:cNvPr>
+          <p:cNvSpPr>
+            <a:spLocks xmlns:a="http://schemas.openxmlformats.org/drawingml/2006/main" noGrp="1"/>
+          </p:cNvSpPr>
+          <p:nvPr/>
+        </p:nvSpPr>
+        <p:spPr>
+          <a:xfrm xmlns:a="http://schemas.openxmlformats.org/drawingml/2006/main">
+            <a:off x="5200650" y="1628775"/>
+            <a:ext cx="1733550" cy="228600"/>
           </a:xfrm>
           <a:prstGeom xmlns:a="http://schemas.openxmlformats.org/drawingml/2006/main" prst="rect">
             <a:avLst/>
@@ -7634,7 +9216,7 @@
           <a:lstStyle xmlns:a="http://schemas.openxmlformats.org/drawingml/2006/main"/>
           <a:p xmlns:a="http://schemas.openxmlformats.org/drawingml/2006/main">
             <a:pPr algn="ctr">
-              <a:defRPr sz="1425" b="1">
+              <a:defRPr sz="1275" b="1">
                 <a:solidFill>
                   <a:srgbClr val="1F497D"/>
                 </a:solidFill>
@@ -7644,7 +9226,7 @@
               </a:defRPr>
             </a:pPr>
             <a:r>
-              <a:rPr sz="1425" b="1">
+              <a:rPr sz="1275" b="1">
                 <a:solidFill>
                   <a:srgbClr val="1F497D"/>
                 </a:solidFill>
@@ -7652,29 +9234,29 @@
                 <a:ea typeface="Arial"/>
                 <a:cs typeface="Arial"/>
               </a:rPr>
-              <a:t>BUILD SIGNALS</a:t>
-            </a:r>
-          </a:p>
-        </p:txBody>
-      </p:sp>
-      <p:sp>
-        <p:nvSpPr>
-          <p:cNvPr id="17420" name="flow-models-detail">
-            <a:extLst xmlns:a="http://schemas.openxmlformats.org/drawingml/2006/main">
-              <a:ext uri="{FF2B5EF4-FFF2-40B4-BE49-F238E27FC236}">
-                <a16:creationId xmlns:a16="http://schemas.microsoft.com/office/drawing/2014/main" id="{8F0D14EE-9D8A-4E94-810C-A75AC2BF44C8}"/>
-              </a:ext>
-            </a:extLst>
-          </p:cNvPr>
-          <p:cNvSpPr>
-            <a:spLocks xmlns:a="http://schemas.openxmlformats.org/drawingml/2006/main" noGrp="1"/>
-          </p:cNvSpPr>
-          <p:nvPr/>
-        </p:nvSpPr>
-        <p:spPr>
-          <a:xfrm xmlns:a="http://schemas.openxmlformats.org/drawingml/2006/main">
-            <a:off x="5210175" y="1781175"/>
-            <a:ext cx="1771650" cy="504825"/>
+              <a:t>3  VALIDATE</a:t>
+            </a:r>
+          </a:p>
+        </p:txBody>
+      </p:sp>
+      <p:sp>
+        <p:nvSpPr>
+          <p:cNvPr id="17421" name="tech-validate-detail">
+            <a:extLst xmlns:a="http://schemas.openxmlformats.org/drawingml/2006/main">
+              <a:ext uri="{FF2B5EF4-FFF2-40B4-BE49-F238E27FC236}">
+                <a16:creationId xmlns:a16="http://schemas.microsoft.com/office/drawing/2014/main" id="{F49AEE26-7412-4F1D-A742-817BECA9064A}"/>
+              </a:ext>
+            </a:extLst>
+          </p:cNvPr>
+          <p:cNvSpPr>
+            <a:spLocks xmlns:a="http://schemas.openxmlformats.org/drawingml/2006/main" noGrp="1"/>
+          </p:cNvSpPr>
+          <p:nvPr/>
+        </p:nvSpPr>
+        <p:spPr>
+          <a:xfrm xmlns:a="http://schemas.openxmlformats.org/drawingml/2006/main">
+            <a:off x="5200650" y="1885950"/>
+            <a:ext cx="1733550" cy="361950"/>
           </a:xfrm>
           <a:prstGeom xmlns:a="http://schemas.openxmlformats.org/drawingml/2006/main" prst="rect">
             <a:avLst/>
@@ -7692,7 +9274,7 @@
           <a:lstStyle xmlns:a="http://schemas.openxmlformats.org/drawingml/2006/main"/>
           <a:p xmlns:a="http://schemas.openxmlformats.org/drawingml/2006/main">
             <a:pPr algn="ctr">
-              <a:defRPr sz="1313">
+              <a:defRPr sz="1163">
                 <a:solidFill>
                   <a:srgbClr val="252525"/>
                 </a:solidFill>
@@ -7702,7 +9284,7 @@
               </a:defRPr>
             </a:pPr>
             <a:r>
-              <a:rPr sz="1313">
+              <a:rPr sz="1163">
                 <a:solidFill>
                   <a:srgbClr val="252525"/>
                 </a:solidFill>
@@ -7710,12 +9292,12 @@
                 <a:ea typeface="Arial"/>
                 <a:cs typeface="Arial"/>
               </a:rPr>
-              <a:t>rule score + scikit-learn</a:t>
+              <a:t>quality status</a:t>
             </a:r>
           </a:p>
           <a:p xmlns:a="http://schemas.openxmlformats.org/drawingml/2006/main">
             <a:pPr algn="ctr">
-              <a:defRPr sz="1313">
+              <a:defRPr sz="1163">
                 <a:solidFill>
                   <a:srgbClr val="252525"/>
                 </a:solidFill>
@@ -7725,7 +9307,7 @@
               </a:defRPr>
             </a:pPr>
             <a:r>
-              <a:rPr sz="1313">
+              <a:rPr sz="1163">
                 <a:solidFill>
                   <a:srgbClr val="252525"/>
                 </a:solidFill>
@@ -7733,29 +9315,29 @@
                 <a:ea typeface="Arial"/>
                 <a:cs typeface="Arial"/>
               </a:rPr>
-              <a:t>logistic / gradient boost</a:t>
-            </a:r>
-          </a:p>
-        </p:txBody>
-      </p:sp>
-      <p:sp>
-        <p:nvSpPr>
-          <p:cNvPr id="17421" name="flow-api-surface">
-            <a:extLst xmlns:a="http://schemas.openxmlformats.org/drawingml/2006/main">
-              <a:ext uri="{FF2B5EF4-FFF2-40B4-BE49-F238E27FC236}">
-                <a16:creationId xmlns:a16="http://schemas.microsoft.com/office/drawing/2014/main" id="{4A158EB7-2C8E-4FB8-9663-44311E2DB436}"/>
-              </a:ext>
-            </a:extLst>
-          </p:cNvPr>
-          <p:cNvSpPr>
-            <a:spLocks xmlns:a="http://schemas.openxmlformats.org/drawingml/2006/main" noGrp="1"/>
-          </p:cNvSpPr>
-          <p:nvPr/>
-        </p:nvSpPr>
-        <p:spPr>
-          <a:xfrm xmlns:a="http://schemas.openxmlformats.org/drawingml/2006/main">
-            <a:off x="7353300" y="1381125"/>
-            <a:ext cx="1943100" cy="1000125"/>
+              <a:t>field + total checks</a:t>
+            </a:r>
+          </a:p>
+        </p:txBody>
+      </p:sp>
+      <p:sp>
+        <p:nvSpPr>
+          <p:cNvPr id="17422" name="tech-compare-surface">
+            <a:extLst xmlns:a="http://schemas.openxmlformats.org/drawingml/2006/main">
+              <a:ext uri="{FF2B5EF4-FFF2-40B4-BE49-F238E27FC236}">
+                <a16:creationId xmlns:a16="http://schemas.microsoft.com/office/drawing/2014/main" id="{0D33A7CD-A79D-4440-AD1C-B3CA1114134E}"/>
+              </a:ext>
+            </a:extLst>
+          </p:cNvPr>
+          <p:cNvSpPr>
+            <a:spLocks xmlns:a="http://schemas.openxmlformats.org/drawingml/2006/main" noGrp="1"/>
+          </p:cNvSpPr>
+          <p:nvPr/>
+        </p:nvSpPr>
+        <p:spPr>
+          <a:xfrm xmlns:a="http://schemas.openxmlformats.org/drawingml/2006/main">
+            <a:off x="7381875" y="1533525"/>
+            <a:ext cx="1885950" cy="781050"/>
           </a:xfrm>
           <a:prstGeom xmlns:a="http://schemas.openxmlformats.org/drawingml/2006/main" prst="rect">
             <a:avLst/>
@@ -7773,22 +9355,22 @@
       </p:sp>
       <p:sp>
         <p:nvSpPr>
-          <p:cNvPr id="17422" name="flow-api-heading">
-            <a:extLst xmlns:a="http://schemas.openxmlformats.org/drawingml/2006/main">
-              <a:ext uri="{FF2B5EF4-FFF2-40B4-BE49-F238E27FC236}">
-                <a16:creationId xmlns:a16="http://schemas.microsoft.com/office/drawing/2014/main" id="{978F0BCA-61DC-40F2-A870-9D269033F387}"/>
-              </a:ext>
-            </a:extLst>
-          </p:cNvPr>
-          <p:cNvSpPr>
-            <a:spLocks xmlns:a="http://schemas.openxmlformats.org/drawingml/2006/main" noGrp="1"/>
-          </p:cNvSpPr>
-          <p:nvPr/>
-        </p:nvSpPr>
-        <p:spPr>
-          <a:xfrm xmlns:a="http://schemas.openxmlformats.org/drawingml/2006/main">
-            <a:off x="7439025" y="1495425"/>
-            <a:ext cx="1771650" cy="238125"/>
+          <p:cNvPr id="17423" name="tech-compare-title">
+            <a:extLst xmlns:a="http://schemas.openxmlformats.org/drawingml/2006/main">
+              <a:ext uri="{FF2B5EF4-FFF2-40B4-BE49-F238E27FC236}">
+                <a16:creationId xmlns:a16="http://schemas.microsoft.com/office/drawing/2014/main" id="{327AB269-A90C-47D1-ACB8-ADC03C0722E3}"/>
+              </a:ext>
+            </a:extLst>
+          </p:cNvPr>
+          <p:cNvSpPr>
+            <a:spLocks xmlns:a="http://schemas.openxmlformats.org/drawingml/2006/main" noGrp="1"/>
+          </p:cNvSpPr>
+          <p:nvPr/>
+        </p:nvSpPr>
+        <p:spPr>
+          <a:xfrm xmlns:a="http://schemas.openxmlformats.org/drawingml/2006/main">
+            <a:off x="7458075" y="1628775"/>
+            <a:ext cx="1733550" cy="228600"/>
           </a:xfrm>
           <a:prstGeom xmlns:a="http://schemas.openxmlformats.org/drawingml/2006/main" prst="rect">
             <a:avLst/>
@@ -7806,7 +9388,7 @@
           <a:lstStyle xmlns:a="http://schemas.openxmlformats.org/drawingml/2006/main"/>
           <a:p xmlns:a="http://schemas.openxmlformats.org/drawingml/2006/main">
             <a:pPr algn="ctr">
-              <a:defRPr sz="1425" b="1">
+              <a:defRPr sz="1275" b="1">
                 <a:solidFill>
                   <a:srgbClr val="1F497D"/>
                 </a:solidFill>
@@ -7816,7 +9398,7 @@
               </a:defRPr>
             </a:pPr>
             <a:r>
-              <a:rPr sz="1425" b="1">
+              <a:rPr sz="1275" b="1">
                 <a:solidFill>
                   <a:srgbClr val="1F497D"/>
                 </a:solidFill>
@@ -7824,29 +9406,29 @@
                 <a:ea typeface="Arial"/>
                 <a:cs typeface="Arial"/>
               </a:rPr>
-              <a:t>EXPORT + SERVE</a:t>
-            </a:r>
-          </a:p>
-        </p:txBody>
-      </p:sp>
-      <p:sp>
-        <p:nvSpPr>
-          <p:cNvPr id="17423" name="flow-api-detail">
-            <a:extLst xmlns:a="http://schemas.openxmlformats.org/drawingml/2006/main">
-              <a:ext uri="{FF2B5EF4-FFF2-40B4-BE49-F238E27FC236}">
-                <a16:creationId xmlns:a16="http://schemas.microsoft.com/office/drawing/2014/main" id="{127215EE-C3BC-4169-8E45-376D075A9683}"/>
-              </a:ext>
-            </a:extLst>
-          </p:cNvPr>
-          <p:cNvSpPr>
-            <a:spLocks xmlns:a="http://schemas.openxmlformats.org/drawingml/2006/main" noGrp="1"/>
-          </p:cNvSpPr>
-          <p:nvPr/>
-        </p:nvSpPr>
-        <p:spPr>
-          <a:xfrm xmlns:a="http://schemas.openxmlformats.org/drawingml/2006/main">
-            <a:off x="7439025" y="1781175"/>
-            <a:ext cx="1771650" cy="504825"/>
+              <a:t>4  COMPARE</a:t>
+            </a:r>
+          </a:p>
+        </p:txBody>
+      </p:sp>
+      <p:sp>
+        <p:nvSpPr>
+          <p:cNvPr id="17424" name="tech-compare-detail">
+            <a:extLst xmlns:a="http://schemas.openxmlformats.org/drawingml/2006/main">
+              <a:ext uri="{FF2B5EF4-FFF2-40B4-BE49-F238E27FC236}">
+                <a16:creationId xmlns:a16="http://schemas.microsoft.com/office/drawing/2014/main" id="{45524094-F902-4117-8783-F42C319D4E63}"/>
+              </a:ext>
+            </a:extLst>
+          </p:cNvPr>
+          <p:cNvSpPr>
+            <a:spLocks xmlns:a="http://schemas.openxmlformats.org/drawingml/2006/main" noGrp="1"/>
+          </p:cNvSpPr>
+          <p:nvPr/>
+        </p:nvSpPr>
+        <p:spPr>
+          <a:xfrm xmlns:a="http://schemas.openxmlformats.org/drawingml/2006/main">
+            <a:off x="7458075" y="1885950"/>
+            <a:ext cx="1733550" cy="361950"/>
           </a:xfrm>
           <a:prstGeom xmlns:a="http://schemas.openxmlformats.org/drawingml/2006/main" prst="rect">
             <a:avLst/>
@@ -7864,7 +9446,7 @@
           <a:lstStyle xmlns:a="http://schemas.openxmlformats.org/drawingml/2006/main"/>
           <a:p xmlns:a="http://schemas.openxmlformats.org/drawingml/2006/main">
             <a:pPr algn="ctr">
-              <a:defRPr sz="1313">
+              <a:defRPr sz="1163">
                 <a:solidFill>
                   <a:srgbClr val="252525"/>
                 </a:solidFill>
@@ -7874,7 +9456,7 @@
               </a:defRPr>
             </a:pPr>
             <a:r>
-              <a:rPr sz="1313">
+              <a:rPr sz="1163">
                 <a:solidFill>
                   <a:srgbClr val="252525"/>
                 </a:solidFill>
@@ -7882,12 +9464,12 @@
                 <a:ea typeface="Arial"/>
                 <a:cs typeface="Arial"/>
               </a:rPr>
-              <a:t>Parquet / JSON</a:t>
+              <a:t>rule / logistic / boost</a:t>
             </a:r>
           </a:p>
           <a:p xmlns:a="http://schemas.openxmlformats.org/drawingml/2006/main">
             <a:pPr algn="ctr">
-              <a:defRPr sz="1313">
+              <a:defRPr sz="1163">
                 <a:solidFill>
                   <a:srgbClr val="252525"/>
                 </a:solidFill>
@@ -7897,7 +9479,7 @@
               </a:defRPr>
             </a:pPr>
             <a:r>
-              <a:rPr sz="1313">
+              <a:rPr sz="1163">
                 <a:solidFill>
                   <a:srgbClr val="252525"/>
                 </a:solidFill>
@@ -7905,29 +9487,29 @@
                 <a:ea typeface="Arial"/>
                 <a:cs typeface="Arial"/>
               </a:rPr>
-              <a:t>Next.js 15 API</a:t>
-            </a:r>
-          </a:p>
-        </p:txBody>
-      </p:sp>
-      <p:sp>
-        <p:nvSpPr>
-          <p:cNvPr id="17424" name="flow-review-surface">
-            <a:extLst xmlns:a="http://schemas.openxmlformats.org/drawingml/2006/main">
-              <a:ext uri="{FF2B5EF4-FFF2-40B4-BE49-F238E27FC236}">
-                <a16:creationId xmlns:a16="http://schemas.microsoft.com/office/drawing/2014/main" id="{E127DFE9-3943-4763-8E96-570B53342D39}"/>
-              </a:ext>
-            </a:extLst>
-          </p:cNvPr>
-          <p:cNvSpPr>
-            <a:spLocks xmlns:a="http://schemas.openxmlformats.org/drawingml/2006/main" noGrp="1"/>
-          </p:cNvSpPr>
-          <p:nvPr/>
-        </p:nvSpPr>
-        <p:spPr>
-          <a:xfrm xmlns:a="http://schemas.openxmlformats.org/drawingml/2006/main">
-            <a:off x="9582150" y="1381125"/>
-            <a:ext cx="1943100" cy="1000125"/>
+              <a:t>ordered + project splits</a:t>
+            </a:r>
+          </a:p>
+        </p:txBody>
+      </p:sp>
+      <p:sp>
+        <p:nvSpPr>
+          <p:cNvPr id="17425" name="tech-review-surface">
+            <a:extLst xmlns:a="http://schemas.openxmlformats.org/drawingml/2006/main">
+              <a:ext uri="{FF2B5EF4-FFF2-40B4-BE49-F238E27FC236}">
+                <a16:creationId xmlns:a16="http://schemas.microsoft.com/office/drawing/2014/main" id="{E20B40F1-D45A-4CBC-A8AC-F742073837F3}"/>
+              </a:ext>
+            </a:extLst>
+          </p:cNvPr>
+          <p:cNvSpPr>
+            <a:spLocks xmlns:a="http://schemas.openxmlformats.org/drawingml/2006/main" noGrp="1"/>
+          </p:cNvSpPr>
+          <p:nvPr/>
+        </p:nvSpPr>
+        <p:spPr>
+          <a:xfrm xmlns:a="http://schemas.openxmlformats.org/drawingml/2006/main">
+            <a:off x="9639300" y="1533525"/>
+            <a:ext cx="1885950" cy="781050"/>
           </a:xfrm>
           <a:prstGeom xmlns:a="http://schemas.openxmlformats.org/drawingml/2006/main" prst="rect">
             <a:avLst/>
@@ -7945,22 +9527,22 @@
       </p:sp>
       <p:sp>
         <p:nvSpPr>
-          <p:cNvPr id="17425" name="flow-review-heading">
-            <a:extLst xmlns:a="http://schemas.openxmlformats.org/drawingml/2006/main">
-              <a:ext uri="{FF2B5EF4-FFF2-40B4-BE49-F238E27FC236}">
-                <a16:creationId xmlns:a16="http://schemas.microsoft.com/office/drawing/2014/main" id="{44D17980-E677-445F-89A6-484E75E3C9A3}"/>
-              </a:ext>
-            </a:extLst>
-          </p:cNvPr>
-          <p:cNvSpPr>
-            <a:spLocks xmlns:a="http://schemas.openxmlformats.org/drawingml/2006/main" noGrp="1"/>
-          </p:cNvSpPr>
-          <p:nvPr/>
-        </p:nvSpPr>
-        <p:spPr>
-          <a:xfrm xmlns:a="http://schemas.openxmlformats.org/drawingml/2006/main">
-            <a:off x="9667875" y="1495425"/>
-            <a:ext cx="1771650" cy="238125"/>
+          <p:cNvPr id="17426" name="tech-review-title">
+            <a:extLst xmlns:a="http://schemas.openxmlformats.org/drawingml/2006/main">
+              <a:ext uri="{FF2B5EF4-FFF2-40B4-BE49-F238E27FC236}">
+                <a16:creationId xmlns:a16="http://schemas.microsoft.com/office/drawing/2014/main" id="{8A8C8C15-184E-4CB5-83A5-F2AB65E289B1}"/>
+              </a:ext>
+            </a:extLst>
+          </p:cNvPr>
+          <p:cNvSpPr>
+            <a:spLocks xmlns:a="http://schemas.openxmlformats.org/drawingml/2006/main" noGrp="1"/>
+          </p:cNvSpPr>
+          <p:nvPr/>
+        </p:nvSpPr>
+        <p:spPr>
+          <a:xfrm xmlns:a="http://schemas.openxmlformats.org/drawingml/2006/main">
+            <a:off x="9715500" y="1628775"/>
+            <a:ext cx="1733550" cy="228600"/>
           </a:xfrm>
           <a:prstGeom xmlns:a="http://schemas.openxmlformats.org/drawingml/2006/main" prst="rect">
             <a:avLst/>
@@ -7978,7 +9560,7 @@
           <a:lstStyle xmlns:a="http://schemas.openxmlformats.org/drawingml/2006/main"/>
           <a:p xmlns:a="http://schemas.openxmlformats.org/drawingml/2006/main">
             <a:pPr algn="ctr">
-              <a:defRPr sz="1425" b="1">
+              <a:defRPr sz="1275" b="1">
                 <a:solidFill>
                   <a:srgbClr val="1F497D"/>
                 </a:solidFill>
@@ -7988,7 +9570,7 @@
               </a:defRPr>
             </a:pPr>
             <a:r>
-              <a:rPr sz="1425" b="1">
+              <a:rPr sz="1275" b="1">
                 <a:solidFill>
                   <a:srgbClr val="1F497D"/>
                 </a:solidFill>
@@ -7996,29 +9578,29 @@
                 <a:ea typeface="Arial"/>
                 <a:cs typeface="Arial"/>
               </a:rPr>
-              <a:t>REVIEW</a:t>
-            </a:r>
-          </a:p>
-        </p:txBody>
-      </p:sp>
-      <p:sp>
-        <p:nvSpPr>
-          <p:cNvPr id="17426" name="flow-review-detail">
-            <a:extLst xmlns:a="http://schemas.openxmlformats.org/drawingml/2006/main">
-              <a:ext uri="{FF2B5EF4-FFF2-40B4-BE49-F238E27FC236}">
-                <a16:creationId xmlns:a16="http://schemas.microsoft.com/office/drawing/2014/main" id="{523EA96B-1BFB-472E-822D-87A08C77135A}"/>
-              </a:ext>
-            </a:extLst>
-          </p:cNvPr>
-          <p:cNvSpPr>
-            <a:spLocks xmlns:a="http://schemas.openxmlformats.org/drawingml/2006/main" noGrp="1"/>
-          </p:cNvSpPr>
-          <p:nvPr/>
-        </p:nvSpPr>
-        <p:spPr>
-          <a:xfrm xmlns:a="http://schemas.openxmlformats.org/drawingml/2006/main">
-            <a:off x="9667875" y="1781175"/>
-            <a:ext cx="1771650" cy="504825"/>
+              <a:t>5  REVIEW</a:t>
+            </a:r>
+          </a:p>
+        </p:txBody>
+      </p:sp>
+      <p:sp>
+        <p:nvSpPr>
+          <p:cNvPr id="17427" name="tech-review-detail">
+            <a:extLst xmlns:a="http://schemas.openxmlformats.org/drawingml/2006/main">
+              <a:ext uri="{FF2B5EF4-FFF2-40B4-BE49-F238E27FC236}">
+                <a16:creationId xmlns:a16="http://schemas.microsoft.com/office/drawing/2014/main" id="{2FB3FE89-7BC5-4533-8BD1-468BD2E06890}"/>
+              </a:ext>
+            </a:extLst>
+          </p:cNvPr>
+          <p:cNvSpPr>
+            <a:spLocks xmlns:a="http://schemas.openxmlformats.org/drawingml/2006/main" noGrp="1"/>
+          </p:cNvSpPr>
+          <p:nvPr/>
+        </p:nvSpPr>
+        <p:spPr>
+          <a:xfrm xmlns:a="http://schemas.openxmlformats.org/drawingml/2006/main">
+            <a:off x="9715500" y="1885950"/>
+            <a:ext cx="1733550" cy="361950"/>
           </a:xfrm>
           <a:prstGeom xmlns:a="http://schemas.openxmlformats.org/drawingml/2006/main" prst="rect">
             <a:avLst/>
@@ -8036,7 +9618,7 @@
           <a:lstStyle xmlns:a="http://schemas.openxmlformats.org/drawingml/2006/main"/>
           <a:p xmlns:a="http://schemas.openxmlformats.org/drawingml/2006/main">
             <a:pPr algn="ctr">
-              <a:defRPr sz="1313">
+              <a:defRPr sz="1163">
                 <a:solidFill>
                   <a:srgbClr val="252525"/>
                 </a:solidFill>
@@ -8046,7 +9628,7 @@
               </a:defRPr>
             </a:pPr>
             <a:r>
-              <a:rPr sz="1313">
+              <a:rPr sz="1163">
                 <a:solidFill>
                   <a:srgbClr val="252525"/>
                 </a:solidFill>
@@ -8054,12 +9636,12 @@
                 <a:ea typeface="Arial"/>
                 <a:cs typeface="Arial"/>
               </a:rPr>
-              <a:t>July snapshot</a:t>
+              <a:t>source-linked card</a:t>
             </a:r>
           </a:p>
           <a:p xmlns:a="http://schemas.openxmlformats.org/drawingml/2006/main">
             <a:pPr algn="ctr">
-              <a:defRPr sz="1313">
+              <a:defRPr sz="1163">
                 <a:solidFill>
                   <a:srgbClr val="252525"/>
                 </a:solidFill>
@@ -8069,7 +9651,7 @@
               </a:defRPr>
             </a:pPr>
             <a:r>
-              <a:rPr sz="1313">
+              <a:rPr sz="1163">
                 <a:solidFill>
                   <a:srgbClr val="252525"/>
                 </a:solidFill>
@@ -8077,29 +9659,29 @@
                 <a:ea typeface="Arial"/>
                 <a:cs typeface="Arial"/>
               </a:rPr>
-              <a:t>1,775 projects</a:t>
-            </a:r>
-          </a:p>
-        </p:txBody>
-      </p:sp>
-      <p:sp>
-        <p:nvSpPr>
-          <p:cNvPr id="17427" name="flow-arrow-1">
-            <a:extLst xmlns:a="http://schemas.openxmlformats.org/drawingml/2006/main">
-              <a:ext uri="{FF2B5EF4-FFF2-40B4-BE49-F238E27FC236}">
-                <a16:creationId xmlns:a16="http://schemas.microsoft.com/office/drawing/2014/main" id="{9A348F60-BB7E-4EA3-86B3-93151FC0B41A}"/>
-              </a:ext>
-            </a:extLst>
-          </p:cNvPr>
-          <p:cNvSpPr>
-            <a:spLocks xmlns:a="http://schemas.openxmlformats.org/drawingml/2006/main" noGrp="1"/>
-          </p:cNvSpPr>
-          <p:nvPr/>
-        </p:nvSpPr>
-        <p:spPr>
-          <a:xfrm xmlns:a="http://schemas.openxmlformats.org/drawingml/2006/main">
-            <a:off x="2667000" y="1743075"/>
-            <a:ext cx="228600" cy="257175"/>
+              <a:t>reason + uncertainty</a:t>
+            </a:r>
+          </a:p>
+        </p:txBody>
+      </p:sp>
+      <p:sp>
+        <p:nvSpPr>
+          <p:cNvPr id="17428" name="tech-flow-arrow-1">
+            <a:extLst xmlns:a="http://schemas.openxmlformats.org/drawingml/2006/main">
+              <a:ext uri="{FF2B5EF4-FFF2-40B4-BE49-F238E27FC236}">
+                <a16:creationId xmlns:a16="http://schemas.microsoft.com/office/drawing/2014/main" id="{C5C54EA7-DC6C-47AE-AFB0-E67317C1252B}"/>
+              </a:ext>
+            </a:extLst>
+          </p:cNvPr>
+          <p:cNvSpPr>
+            <a:spLocks xmlns:a="http://schemas.openxmlformats.org/drawingml/2006/main" noGrp="1"/>
+          </p:cNvSpPr>
+          <p:nvPr/>
+        </p:nvSpPr>
+        <p:spPr>
+          <a:xfrm xmlns:a="http://schemas.openxmlformats.org/drawingml/2006/main">
+            <a:off x="2571750" y="1809750"/>
+            <a:ext cx="190500" cy="228600"/>
           </a:xfrm>
           <a:prstGeom xmlns:a="http://schemas.openxmlformats.org/drawingml/2006/main" prst="rightArrow">
             <a:avLst/>
@@ -8115,22 +9697,22 @@
       </p:sp>
       <p:sp>
         <p:nvSpPr>
-          <p:cNvPr id="17428" name="flow-arrow-2">
-            <a:extLst xmlns:a="http://schemas.openxmlformats.org/drawingml/2006/main">
-              <a:ext uri="{FF2B5EF4-FFF2-40B4-BE49-F238E27FC236}">
-                <a16:creationId xmlns:a16="http://schemas.microsoft.com/office/drawing/2014/main" id="{82D01945-B282-4AAC-9275-033D5A9B6466}"/>
-              </a:ext>
-            </a:extLst>
-          </p:cNvPr>
-          <p:cNvSpPr>
-            <a:spLocks xmlns:a="http://schemas.openxmlformats.org/drawingml/2006/main" noGrp="1"/>
-          </p:cNvSpPr>
-          <p:nvPr/>
-        </p:nvSpPr>
-        <p:spPr>
-          <a:xfrm xmlns:a="http://schemas.openxmlformats.org/drawingml/2006/main">
-            <a:off x="4895850" y="1743075"/>
-            <a:ext cx="228600" cy="257175"/>
+          <p:cNvPr id="17429" name="tech-flow-arrow-2">
+            <a:extLst xmlns:a="http://schemas.openxmlformats.org/drawingml/2006/main">
+              <a:ext uri="{FF2B5EF4-FFF2-40B4-BE49-F238E27FC236}">
+                <a16:creationId xmlns:a16="http://schemas.microsoft.com/office/drawing/2014/main" id="{512B1A05-ED37-481C-A212-506D68E0EC98}"/>
+              </a:ext>
+            </a:extLst>
+          </p:cNvPr>
+          <p:cNvSpPr>
+            <a:spLocks xmlns:a="http://schemas.openxmlformats.org/drawingml/2006/main" noGrp="1"/>
+          </p:cNvSpPr>
+          <p:nvPr/>
+        </p:nvSpPr>
+        <p:spPr>
+          <a:xfrm xmlns:a="http://schemas.openxmlformats.org/drawingml/2006/main">
+            <a:off x="4829175" y="1809750"/>
+            <a:ext cx="190500" cy="228600"/>
           </a:xfrm>
           <a:prstGeom xmlns:a="http://schemas.openxmlformats.org/drawingml/2006/main" prst="rightArrow">
             <a:avLst/>
@@ -8146,22 +9728,22 @@
       </p:sp>
       <p:sp>
         <p:nvSpPr>
-          <p:cNvPr id="17429" name="flow-arrow-3">
-            <a:extLst xmlns:a="http://schemas.openxmlformats.org/drawingml/2006/main">
-              <a:ext uri="{FF2B5EF4-FFF2-40B4-BE49-F238E27FC236}">
-                <a16:creationId xmlns:a16="http://schemas.microsoft.com/office/drawing/2014/main" id="{D8BE6B59-6F97-4B05-BEA5-AEF1B828CF4C}"/>
-              </a:ext>
-            </a:extLst>
-          </p:cNvPr>
-          <p:cNvSpPr>
-            <a:spLocks xmlns:a="http://schemas.openxmlformats.org/drawingml/2006/main" noGrp="1"/>
-          </p:cNvSpPr>
-          <p:nvPr/>
-        </p:nvSpPr>
-        <p:spPr>
-          <a:xfrm xmlns:a="http://schemas.openxmlformats.org/drawingml/2006/main">
-            <a:off x="7124700" y="1743075"/>
-            <a:ext cx="228600" cy="257175"/>
+          <p:cNvPr id="17430" name="tech-flow-arrow-3">
+            <a:extLst xmlns:a="http://schemas.openxmlformats.org/drawingml/2006/main">
+              <a:ext uri="{FF2B5EF4-FFF2-40B4-BE49-F238E27FC236}">
+                <a16:creationId xmlns:a16="http://schemas.microsoft.com/office/drawing/2014/main" id="{A5F35722-E9FF-4218-8643-5C3178991BAC}"/>
+              </a:ext>
+            </a:extLst>
+          </p:cNvPr>
+          <p:cNvSpPr>
+            <a:spLocks xmlns:a="http://schemas.openxmlformats.org/drawingml/2006/main" noGrp="1"/>
+          </p:cNvSpPr>
+          <p:nvPr/>
+        </p:nvSpPr>
+        <p:spPr>
+          <a:xfrm xmlns:a="http://schemas.openxmlformats.org/drawingml/2006/main">
+            <a:off x="7086600" y="1809750"/>
+            <a:ext cx="190500" cy="228600"/>
           </a:xfrm>
           <a:prstGeom xmlns:a="http://schemas.openxmlformats.org/drawingml/2006/main" prst="rightArrow">
             <a:avLst/>
@@ -8177,22 +9759,22 @@
       </p:sp>
       <p:sp>
         <p:nvSpPr>
-          <p:cNvPr id="17430" name="flow-arrow-4">
-            <a:extLst xmlns:a="http://schemas.openxmlformats.org/drawingml/2006/main">
-              <a:ext uri="{FF2B5EF4-FFF2-40B4-BE49-F238E27FC236}">
-                <a16:creationId xmlns:a16="http://schemas.microsoft.com/office/drawing/2014/main" id="{0F43322E-8395-45A9-9215-24C89AFCE85B}"/>
-              </a:ext>
-            </a:extLst>
-          </p:cNvPr>
-          <p:cNvSpPr>
-            <a:spLocks xmlns:a="http://schemas.openxmlformats.org/drawingml/2006/main" noGrp="1"/>
-          </p:cNvSpPr>
-          <p:nvPr/>
-        </p:nvSpPr>
-        <p:spPr>
-          <a:xfrm xmlns:a="http://schemas.openxmlformats.org/drawingml/2006/main">
-            <a:off x="9353550" y="1743075"/>
-            <a:ext cx="228600" cy="257175"/>
+          <p:cNvPr id="17431" name="tech-flow-arrow-4">
+            <a:extLst xmlns:a="http://schemas.openxmlformats.org/drawingml/2006/main">
+              <a:ext uri="{FF2B5EF4-FFF2-40B4-BE49-F238E27FC236}">
+                <a16:creationId xmlns:a16="http://schemas.microsoft.com/office/drawing/2014/main" id="{4171EABD-BB37-4548-A5D3-FD740EC89A06}"/>
+              </a:ext>
+            </a:extLst>
+          </p:cNvPr>
+          <p:cNvSpPr>
+            <a:spLocks xmlns:a="http://schemas.openxmlformats.org/drawingml/2006/main" noGrp="1"/>
+          </p:cNvSpPr>
+          <p:nvPr/>
+        </p:nvSpPr>
+        <p:spPr>
+          <a:xfrm xmlns:a="http://schemas.openxmlformats.org/drawingml/2006/main">
+            <a:off x="9344025" y="1809750"/>
+            <a:ext cx="190500" cy="228600"/>
           </a:xfrm>
           <a:prstGeom xmlns:a="http://schemas.openxmlformats.org/drawingml/2006/main" prst="rightArrow">
             <a:avLst/>
@@ -8208,22 +9790,22 @@
       </p:sp>
       <p:sp>
         <p:nvSpPr>
-          <p:cNvPr id="17431" name="stack-line">
-            <a:extLst xmlns:a="http://schemas.openxmlformats.org/drawingml/2006/main">
-              <a:ext uri="{FF2B5EF4-FFF2-40B4-BE49-F238E27FC236}">
-                <a16:creationId xmlns:a16="http://schemas.microsoft.com/office/drawing/2014/main" id="{B4FF5240-044D-428C-BBEE-9ED302485F63}"/>
-              </a:ext>
-            </a:extLst>
-          </p:cNvPr>
-          <p:cNvSpPr>
-            <a:spLocks xmlns:a="http://schemas.openxmlformats.org/drawingml/2006/main" noGrp="1"/>
-          </p:cNvSpPr>
-          <p:nvPr/>
-        </p:nvSpPr>
-        <p:spPr>
-          <a:xfrm xmlns:a="http://schemas.openxmlformats.org/drawingml/2006/main">
-            <a:off x="666750" y="2447925"/>
-            <a:ext cx="10858500" cy="266700"/>
+          <p:cNvPr id="17432" name="technical-quality-note">
+            <a:extLst xmlns:a="http://schemas.openxmlformats.org/drawingml/2006/main">
+              <a:ext uri="{FF2B5EF4-FFF2-40B4-BE49-F238E27FC236}">
+                <a16:creationId xmlns:a16="http://schemas.microsoft.com/office/drawing/2014/main" id="{CC239479-E3EB-4DCD-B0CC-840ACBBC4CE7}"/>
+              </a:ext>
+            </a:extLst>
+          </p:cNvPr>
+          <p:cNvSpPr>
+            <a:spLocks xmlns:a="http://schemas.openxmlformats.org/drawingml/2006/main" noGrp="1"/>
+          </p:cNvSpPr>
+          <p:nvPr/>
+        </p:nvSpPr>
+        <p:spPr>
+          <a:xfrm xmlns:a="http://schemas.openxmlformats.org/drawingml/2006/main">
+            <a:off x="609600" y="2409825"/>
+            <a:ext cx="10972800" cy="323850"/>
           </a:xfrm>
           <a:prstGeom xmlns:a="http://schemas.openxmlformats.org/drawingml/2006/main" prst="rect">
             <a:avLst/>
@@ -8236,14 +9818,14 @@
         </p:spPr>
         <p:txBody>
           <a:bodyPr xmlns:a="http://schemas.openxmlformats.org/drawingml/2006/main" wrap="square" lIns="0" tIns="0" rIns="0" bIns="0" anchor="t">
-            <a:normAutofit fontScale="100000"/>
+            <a:normAutofit fontScale="91693"/>
           </a:bodyPr>
           <a:lstStyle xmlns:a="http://schemas.openxmlformats.org/drawingml/2006/main"/>
           <a:p xmlns:a="http://schemas.openxmlformats.org/drawingml/2006/main">
             <a:pPr algn="l">
-              <a:defRPr sz="1313">
-                <a:solidFill>
-                  <a:srgbClr val="383838"/>
+              <a:defRPr sz="1238">
+                <a:solidFill>
+                  <a:srgbClr val="252525"/>
                 </a:solidFill>
                 <a:latin typeface="Arial"/>
                 <a:ea typeface="Arial"/>
@@ -8251,37 +9833,37 @@
               </a:defRPr>
             </a:pPr>
             <a:r>
-              <a:rPr sz="1313">
-                <a:solidFill>
-                  <a:srgbClr val="383838"/>
+              <a:rPr sz="1238">
+                <a:solidFill>
+                  <a:srgbClr val="252525"/>
                 </a:solidFill>
                 <a:latin typeface="Arial"/>
                 <a:ea typeface="Arial"/>
                 <a:cs typeface="Arial"/>
               </a:rPr>
-              <a:t>Open-source stack: Python • pandas / NumPy • scikit-learn • Parquet • Next.js 15 / React 19 • Recharts</a:t>
-            </a:r>
-          </a:p>
-        </p:txBody>
-      </p:sp>
-      <p:sp>
-        <p:nvSpPr>
-          <p:cNvPr id="17432" name="qa-evidence">
-            <a:extLst xmlns:a="http://schemas.openxmlformats.org/drawingml/2006/main">
-              <a:ext uri="{FF2B5EF4-FFF2-40B4-BE49-F238E27FC236}">
-                <a16:creationId xmlns:a16="http://schemas.microsoft.com/office/drawing/2014/main" id="{46EC9D28-A570-4B6C-A391-72A98DC1E6B7}"/>
-              </a:ext>
-            </a:extLst>
-          </p:cNvPr>
-          <p:cNvSpPr>
-            <a:spLocks xmlns:a="http://schemas.openxmlformats.org/drawingml/2006/main" noGrp="1"/>
-          </p:cNvSpPr>
-          <p:nvPr/>
-        </p:nvSpPr>
-        <p:spPr>
-          <a:xfrm xmlns:a="http://schemas.openxmlformats.org/drawingml/2006/main">
-            <a:off x="666750" y="2724150"/>
-            <a:ext cx="10858500" cy="466725"/>
+              <a:t>QUALITY CONTROL  •  Across 17 reports: 24,257 VERIFIED; 859 REVIEW_REQUIRED. Training uses VERIFIED rows. Flags are investigation cues, not confirmed errors.</a:t>
+            </a:r>
+          </a:p>
+        </p:txBody>
+      </p:sp>
+      <p:sp>
+        <p:nvSpPr>
+          <p:cNvPr id="17433" name="technical-eval-heading">
+            <a:extLst xmlns:a="http://schemas.openxmlformats.org/drawingml/2006/main">
+              <a:ext uri="{FF2B5EF4-FFF2-40B4-BE49-F238E27FC236}">
+                <a16:creationId xmlns:a16="http://schemas.microsoft.com/office/drawing/2014/main" id="{E2E155BC-AB19-4D13-B917-9714AFF35606}"/>
+              </a:ext>
+            </a:extLst>
+          </p:cNvPr>
+          <p:cNvSpPr>
+            <a:spLocks xmlns:a="http://schemas.openxmlformats.org/drawingml/2006/main" noGrp="1"/>
+          </p:cNvSpPr>
+          <p:nvPr/>
+        </p:nvSpPr>
+        <p:spPr>
+          <a:xfrm xmlns:a="http://schemas.openxmlformats.org/drawingml/2006/main">
+            <a:off x="609600" y="2819400"/>
+            <a:ext cx="10972800" cy="266700"/>
           </a:xfrm>
           <a:prstGeom xmlns:a="http://schemas.openxmlformats.org/drawingml/2006/main" prst="rect">
             <a:avLst/>
@@ -8299,7 +9881,7 @@
           <a:lstStyle xmlns:a="http://schemas.openxmlformats.org/drawingml/2006/main"/>
           <a:p xmlns:a="http://schemas.openxmlformats.org/drawingml/2006/main">
             <a:pPr algn="l">
-              <a:defRPr sz="1313" b="1">
+              <a:defRPr sz="1388" b="1">
                 <a:solidFill>
                   <a:srgbClr val="1F497D"/>
                 </a:solidFill>
@@ -8309,7 +9891,7 @@
               </a:defRPr>
             </a:pPr>
             <a:r>
-              <a:rPr sz="1313" b="1">
+              <a:rPr sz="1388" b="1">
                 <a:solidFill>
                   <a:srgbClr val="1F497D"/>
                 </a:solidFill>
@@ -8317,29 +9899,62 @@
                 <a:ea typeface="Arial"/>
                 <a:cs typeface="Arial"/>
               </a:rPr>
-              <a:t>April audit: 1,981 project rows and all three portfolio totals reconcile to the MoSPI report (0.0% displayed difference). checker.py is separate today; making it block exports is next.</a:t>
-            </a:r>
-          </a:p>
-        </p:txBody>
-      </p:sp>
-      <p:sp>
-        <p:nvSpPr>
-          <p:cNvPr id="17433" name="evaluation-title">
-            <a:extLst xmlns:a="http://schemas.openxmlformats.org/drawingml/2006/main">
-              <a:ext uri="{FF2B5EF4-FFF2-40B4-BE49-F238E27FC236}">
-                <a16:creationId xmlns:a16="http://schemas.microsoft.com/office/drawing/2014/main" id="{F4900453-E773-4386-97D3-FA3CE6DF9B56}"/>
-              </a:ext>
-            </a:extLst>
-          </p:cNvPr>
-          <p:cNvSpPr>
-            <a:spLocks xmlns:a="http://schemas.openxmlformats.org/drawingml/2006/main" noGrp="1"/>
-          </p:cNvSpPr>
-          <p:nvPr/>
-        </p:nvSpPr>
-        <p:spPr>
-          <a:xfrm xmlns:a="http://schemas.openxmlformats.org/drawingml/2006/main">
-            <a:off x="666750" y="3333750"/>
-            <a:ext cx="10858500" cy="257175"/>
+              <a:t>ORDERED TIME-HOLDOUT  •  PR-AUC (rare-event ranking), not “accuracy”</a:t>
+            </a:r>
+          </a:p>
+        </p:txBody>
+      </p:sp>
+      <p:sp>
+        <p:nvSpPr>
+          <p:cNvPr id="17434" name="technical-eval-schedule-panel">
+            <a:extLst xmlns:a="http://schemas.openxmlformats.org/drawingml/2006/main">
+              <a:ext uri="{FF2B5EF4-FFF2-40B4-BE49-F238E27FC236}">
+                <a16:creationId xmlns:a16="http://schemas.microsoft.com/office/drawing/2014/main" id="{30925C32-56A1-433A-80F5-55A3AC09A984}"/>
+              </a:ext>
+            </a:extLst>
+          </p:cNvPr>
+          <p:cNvSpPr>
+            <a:spLocks xmlns:a="http://schemas.openxmlformats.org/drawingml/2006/main" noGrp="1"/>
+          </p:cNvSpPr>
+          <p:nvPr/>
+        </p:nvSpPr>
+        <p:spPr>
+          <a:xfrm xmlns:a="http://schemas.openxmlformats.org/drawingml/2006/main">
+            <a:off x="609600" y="3152775"/>
+            <a:ext cx="5238750" cy="1619250"/>
+          </a:xfrm>
+          <a:prstGeom xmlns:a="http://schemas.openxmlformats.org/drawingml/2006/main" prst="rect">
+            <a:avLst/>
+          </a:prstGeom>
+          <a:solidFill xmlns:a="http://schemas.openxmlformats.org/drawingml/2006/main">
+            <a:srgbClr val="F4F7FA"/>
+          </a:solidFill>
+          <a:ln xmlns:a="http://schemas.openxmlformats.org/drawingml/2006/main" w="9525">
+            <a:solidFill>
+              <a:srgbClr val="AFC4D6"/>
+            </a:solidFill>
+            <a:prstDash val="solid"/>
+          </a:ln>
+        </p:spPr>
+      </p:sp>
+      <p:sp>
+        <p:nvSpPr>
+          <p:cNvPr id="17435" name="technical-schedule-title">
+            <a:extLst xmlns:a="http://schemas.openxmlformats.org/drawingml/2006/main">
+              <a:ext uri="{FF2B5EF4-FFF2-40B4-BE49-F238E27FC236}">
+                <a16:creationId xmlns:a16="http://schemas.microsoft.com/office/drawing/2014/main" id="{463393AE-4E49-4EB3-8470-D9EAB584BB37}"/>
+              </a:ext>
+            </a:extLst>
+          </p:cNvPr>
+          <p:cNvSpPr>
+            <a:spLocks xmlns:a="http://schemas.openxmlformats.org/drawingml/2006/main" noGrp="1"/>
+          </p:cNvSpPr>
+          <p:nvPr/>
+        </p:nvSpPr>
+        <p:spPr>
+          <a:xfrm xmlns:a="http://schemas.openxmlformats.org/drawingml/2006/main">
+            <a:off x="781050" y="3267075"/>
+            <a:ext cx="4905375" cy="238125"/>
           </a:xfrm>
           <a:prstGeom xmlns:a="http://schemas.openxmlformats.org/drawingml/2006/main" prst="rect">
             <a:avLst/>
@@ -8357,7 +9972,7 @@
           <a:lstStyle xmlns:a="http://schemas.openxmlformats.org/drawingml/2006/main"/>
           <a:p xmlns:a="http://schemas.openxmlformats.org/drawingml/2006/main">
             <a:pPr algn="l">
-              <a:defRPr sz="1425" b="1">
+              <a:defRPr sz="1238" b="1">
                 <a:solidFill>
                   <a:srgbClr val="1F497D"/>
                 </a:solidFill>
@@ -8367,7 +9982,7 @@
               </a:defRPr>
             </a:pPr>
             <a:r>
-              <a:rPr sz="1425" b="1">
+              <a:rPr sz="1238" b="1">
                 <a:solidFill>
                   <a:srgbClr val="1F497D"/>
                 </a:solidFill>
@@ -8375,60 +9990,29 @@
                 <a:ea typeface="Arial"/>
                 <a:cs typeface="Arial"/>
               </a:rPr>
-              <a:t>ONE TEMPORAL HOLDOUT • JUNE INPUT → JULY OUTCOMES • NEXT MONTH</a:t>
-            </a:r>
-          </a:p>
-        </p:txBody>
-      </p:sp>
-      <p:sp>
-        <p:nvSpPr>
-          <p:cNvPr id="17434" name="evaluation-divider">
-            <a:extLst xmlns:a="http://schemas.openxmlformats.org/drawingml/2006/main">
-              <a:ext uri="{FF2B5EF4-FFF2-40B4-BE49-F238E27FC236}">
-                <a16:creationId xmlns:a16="http://schemas.microsoft.com/office/drawing/2014/main" id="{F401063B-4BD4-4E1E-BD0D-DCA932A87517}"/>
-              </a:ext>
-            </a:extLst>
-          </p:cNvPr>
-          <p:cNvSpPr>
-            <a:spLocks xmlns:a="http://schemas.openxmlformats.org/drawingml/2006/main" noGrp="1"/>
-          </p:cNvSpPr>
-          <p:nvPr/>
-        </p:nvSpPr>
-        <p:spPr>
-          <a:xfrm xmlns:a="http://schemas.openxmlformats.org/drawingml/2006/main">
-            <a:off x="6096000" y="3714750"/>
-            <a:ext cx="14288" cy="1466850"/>
-          </a:xfrm>
-          <a:prstGeom xmlns:a="http://schemas.openxmlformats.org/drawingml/2006/main" prst="rect">
-            <a:avLst/>
-          </a:prstGeom>
-          <a:solidFill xmlns:a="http://schemas.openxmlformats.org/drawingml/2006/main">
-            <a:srgbClr val="AFC4D6"/>
-          </a:solidFill>
-          <a:ln xmlns:a="http://schemas.openxmlformats.org/drawingml/2006/main" w="0">
-            <a:noFill/>
-            <a:prstDash val="solid"/>
-          </a:ln>
-        </p:spPr>
-      </p:sp>
-      <p:sp>
-        <p:nvSpPr>
-          <p:cNvPr id="17435" name="schedule-eval-heading">
-            <a:extLst xmlns:a="http://schemas.openxmlformats.org/drawingml/2006/main">
-              <a:ext uri="{FF2B5EF4-FFF2-40B4-BE49-F238E27FC236}">
-                <a16:creationId xmlns:a16="http://schemas.microsoft.com/office/drawing/2014/main" id="{96A3F231-64A2-4211-A209-DA6BC76724F5}"/>
-              </a:ext>
-            </a:extLst>
-          </p:cNvPr>
-          <p:cNvSpPr>
-            <a:spLocks xmlns:a="http://schemas.openxmlformats.org/drawingml/2006/main" noGrp="1"/>
-          </p:cNvSpPr>
-          <p:nvPr/>
-        </p:nvSpPr>
-        <p:spPr>
-          <a:xfrm xmlns:a="http://schemas.openxmlformats.org/drawingml/2006/main">
-            <a:off x="666750" y="3705225"/>
-            <a:ext cx="5048250" cy="276225"/>
+              <a:t>SCHEDULE CHANGE  •  APR–JUN 2026 (3 ORDERED MONTHS)</a:t>
+            </a:r>
+          </a:p>
+        </p:txBody>
+      </p:sp>
+      <p:sp>
+        <p:nvSpPr>
+          <p:cNvPr id="17436" name="technical-schedule-metrics">
+            <a:extLst xmlns:a="http://schemas.openxmlformats.org/drawingml/2006/main">
+              <a:ext uri="{FF2B5EF4-FFF2-40B4-BE49-F238E27FC236}">
+                <a16:creationId xmlns:a16="http://schemas.microsoft.com/office/drawing/2014/main" id="{291EF44E-5BDB-4AB7-A133-AC7E93F5E0D7}"/>
+              </a:ext>
+            </a:extLst>
+          </p:cNvPr>
+          <p:cNvSpPr>
+            <a:spLocks xmlns:a="http://schemas.openxmlformats.org/drawingml/2006/main" noGrp="1"/>
+          </p:cNvSpPr>
+          <p:nvPr/>
+        </p:nvSpPr>
+        <p:spPr>
+          <a:xfrm xmlns:a="http://schemas.openxmlformats.org/drawingml/2006/main">
+            <a:off x="781050" y="3638550"/>
+            <a:ext cx="4905375" cy="923925"/>
           </a:xfrm>
           <a:prstGeom xmlns:a="http://schemas.openxmlformats.org/drawingml/2006/main" prst="rect">
             <a:avLst/>
@@ -8446,9 +10030,9 @@
           <a:lstStyle xmlns:a="http://schemas.openxmlformats.org/drawingml/2006/main"/>
           <a:p xmlns:a="http://schemas.openxmlformats.org/drawingml/2006/main">
             <a:pPr algn="l">
-              <a:defRPr sz="1500" b="1">
-                <a:solidFill>
-                  <a:srgbClr val="1F497D"/>
+              <a:defRPr sz="1238">
+                <a:solidFill>
+                  <a:srgbClr val="252525"/>
                 </a:solidFill>
                 <a:latin typeface="Arial"/>
                 <a:ea typeface="Arial"/>
@@ -8456,37 +10040,116 @@
               </a:defRPr>
             </a:pPr>
             <a:r>
-              <a:rPr sz="1500" b="1">
-                <a:solidFill>
-                  <a:srgbClr val="1F497D"/>
+              <a:rPr sz="1238">
+                <a:solidFill>
+                  <a:srgbClr val="252525"/>
                 </a:solidFill>
                 <a:latin typeface="Arial"/>
                 <a:ea typeface="Arial"/>
                 <a:cs typeface="Arial"/>
               </a:rPr>
-              <a:t>SCHEDULE-DATE CHANGE</a:t>
-            </a:r>
-          </a:p>
-        </p:txBody>
-      </p:sp>
-      <p:sp>
-        <p:nvSpPr>
-          <p:cNvPr id="17436" name="schedule-eval-detail">
-            <a:extLst xmlns:a="http://schemas.openxmlformats.org/drawingml/2006/main">
-              <a:ext uri="{FF2B5EF4-FFF2-40B4-BE49-F238E27FC236}">
-                <a16:creationId xmlns:a16="http://schemas.microsoft.com/office/drawing/2014/main" id="{86215E86-1D29-4517-89E8-3B0C7ED3D615}"/>
-              </a:ext>
-            </a:extLst>
-          </p:cNvPr>
-          <p:cNvSpPr>
-            <a:spLocks xmlns:a="http://schemas.openxmlformats.org/drawingml/2006/main" noGrp="1"/>
-          </p:cNvSpPr>
-          <p:nvPr/>
-        </p:nvSpPr>
-        <p:spPr>
-          <a:xfrm xmlns:a="http://schemas.openxmlformats.org/drawingml/2006/main">
-            <a:off x="666750" y="4029075"/>
-            <a:ext cx="5048250" cy="1104900"/>
+              <a:t>PR-AUC   Gradient boost  0.376   |   Logistic  0.340   |   Rule  0.201</a:t>
+            </a:r>
+          </a:p>
+          <a:p xmlns:a="http://schemas.openxmlformats.org/drawingml/2006/main">
+            <a:pPr algn="l">
+              <a:defRPr sz="1238">
+                <a:solidFill>
+                  <a:srgbClr val="252525"/>
+                </a:solidFill>
+                <a:latin typeface="Arial"/>
+                <a:ea typeface="Arial"/>
+                <a:cs typeface="Arial"/>
+              </a:defRPr>
+            </a:pPr>
+            <a:r>
+              <a:rPr sz="1238">
+                <a:solidFill>
+                  <a:srgbClr val="252525"/>
+                </a:solidFill>
+                <a:latin typeface="Arial"/>
+                <a:ea typeface="Arial"/>
+                <a:cs typeface="Arial"/>
+              </a:rPr>
+              <a:t>ROC-AUC  Gradient boost  0.777   |   Logistic  0.762   |   Rule  0.566</a:t>
+            </a:r>
+          </a:p>
+          <a:p xmlns:a="http://schemas.openxmlformats.org/drawingml/2006/main">
+            <a:pPr algn="l">
+              <a:defRPr sz="1238">
+                <a:solidFill>
+                  <a:srgbClr val="252525"/>
+                </a:solidFill>
+                <a:latin typeface="Arial"/>
+                <a:ea typeface="Arial"/>
+                <a:cs typeface="Arial"/>
+              </a:defRPr>
+            </a:pPr>
+            <a:r>
+              <a:rPr sz="1238">
+                <a:solidFill>
+                  <a:srgbClr val="252525"/>
+                </a:solidFill>
+                <a:latin typeface="Arial"/>
+                <a:ea typeface="Arial"/>
+                <a:cs typeface="Arial"/>
+              </a:rPr>
+              <a:t>Mean across ordered tests; June test included 1,732 rows / 268 positive cases.</a:t>
+            </a:r>
+          </a:p>
+        </p:txBody>
+      </p:sp>
+      <p:sp>
+        <p:nvSpPr>
+          <p:cNvPr id="17437" name="technical-eval-cost-panel">
+            <a:extLst xmlns:a="http://schemas.openxmlformats.org/drawingml/2006/main">
+              <a:ext uri="{FF2B5EF4-FFF2-40B4-BE49-F238E27FC236}">
+                <a16:creationId xmlns:a16="http://schemas.microsoft.com/office/drawing/2014/main" id="{05FAA956-4507-485C-976F-9C7D17FD7A8D}"/>
+              </a:ext>
+            </a:extLst>
+          </p:cNvPr>
+          <p:cNvSpPr>
+            <a:spLocks xmlns:a="http://schemas.openxmlformats.org/drawingml/2006/main" noGrp="1"/>
+          </p:cNvSpPr>
+          <p:nvPr/>
+        </p:nvSpPr>
+        <p:spPr>
+          <a:xfrm xmlns:a="http://schemas.openxmlformats.org/drawingml/2006/main">
+            <a:off x="6343650" y="3152775"/>
+            <a:ext cx="5238750" cy="1619250"/>
+          </a:xfrm>
+          <a:prstGeom xmlns:a="http://schemas.openxmlformats.org/drawingml/2006/main" prst="rect">
+            <a:avLst/>
+          </a:prstGeom>
+          <a:solidFill xmlns:a="http://schemas.openxmlformats.org/drawingml/2006/main">
+            <a:srgbClr val="F4F7FA"/>
+          </a:solidFill>
+          <a:ln xmlns:a="http://schemas.openxmlformats.org/drawingml/2006/main" w="9525">
+            <a:solidFill>
+              <a:srgbClr val="AFC4D6"/>
+            </a:solidFill>
+            <a:prstDash val="solid"/>
+          </a:ln>
+        </p:spPr>
+      </p:sp>
+      <p:sp>
+        <p:nvSpPr>
+          <p:cNvPr id="17438" name="technical-cost-title">
+            <a:extLst xmlns:a="http://schemas.openxmlformats.org/drawingml/2006/main">
+              <a:ext uri="{FF2B5EF4-FFF2-40B4-BE49-F238E27FC236}">
+                <a16:creationId xmlns:a16="http://schemas.microsoft.com/office/drawing/2014/main" id="{063EFA63-F73B-42E2-BB49-20DA4C6BE24F}"/>
+              </a:ext>
+            </a:extLst>
+          </p:cNvPr>
+          <p:cNvSpPr>
+            <a:spLocks xmlns:a="http://schemas.openxmlformats.org/drawingml/2006/main" noGrp="1"/>
+          </p:cNvSpPr>
+          <p:nvPr/>
+        </p:nvSpPr>
+        <p:spPr>
+          <a:xfrm xmlns:a="http://schemas.openxmlformats.org/drawingml/2006/main">
+            <a:off x="6515100" y="3267075"/>
+            <a:ext cx="4905375" cy="238125"/>
           </a:xfrm>
           <a:prstGeom xmlns:a="http://schemas.openxmlformats.org/drawingml/2006/main" prst="rect">
             <a:avLst/>
@@ -8504,9 +10167,9 @@
           <a:lstStyle xmlns:a="http://schemas.openxmlformats.org/drawingml/2006/main"/>
           <a:p xmlns:a="http://schemas.openxmlformats.org/drawingml/2006/main">
             <a:pPr algn="l">
-              <a:defRPr sz="1463">
-                <a:solidFill>
-                  <a:srgbClr val="202020"/>
+              <a:defRPr sz="1238" b="1">
+                <a:solidFill>
+                  <a:srgbClr val="1F497D"/>
                 </a:solidFill>
                 <a:latin typeface="Arial"/>
                 <a:ea typeface="Arial"/>
@@ -8514,83 +10177,37 @@
               </a:defRPr>
             </a:pPr>
             <a:r>
-              <a:rPr sz="1463">
-                <a:solidFill>
-                  <a:srgbClr val="202020"/>
+              <a:rPr sz="1238" b="1">
+                <a:solidFill>
+                  <a:srgbClr val="1F497D"/>
                 </a:solidFill>
                 <a:latin typeface="Arial"/>
                 <a:ea typeface="Arial"/>
                 <a:cs typeface="Arial"/>
               </a:rPr>
-              <a:t>Gradient boosting   ROC-AUC 0.767  •  PR-AUC 0.342</a:t>
-            </a:r>
-          </a:p>
-          <a:p xmlns:a="http://schemas.openxmlformats.org/drawingml/2006/main">
-            <a:pPr algn="l">
-              <a:defRPr sz="1463">
-                <a:solidFill>
-                  <a:srgbClr val="202020"/>
-                </a:solidFill>
-                <a:latin typeface="Arial"/>
-                <a:ea typeface="Arial"/>
-                <a:cs typeface="Arial"/>
-              </a:defRPr>
-            </a:pPr>
-            <a:r>
-              <a:rPr sz="1463">
-                <a:solidFill>
-                  <a:srgbClr val="202020"/>
-                </a:solidFill>
-                <a:latin typeface="Arial"/>
-                <a:ea typeface="Arial"/>
-                <a:cs typeface="Arial"/>
-              </a:rPr>
-              <a:t>Logistic regression  ROC-AUC 0.728  •  PR-AUC 0.280</a:t>
-            </a:r>
-          </a:p>
-          <a:p xmlns:a="http://schemas.openxmlformats.org/drawingml/2006/main">
-            <a:pPr algn="l">
-              <a:defRPr sz="1463">
-                <a:solidFill>
-                  <a:srgbClr val="202020"/>
-                </a:solidFill>
-                <a:latin typeface="Arial"/>
-                <a:ea typeface="Arial"/>
-                <a:cs typeface="Arial"/>
-              </a:defRPr>
-            </a:pPr>
-            <a:r>
-              <a:rPr sz="1463">
-                <a:solidFill>
-                  <a:srgbClr val="202020"/>
-                </a:solidFill>
-                <a:latin typeface="Arial"/>
-                <a:ea typeface="Arial"/>
-                <a:cs typeface="Arial"/>
-              </a:rPr>
-              <a:t>1,732 labelled rows • 268 schedule changes</a:t>
-            </a:r>
-          </a:p>
-        </p:txBody>
-      </p:sp>
-      <p:sp>
-        <p:nvSpPr>
-          <p:cNvPr id="17437" name="cost-eval-heading">
-            <a:extLst xmlns:a="http://schemas.openxmlformats.org/drawingml/2006/main">
-              <a:ext uri="{FF2B5EF4-FFF2-40B4-BE49-F238E27FC236}">
-                <a16:creationId xmlns:a16="http://schemas.microsoft.com/office/drawing/2014/main" id="{FB1F2D4D-ED4E-498C-99BC-E3841210DD27}"/>
-              </a:ext>
-            </a:extLst>
-          </p:cNvPr>
-          <p:cNvSpPr>
-            <a:spLocks xmlns:a="http://schemas.openxmlformats.org/drawingml/2006/main" noGrp="1"/>
-          </p:cNvSpPr>
-          <p:nvPr/>
-        </p:nvSpPr>
-        <p:spPr>
-          <a:xfrm xmlns:a="http://schemas.openxmlformats.org/drawingml/2006/main">
-            <a:off x="6467475" y="3705225"/>
-            <a:ext cx="5048250" cy="276225"/>
+              <a:t>COST REVISION  •  JUNE 2026 ONLY (72 POSITIVES)</a:t>
+            </a:r>
+          </a:p>
+        </p:txBody>
+      </p:sp>
+      <p:sp>
+        <p:nvSpPr>
+          <p:cNvPr id="17439" name="technical-cost-metrics">
+            <a:extLst xmlns:a="http://schemas.openxmlformats.org/drawingml/2006/main">
+              <a:ext uri="{FF2B5EF4-FFF2-40B4-BE49-F238E27FC236}">
+                <a16:creationId xmlns:a16="http://schemas.microsoft.com/office/drawing/2014/main" id="{22767FC1-A4C0-41ED-8729-F0984E409F7F}"/>
+              </a:ext>
+            </a:extLst>
+          </p:cNvPr>
+          <p:cNvSpPr>
+            <a:spLocks xmlns:a="http://schemas.openxmlformats.org/drawingml/2006/main" noGrp="1"/>
+          </p:cNvSpPr>
+          <p:nvPr/>
+        </p:nvSpPr>
+        <p:spPr>
+          <a:xfrm xmlns:a="http://schemas.openxmlformats.org/drawingml/2006/main">
+            <a:off x="6515100" y="3638550"/>
+            <a:ext cx="4905375" cy="923925"/>
           </a:xfrm>
           <a:prstGeom xmlns:a="http://schemas.openxmlformats.org/drawingml/2006/main" prst="rect">
             <a:avLst/>
@@ -8608,9 +10225,9 @@
           <a:lstStyle xmlns:a="http://schemas.openxmlformats.org/drawingml/2006/main"/>
           <a:p xmlns:a="http://schemas.openxmlformats.org/drawingml/2006/main">
             <a:pPr algn="l">
-              <a:defRPr sz="1500" b="1">
-                <a:solidFill>
-                  <a:srgbClr val="1F497D"/>
+              <a:defRPr sz="1238">
+                <a:solidFill>
+                  <a:srgbClr val="252525"/>
                 </a:solidFill>
                 <a:latin typeface="Arial"/>
                 <a:ea typeface="Arial"/>
@@ -8618,37 +10235,83 @@
               </a:defRPr>
             </a:pPr>
             <a:r>
-              <a:rPr sz="1500" b="1">
-                <a:solidFill>
-                  <a:srgbClr val="1F497D"/>
+              <a:rPr sz="1238">
+                <a:solidFill>
+                  <a:srgbClr val="252525"/>
                 </a:solidFill>
                 <a:latin typeface="Arial"/>
                 <a:ea typeface="Arial"/>
                 <a:cs typeface="Arial"/>
               </a:rPr>
-              <a:t>COST REVISION</a:t>
-            </a:r>
-          </a:p>
-        </p:txBody>
-      </p:sp>
-      <p:sp>
-        <p:nvSpPr>
-          <p:cNvPr id="17438" name="cost-eval-detail">
-            <a:extLst xmlns:a="http://schemas.openxmlformats.org/drawingml/2006/main">
-              <a:ext uri="{FF2B5EF4-FFF2-40B4-BE49-F238E27FC236}">
-                <a16:creationId xmlns:a16="http://schemas.microsoft.com/office/drawing/2014/main" id="{D6864FEF-E5F0-45FF-944A-D67FA70E4F86}"/>
-              </a:ext>
-            </a:extLst>
-          </p:cNvPr>
-          <p:cNvSpPr>
-            <a:spLocks xmlns:a="http://schemas.openxmlformats.org/drawingml/2006/main" noGrp="1"/>
-          </p:cNvSpPr>
-          <p:nvPr/>
-        </p:nvSpPr>
-        <p:spPr>
-          <a:xfrm xmlns:a="http://schemas.openxmlformats.org/drawingml/2006/main">
-            <a:off x="6467475" y="4029075"/>
-            <a:ext cx="5048250" cy="1104900"/>
+              <a:t>PR-AUC   Logistic  0.131   |   Gradient boost  0.076   |   Rule  0.064</a:t>
+            </a:r>
+          </a:p>
+          <a:p xmlns:a="http://schemas.openxmlformats.org/drawingml/2006/main">
+            <a:pPr algn="l">
+              <a:defRPr sz="1238">
+                <a:solidFill>
+                  <a:srgbClr val="252525"/>
+                </a:solidFill>
+                <a:latin typeface="Arial"/>
+                <a:ea typeface="Arial"/>
+                <a:cs typeface="Arial"/>
+              </a:defRPr>
+            </a:pPr>
+            <a:r>
+              <a:rPr sz="1238">
+                <a:solidFill>
+                  <a:srgbClr val="252525"/>
+                </a:solidFill>
+                <a:latin typeface="Arial"/>
+                <a:ea typeface="Arial"/>
+                <a:cs typeface="Arial"/>
+              </a:rPr>
+              <a:t>ROC-AUC  Logistic  0.672   |   Gradient boost  0.704   |   Rule  0.586</a:t>
+            </a:r>
+          </a:p>
+          <a:p xmlns:a="http://schemas.openxmlformats.org/drawingml/2006/main">
+            <a:pPr algn="l">
+              <a:defRPr sz="1238">
+                <a:solidFill>
+                  <a:srgbClr val="252525"/>
+                </a:solidFill>
+                <a:latin typeface="Arial"/>
+                <a:ea typeface="Arial"/>
+                <a:cs typeface="Arial"/>
+              </a:defRPr>
+            </a:pPr>
+            <a:r>
+              <a:rPr sz="1238">
+                <a:solidFill>
+                  <a:srgbClr val="252525"/>
+                </a:solidFill>
+                <a:latin typeface="Arial"/>
+                <a:ea typeface="Arial"/>
+                <a:cs typeface="Arial"/>
+              </a:rPr>
+              <a:t>One ordered test month only: not decision-ready evidence.</a:t>
+            </a:r>
+          </a:p>
+        </p:txBody>
+      </p:sp>
+      <p:sp>
+        <p:nvSpPr>
+          <p:cNvPr id="17440" name="technical-explanation-note">
+            <a:extLst xmlns:a="http://schemas.openxmlformats.org/drawingml/2006/main">
+              <a:ext uri="{FF2B5EF4-FFF2-40B4-BE49-F238E27FC236}">
+                <a16:creationId xmlns:a16="http://schemas.microsoft.com/office/drawing/2014/main" id="{9E786363-0B97-43C6-9FAA-4E28DE9D08AE}"/>
+              </a:ext>
+            </a:extLst>
+          </p:cNvPr>
+          <p:cNvSpPr>
+            <a:spLocks xmlns:a="http://schemas.openxmlformats.org/drawingml/2006/main" noGrp="1"/>
+          </p:cNvSpPr>
+          <p:nvPr/>
+        </p:nvSpPr>
+        <p:spPr>
+          <a:xfrm xmlns:a="http://schemas.openxmlformats.org/drawingml/2006/main">
+            <a:off x="609600" y="4943475"/>
+            <a:ext cx="10972800" cy="542925"/>
           </a:xfrm>
           <a:prstGeom xmlns:a="http://schemas.openxmlformats.org/drawingml/2006/main" prst="rect">
             <a:avLst/>
@@ -8666,9 +10329,9 @@
           <a:lstStyle xmlns:a="http://schemas.openxmlformats.org/drawingml/2006/main"/>
           <a:p xmlns:a="http://schemas.openxmlformats.org/drawingml/2006/main">
             <a:pPr algn="l">
-              <a:defRPr sz="1463">
-                <a:solidFill>
-                  <a:srgbClr val="202020"/>
+              <a:defRPr sz="1238">
+                <a:solidFill>
+                  <a:srgbClr val="252525"/>
                 </a:solidFill>
                 <a:latin typeface="Arial"/>
                 <a:ea typeface="Arial"/>
@@ -8676,83 +10339,37 @@
               </a:defRPr>
             </a:pPr>
             <a:r>
-              <a:rPr sz="1463">
-                <a:solidFill>
-                  <a:srgbClr val="202020"/>
+              <a:rPr sz="1238">
+                <a:solidFill>
+                  <a:srgbClr val="252525"/>
                 </a:solidFill>
                 <a:latin typeface="Arial"/>
                 <a:ea typeface="Arial"/>
                 <a:cs typeface="Arial"/>
               </a:rPr>
-              <a:t>Gradient boosting   ROC-AUC 0.436  •  PR-AUC 0.039</a:t>
-            </a:r>
-          </a:p>
-          <a:p xmlns:a="http://schemas.openxmlformats.org/drawingml/2006/main">
-            <a:pPr algn="l">
-              <a:defRPr sz="1463">
-                <a:solidFill>
-                  <a:srgbClr val="202020"/>
-                </a:solidFill>
-                <a:latin typeface="Arial"/>
-                <a:ea typeface="Arial"/>
-                <a:cs typeface="Arial"/>
-              </a:defRPr>
-            </a:pPr>
-            <a:r>
-              <a:rPr sz="1463">
-                <a:solidFill>
-                  <a:srgbClr val="202020"/>
-                </a:solidFill>
-                <a:latin typeface="Arial"/>
-                <a:ea typeface="Arial"/>
-                <a:cs typeface="Arial"/>
-              </a:rPr>
-              <a:t>Logistic regression  ROC-AUC 0.503  •  PR-AUC 0.044</a:t>
-            </a:r>
-          </a:p>
-          <a:p xmlns:a="http://schemas.openxmlformats.org/drawingml/2006/main">
-            <a:pPr algn="l">
-              <a:defRPr sz="1463">
-                <a:solidFill>
-                  <a:srgbClr val="202020"/>
-                </a:solidFill>
-                <a:latin typeface="Arial"/>
-                <a:ea typeface="Arial"/>
-                <a:cs typeface="Arial"/>
-              </a:defRPr>
-            </a:pPr>
-            <a:r>
-              <a:rPr sz="1463">
-                <a:solidFill>
-                  <a:srgbClr val="202020"/>
-                </a:solidFill>
-                <a:latin typeface="Arial"/>
-                <a:ea typeface="Arial"/>
-                <a:cs typeface="Arial"/>
-              </a:rPr>
-              <a:t>1,732 labelled rows • 72 cost revisions</a:t>
-            </a:r>
-          </a:p>
-        </p:txBody>
-      </p:sp>
-      <p:sp>
-        <p:nvSpPr>
-          <p:cNvPr id="17439" name="cost-model-warning">
-            <a:extLst xmlns:a="http://schemas.openxmlformats.org/drawingml/2006/main">
-              <a:ext uri="{FF2B5EF4-FFF2-40B4-BE49-F238E27FC236}">
-                <a16:creationId xmlns:a16="http://schemas.microsoft.com/office/drawing/2014/main" id="{3FF589E6-4A5A-4ADC-888A-D3A2F5C454F7}"/>
-              </a:ext>
-            </a:extLst>
-          </p:cNvPr>
-          <p:cNvSpPr>
-            <a:spLocks xmlns:a="http://schemas.openxmlformats.org/drawingml/2006/main" noGrp="1"/>
-          </p:cNvSpPr>
-          <p:nvPr/>
-        </p:nvSpPr>
-        <p:spPr>
-          <a:xfrm xmlns:a="http://schemas.openxmlformats.org/drawingml/2006/main">
-            <a:off x="6467475" y="5095875"/>
-            <a:ext cx="5048250" cy="238125"/>
+              <a:t>EXPLAINABILITY  •  Show changed source values and permutation drivers (predictive signal, not cause). Next: CUF-only vs added-feature ablation and a human review disposition. Probabilities are uncalibrated; show ranks, not percentages.</a:t>
+            </a:r>
+          </a:p>
+        </p:txBody>
+      </p:sp>
+      <p:sp>
+        <p:nvSpPr>
+          <p:cNvPr id="17441" name="technical-model-roadmap">
+            <a:extLst xmlns:a="http://schemas.openxmlformats.org/drawingml/2006/main">
+              <a:ext uri="{FF2B5EF4-FFF2-40B4-BE49-F238E27FC236}">
+                <a16:creationId xmlns:a16="http://schemas.microsoft.com/office/drawing/2014/main" id="{AD035DF5-63A9-4389-A8A3-D1695560DE19}"/>
+              </a:ext>
+            </a:extLst>
+          </p:cNvPr>
+          <p:cNvSpPr>
+            <a:spLocks xmlns:a="http://schemas.openxmlformats.org/drawingml/2006/main" noGrp="1"/>
+          </p:cNvSpPr>
+          <p:nvPr/>
+        </p:nvSpPr>
+        <p:spPr>
+          <a:xfrm xmlns:a="http://schemas.openxmlformats.org/drawingml/2006/main">
+            <a:off x="609600" y="5619750"/>
+            <a:ext cx="10972800" cy="361950"/>
           </a:xfrm>
           <a:prstGeom xmlns:a="http://schemas.openxmlformats.org/drawingml/2006/main" prst="rect">
             <a:avLst/>
@@ -8770,9 +10387,9 @@
           <a:lstStyle xmlns:a="http://schemas.openxmlformats.org/drawingml/2006/main"/>
           <a:p xmlns:a="http://schemas.openxmlformats.org/drawingml/2006/main">
             <a:pPr algn="l">
-              <a:defRPr sz="1313" b="1">
-                <a:solidFill>
-                  <a:srgbClr val="A33A2B"/>
+              <a:defRPr sz="1163" b="1">
+                <a:solidFill>
+                  <a:srgbClr val="1F497D"/>
                 </a:solidFill>
                 <a:latin typeface="Arial"/>
                 <a:ea typeface="Arial"/>
@@ -8780,73 +10397,15 @@
               </a:defRPr>
             </a:pPr>
             <a:r>
-              <a:rPr sz="1313" b="1">
-                <a:solidFill>
-                  <a:srgbClr val="A33A2B"/>
+              <a:rPr sz="1163" b="1">
+                <a:solidFill>
+                  <a:srgbClr val="1F497D"/>
                 </a:solidFill>
                 <a:latin typeface="Arial"/>
                 <a:ea typeface="Arial"/>
                 <a:cs typeface="Arial"/>
               </a:rPr>
-              <a:t>Cost model: not decision-ready</a:t>
-            </a:r>
-          </a:p>
-        </p:txBody>
-      </p:sp>
-      <p:sp>
-        <p:nvSpPr>
-          <p:cNvPr id="17440" name="evaluation-caveat">
-            <a:extLst xmlns:a="http://schemas.openxmlformats.org/drawingml/2006/main">
-              <a:ext uri="{FF2B5EF4-FFF2-40B4-BE49-F238E27FC236}">
-                <a16:creationId xmlns:a16="http://schemas.microsoft.com/office/drawing/2014/main" id="{CB87205E-9957-463C-85BF-FBFE63EB0C81}"/>
-              </a:ext>
-            </a:extLst>
-          </p:cNvPr>
-          <p:cNvSpPr>
-            <a:spLocks xmlns:a="http://schemas.openxmlformats.org/drawingml/2006/main" noGrp="1"/>
-          </p:cNvSpPr>
-          <p:nvPr/>
-        </p:nvSpPr>
-        <p:spPr>
-          <a:xfrm xmlns:a="http://schemas.openxmlformats.org/drawingml/2006/main">
-            <a:off x="666750" y="5514975"/>
-            <a:ext cx="10858500" cy="314325"/>
-          </a:xfrm>
-          <a:prstGeom xmlns:a="http://schemas.openxmlformats.org/drawingml/2006/main" prst="rect">
-            <a:avLst/>
-          </a:prstGeom>
-          <a:noFill xmlns:a="http://schemas.openxmlformats.org/drawingml/2006/main"/>
-          <a:ln xmlns:a="http://schemas.openxmlformats.org/drawingml/2006/main" w="0">
-            <a:noFill/>
-            <a:prstDash val="solid"/>
-          </a:ln>
-        </p:spPr>
-        <p:txBody>
-          <a:bodyPr xmlns:a="http://schemas.openxmlformats.org/drawingml/2006/main" wrap="square" lIns="0" tIns="0" rIns="0" bIns="0" anchor="t">
-            <a:normAutofit fontScale="100000"/>
-          </a:bodyPr>
-          <a:lstStyle xmlns:a="http://schemas.openxmlformats.org/drawingml/2006/main"/>
-          <a:p xmlns:a="http://schemas.openxmlformats.org/drawingml/2006/main">
-            <a:pPr algn="l">
-              <a:defRPr sz="1275">
-                <a:solidFill>
-                  <a:srgbClr val="454545"/>
-                </a:solidFill>
-                <a:latin typeface="Arial"/>
-                <a:ea typeface="Arial"/>
-                <a:cs typeface="Arial"/>
-              </a:defRPr>
-            </a:pPr>
-            <a:r>
-              <a:rPr sz="1275">
-                <a:solidFill>
-                  <a:srgbClr val="454545"/>
-                </a:solidFill>
-                <a:latin typeface="Arial"/>
-                <a:ea typeface="Arial"/>
-                <a:cs typeface="Arial"/>
-              </a:rPr>
-              <a:t>One temporal test month; probabilities are uncalibrated. These results are preliminary, not deployment validation.</a:t>
+              <a:t>NEXT VALIDATION  •  repeat time-forward checks  |  test top-K precision and lead time  |  add XGBoost / SHAP only if they improve validated results and explanation quality</a:t>
             </a:r>
           </a:p>
         </p:txBody>
@@ -8854,7 +10413,7 @@
     </p:spTree>
     <p:extLst>
       <p:ext uri="{BB962C8B-B14F-4D97-AF65-F5344CB8AC3E}">
-        <p14:creationId xmlns:p14="http://schemas.microsoft.com/office/powerpoint/2010/main" val="1656467327"/>
+        <p14:creationId xmlns:p14="http://schemas.microsoft.com/office/powerpoint/2010/main" val="1914999565"/>
       </p:ext>
     </p:extLst>
   </p:cSld>
@@ -8950,7 +10509,7 @@
           <p:cNvPr id="17409" name="Title 1">
             <a:extLst xmlns:a="http://schemas.openxmlformats.org/drawingml/2006/main">
               <a:ext uri="{FF2B5EF4-FFF2-40B4-BE49-F238E27FC236}">
-                <a16:creationId xmlns:a16="http://schemas.microsoft.com/office/drawing/2014/main" id="{DD493D9F-EBD3-4DDA-BF72-C62FBC303DE7}"/>
+                <a16:creationId xmlns:a16="http://schemas.microsoft.com/office/drawing/2014/main" id="{48FBE034-3092-4A2B-ABB1-ABB560EAF7BF}"/>
               </a:ext>
             </a:extLst>
           </p:cNvPr>
@@ -8985,7 +10544,7 @@
           <p:cNvPr id="17410" name="TextBox 8">
             <a:extLst xmlns:a="http://schemas.openxmlformats.org/drawingml/2006/main">
               <a:ext uri="{FF2B5EF4-FFF2-40B4-BE49-F238E27FC236}">
-                <a16:creationId xmlns:a16="http://schemas.microsoft.com/office/drawing/2014/main" id="{B70BD68C-8BEE-4492-B0AC-C8DF6862F119}"/>
+                <a16:creationId xmlns:a16="http://schemas.microsoft.com/office/drawing/2014/main" id="{48A7B86B-C4A9-4C3D-AB81-306C3CD95A72}"/>
               </a:ext>
             </a:extLst>
           </p:cNvPr>
@@ -9059,7 +10618,7 @@
           <p:cNvPr id="6" name="Slide Number Placeholder 5">
             <a:extLst xmlns:a="http://schemas.openxmlformats.org/drawingml/2006/main">
               <a:ext uri="{FF2B5EF4-FFF2-40B4-BE49-F238E27FC236}">
-                <a16:creationId xmlns:a16="http://schemas.microsoft.com/office/drawing/2014/main" id="{226CCD00-11BE-469F-8644-4E3F9351724D}"/>
+                <a16:creationId xmlns:a16="http://schemas.microsoft.com/office/drawing/2014/main" id="{D9D71EF7-9B16-443A-B786-75B162F4164A}"/>
               </a:ext>
             </a:extLst>
           </p:cNvPr>
@@ -9123,7 +10682,7 @@
           <p:cNvPr id="7" name="Footer Placeholder 6">
             <a:extLst xmlns:a="http://schemas.openxmlformats.org/drawingml/2006/main">
               <a:ext uri="{FF2B5EF4-FFF2-40B4-BE49-F238E27FC236}">
-                <a16:creationId xmlns:a16="http://schemas.microsoft.com/office/drawing/2014/main" id="{1C9F443C-FF06-4A14-82E3-DF3A2C0580CB}"/>
+                <a16:creationId xmlns:a16="http://schemas.microsoft.com/office/drawing/2014/main" id="{D71114AE-4E4D-4B02-9D4A-403C196156BB}"/>
               </a:ext>
             </a:extLst>
           </p:cNvPr>
@@ -9250,7 +10809,7 @@
                 <a:ea typeface="Arial"/>
                 <a:cs typeface="Arial"/>
               </a:rPr>
-              <a:t>[TEAM]</a:t>
+              <a:t>PARAKH</a:t>
             </a:r>
             <a:endParaRPr/>
           </a:p>
@@ -9258,14 +10817,14 @@
       </p:sp>
       <p:pic>
         <p:nvPicPr>
-          <p:cNvPr id="17440" name="Picture 10"/>
+          <p:cNvPr id="17452" name="Picture 10"/>
           <p:cNvPicPr>
             <a:picLocks xmlns:a="http://schemas.openxmlformats.org/drawingml/2006/main" noChangeAspect="1"/>
           </p:cNvPicPr>
           <p:nvPr/>
         </p:nvPicPr>
         <p:blipFill>
-          <a:blip xmlns:r="http://schemas.openxmlformats.org/officeDocument/2006/relationships" xmlns:a="http://schemas.openxmlformats.org/drawingml/2006/main" r:embed="R62b6a48f6bdb491c"/>
+          <a:blip xmlns:r="http://schemas.openxmlformats.org/officeDocument/2006/relationships" xmlns:a="http://schemas.openxmlformats.org/drawingml/2006/main" r:embed="Rac87c44590194ce4"/>
           <a:stretch xmlns:a="http://schemas.openxmlformats.org/drawingml/2006/main">
             <a:fillRect l="0" t="0" r="0" b="0"/>
           </a:stretch>
@@ -9282,22 +10841,22 @@
       </p:pic>
       <p:sp>
         <p:nvSpPr>
-          <p:cNvPr id="17412" name="feasible-tech-title">
-            <a:extLst xmlns:a="http://schemas.openxmlformats.org/drawingml/2006/main">
-              <a:ext uri="{FF2B5EF4-FFF2-40B4-BE49-F238E27FC236}">
-                <a16:creationId xmlns:a16="http://schemas.microsoft.com/office/drawing/2014/main" id="{220DC6C5-84AB-467F-9C29-22848D23BC98}"/>
-              </a:ext>
-            </a:extLst>
-          </p:cNvPr>
-          <p:cNvSpPr>
-            <a:spLocks xmlns:a="http://schemas.openxmlformats.org/drawingml/2006/main" noGrp="1"/>
-          </p:cNvSpPr>
-          <p:nvPr/>
-        </p:nvSpPr>
-        <p:spPr>
-          <a:xfrm xmlns:a="http://schemas.openxmlformats.org/drawingml/2006/main">
-            <a:off x="609600" y="1381125"/>
-            <a:ext cx="3238500" cy="266700"/>
+          <p:cNvPr id="17412" name="feasibility-1-title">
+            <a:extLst xmlns:a="http://schemas.openxmlformats.org/drawingml/2006/main">
+              <a:ext uri="{FF2B5EF4-FFF2-40B4-BE49-F238E27FC236}">
+                <a16:creationId xmlns:a16="http://schemas.microsoft.com/office/drawing/2014/main" id="{DE073921-06AF-446D-913E-25F266291301}"/>
+              </a:ext>
+            </a:extLst>
+          </p:cNvPr>
+          <p:cNvSpPr>
+            <a:spLocks xmlns:a="http://schemas.openxmlformats.org/drawingml/2006/main" noGrp="1"/>
+          </p:cNvSpPr>
+          <p:nvPr/>
+        </p:nvSpPr>
+        <p:spPr>
+          <a:xfrm xmlns:a="http://schemas.openxmlformats.org/drawingml/2006/main">
+            <a:off x="609600" y="1362075"/>
+            <a:ext cx="3238500" cy="247650"/>
           </a:xfrm>
           <a:prstGeom xmlns:a="http://schemas.openxmlformats.org/drawingml/2006/main" prst="rect">
             <a:avLst/>
@@ -9315,7 +10874,7 @@
           <a:lstStyle xmlns:a="http://schemas.openxmlformats.org/drawingml/2006/main"/>
           <a:p xmlns:a="http://schemas.openxmlformats.org/drawingml/2006/main">
             <a:pPr algn="l">
-              <a:defRPr sz="1425" b="1">
+              <a:defRPr sz="1388" b="1">
                 <a:solidFill>
                   <a:srgbClr val="1F497D"/>
                 </a:solidFill>
@@ -9325,7 +10884,7 @@
               </a:defRPr>
             </a:pPr>
             <a:r>
-              <a:rPr sz="1425" b="1">
+              <a:rPr sz="1388" b="1">
                 <a:solidFill>
                   <a:srgbClr val="1F497D"/>
                 </a:solidFill>
@@ -9340,22 +10899,22 @@
       </p:sp>
       <p:sp>
         <p:nvSpPr>
-          <p:cNvPr id="17413" name="feasible-tech-body">
-            <a:extLst xmlns:a="http://schemas.openxmlformats.org/drawingml/2006/main">
-              <a:ext uri="{FF2B5EF4-FFF2-40B4-BE49-F238E27FC236}">
-                <a16:creationId xmlns:a16="http://schemas.microsoft.com/office/drawing/2014/main" id="{3239F65A-B788-4BD0-945E-7E6E3B3F5FB3}"/>
-              </a:ext>
-            </a:extLst>
-          </p:cNvPr>
-          <p:cNvSpPr>
-            <a:spLocks xmlns:a="http://schemas.openxmlformats.org/drawingml/2006/main" noGrp="1"/>
-          </p:cNvSpPr>
-          <p:nvPr/>
-        </p:nvSpPr>
-        <p:spPr>
-          <a:xfrm xmlns:a="http://schemas.openxmlformats.org/drawingml/2006/main">
-            <a:off x="609600" y="1724025"/>
-            <a:ext cx="3209925" cy="952500"/>
+          <p:cNvPr id="17413" name="feasibility-1-detail">
+            <a:extLst xmlns:a="http://schemas.openxmlformats.org/drawingml/2006/main">
+              <a:ext uri="{FF2B5EF4-FFF2-40B4-BE49-F238E27FC236}">
+                <a16:creationId xmlns:a16="http://schemas.microsoft.com/office/drawing/2014/main" id="{6BA3E2D2-914B-48B0-A7A0-DAD59A7F0C5D}"/>
+              </a:ext>
+            </a:extLst>
+          </p:cNvPr>
+          <p:cNvSpPr>
+            <a:spLocks xmlns:a="http://schemas.openxmlformats.org/drawingml/2006/main" noGrp="1"/>
+          </p:cNvSpPr>
+          <p:nvPr/>
+        </p:nvSpPr>
+        <p:spPr>
+          <a:xfrm xmlns:a="http://schemas.openxmlformats.org/drawingml/2006/main">
+            <a:off x="609600" y="1676400"/>
+            <a:ext cx="3238500" cy="714375"/>
           </a:xfrm>
           <a:prstGeom xmlns:a="http://schemas.openxmlformats.org/drawingml/2006/main" prst="rect">
             <a:avLst/>
@@ -9373,9 +10932,9 @@
           <a:lstStyle xmlns:a="http://schemas.openxmlformats.org/drawingml/2006/main"/>
           <a:p xmlns:a="http://schemas.openxmlformats.org/drawingml/2006/main">
             <a:pPr algn="l">
-              <a:defRPr sz="1463">
-                <a:solidFill>
-                  <a:srgbClr val="202020"/>
+              <a:defRPr sz="1313">
+                <a:solidFill>
+                  <a:srgbClr val="252525"/>
                 </a:solidFill>
                 <a:latin typeface="Arial"/>
                 <a:ea typeface="Arial"/>
@@ -9383,37 +10942,37 @@
               </a:defRPr>
             </a:pPr>
             <a:r>
-              <a:rPr sz="1463">
-                <a:solidFill>
-                  <a:srgbClr val="202020"/>
+              <a:rPr sz="1313">
+                <a:solidFill>
+                  <a:srgbClr val="252525"/>
                 </a:solidFill>
                 <a:latin typeface="Arial"/>
                 <a:ea typeface="Arial"/>
                 <a:cs typeface="Arial"/>
               </a:rPr>
-              <a:t>Open-source Python + Next.js already used. Batch report processing; no GPU or paid model API is configured.</a:t>
-            </a:r>
-          </a:p>
-        </p:txBody>
-      </p:sp>
-      <p:sp>
-        <p:nvSpPr>
-          <p:cNvPr id="17414" name="feasible-economic-title">
-            <a:extLst xmlns:a="http://schemas.openxmlformats.org/drawingml/2006/main">
-              <a:ext uri="{FF2B5EF4-FFF2-40B4-BE49-F238E27FC236}">
-                <a16:creationId xmlns:a16="http://schemas.microsoft.com/office/drawing/2014/main" id="{B53F03FB-B7E9-46DD-AFCC-0BC0CC569F36}"/>
-              </a:ext>
-            </a:extLst>
-          </p:cNvPr>
-          <p:cNvSpPr>
-            <a:spLocks xmlns:a="http://schemas.openxmlformats.org/drawingml/2006/main" noGrp="1"/>
-          </p:cNvSpPr>
-          <p:nvPr/>
-        </p:nvSpPr>
-        <p:spPr>
-          <a:xfrm xmlns:a="http://schemas.openxmlformats.org/drawingml/2006/main">
-            <a:off x="4295775" y="1381125"/>
-            <a:ext cx="3238500" cy="266700"/>
+              <a:t>Existing Python, pandas, scikit-learn and Next.js stack; batch processing, no GPU requirement.</a:t>
+            </a:r>
+          </a:p>
+        </p:txBody>
+      </p:sp>
+      <p:sp>
+        <p:nvSpPr>
+          <p:cNvPr id="17414" name="feasibility-2-title">
+            <a:extLst xmlns:a="http://schemas.openxmlformats.org/drawingml/2006/main">
+              <a:ext uri="{FF2B5EF4-FFF2-40B4-BE49-F238E27FC236}">
+                <a16:creationId xmlns:a16="http://schemas.microsoft.com/office/drawing/2014/main" id="{38E5D5C6-0CB6-4B64-8FCF-EC59E9F91E38}"/>
+              </a:ext>
+            </a:extLst>
+          </p:cNvPr>
+          <p:cNvSpPr>
+            <a:spLocks xmlns:a="http://schemas.openxmlformats.org/drawingml/2006/main" noGrp="1"/>
+          </p:cNvSpPr>
+          <p:nvPr/>
+        </p:nvSpPr>
+        <p:spPr>
+          <a:xfrm xmlns:a="http://schemas.openxmlformats.org/drawingml/2006/main">
+            <a:off x="4295775" y="1362075"/>
+            <a:ext cx="3238500" cy="247650"/>
           </a:xfrm>
           <a:prstGeom xmlns:a="http://schemas.openxmlformats.org/drawingml/2006/main" prst="rect">
             <a:avLst/>
@@ -9431,7 +10990,7 @@
           <a:lstStyle xmlns:a="http://schemas.openxmlformats.org/drawingml/2006/main"/>
           <a:p xmlns:a="http://schemas.openxmlformats.org/drawingml/2006/main">
             <a:pPr algn="l">
-              <a:defRPr sz="1425" b="1">
+              <a:defRPr sz="1388" b="1">
                 <a:solidFill>
                   <a:srgbClr val="1F497D"/>
                 </a:solidFill>
@@ -9441,7 +11000,7 @@
               </a:defRPr>
             </a:pPr>
             <a:r>
-              <a:rPr sz="1425" b="1">
+              <a:rPr sz="1388" b="1">
                 <a:solidFill>
                   <a:srgbClr val="1F497D"/>
                 </a:solidFill>
@@ -9456,22 +11015,22 @@
       </p:sp>
       <p:sp>
         <p:nvSpPr>
-          <p:cNvPr id="17415" name="feasible-economic-body">
-            <a:extLst xmlns:a="http://schemas.openxmlformats.org/drawingml/2006/main">
-              <a:ext uri="{FF2B5EF4-FFF2-40B4-BE49-F238E27FC236}">
-                <a16:creationId xmlns:a16="http://schemas.microsoft.com/office/drawing/2014/main" id="{7F09C1C0-440A-4D49-88F9-9AD7B2D778C1}"/>
-              </a:ext>
-            </a:extLst>
-          </p:cNvPr>
-          <p:cNvSpPr>
-            <a:spLocks xmlns:a="http://schemas.openxmlformats.org/drawingml/2006/main" noGrp="1"/>
-          </p:cNvSpPr>
-          <p:nvPr/>
-        </p:nvSpPr>
-        <p:spPr>
-          <a:xfrm xmlns:a="http://schemas.openxmlformats.org/drawingml/2006/main">
-            <a:off x="4295775" y="1724025"/>
-            <a:ext cx="3209925" cy="952500"/>
+          <p:cNvPr id="17415" name="feasibility-2-detail">
+            <a:extLst xmlns:a="http://schemas.openxmlformats.org/drawingml/2006/main">
+              <a:ext uri="{FF2B5EF4-FFF2-40B4-BE49-F238E27FC236}">
+                <a16:creationId xmlns:a16="http://schemas.microsoft.com/office/drawing/2014/main" id="{23DCBDD8-F9F4-4CF5-8734-B3A8F67C8D79}"/>
+              </a:ext>
+            </a:extLst>
+          </p:cNvPr>
+          <p:cNvSpPr>
+            <a:spLocks xmlns:a="http://schemas.openxmlformats.org/drawingml/2006/main" noGrp="1"/>
+          </p:cNvSpPr>
+          <p:nvPr/>
+        </p:nvSpPr>
+        <p:spPr>
+          <a:xfrm xmlns:a="http://schemas.openxmlformats.org/drawingml/2006/main">
+            <a:off x="4295775" y="1676400"/>
+            <a:ext cx="3238500" cy="714375"/>
           </a:xfrm>
           <a:prstGeom xmlns:a="http://schemas.openxmlformats.org/drawingml/2006/main" prst="rect">
             <a:avLst/>
@@ -9489,9 +11048,9 @@
           <a:lstStyle xmlns:a="http://schemas.openxmlformats.org/drawingml/2006/main"/>
           <a:p xmlns:a="http://schemas.openxmlformats.org/drawingml/2006/main">
             <a:pPr algn="l">
-              <a:defRPr sz="1463">
-                <a:solidFill>
-                  <a:srgbClr val="202020"/>
+              <a:defRPr sz="1313">
+                <a:solidFill>
+                  <a:srgbClr val="252525"/>
                 </a:solidFill>
                 <a:latin typeface="Arial"/>
                 <a:ea typeface="Arial"/>
@@ -9499,37 +11058,37 @@
               </a:defRPr>
             </a:pPr>
             <a:r>
-              <a:rPr sz="1463">
-                <a:solidFill>
-                  <a:srgbClr val="202020"/>
+              <a:rPr sz="1313">
+                <a:solidFill>
+                  <a:srgbClr val="252525"/>
                 </a:solidFill>
                 <a:latin typeface="Arial"/>
                 <a:ea typeface="Arial"/>
                 <a:cs typeface="Arial"/>
               </a:rPr>
-              <a:t>No new database or API subscription for this prototype. Hosting, support and review costs still need an operational estimate.</a:t>
-            </a:r>
-          </a:p>
-        </p:txBody>
-      </p:sp>
-      <p:sp>
-        <p:nvSpPr>
-          <p:cNvPr id="17416" name="feasible-operational-title">
-            <a:extLst xmlns:a="http://schemas.openxmlformats.org/drawingml/2006/main">
-              <a:ext uri="{FF2B5EF4-FFF2-40B4-BE49-F238E27FC236}">
-                <a16:creationId xmlns:a16="http://schemas.microsoft.com/office/drawing/2014/main" id="{78EDE92F-38C1-4518-ABDF-0D8FDB4DEC56}"/>
-              </a:ext>
-            </a:extLst>
-          </p:cNvPr>
-          <p:cNvSpPr>
-            <a:spLocks xmlns:a="http://schemas.openxmlformats.org/drawingml/2006/main" noGrp="1"/>
-          </p:cNvSpPr>
-          <p:nvPr/>
-        </p:nvSpPr>
-        <p:spPr>
-          <a:xfrm xmlns:a="http://schemas.openxmlformats.org/drawingml/2006/main">
-            <a:off x="7981950" y="1381125"/>
-            <a:ext cx="3238500" cy="266700"/>
+              <a:t>Open-source tooling; no paid model API. Estimate hosting and reviewer effort during pilot.</a:t>
+            </a:r>
+          </a:p>
+        </p:txBody>
+      </p:sp>
+      <p:sp>
+        <p:nvSpPr>
+          <p:cNvPr id="17416" name="feasibility-3-title">
+            <a:extLst xmlns:a="http://schemas.openxmlformats.org/drawingml/2006/main">
+              <a:ext uri="{FF2B5EF4-FFF2-40B4-BE49-F238E27FC236}">
+                <a16:creationId xmlns:a16="http://schemas.microsoft.com/office/drawing/2014/main" id="{DFC010F0-F474-495D-8414-D80954EB332E}"/>
+              </a:ext>
+            </a:extLst>
+          </p:cNvPr>
+          <p:cNvSpPr>
+            <a:spLocks xmlns:a="http://schemas.openxmlformats.org/drawingml/2006/main" noGrp="1"/>
+          </p:cNvSpPr>
+          <p:nvPr/>
+        </p:nvSpPr>
+        <p:spPr>
+          <a:xfrm xmlns:a="http://schemas.openxmlformats.org/drawingml/2006/main">
+            <a:off x="7981950" y="1362075"/>
+            <a:ext cx="3238500" cy="247650"/>
           </a:xfrm>
           <a:prstGeom xmlns:a="http://schemas.openxmlformats.org/drawingml/2006/main" prst="rect">
             <a:avLst/>
@@ -9547,7 +11106,7 @@
           <a:lstStyle xmlns:a="http://schemas.openxmlformats.org/drawingml/2006/main"/>
           <a:p xmlns:a="http://schemas.openxmlformats.org/drawingml/2006/main">
             <a:pPr algn="l">
-              <a:defRPr sz="1425" b="1">
+              <a:defRPr sz="1388" b="1">
                 <a:solidFill>
                   <a:srgbClr val="1F497D"/>
                 </a:solidFill>
@@ -9557,7 +11116,7 @@
               </a:defRPr>
             </a:pPr>
             <a:r>
-              <a:rPr sz="1425" b="1">
+              <a:rPr sz="1388" b="1">
                 <a:solidFill>
                   <a:srgbClr val="1F497D"/>
                 </a:solidFill>
@@ -9572,22 +11131,22 @@
       </p:sp>
       <p:sp>
         <p:nvSpPr>
-          <p:cNvPr id="17417" name="feasible-operational-body">
-            <a:extLst xmlns:a="http://schemas.openxmlformats.org/drawingml/2006/main">
-              <a:ext uri="{FF2B5EF4-FFF2-40B4-BE49-F238E27FC236}">
-                <a16:creationId xmlns:a16="http://schemas.microsoft.com/office/drawing/2014/main" id="{0A4DFFE2-CD39-4D1D-B2AC-05719863EEB5}"/>
-              </a:ext>
-            </a:extLst>
-          </p:cNvPr>
-          <p:cNvSpPr>
-            <a:spLocks xmlns:a="http://schemas.openxmlformats.org/drawingml/2006/main" noGrp="1"/>
-          </p:cNvSpPr>
-          <p:nvPr/>
-        </p:nvSpPr>
-        <p:spPr>
-          <a:xfrm xmlns:a="http://schemas.openxmlformats.org/drawingml/2006/main">
-            <a:off x="7981950" y="1724025"/>
-            <a:ext cx="3238500" cy="952500"/>
+          <p:cNvPr id="17417" name="feasibility-3-detail">
+            <a:extLst xmlns:a="http://schemas.openxmlformats.org/drawingml/2006/main">
+              <a:ext uri="{FF2B5EF4-FFF2-40B4-BE49-F238E27FC236}">
+                <a16:creationId xmlns:a16="http://schemas.microsoft.com/office/drawing/2014/main" id="{2A1FAAD3-E409-4248-8DF4-F164088144A3}"/>
+              </a:ext>
+            </a:extLst>
+          </p:cNvPr>
+          <p:cNvSpPr>
+            <a:spLocks xmlns:a="http://schemas.openxmlformats.org/drawingml/2006/main" noGrp="1"/>
+          </p:cNvSpPr>
+          <p:nvPr/>
+        </p:nvSpPr>
+        <p:spPr>
+          <a:xfrm xmlns:a="http://schemas.openxmlformats.org/drawingml/2006/main">
+            <a:off x="7981950" y="1676400"/>
+            <a:ext cx="3238500" cy="714375"/>
           </a:xfrm>
           <a:prstGeom xmlns:a="http://schemas.openxmlformats.org/drawingml/2006/main" prst="rect">
             <a:avLst/>
@@ -9605,9 +11164,9 @@
           <a:lstStyle xmlns:a="http://schemas.openxmlformats.org/drawingml/2006/main"/>
           <a:p xmlns:a="http://schemas.openxmlformats.org/drawingml/2006/main">
             <a:pPr algn="l">
-              <a:defRPr sz="1463">
-                <a:solidFill>
-                  <a:srgbClr val="202020"/>
+              <a:defRPr sz="1313">
+                <a:solidFill>
+                  <a:srgbClr val="252525"/>
                 </a:solidFill>
                 <a:latin typeface="Arial"/>
                 <a:ea typeface="Arial"/>
@@ -9615,15 +11174,15 @@
               </a:defRPr>
             </a:pPr>
             <a:r>
-              <a:rPr sz="1463">
-                <a:solidFill>
-                  <a:srgbClr val="202020"/>
+              <a:rPr sz="1313">
+                <a:solidFill>
+                  <a:srgbClr val="252525"/>
                 </a:solidFill>
                 <a:latin typeface="Arial"/>
                 <a:ea typeface="Arial"/>
                 <a:cs typeface="Arial"/>
               </a:rPr>
-              <a:t>Fits monthly report review. Analysts retain authority; there is no ministry alert or intervention integration.</a:t>
+              <a:t>Monthly, analyst-led queue. No external alert dispatch; notifications follow roles and thresholds.</a:t>
             </a:r>
           </a:p>
         </p:txBody>
@@ -9633,19 +11192,19 @@
           <p:cNvPr id="17418" name="feasibility-separator-1">
             <a:extLst xmlns:a="http://schemas.openxmlformats.org/drawingml/2006/main">
               <a:ext uri="{FF2B5EF4-FFF2-40B4-BE49-F238E27FC236}">
-                <a16:creationId xmlns:a16="http://schemas.microsoft.com/office/drawing/2014/main" id="{EAEFA89A-2475-46BA-88B3-419BF282A5D5}"/>
-              </a:ext>
-            </a:extLst>
-          </p:cNvPr>
-          <p:cNvSpPr>
-            <a:spLocks xmlns:a="http://schemas.openxmlformats.org/drawingml/2006/main" noGrp="1"/>
-          </p:cNvSpPr>
-          <p:nvPr/>
-        </p:nvSpPr>
-        <p:spPr>
-          <a:xfrm xmlns:a="http://schemas.openxmlformats.org/drawingml/2006/main">
-            <a:off x="4095750" y="1400175"/>
-            <a:ext cx="11906" cy="1266825"/>
+                <a16:creationId xmlns:a16="http://schemas.microsoft.com/office/drawing/2014/main" id="{EB2E7C63-6B03-4AC1-9E31-DD7D25010C0E}"/>
+              </a:ext>
+            </a:extLst>
+          </p:cNvPr>
+          <p:cNvSpPr>
+            <a:spLocks xmlns:a="http://schemas.openxmlformats.org/drawingml/2006/main" noGrp="1"/>
+          </p:cNvSpPr>
+          <p:nvPr/>
+        </p:nvSpPr>
+        <p:spPr>
+          <a:xfrm xmlns:a="http://schemas.openxmlformats.org/drawingml/2006/main">
+            <a:off x="4095750" y="1371600"/>
+            <a:ext cx="11906" cy="1066800"/>
           </a:xfrm>
           <a:prstGeom xmlns:a="http://schemas.openxmlformats.org/drawingml/2006/main" prst="rect">
             <a:avLst/>
@@ -9664,19 +11223,19 @@
           <p:cNvPr id="17419" name="feasibility-separator-2">
             <a:extLst xmlns:a="http://schemas.openxmlformats.org/drawingml/2006/main">
               <a:ext uri="{FF2B5EF4-FFF2-40B4-BE49-F238E27FC236}">
-                <a16:creationId xmlns:a16="http://schemas.microsoft.com/office/drawing/2014/main" id="{826A5832-BC9B-4363-BA6C-8217710116FC}"/>
-              </a:ext>
-            </a:extLst>
-          </p:cNvPr>
-          <p:cNvSpPr>
-            <a:spLocks xmlns:a="http://schemas.openxmlformats.org/drawingml/2006/main" noGrp="1"/>
-          </p:cNvSpPr>
-          <p:nvPr/>
-        </p:nvSpPr>
-        <p:spPr>
-          <a:xfrm xmlns:a="http://schemas.openxmlformats.org/drawingml/2006/main">
-            <a:off x="7781925" y="1400175"/>
-            <a:ext cx="11906" cy="1266825"/>
+                <a16:creationId xmlns:a16="http://schemas.microsoft.com/office/drawing/2014/main" id="{0EE0A428-FE85-4FC4-AA92-C84DCE0BEE03}"/>
+              </a:ext>
+            </a:extLst>
+          </p:cNvPr>
+          <p:cNvSpPr>
+            <a:spLocks xmlns:a="http://schemas.openxmlformats.org/drawingml/2006/main" noGrp="1"/>
+          </p:cNvSpPr>
+          <p:nvPr/>
+        </p:nvSpPr>
+        <p:spPr>
+          <a:xfrm xmlns:a="http://schemas.openxmlformats.org/drawingml/2006/main">
+            <a:off x="7781925" y="1371600"/>
+            <a:ext cx="11906" cy="1066800"/>
           </a:xfrm>
           <a:prstGeom xmlns:a="http://schemas.openxmlformats.org/drawingml/2006/main" prst="rect">
             <a:avLst/>
@@ -9692,22 +11251,22 @@
       </p:sp>
       <p:sp>
         <p:nvSpPr>
-          <p:cNvPr id="17420" name="feasibility-divider">
-            <a:extLst xmlns:a="http://schemas.openxmlformats.org/drawingml/2006/main">
-              <a:ext uri="{FF2B5EF4-FFF2-40B4-BE49-F238E27FC236}">
-                <a16:creationId xmlns:a16="http://schemas.microsoft.com/office/drawing/2014/main" id="{C64655AB-45E1-4809-8162-8411B74A39D0}"/>
-              </a:ext>
-            </a:extLst>
-          </p:cNvPr>
-          <p:cNvSpPr>
-            <a:spLocks xmlns:a="http://schemas.openxmlformats.org/drawingml/2006/main" noGrp="1"/>
-          </p:cNvSpPr>
-          <p:nvPr/>
-        </p:nvSpPr>
-        <p:spPr>
-          <a:xfrm xmlns:a="http://schemas.openxmlformats.org/drawingml/2006/main">
-            <a:off x="609600" y="2867025"/>
-            <a:ext cx="10972800" cy="14288"/>
+          <p:cNvPr id="17420" name="feasibility-top-divider">
+            <a:extLst xmlns:a="http://schemas.openxmlformats.org/drawingml/2006/main">
+              <a:ext uri="{FF2B5EF4-FFF2-40B4-BE49-F238E27FC236}">
+                <a16:creationId xmlns:a16="http://schemas.microsoft.com/office/drawing/2014/main" id="{14F53686-17CF-4570-8B12-5AE5E0BBAC13}"/>
+              </a:ext>
+            </a:extLst>
+          </p:cNvPr>
+          <p:cNvSpPr>
+            <a:spLocks xmlns:a="http://schemas.openxmlformats.org/drawingml/2006/main" noGrp="1"/>
+          </p:cNvSpPr>
+          <p:nvPr/>
+        </p:nvSpPr>
+        <p:spPr>
+          <a:xfrm xmlns:a="http://schemas.openxmlformats.org/drawingml/2006/main">
+            <a:off x="609600" y="2571750"/>
+            <a:ext cx="10972800" cy="9525"/>
           </a:xfrm>
           <a:prstGeom xmlns:a="http://schemas.openxmlformats.org/drawingml/2006/main" prst="rect">
             <a:avLst/>
@@ -9723,22 +11282,22 @@
       </p:sp>
       <p:sp>
         <p:nvSpPr>
-          <p:cNvPr id="17421" name="challenge-response-title">
-            <a:extLst xmlns:a="http://schemas.openxmlformats.org/drawingml/2006/main">
-              <a:ext uri="{FF2B5EF4-FFF2-40B4-BE49-F238E27FC236}">
-                <a16:creationId xmlns:a16="http://schemas.microsoft.com/office/drawing/2014/main" id="{97C32B34-D21A-45A2-98CB-CCF68B1ACCC8}"/>
-              </a:ext>
-            </a:extLst>
-          </p:cNvPr>
-          <p:cNvSpPr>
-            <a:spLocks xmlns:a="http://schemas.openxmlformats.org/drawingml/2006/main" noGrp="1"/>
-          </p:cNvSpPr>
-          <p:nvPr/>
-        </p:nvSpPr>
-        <p:spPr>
-          <a:xfrm xmlns:a="http://schemas.openxmlformats.org/drawingml/2006/main">
-            <a:off x="609600" y="3028950"/>
-            <a:ext cx="10972800" cy="266700"/>
+          <p:cNvPr id="17421" name="feasibility-timeline-title">
+            <a:extLst xmlns:a="http://schemas.openxmlformats.org/drawingml/2006/main">
+              <a:ext uri="{FF2B5EF4-FFF2-40B4-BE49-F238E27FC236}">
+                <a16:creationId xmlns:a16="http://schemas.microsoft.com/office/drawing/2014/main" id="{024CBB5F-1AD8-4DCE-8263-06C00AABD8F5}"/>
+              </a:ext>
+            </a:extLst>
+          </p:cNvPr>
+          <p:cNvSpPr>
+            <a:spLocks xmlns:a="http://schemas.openxmlformats.org/drawingml/2006/main" noGrp="1"/>
+          </p:cNvSpPr>
+          <p:nvPr/>
+        </p:nvSpPr>
+        <p:spPr>
+          <a:xfrm xmlns:a="http://schemas.openxmlformats.org/drawingml/2006/main">
+            <a:off x="609600" y="2705100"/>
+            <a:ext cx="10972800" cy="247650"/>
           </a:xfrm>
           <a:prstGeom xmlns:a="http://schemas.openxmlformats.org/drawingml/2006/main" prst="rect">
             <a:avLst/>
@@ -9756,7 +11315,7 @@
           <a:lstStyle xmlns:a="http://schemas.openxmlformats.org/drawingml/2006/main"/>
           <a:p xmlns:a="http://schemas.openxmlformats.org/drawingml/2006/main">
             <a:pPr algn="l">
-              <a:defRPr sz="1500" b="1">
+              <a:defRPr sz="1388" b="1">
                 <a:solidFill>
                   <a:srgbClr val="1F497D"/>
                 </a:solidFill>
@@ -9766,7 +11325,7 @@
               </a:defRPr>
             </a:pPr>
             <a:r>
-              <a:rPr sz="1500" b="1">
+              <a:rPr sz="1388" b="1">
                 <a:solidFill>
                   <a:srgbClr val="1F497D"/>
                 </a:solidFill>
@@ -9774,29 +11333,62 @@
                 <a:ea typeface="Arial"/>
                 <a:cs typeface="Arial"/>
               </a:rPr>
-              <a:t>CHALLENGE → RESPONSE</a:t>
-            </a:r>
-          </a:p>
-        </p:txBody>
-      </p:sp>
-      <p:sp>
-        <p:nvSpPr>
-          <p:cNvPr id="17422" name="risk-1-issue">
-            <a:extLst xmlns:a="http://schemas.openxmlformats.org/drawingml/2006/main">
-              <a:ext uri="{FF2B5EF4-FFF2-40B4-BE49-F238E27FC236}">
-                <a16:creationId xmlns:a16="http://schemas.microsoft.com/office/drawing/2014/main" id="{BD9C8482-AED2-4238-AD97-ED9E64F6CD36}"/>
-              </a:ext>
-            </a:extLst>
-          </p:cNvPr>
-          <p:cNvSpPr>
-            <a:spLocks xmlns:a="http://schemas.openxmlformats.org/drawingml/2006/main" noGrp="1"/>
-          </p:cNvSpPr>
-          <p:nvPr/>
-        </p:nvSpPr>
-        <p:spPr>
-          <a:xfrm xmlns:a="http://schemas.openxmlformats.org/drawingml/2006/main">
-            <a:off x="666750" y="3429000"/>
-            <a:ext cx="2714625" cy="428625"/>
+              <a:t>30-DAY BUILD PATH  •  TARGETS, NOT CLAIMED AS COMPLETE</a:t>
+            </a:r>
+          </a:p>
+        </p:txBody>
+      </p:sp>
+      <p:sp>
+        <p:nvSpPr>
+          <p:cNvPr id="17422" name="build-week-1-surface">
+            <a:extLst xmlns:a="http://schemas.openxmlformats.org/drawingml/2006/main">
+              <a:ext uri="{FF2B5EF4-FFF2-40B4-BE49-F238E27FC236}">
+                <a16:creationId xmlns:a16="http://schemas.microsoft.com/office/drawing/2014/main" id="{A0A3380D-FB16-40AF-A45D-924D55835E2B}"/>
+              </a:ext>
+            </a:extLst>
+          </p:cNvPr>
+          <p:cNvSpPr>
+            <a:spLocks xmlns:a="http://schemas.openxmlformats.org/drawingml/2006/main" noGrp="1"/>
+          </p:cNvSpPr>
+          <p:nvPr/>
+        </p:nvSpPr>
+        <p:spPr>
+          <a:xfrm xmlns:a="http://schemas.openxmlformats.org/drawingml/2006/main">
+            <a:off x="609600" y="3038475"/>
+            <a:ext cx="2352675" cy="647700"/>
+          </a:xfrm>
+          <a:prstGeom xmlns:a="http://schemas.openxmlformats.org/drawingml/2006/main" prst="rect">
+            <a:avLst/>
+          </a:prstGeom>
+          <a:solidFill xmlns:a="http://schemas.openxmlformats.org/drawingml/2006/main">
+            <a:srgbClr val="F4F7FA"/>
+          </a:solidFill>
+          <a:ln xmlns:a="http://schemas.openxmlformats.org/drawingml/2006/main" w="9525">
+            <a:solidFill>
+              <a:srgbClr val="C4D2DD"/>
+            </a:solidFill>
+            <a:prstDash val="solid"/>
+          </a:ln>
+        </p:spPr>
+      </p:sp>
+      <p:sp>
+        <p:nvSpPr>
+          <p:cNvPr id="17423" name="build-week-1-title">
+            <a:extLst xmlns:a="http://schemas.openxmlformats.org/drawingml/2006/main">
+              <a:ext uri="{FF2B5EF4-FFF2-40B4-BE49-F238E27FC236}">
+                <a16:creationId xmlns:a16="http://schemas.microsoft.com/office/drawing/2014/main" id="{AE1BFC14-E390-4C33-8E8B-D73954F5968C}"/>
+              </a:ext>
+            </a:extLst>
+          </p:cNvPr>
+          <p:cNvSpPr>
+            <a:spLocks xmlns:a="http://schemas.openxmlformats.org/drawingml/2006/main" noGrp="1"/>
+          </p:cNvSpPr>
+          <p:nvPr/>
+        </p:nvSpPr>
+        <p:spPr>
+          <a:xfrm xmlns:a="http://schemas.openxmlformats.org/drawingml/2006/main">
+            <a:off x="704850" y="3105150"/>
+            <a:ext cx="2162175" cy="209550"/>
           </a:xfrm>
           <a:prstGeom xmlns:a="http://schemas.openxmlformats.org/drawingml/2006/main" prst="rect">
             <a:avLst/>
@@ -9814,9 +11406,9 @@
           <a:lstStyle xmlns:a="http://schemas.openxmlformats.org/drawingml/2006/main"/>
           <a:p xmlns:a="http://schemas.openxmlformats.org/drawingml/2006/main">
             <a:pPr algn="l">
-              <a:defRPr sz="1388" b="1">
-                <a:solidFill>
-                  <a:srgbClr val="252525"/>
+              <a:defRPr sz="1238" b="1">
+                <a:solidFill>
+                  <a:srgbClr val="1F497D"/>
                 </a:solidFill>
                 <a:latin typeface="Arial"/>
                 <a:ea typeface="Arial"/>
@@ -9824,37 +11416,37 @@
               </a:defRPr>
             </a:pPr>
             <a:r>
-              <a:rPr sz="1388" b="1">
-                <a:solidFill>
-                  <a:srgbClr val="252525"/>
+              <a:rPr sz="1238" b="1">
+                <a:solidFill>
+                  <a:srgbClr val="1F497D"/>
                 </a:solidFill>
                 <a:latin typeface="Arial"/>
                 <a:ea typeface="Arial"/>
                 <a:cs typeface="Arial"/>
               </a:rPr>
-              <a:t>Only four report months</a:t>
-            </a:r>
-          </a:p>
-        </p:txBody>
-      </p:sp>
-      <p:sp>
-        <p:nvSpPr>
-          <p:cNvPr id="17423" name="risk-1-response">
-            <a:extLst xmlns:a="http://schemas.openxmlformats.org/drawingml/2006/main">
-              <a:ext uri="{FF2B5EF4-FFF2-40B4-BE49-F238E27FC236}">
-                <a16:creationId xmlns:a16="http://schemas.microsoft.com/office/drawing/2014/main" id="{C570FFD9-CE9D-43D2-B12B-A8300177A703}"/>
-              </a:ext>
-            </a:extLst>
-          </p:cNvPr>
-          <p:cNvSpPr>
-            <a:spLocks xmlns:a="http://schemas.openxmlformats.org/drawingml/2006/main" noGrp="1"/>
-          </p:cNvSpPr>
-          <p:nvPr/>
-        </p:nvSpPr>
-        <p:spPr>
-          <a:xfrm xmlns:a="http://schemas.openxmlformats.org/drawingml/2006/main">
-            <a:off x="3543300" y="3429000"/>
-            <a:ext cx="7981950" cy="428625"/>
+              <a:t>WEEK 1</a:t>
+            </a:r>
+          </a:p>
+        </p:txBody>
+      </p:sp>
+      <p:sp>
+        <p:nvSpPr>
+          <p:cNvPr id="17424" name="build-week-1-detail">
+            <a:extLst xmlns:a="http://schemas.openxmlformats.org/drawingml/2006/main">
+              <a:ext uri="{FF2B5EF4-FFF2-40B4-BE49-F238E27FC236}">
+                <a16:creationId xmlns:a16="http://schemas.microsoft.com/office/drawing/2014/main" id="{ADAD4A48-BAA5-4871-985C-42EF301BAC24}"/>
+              </a:ext>
+            </a:extLst>
+          </p:cNvPr>
+          <p:cNvSpPr>
+            <a:spLocks xmlns:a="http://schemas.openxmlformats.org/drawingml/2006/main" noGrp="1"/>
+          </p:cNvSpPr>
+          <p:nvPr/>
+        </p:nvSpPr>
+        <p:spPr>
+          <a:xfrm xmlns:a="http://schemas.openxmlformats.org/drawingml/2006/main">
+            <a:off x="704850" y="3333750"/>
+            <a:ext cx="2162175" cy="304800"/>
           </a:xfrm>
           <a:prstGeom xmlns:a="http://schemas.openxmlformats.org/drawingml/2006/main" prst="rect">
             <a:avLst/>
@@ -9867,12 +11459,161 @@
         </p:spPr>
         <p:txBody>
           <a:bodyPr xmlns:a="http://schemas.openxmlformats.org/drawingml/2006/main" wrap="square" lIns="0" tIns="0" rIns="0" bIns="0" anchor="t">
+            <a:normAutofit fontScale="91912"/>
+          </a:bodyPr>
+          <a:lstStyle xmlns:a="http://schemas.openxmlformats.org/drawingml/2006/main"/>
+          <a:p xmlns:a="http://schemas.openxmlformats.org/drawingml/2006/main">
+            <a:pPr algn="l">
+              <a:defRPr sz="1088">
+                <a:solidFill>
+                  <a:srgbClr val="252525"/>
+                </a:solidFill>
+                <a:latin typeface="Arial"/>
+                <a:ea typeface="Arial"/>
+                <a:cs typeface="Arial"/>
+              </a:defRPr>
+            </a:pPr>
+            <a:r>
+              <a:rPr sz="1088">
+                <a:solidFill>
+                  <a:srgbClr val="252525"/>
+                </a:solidFill>
+                <a:latin typeface="Arial"/>
+                <a:ea typeface="Arial"/>
+                <a:cs typeface="Arial"/>
+              </a:rPr>
+              <a:t>Close source/reconciliation gaps; wire quality holds.</a:t>
+            </a:r>
+          </a:p>
+        </p:txBody>
+      </p:sp>
+      <p:sp>
+        <p:nvSpPr>
+          <p:cNvPr id="17425" name="build-week-2-surface">
+            <a:extLst xmlns:a="http://schemas.openxmlformats.org/drawingml/2006/main">
+              <a:ext uri="{FF2B5EF4-FFF2-40B4-BE49-F238E27FC236}">
+                <a16:creationId xmlns:a16="http://schemas.microsoft.com/office/drawing/2014/main" id="{9491B57D-28E0-4E7A-AA4D-630A00712391}"/>
+              </a:ext>
+            </a:extLst>
+          </p:cNvPr>
+          <p:cNvSpPr>
+            <a:spLocks xmlns:a="http://schemas.openxmlformats.org/drawingml/2006/main" noGrp="1"/>
+          </p:cNvSpPr>
+          <p:nvPr/>
+        </p:nvSpPr>
+        <p:spPr>
+          <a:xfrm xmlns:a="http://schemas.openxmlformats.org/drawingml/2006/main">
+            <a:off x="3381375" y="3038475"/>
+            <a:ext cx="2352675" cy="647700"/>
+          </a:xfrm>
+          <a:prstGeom xmlns:a="http://schemas.openxmlformats.org/drawingml/2006/main" prst="rect">
+            <a:avLst/>
+          </a:prstGeom>
+          <a:solidFill xmlns:a="http://schemas.openxmlformats.org/drawingml/2006/main">
+            <a:srgbClr val="F4F7FA"/>
+          </a:solidFill>
+          <a:ln xmlns:a="http://schemas.openxmlformats.org/drawingml/2006/main" w="9525">
+            <a:solidFill>
+              <a:srgbClr val="C4D2DD"/>
+            </a:solidFill>
+            <a:prstDash val="solid"/>
+          </a:ln>
+        </p:spPr>
+      </p:sp>
+      <p:sp>
+        <p:nvSpPr>
+          <p:cNvPr id="17426" name="build-week-2-title">
+            <a:extLst xmlns:a="http://schemas.openxmlformats.org/drawingml/2006/main">
+              <a:ext uri="{FF2B5EF4-FFF2-40B4-BE49-F238E27FC236}">
+                <a16:creationId xmlns:a16="http://schemas.microsoft.com/office/drawing/2014/main" id="{04E7A605-D944-4147-9715-97F45BC0B0EA}"/>
+              </a:ext>
+            </a:extLst>
+          </p:cNvPr>
+          <p:cNvSpPr>
+            <a:spLocks xmlns:a="http://schemas.openxmlformats.org/drawingml/2006/main" noGrp="1"/>
+          </p:cNvSpPr>
+          <p:nvPr/>
+        </p:nvSpPr>
+        <p:spPr>
+          <a:xfrm xmlns:a="http://schemas.openxmlformats.org/drawingml/2006/main">
+            <a:off x="3476625" y="3105150"/>
+            <a:ext cx="2162175" cy="209550"/>
+          </a:xfrm>
+          <a:prstGeom xmlns:a="http://schemas.openxmlformats.org/drawingml/2006/main" prst="rect">
+            <a:avLst/>
+          </a:prstGeom>
+          <a:noFill xmlns:a="http://schemas.openxmlformats.org/drawingml/2006/main"/>
+          <a:ln xmlns:a="http://schemas.openxmlformats.org/drawingml/2006/main" w="0">
+            <a:noFill/>
+            <a:prstDash val="solid"/>
+          </a:ln>
+        </p:spPr>
+        <p:txBody>
+          <a:bodyPr xmlns:a="http://schemas.openxmlformats.org/drawingml/2006/main" wrap="square" lIns="0" tIns="0" rIns="0" bIns="0" anchor="t">
             <a:normAutofit fontScale="100000"/>
           </a:bodyPr>
           <a:lstStyle xmlns:a="http://schemas.openxmlformats.org/drawingml/2006/main"/>
           <a:p xmlns:a="http://schemas.openxmlformats.org/drawingml/2006/main">
             <a:pPr algn="l">
-              <a:defRPr sz="1388">
+              <a:defRPr sz="1238" b="1">
+                <a:solidFill>
+                  <a:srgbClr val="1F497D"/>
+                </a:solidFill>
+                <a:latin typeface="Arial"/>
+                <a:ea typeface="Arial"/>
+                <a:cs typeface="Arial"/>
+              </a:defRPr>
+            </a:pPr>
+            <a:r>
+              <a:rPr sz="1238" b="1">
+                <a:solidFill>
+                  <a:srgbClr val="1F497D"/>
+                </a:solidFill>
+                <a:latin typeface="Arial"/>
+                <a:ea typeface="Arial"/>
+                <a:cs typeface="Arial"/>
+              </a:rPr>
+              <a:t>WEEK 2</a:t>
+            </a:r>
+          </a:p>
+        </p:txBody>
+      </p:sp>
+      <p:sp>
+        <p:nvSpPr>
+          <p:cNvPr id="17427" name="build-week-2-detail">
+            <a:extLst xmlns:a="http://schemas.openxmlformats.org/drawingml/2006/main">
+              <a:ext uri="{FF2B5EF4-FFF2-40B4-BE49-F238E27FC236}">
+                <a16:creationId xmlns:a16="http://schemas.microsoft.com/office/drawing/2014/main" id="{43C3E5C6-F36E-4969-859A-0DD499DB8990}"/>
+              </a:ext>
+            </a:extLst>
+          </p:cNvPr>
+          <p:cNvSpPr>
+            <a:spLocks xmlns:a="http://schemas.openxmlformats.org/drawingml/2006/main" noGrp="1"/>
+          </p:cNvSpPr>
+          <p:nvPr/>
+        </p:nvSpPr>
+        <p:spPr>
+          <a:xfrm xmlns:a="http://schemas.openxmlformats.org/drawingml/2006/main">
+            <a:off x="3476625" y="3333750"/>
+            <a:ext cx="2162175" cy="304800"/>
+          </a:xfrm>
+          <a:prstGeom xmlns:a="http://schemas.openxmlformats.org/drawingml/2006/main" prst="rect">
+            <a:avLst/>
+          </a:prstGeom>
+          <a:noFill xmlns:a="http://schemas.openxmlformats.org/drawingml/2006/main"/>
+          <a:ln xmlns:a="http://schemas.openxmlformats.org/drawingml/2006/main" w="0">
+            <a:noFill/>
+            <a:prstDash val="solid"/>
+          </a:ln>
+        </p:spPr>
+        <p:txBody>
+          <a:bodyPr xmlns:a="http://schemas.openxmlformats.org/drawingml/2006/main" wrap="square" lIns="0" tIns="0" rIns="0" bIns="0" anchor="t">
+            <a:normAutofit fontScale="91912"/>
+          </a:bodyPr>
+          <a:lstStyle xmlns:a="http://schemas.openxmlformats.org/drawingml/2006/main"/>
+          <a:p xmlns:a="http://schemas.openxmlformats.org/drawingml/2006/main">
+            <a:pPr algn="l">
+              <a:defRPr sz="1088">
                 <a:solidFill>
                   <a:srgbClr val="252525"/>
                 </a:solidFill>
@@ -9882,7 +11623,7 @@
               </a:defRPr>
             </a:pPr>
             <a:r>
-              <a:rPr sz="1388">
+              <a:rPr sz="1088">
                 <a:solidFill>
                   <a:srgbClr val="252525"/>
                 </a:solidFill>
@@ -9890,28 +11631,500 @@
                 <a:ea typeface="Arial"/>
                 <a:cs typeface="Arial"/>
               </a:rPr>
-              <a:t>Add older reports; repeat time-forward validation across multiple months.</a:t>
-            </a:r>
-          </a:p>
-        </p:txBody>
-      </p:sp>
-      <p:sp>
-        <p:nvSpPr>
-          <p:cNvPr id="17424" name="risk-divider-1">
-            <a:extLst xmlns:a="http://schemas.openxmlformats.org/drawingml/2006/main">
-              <a:ext uri="{FF2B5EF4-FFF2-40B4-BE49-F238E27FC236}">
-                <a16:creationId xmlns:a16="http://schemas.microsoft.com/office/drawing/2014/main" id="{2A13897D-5781-448A-97F5-5BA3F211D72A}"/>
-              </a:ext>
-            </a:extLst>
-          </p:cNvPr>
-          <p:cNvSpPr>
-            <a:spLocks xmlns:a="http://schemas.openxmlformats.org/drawingml/2006/main" noGrp="1"/>
-          </p:cNvSpPr>
-          <p:nvPr/>
-        </p:nvSpPr>
-        <p:spPr>
-          <a:xfrm xmlns:a="http://schemas.openxmlformats.org/drawingml/2006/main">
-            <a:off x="666750" y="3895725"/>
+              <a:t>Re-run ordered and project-disjoint benchmarks; compare CUF features.</a:t>
+            </a:r>
+          </a:p>
+        </p:txBody>
+      </p:sp>
+      <p:sp>
+        <p:nvSpPr>
+          <p:cNvPr id="17428" name="build-week-3-surface">
+            <a:extLst xmlns:a="http://schemas.openxmlformats.org/drawingml/2006/main">
+              <a:ext uri="{FF2B5EF4-FFF2-40B4-BE49-F238E27FC236}">
+                <a16:creationId xmlns:a16="http://schemas.microsoft.com/office/drawing/2014/main" id="{62EF33B7-7940-4CD1-9012-449259526900}"/>
+              </a:ext>
+            </a:extLst>
+          </p:cNvPr>
+          <p:cNvSpPr>
+            <a:spLocks xmlns:a="http://schemas.openxmlformats.org/drawingml/2006/main" noGrp="1"/>
+          </p:cNvSpPr>
+          <p:nvPr/>
+        </p:nvSpPr>
+        <p:spPr>
+          <a:xfrm xmlns:a="http://schemas.openxmlformats.org/drawingml/2006/main">
+            <a:off x="6153150" y="3038475"/>
+            <a:ext cx="2352675" cy="647700"/>
+          </a:xfrm>
+          <a:prstGeom xmlns:a="http://schemas.openxmlformats.org/drawingml/2006/main" prst="rect">
+            <a:avLst/>
+          </a:prstGeom>
+          <a:solidFill xmlns:a="http://schemas.openxmlformats.org/drawingml/2006/main">
+            <a:srgbClr val="F4F7FA"/>
+          </a:solidFill>
+          <a:ln xmlns:a="http://schemas.openxmlformats.org/drawingml/2006/main" w="9525">
+            <a:solidFill>
+              <a:srgbClr val="C4D2DD"/>
+            </a:solidFill>
+            <a:prstDash val="solid"/>
+          </a:ln>
+        </p:spPr>
+      </p:sp>
+      <p:sp>
+        <p:nvSpPr>
+          <p:cNvPr id="17429" name="build-week-3-title">
+            <a:extLst xmlns:a="http://schemas.openxmlformats.org/drawingml/2006/main">
+              <a:ext uri="{FF2B5EF4-FFF2-40B4-BE49-F238E27FC236}">
+                <a16:creationId xmlns:a16="http://schemas.microsoft.com/office/drawing/2014/main" id="{81064263-4CFB-4E7A-AACE-F9643C78309C}"/>
+              </a:ext>
+            </a:extLst>
+          </p:cNvPr>
+          <p:cNvSpPr>
+            <a:spLocks xmlns:a="http://schemas.openxmlformats.org/drawingml/2006/main" noGrp="1"/>
+          </p:cNvSpPr>
+          <p:nvPr/>
+        </p:nvSpPr>
+        <p:spPr>
+          <a:xfrm xmlns:a="http://schemas.openxmlformats.org/drawingml/2006/main">
+            <a:off x="6248400" y="3105150"/>
+            <a:ext cx="2162175" cy="209550"/>
+          </a:xfrm>
+          <a:prstGeom xmlns:a="http://schemas.openxmlformats.org/drawingml/2006/main" prst="rect">
+            <a:avLst/>
+          </a:prstGeom>
+          <a:noFill xmlns:a="http://schemas.openxmlformats.org/drawingml/2006/main"/>
+          <a:ln xmlns:a="http://schemas.openxmlformats.org/drawingml/2006/main" w="0">
+            <a:noFill/>
+            <a:prstDash val="solid"/>
+          </a:ln>
+        </p:spPr>
+        <p:txBody>
+          <a:bodyPr xmlns:a="http://schemas.openxmlformats.org/drawingml/2006/main" wrap="square" lIns="0" tIns="0" rIns="0" bIns="0" anchor="t">
+            <a:normAutofit fontScale="100000"/>
+          </a:bodyPr>
+          <a:lstStyle xmlns:a="http://schemas.openxmlformats.org/drawingml/2006/main"/>
+          <a:p xmlns:a="http://schemas.openxmlformats.org/drawingml/2006/main">
+            <a:pPr algn="l">
+              <a:defRPr sz="1238" b="1">
+                <a:solidFill>
+                  <a:srgbClr val="1F497D"/>
+                </a:solidFill>
+                <a:latin typeface="Arial"/>
+                <a:ea typeface="Arial"/>
+                <a:cs typeface="Arial"/>
+              </a:defRPr>
+            </a:pPr>
+            <a:r>
+              <a:rPr sz="1238" b="1">
+                <a:solidFill>
+                  <a:srgbClr val="1F497D"/>
+                </a:solidFill>
+                <a:latin typeface="Arial"/>
+                <a:ea typeface="Arial"/>
+                <a:cs typeface="Arial"/>
+              </a:rPr>
+              <a:t>WEEK 3</a:t>
+            </a:r>
+          </a:p>
+        </p:txBody>
+      </p:sp>
+      <p:sp>
+        <p:nvSpPr>
+          <p:cNvPr id="17430" name="build-week-3-detail">
+            <a:extLst xmlns:a="http://schemas.openxmlformats.org/drawingml/2006/main">
+              <a:ext uri="{FF2B5EF4-FFF2-40B4-BE49-F238E27FC236}">
+                <a16:creationId xmlns:a16="http://schemas.microsoft.com/office/drawing/2014/main" id="{E0F727F7-F15D-45E3-9C1C-38B38BE4ACF5}"/>
+              </a:ext>
+            </a:extLst>
+          </p:cNvPr>
+          <p:cNvSpPr>
+            <a:spLocks xmlns:a="http://schemas.openxmlformats.org/drawingml/2006/main" noGrp="1"/>
+          </p:cNvSpPr>
+          <p:nvPr/>
+        </p:nvSpPr>
+        <p:spPr>
+          <a:xfrm xmlns:a="http://schemas.openxmlformats.org/drawingml/2006/main">
+            <a:off x="6248400" y="3333750"/>
+            <a:ext cx="2162175" cy="304800"/>
+          </a:xfrm>
+          <a:prstGeom xmlns:a="http://schemas.openxmlformats.org/drawingml/2006/main" prst="rect">
+            <a:avLst/>
+          </a:prstGeom>
+          <a:noFill xmlns:a="http://schemas.openxmlformats.org/drawingml/2006/main"/>
+          <a:ln xmlns:a="http://schemas.openxmlformats.org/drawingml/2006/main" w="0">
+            <a:noFill/>
+            <a:prstDash val="solid"/>
+          </a:ln>
+        </p:spPr>
+        <p:txBody>
+          <a:bodyPr xmlns:a="http://schemas.openxmlformats.org/drawingml/2006/main" wrap="square" lIns="0" tIns="0" rIns="0" bIns="0" anchor="t">
+            <a:normAutofit fontScale="91912"/>
+          </a:bodyPr>
+          <a:lstStyle xmlns:a="http://schemas.openxmlformats.org/drawingml/2006/main"/>
+          <a:p xmlns:a="http://schemas.openxmlformats.org/drawingml/2006/main">
+            <a:pPr algn="l">
+              <a:defRPr sz="1088">
+                <a:solidFill>
+                  <a:srgbClr val="252525"/>
+                </a:solidFill>
+                <a:latin typeface="Arial"/>
+                <a:ea typeface="Arial"/>
+                <a:cs typeface="Arial"/>
+              </a:defRPr>
+            </a:pPr>
+            <a:r>
+              <a:rPr sz="1088">
+                <a:solidFill>
+                  <a:srgbClr val="252525"/>
+                </a:solidFill>
+                <a:latin typeface="Arial"/>
+                <a:ea typeface="Arial"/>
+                <a:cs typeface="Arial"/>
+              </a:rPr>
+              <a:t>Build source-linked review cards and reviewer dispositions.</a:t>
+            </a:r>
+          </a:p>
+        </p:txBody>
+      </p:sp>
+      <p:sp>
+        <p:nvSpPr>
+          <p:cNvPr id="17431" name="build-week-4-surface">
+            <a:extLst xmlns:a="http://schemas.openxmlformats.org/drawingml/2006/main">
+              <a:ext uri="{FF2B5EF4-FFF2-40B4-BE49-F238E27FC236}">
+                <a16:creationId xmlns:a16="http://schemas.microsoft.com/office/drawing/2014/main" id="{BB6F4B0A-72CD-44BF-89E9-9B58BD4CA145}"/>
+              </a:ext>
+            </a:extLst>
+          </p:cNvPr>
+          <p:cNvSpPr>
+            <a:spLocks xmlns:a="http://schemas.openxmlformats.org/drawingml/2006/main" noGrp="1"/>
+          </p:cNvSpPr>
+          <p:nvPr/>
+        </p:nvSpPr>
+        <p:spPr>
+          <a:xfrm xmlns:a="http://schemas.openxmlformats.org/drawingml/2006/main">
+            <a:off x="8924925" y="3038475"/>
+            <a:ext cx="2352675" cy="647700"/>
+          </a:xfrm>
+          <a:prstGeom xmlns:a="http://schemas.openxmlformats.org/drawingml/2006/main" prst="rect">
+            <a:avLst/>
+          </a:prstGeom>
+          <a:solidFill xmlns:a="http://schemas.openxmlformats.org/drawingml/2006/main">
+            <a:srgbClr val="F4F7FA"/>
+          </a:solidFill>
+          <a:ln xmlns:a="http://schemas.openxmlformats.org/drawingml/2006/main" w="9525">
+            <a:solidFill>
+              <a:srgbClr val="C4D2DD"/>
+            </a:solidFill>
+            <a:prstDash val="solid"/>
+          </a:ln>
+        </p:spPr>
+      </p:sp>
+      <p:sp>
+        <p:nvSpPr>
+          <p:cNvPr id="17432" name="build-week-4-title">
+            <a:extLst xmlns:a="http://schemas.openxmlformats.org/drawingml/2006/main">
+              <a:ext uri="{FF2B5EF4-FFF2-40B4-BE49-F238E27FC236}">
+                <a16:creationId xmlns:a16="http://schemas.microsoft.com/office/drawing/2014/main" id="{04CB8365-FDE2-4375-8BBA-30127A7BF15F}"/>
+              </a:ext>
+            </a:extLst>
+          </p:cNvPr>
+          <p:cNvSpPr>
+            <a:spLocks xmlns:a="http://schemas.openxmlformats.org/drawingml/2006/main" noGrp="1"/>
+          </p:cNvSpPr>
+          <p:nvPr/>
+        </p:nvSpPr>
+        <p:spPr>
+          <a:xfrm xmlns:a="http://schemas.openxmlformats.org/drawingml/2006/main">
+            <a:off x="9020175" y="3105150"/>
+            <a:ext cx="2162175" cy="209550"/>
+          </a:xfrm>
+          <a:prstGeom xmlns:a="http://schemas.openxmlformats.org/drawingml/2006/main" prst="rect">
+            <a:avLst/>
+          </a:prstGeom>
+          <a:noFill xmlns:a="http://schemas.openxmlformats.org/drawingml/2006/main"/>
+          <a:ln xmlns:a="http://schemas.openxmlformats.org/drawingml/2006/main" w="0">
+            <a:noFill/>
+            <a:prstDash val="solid"/>
+          </a:ln>
+        </p:spPr>
+        <p:txBody>
+          <a:bodyPr xmlns:a="http://schemas.openxmlformats.org/drawingml/2006/main" wrap="square" lIns="0" tIns="0" rIns="0" bIns="0" anchor="t">
+            <a:normAutofit fontScale="100000"/>
+          </a:bodyPr>
+          <a:lstStyle xmlns:a="http://schemas.openxmlformats.org/drawingml/2006/main"/>
+          <a:p xmlns:a="http://schemas.openxmlformats.org/drawingml/2006/main">
+            <a:pPr algn="l">
+              <a:defRPr sz="1238" b="1">
+                <a:solidFill>
+                  <a:srgbClr val="1F497D"/>
+                </a:solidFill>
+                <a:latin typeface="Arial"/>
+                <a:ea typeface="Arial"/>
+                <a:cs typeface="Arial"/>
+              </a:defRPr>
+            </a:pPr>
+            <a:r>
+              <a:rPr sz="1238" b="1">
+                <a:solidFill>
+                  <a:srgbClr val="1F497D"/>
+                </a:solidFill>
+                <a:latin typeface="Arial"/>
+                <a:ea typeface="Arial"/>
+                <a:cs typeface="Arial"/>
+              </a:rPr>
+              <a:t>WEEK 4</a:t>
+            </a:r>
+          </a:p>
+        </p:txBody>
+      </p:sp>
+      <p:sp>
+        <p:nvSpPr>
+          <p:cNvPr id="17433" name="build-week-4-detail">
+            <a:extLst xmlns:a="http://schemas.openxmlformats.org/drawingml/2006/main">
+              <a:ext uri="{FF2B5EF4-FFF2-40B4-BE49-F238E27FC236}">
+                <a16:creationId xmlns:a16="http://schemas.microsoft.com/office/drawing/2014/main" id="{B0F4A098-4E1B-4DEF-9B01-11F8E5E7B937}"/>
+              </a:ext>
+            </a:extLst>
+          </p:cNvPr>
+          <p:cNvSpPr>
+            <a:spLocks xmlns:a="http://schemas.openxmlformats.org/drawingml/2006/main" noGrp="1"/>
+          </p:cNvSpPr>
+          <p:nvPr/>
+        </p:nvSpPr>
+        <p:spPr>
+          <a:xfrm xmlns:a="http://schemas.openxmlformats.org/drawingml/2006/main">
+            <a:off x="9020175" y="3333750"/>
+            <a:ext cx="2162175" cy="304800"/>
+          </a:xfrm>
+          <a:prstGeom xmlns:a="http://schemas.openxmlformats.org/drawingml/2006/main" prst="rect">
+            <a:avLst/>
+          </a:prstGeom>
+          <a:noFill xmlns:a="http://schemas.openxmlformats.org/drawingml/2006/main"/>
+          <a:ln xmlns:a="http://schemas.openxmlformats.org/drawingml/2006/main" w="0">
+            <a:noFill/>
+            <a:prstDash val="solid"/>
+          </a:ln>
+        </p:spPr>
+        <p:txBody>
+          <a:bodyPr xmlns:a="http://schemas.openxmlformats.org/drawingml/2006/main" wrap="square" lIns="0" tIns="0" rIns="0" bIns="0" anchor="t">
+            <a:normAutofit fontScale="91912"/>
+          </a:bodyPr>
+          <a:lstStyle xmlns:a="http://schemas.openxmlformats.org/drawingml/2006/main"/>
+          <a:p xmlns:a="http://schemas.openxmlformats.org/drawingml/2006/main">
+            <a:pPr algn="l">
+              <a:defRPr sz="1088">
+                <a:solidFill>
+                  <a:srgbClr val="252525"/>
+                </a:solidFill>
+                <a:latin typeface="Arial"/>
+                <a:ea typeface="Arial"/>
+                <a:cs typeface="Arial"/>
+              </a:defRPr>
+            </a:pPr>
+            <a:r>
+              <a:rPr sz="1088">
+                <a:solidFill>
+                  <a:srgbClr val="252525"/>
+                </a:solidFill>
+                <a:latin typeface="Arial"/>
+                <a:ea typeface="Arial"/>
+                <a:cs typeface="Arial"/>
+              </a:rPr>
+              <a:t>Replay held-out months; set pilot precision@K and lead-time baselines.</a:t>
+            </a:r>
+          </a:p>
+        </p:txBody>
+      </p:sp>
+      <p:sp>
+        <p:nvSpPr>
+          <p:cNvPr id="17434" name="feasibility-risk-title">
+            <a:extLst xmlns:a="http://schemas.openxmlformats.org/drawingml/2006/main">
+              <a:ext uri="{FF2B5EF4-FFF2-40B4-BE49-F238E27FC236}">
+                <a16:creationId xmlns:a16="http://schemas.microsoft.com/office/drawing/2014/main" id="{2DDF1BA2-8F28-4C9B-B57C-6C6A5B1C3D74}"/>
+              </a:ext>
+            </a:extLst>
+          </p:cNvPr>
+          <p:cNvSpPr>
+            <a:spLocks xmlns:a="http://schemas.openxmlformats.org/drawingml/2006/main" noGrp="1"/>
+          </p:cNvSpPr>
+          <p:nvPr/>
+        </p:nvSpPr>
+        <p:spPr>
+          <a:xfrm xmlns:a="http://schemas.openxmlformats.org/drawingml/2006/main">
+            <a:off x="609600" y="3867150"/>
+            <a:ext cx="10972800" cy="247650"/>
+          </a:xfrm>
+          <a:prstGeom xmlns:a="http://schemas.openxmlformats.org/drawingml/2006/main" prst="rect">
+            <a:avLst/>
+          </a:prstGeom>
+          <a:noFill xmlns:a="http://schemas.openxmlformats.org/drawingml/2006/main"/>
+          <a:ln xmlns:a="http://schemas.openxmlformats.org/drawingml/2006/main" w="0">
+            <a:noFill/>
+            <a:prstDash val="solid"/>
+          </a:ln>
+        </p:spPr>
+        <p:txBody>
+          <a:bodyPr xmlns:a="http://schemas.openxmlformats.org/drawingml/2006/main" wrap="square" lIns="0" tIns="0" rIns="0" bIns="0" anchor="t">
+            <a:normAutofit fontScale="100000"/>
+          </a:bodyPr>
+          <a:lstStyle xmlns:a="http://schemas.openxmlformats.org/drawingml/2006/main"/>
+          <a:p xmlns:a="http://schemas.openxmlformats.org/drawingml/2006/main">
+            <a:pPr algn="l">
+              <a:defRPr sz="1388" b="1">
+                <a:solidFill>
+                  <a:srgbClr val="1F497D"/>
+                </a:solidFill>
+                <a:latin typeface="Arial"/>
+                <a:ea typeface="Arial"/>
+                <a:cs typeface="Arial"/>
+              </a:defRPr>
+            </a:pPr>
+            <a:r>
+              <a:rPr sz="1388" b="1">
+                <a:solidFill>
+                  <a:srgbClr val="1F497D"/>
+                </a:solidFill>
+                <a:latin typeface="Arial"/>
+                <a:ea typeface="Arial"/>
+                <a:cs typeface="Arial"/>
+              </a:rPr>
+              <a:t>RISKS AND RESPONSES</a:t>
+            </a:r>
+          </a:p>
+        </p:txBody>
+      </p:sp>
+      <p:sp>
+        <p:nvSpPr>
+          <p:cNvPr id="17435" name="risk-1-title">
+            <a:extLst xmlns:a="http://schemas.openxmlformats.org/drawingml/2006/main">
+              <a:ext uri="{FF2B5EF4-FFF2-40B4-BE49-F238E27FC236}">
+                <a16:creationId xmlns:a16="http://schemas.microsoft.com/office/drawing/2014/main" id="{9930182C-5790-401F-AD69-3F8C497021B3}"/>
+              </a:ext>
+            </a:extLst>
+          </p:cNvPr>
+          <p:cNvSpPr>
+            <a:spLocks xmlns:a="http://schemas.openxmlformats.org/drawingml/2006/main" noGrp="1"/>
+          </p:cNvSpPr>
+          <p:nvPr/>
+        </p:nvSpPr>
+        <p:spPr>
+          <a:xfrm xmlns:a="http://schemas.openxmlformats.org/drawingml/2006/main">
+            <a:off x="666750" y="4219575"/>
+            <a:ext cx="2762250" cy="323850"/>
+          </a:xfrm>
+          <a:prstGeom xmlns:a="http://schemas.openxmlformats.org/drawingml/2006/main" prst="rect">
+            <a:avLst/>
+          </a:prstGeom>
+          <a:noFill xmlns:a="http://schemas.openxmlformats.org/drawingml/2006/main"/>
+          <a:ln xmlns:a="http://schemas.openxmlformats.org/drawingml/2006/main" w="0">
+            <a:noFill/>
+            <a:prstDash val="solid"/>
+          </a:ln>
+        </p:spPr>
+        <p:txBody>
+          <a:bodyPr xmlns:a="http://schemas.openxmlformats.org/drawingml/2006/main" wrap="square" lIns="0" tIns="0" rIns="0" bIns="0" anchor="t">
+            <a:normAutofit fontScale="100000"/>
+          </a:bodyPr>
+          <a:lstStyle xmlns:a="http://schemas.openxmlformats.org/drawingml/2006/main"/>
+          <a:p xmlns:a="http://schemas.openxmlformats.org/drawingml/2006/main">
+            <a:pPr algn="l">
+              <a:defRPr sz="1238" b="1">
+                <a:solidFill>
+                  <a:srgbClr val="252525"/>
+                </a:solidFill>
+                <a:latin typeface="Arial"/>
+                <a:ea typeface="Arial"/>
+                <a:cs typeface="Arial"/>
+              </a:defRPr>
+            </a:pPr>
+            <a:r>
+              <a:rPr sz="1238" b="1">
+                <a:solidFill>
+                  <a:srgbClr val="252525"/>
+                </a:solidFill>
+                <a:latin typeface="Arial"/>
+                <a:ea typeface="Arial"/>
+                <a:cs typeface="Arial"/>
+              </a:rPr>
+              <a:t>Panel: 859 flagged rows</a:t>
+            </a:r>
+          </a:p>
+        </p:txBody>
+      </p:sp>
+      <p:sp>
+        <p:nvSpPr>
+          <p:cNvPr id="17436" name="risk-1-response">
+            <a:extLst xmlns:a="http://schemas.openxmlformats.org/drawingml/2006/main">
+              <a:ext uri="{FF2B5EF4-FFF2-40B4-BE49-F238E27FC236}">
+                <a16:creationId xmlns:a16="http://schemas.microsoft.com/office/drawing/2014/main" id="{7CC67366-2A22-45F3-8E7A-560A6F9D6D00}"/>
+              </a:ext>
+            </a:extLst>
+          </p:cNvPr>
+          <p:cNvSpPr>
+            <a:spLocks xmlns:a="http://schemas.openxmlformats.org/drawingml/2006/main" noGrp="1"/>
+          </p:cNvSpPr>
+          <p:nvPr/>
+        </p:nvSpPr>
+        <p:spPr>
+          <a:xfrm xmlns:a="http://schemas.openxmlformats.org/drawingml/2006/main">
+            <a:off x="3619500" y="4219575"/>
+            <a:ext cx="7905750" cy="342900"/>
+          </a:xfrm>
+          <a:prstGeom xmlns:a="http://schemas.openxmlformats.org/drawingml/2006/main" prst="rect">
+            <a:avLst/>
+          </a:prstGeom>
+          <a:noFill xmlns:a="http://schemas.openxmlformats.org/drawingml/2006/main"/>
+          <a:ln xmlns:a="http://schemas.openxmlformats.org/drawingml/2006/main" w="0">
+            <a:noFill/>
+            <a:prstDash val="solid"/>
+          </a:ln>
+        </p:spPr>
+        <p:txBody>
+          <a:bodyPr xmlns:a="http://schemas.openxmlformats.org/drawingml/2006/main" wrap="square" lIns="0" tIns="0" rIns="0" bIns="0" anchor="t">
+            <a:normAutofit fontScale="100000"/>
+          </a:bodyPr>
+          <a:lstStyle xmlns:a="http://schemas.openxmlformats.org/drawingml/2006/main"/>
+          <a:p xmlns:a="http://schemas.openxmlformats.org/drawingml/2006/main">
+            <a:pPr algn="l">
+              <a:defRPr sz="1238">
+                <a:solidFill>
+                  <a:srgbClr val="252525"/>
+                </a:solidFill>
+                <a:latin typeface="Arial"/>
+                <a:ea typeface="Arial"/>
+                <a:cs typeface="Arial"/>
+              </a:defRPr>
+            </a:pPr>
+            <a:r>
+              <a:rPr sz="1238">
+                <a:solidFill>
+                  <a:srgbClr val="252525"/>
+                </a:solidFill>
+                <a:latin typeface="Arial"/>
+                <a:ea typeface="Arial"/>
+                <a:cs typeface="Arial"/>
+              </a:rPr>
+              <a:t>Flag patterns are not all extraction errors; preserve source pages and let analysts confirm or dismiss.</a:t>
+            </a:r>
+          </a:p>
+        </p:txBody>
+      </p:sp>
+      <p:sp>
+        <p:nvSpPr>
+          <p:cNvPr id="17437" name="risk-1-divider">
+            <a:extLst xmlns:a="http://schemas.openxmlformats.org/drawingml/2006/main">
+              <a:ext uri="{FF2B5EF4-FFF2-40B4-BE49-F238E27FC236}">
+                <a16:creationId xmlns:a16="http://schemas.microsoft.com/office/drawing/2014/main" id="{42B31FA3-E9B2-4C19-B3D1-AF21796F7B80}"/>
+              </a:ext>
+            </a:extLst>
+          </p:cNvPr>
+          <p:cNvSpPr>
+            <a:spLocks xmlns:a="http://schemas.openxmlformats.org/drawingml/2006/main" noGrp="1"/>
+          </p:cNvSpPr>
+          <p:nvPr/>
+        </p:nvSpPr>
+        <p:spPr>
+          <a:xfrm xmlns:a="http://schemas.openxmlformats.org/drawingml/2006/main">
+            <a:off x="666750" y="4581525"/>
             <a:ext cx="10858500" cy="9525"/>
           </a:xfrm>
           <a:prstGeom xmlns:a="http://schemas.openxmlformats.org/drawingml/2006/main" prst="rect">
@@ -9928,22 +12141,22 @@
       </p:sp>
       <p:sp>
         <p:nvSpPr>
-          <p:cNvPr id="17425" name="risk-2-issue">
-            <a:extLst xmlns:a="http://schemas.openxmlformats.org/drawingml/2006/main">
-              <a:ext uri="{FF2B5EF4-FFF2-40B4-BE49-F238E27FC236}">
-                <a16:creationId xmlns:a16="http://schemas.microsoft.com/office/drawing/2014/main" id="{08A2C1D4-937B-4E62-B4AF-CF4D39BA0E16}"/>
-              </a:ext>
-            </a:extLst>
-          </p:cNvPr>
-          <p:cNvSpPr>
-            <a:spLocks xmlns:a="http://schemas.openxmlformats.org/drawingml/2006/main" noGrp="1"/>
-          </p:cNvSpPr>
-          <p:nvPr/>
-        </p:nvSpPr>
-        <p:spPr>
-          <a:xfrm xmlns:a="http://schemas.openxmlformats.org/drawingml/2006/main">
-            <a:off x="666750" y="3943350"/>
-            <a:ext cx="2714625" cy="428625"/>
+          <p:cNvPr id="17438" name="risk-2-title">
+            <a:extLst xmlns:a="http://schemas.openxmlformats.org/drawingml/2006/main">
+              <a:ext uri="{FF2B5EF4-FFF2-40B4-BE49-F238E27FC236}">
+                <a16:creationId xmlns:a16="http://schemas.microsoft.com/office/drawing/2014/main" id="{089577BF-B570-43A7-A7FD-0B03E566827F}"/>
+              </a:ext>
+            </a:extLst>
+          </p:cNvPr>
+          <p:cNvSpPr>
+            <a:spLocks xmlns:a="http://schemas.openxmlformats.org/drawingml/2006/main" noGrp="1"/>
+          </p:cNvSpPr>
+          <p:nvPr/>
+        </p:nvSpPr>
+        <p:spPr>
+          <a:xfrm xmlns:a="http://schemas.openxmlformats.org/drawingml/2006/main">
+            <a:off x="666750" y="4629150"/>
+            <a:ext cx="2762250" cy="323850"/>
           </a:xfrm>
           <a:prstGeom xmlns:a="http://schemas.openxmlformats.org/drawingml/2006/main" prst="rect">
             <a:avLst/>
@@ -9961,7 +12174,7 @@
           <a:lstStyle xmlns:a="http://schemas.openxmlformats.org/drawingml/2006/main"/>
           <a:p xmlns:a="http://schemas.openxmlformats.org/drawingml/2006/main">
             <a:pPr algn="l">
-              <a:defRPr sz="1388" b="1">
+              <a:defRPr sz="1238" b="1">
                 <a:solidFill>
                   <a:srgbClr val="252525"/>
                 </a:solidFill>
@@ -9971,7 +12184,7 @@
               </a:defRPr>
             </a:pPr>
             <a:r>
-              <a:rPr sz="1388" b="1">
+              <a:rPr sz="1238" b="1">
                 <a:solidFill>
                   <a:srgbClr val="252525"/>
                 </a:solidFill>
@@ -9979,29 +12192,29 @@
                 <a:ea typeface="Arial"/>
                 <a:cs typeface="Arial"/>
               </a:rPr>
-              <a:t>PDF layouts can shift</a:t>
-            </a:r>
-          </a:p>
-        </p:txBody>
-      </p:sp>
-      <p:sp>
-        <p:nvSpPr>
-          <p:cNvPr id="17426" name="risk-2-response">
-            <a:extLst xmlns:a="http://schemas.openxmlformats.org/drawingml/2006/main">
-              <a:ext uri="{FF2B5EF4-FFF2-40B4-BE49-F238E27FC236}">
-                <a16:creationId xmlns:a16="http://schemas.microsoft.com/office/drawing/2014/main" id="{1E18D86E-C6D5-4400-BA05-DBDEC14DDD87}"/>
-              </a:ext>
-            </a:extLst>
-          </p:cNvPr>
-          <p:cNvSpPr>
-            <a:spLocks xmlns:a="http://schemas.openxmlformats.org/drawingml/2006/main" noGrp="1"/>
-          </p:cNvSpPr>
-          <p:nvPr/>
-        </p:nvSpPr>
-        <p:spPr>
-          <a:xfrm xmlns:a="http://schemas.openxmlformats.org/drawingml/2006/main">
-            <a:off x="3543300" y="3943350"/>
-            <a:ext cx="7981950" cy="428625"/>
+              <a:t>Cost evidence is thin</a:t>
+            </a:r>
+          </a:p>
+        </p:txBody>
+      </p:sp>
+      <p:sp>
+        <p:nvSpPr>
+          <p:cNvPr id="17439" name="risk-2-response">
+            <a:extLst xmlns:a="http://schemas.openxmlformats.org/drawingml/2006/main">
+              <a:ext uri="{FF2B5EF4-FFF2-40B4-BE49-F238E27FC236}">
+                <a16:creationId xmlns:a16="http://schemas.microsoft.com/office/drawing/2014/main" id="{52C26BD5-9360-40FD-9DE8-5566F95F956E}"/>
+              </a:ext>
+            </a:extLst>
+          </p:cNvPr>
+          <p:cNvSpPr>
+            <a:spLocks xmlns:a="http://schemas.openxmlformats.org/drawingml/2006/main" noGrp="1"/>
+          </p:cNvSpPr>
+          <p:nvPr/>
+        </p:nvSpPr>
+        <p:spPr>
+          <a:xfrm xmlns:a="http://schemas.openxmlformats.org/drawingml/2006/main">
+            <a:off x="3619500" y="4629150"/>
+            <a:ext cx="7905750" cy="342900"/>
           </a:xfrm>
           <a:prstGeom xmlns:a="http://schemas.openxmlformats.org/drawingml/2006/main" prst="rect">
             <a:avLst/>
@@ -10019,7 +12232,7 @@
           <a:lstStyle xmlns:a="http://schemas.openxmlformats.org/drawingml/2006/main"/>
           <a:p xmlns:a="http://schemas.openxmlformats.org/drawingml/2006/main">
             <a:pPr algn="l">
-              <a:defRPr sz="1388">
+              <a:defRPr sz="1238">
                 <a:solidFill>
                   <a:srgbClr val="252525"/>
                 </a:solidFill>
@@ -10029,7 +12242,7 @@
               </a:defRPr>
             </a:pPr>
             <a:r>
-              <a:rPr sz="1388">
+              <a:rPr sz="1238">
                 <a:solidFill>
                   <a:srgbClr val="252525"/>
                 </a:solidFill>
@@ -10037,28 +12250,28 @@
                 <a:ea typeface="Arial"/>
                 <a:cs typeface="Arial"/>
               </a:rPr>
-              <a:t>Add per-page schema and total checks; wire checker.py as a stop/go gate before export.</a:t>
-            </a:r>
-          </a:p>
-        </p:txBody>
-      </p:sp>
-      <p:sp>
-        <p:nvSpPr>
-          <p:cNvPr id="17427" name="risk-divider-2">
-            <a:extLst xmlns:a="http://schemas.openxmlformats.org/drawingml/2006/main">
-              <a:ext uri="{FF2B5EF4-FFF2-40B4-BE49-F238E27FC236}">
-                <a16:creationId xmlns:a16="http://schemas.microsoft.com/office/drawing/2014/main" id="{89BB68A6-BE41-4990-BE73-B047D4EB3E26}"/>
-              </a:ext>
-            </a:extLst>
-          </p:cNvPr>
-          <p:cNvSpPr>
-            <a:spLocks xmlns:a="http://schemas.openxmlformats.org/drawingml/2006/main" noGrp="1"/>
-          </p:cNvSpPr>
-          <p:nvPr/>
-        </p:nvSpPr>
-        <p:spPr>
-          <a:xfrm xmlns:a="http://schemas.openxmlformats.org/drawingml/2006/main">
-            <a:off x="666750" y="4410075"/>
+              <a:t>Only one ordered cost test month; withhold operational claims until repeated holdouts and calibration.</a:t>
+            </a:r>
+          </a:p>
+        </p:txBody>
+      </p:sp>
+      <p:sp>
+        <p:nvSpPr>
+          <p:cNvPr id="17440" name="risk-2-divider">
+            <a:extLst xmlns:a="http://schemas.openxmlformats.org/drawingml/2006/main">
+              <a:ext uri="{FF2B5EF4-FFF2-40B4-BE49-F238E27FC236}">
+                <a16:creationId xmlns:a16="http://schemas.microsoft.com/office/drawing/2014/main" id="{F13F03C6-C02A-4733-BDB8-20F1B180FA3B}"/>
+              </a:ext>
+            </a:extLst>
+          </p:cNvPr>
+          <p:cNvSpPr>
+            <a:spLocks xmlns:a="http://schemas.openxmlformats.org/drawingml/2006/main" noGrp="1"/>
+          </p:cNvSpPr>
+          <p:nvPr/>
+        </p:nvSpPr>
+        <p:spPr>
+          <a:xfrm xmlns:a="http://schemas.openxmlformats.org/drawingml/2006/main">
+            <a:off x="666750" y="4991100"/>
             <a:ext cx="10858500" cy="9525"/>
           </a:xfrm>
           <a:prstGeom xmlns:a="http://schemas.openxmlformats.org/drawingml/2006/main" prst="rect">
@@ -10075,22 +12288,22 @@
       </p:sp>
       <p:sp>
         <p:nvSpPr>
-          <p:cNvPr id="17428" name="risk-3-issue">
-            <a:extLst xmlns:a="http://schemas.openxmlformats.org/drawingml/2006/main">
-              <a:ext uri="{FF2B5EF4-FFF2-40B4-BE49-F238E27FC236}">
-                <a16:creationId xmlns:a16="http://schemas.microsoft.com/office/drawing/2014/main" id="{B9E56599-A78E-47B9-B7E4-D1E4CCA39F62}"/>
-              </a:ext>
-            </a:extLst>
-          </p:cNvPr>
-          <p:cNvSpPr>
-            <a:spLocks xmlns:a="http://schemas.openxmlformats.org/drawingml/2006/main" noGrp="1"/>
-          </p:cNvSpPr>
-          <p:nvPr/>
-        </p:nvSpPr>
-        <p:spPr>
-          <a:xfrm xmlns:a="http://schemas.openxmlformats.org/drawingml/2006/main">
-            <a:off x="666750" y="4457700"/>
-            <a:ext cx="2714625" cy="428625"/>
+          <p:cNvPr id="17441" name="risk-3-title">
+            <a:extLst xmlns:a="http://schemas.openxmlformats.org/drawingml/2006/main">
+              <a:ext uri="{FF2B5EF4-FFF2-40B4-BE49-F238E27FC236}">
+                <a16:creationId xmlns:a16="http://schemas.microsoft.com/office/drawing/2014/main" id="{33AE31E7-7D57-4095-A7AC-CD840B9F343D}"/>
+              </a:ext>
+            </a:extLst>
+          </p:cNvPr>
+          <p:cNvSpPr>
+            <a:spLocks xmlns:a="http://schemas.openxmlformats.org/drawingml/2006/main" noGrp="1"/>
+          </p:cNvSpPr>
+          <p:nvPr/>
+        </p:nvSpPr>
+        <p:spPr>
+          <a:xfrm xmlns:a="http://schemas.openxmlformats.org/drawingml/2006/main">
+            <a:off x="666750" y="5038725"/>
+            <a:ext cx="2762250" cy="323850"/>
           </a:xfrm>
           <a:prstGeom xmlns:a="http://schemas.openxmlformats.org/drawingml/2006/main" prst="rect">
             <a:avLst/>
@@ -10108,7 +12321,7 @@
           <a:lstStyle xmlns:a="http://schemas.openxmlformats.org/drawingml/2006/main"/>
           <a:p xmlns:a="http://schemas.openxmlformats.org/drawingml/2006/main">
             <a:pPr algn="l">
-              <a:defRPr sz="1388" b="1">
+              <a:defRPr sz="1238" b="1">
                 <a:solidFill>
                   <a:srgbClr val="252525"/>
                 </a:solidFill>
@@ -10118,7 +12331,7 @@
               </a:defRPr>
             </a:pPr>
             <a:r>
-              <a:rPr sz="1388" b="1">
+              <a:rPr sz="1238" b="1">
                 <a:solidFill>
                   <a:srgbClr val="252525"/>
                 </a:solidFill>
@@ -10126,29 +12339,29 @@
                 <a:ea typeface="Arial"/>
                 <a:cs typeface="Arial"/>
               </a:rPr>
-              <a:t>Cost model is weak</a:t>
-            </a:r>
-          </a:p>
-        </p:txBody>
-      </p:sp>
-      <p:sp>
-        <p:nvSpPr>
-          <p:cNvPr id="17429" name="risk-3-response">
-            <a:extLst xmlns:a="http://schemas.openxmlformats.org/drawingml/2006/main">
-              <a:ext uri="{FF2B5EF4-FFF2-40B4-BE49-F238E27FC236}">
-                <a16:creationId xmlns:a16="http://schemas.microsoft.com/office/drawing/2014/main" id="{5315EFA7-1C1F-4E13-B6EA-E05D773B3BE9}"/>
-              </a:ext>
-            </a:extLst>
-          </p:cNvPr>
-          <p:cNvSpPr>
-            <a:spLocks xmlns:a="http://schemas.openxmlformats.org/drawingml/2006/main" noGrp="1"/>
-          </p:cNvSpPr>
-          <p:nvPr/>
-        </p:nvSpPr>
-        <p:spPr>
-          <a:xfrm xmlns:a="http://schemas.openxmlformats.org/drawingml/2006/main">
-            <a:off x="3543300" y="4457700"/>
-            <a:ext cx="7981950" cy="428625"/>
+              <a:t>PDF layouts can change</a:t>
+            </a:r>
+          </a:p>
+        </p:txBody>
+      </p:sp>
+      <p:sp>
+        <p:nvSpPr>
+          <p:cNvPr id="17442" name="risk-3-response">
+            <a:extLst xmlns:a="http://schemas.openxmlformats.org/drawingml/2006/main">
+              <a:ext uri="{FF2B5EF4-FFF2-40B4-BE49-F238E27FC236}">
+                <a16:creationId xmlns:a16="http://schemas.microsoft.com/office/drawing/2014/main" id="{ADD68A6B-E169-4D08-8566-77B545AA3FAE}"/>
+              </a:ext>
+            </a:extLst>
+          </p:cNvPr>
+          <p:cNvSpPr>
+            <a:spLocks xmlns:a="http://schemas.openxmlformats.org/drawingml/2006/main" noGrp="1"/>
+          </p:cNvSpPr>
+          <p:nvPr/>
+        </p:nvSpPr>
+        <p:spPr>
+          <a:xfrm xmlns:a="http://schemas.openxmlformats.org/drawingml/2006/main">
+            <a:off x="3619500" y="5038725"/>
+            <a:ext cx="7905750" cy="342900"/>
           </a:xfrm>
           <a:prstGeom xmlns:a="http://schemas.openxmlformats.org/drawingml/2006/main" prst="rect">
             <a:avLst/>
@@ -10166,7 +12379,7 @@
           <a:lstStyle xmlns:a="http://schemas.openxmlformats.org/drawingml/2006/main"/>
           <a:p xmlns:a="http://schemas.openxmlformats.org/drawingml/2006/main">
             <a:pPr algn="l">
-              <a:defRPr sz="1388">
+              <a:defRPr sz="1238">
                 <a:solidFill>
                   <a:srgbClr val="252525"/>
                 </a:solidFill>
@@ -10176,7 +12389,7 @@
               </a:defRPr>
             </a:pPr>
             <a:r>
-              <a:rPr sz="1388">
+              <a:rPr sz="1238">
                 <a:solidFill>
                   <a:srgbClr val="252525"/>
                 </a:solidFill>
@@ -10184,28 +12397,28 @@
                 <a:ea typeface="Arial"/>
                 <a:cs typeface="Arial"/>
               </a:rPr>
-              <a:t>Keep it out of decisions until it beats a baseline repeatedly and probabilities are calibrated.</a:t>
-            </a:r>
-          </a:p>
-        </p:txBody>
-      </p:sp>
-      <p:sp>
-        <p:nvSpPr>
-          <p:cNvPr id="17430" name="risk-divider-3">
-            <a:extLst xmlns:a="http://schemas.openxmlformats.org/drawingml/2006/main">
-              <a:ext uri="{FF2B5EF4-FFF2-40B4-BE49-F238E27FC236}">
-                <a16:creationId xmlns:a16="http://schemas.microsoft.com/office/drawing/2014/main" id="{82ABB0B0-60AC-4090-B981-B3E842C7CB3C}"/>
-              </a:ext>
-            </a:extLst>
-          </p:cNvPr>
-          <p:cNvSpPr>
-            <a:spLocks xmlns:a="http://schemas.openxmlformats.org/drawingml/2006/main" noGrp="1"/>
-          </p:cNvSpPr>
-          <p:nvPr/>
-        </p:nvSpPr>
-        <p:spPr>
-          <a:xfrm xmlns:a="http://schemas.openxmlformats.org/drawingml/2006/main">
-            <a:off x="666750" y="4924425"/>
+              <a:t>Keep per-report schema/total checks; stop exports on hard failures, route warnings for review.</a:t>
+            </a:r>
+          </a:p>
+        </p:txBody>
+      </p:sp>
+      <p:sp>
+        <p:nvSpPr>
+          <p:cNvPr id="17443" name="risk-3-divider">
+            <a:extLst xmlns:a="http://schemas.openxmlformats.org/drawingml/2006/main">
+              <a:ext uri="{FF2B5EF4-FFF2-40B4-BE49-F238E27FC236}">
+                <a16:creationId xmlns:a16="http://schemas.microsoft.com/office/drawing/2014/main" id="{8A7ABD6D-6A07-4FC9-989C-CC70F0E0E815}"/>
+              </a:ext>
+            </a:extLst>
+          </p:cNvPr>
+          <p:cNvSpPr>
+            <a:spLocks xmlns:a="http://schemas.openxmlformats.org/drawingml/2006/main" noGrp="1"/>
+          </p:cNvSpPr>
+          <p:nvPr/>
+        </p:nvSpPr>
+        <p:spPr>
+          <a:xfrm xmlns:a="http://schemas.openxmlformats.org/drawingml/2006/main">
+            <a:off x="666750" y="5400675"/>
             <a:ext cx="10858500" cy="9525"/>
           </a:xfrm>
           <a:prstGeom xmlns:a="http://schemas.openxmlformats.org/drawingml/2006/main" prst="rect">
@@ -10222,22 +12435,22 @@
       </p:sp>
       <p:sp>
         <p:nvSpPr>
-          <p:cNvPr id="17431" name="risk-4-issue">
-            <a:extLst xmlns:a="http://schemas.openxmlformats.org/drawingml/2006/main">
-              <a:ext uri="{FF2B5EF4-FFF2-40B4-BE49-F238E27FC236}">
-                <a16:creationId xmlns:a16="http://schemas.microsoft.com/office/drawing/2014/main" id="{9D37C9EB-5185-4CE1-BEFB-4E4BE6DB09D3}"/>
-              </a:ext>
-            </a:extLst>
-          </p:cNvPr>
-          <p:cNvSpPr>
-            <a:spLocks xmlns:a="http://schemas.openxmlformats.org/drawingml/2006/main" noGrp="1"/>
-          </p:cNvSpPr>
-          <p:nvPr/>
-        </p:nvSpPr>
-        <p:spPr>
-          <a:xfrm xmlns:a="http://schemas.openxmlformats.org/drawingml/2006/main">
-            <a:off x="666750" y="4972050"/>
-            <a:ext cx="2714625" cy="428625"/>
+          <p:cNvPr id="17444" name="risk-4-title">
+            <a:extLst xmlns:a="http://schemas.openxmlformats.org/drawingml/2006/main">
+              <a:ext uri="{FF2B5EF4-FFF2-40B4-BE49-F238E27FC236}">
+                <a16:creationId xmlns:a16="http://schemas.microsoft.com/office/drawing/2014/main" id="{41DDCE30-88ED-4C5B-A0BD-0492F9D4DC31}"/>
+              </a:ext>
+            </a:extLst>
+          </p:cNvPr>
+          <p:cNvSpPr>
+            <a:spLocks xmlns:a="http://schemas.openxmlformats.org/drawingml/2006/main" noGrp="1"/>
+          </p:cNvSpPr>
+          <p:nvPr/>
+        </p:nvSpPr>
+        <p:spPr>
+          <a:xfrm xmlns:a="http://schemas.openxmlformats.org/drawingml/2006/main">
+            <a:off x="666750" y="5448300"/>
+            <a:ext cx="2762250" cy="323850"/>
           </a:xfrm>
           <a:prstGeom xmlns:a="http://schemas.openxmlformats.org/drawingml/2006/main" prst="rect">
             <a:avLst/>
@@ -10255,7 +12468,7 @@
           <a:lstStyle xmlns:a="http://schemas.openxmlformats.org/drawingml/2006/main"/>
           <a:p xmlns:a="http://schemas.openxmlformats.org/drawingml/2006/main">
             <a:pPr algn="l">
-              <a:defRPr sz="1388" b="1">
+              <a:defRPr sz="1238" b="1">
                 <a:solidFill>
                   <a:srgbClr val="252525"/>
                 </a:solidFill>
@@ -10265,7 +12478,7 @@
               </a:defRPr>
             </a:pPr>
             <a:r>
-              <a:rPr sz="1388" b="1">
+              <a:rPr sz="1238" b="1">
                 <a:solidFill>
                   <a:srgbClr val="252525"/>
                 </a:solidFill>
@@ -10273,29 +12486,29 @@
                 <a:ea typeface="Arial"/>
                 <a:cs typeface="Arial"/>
               </a:rPr>
-              <a:t>Warnings need context</a:t>
-            </a:r>
-          </a:p>
-        </p:txBody>
-      </p:sp>
-      <p:sp>
-        <p:nvSpPr>
-          <p:cNvPr id="17432" name="risk-4-response">
-            <a:extLst xmlns:a="http://schemas.openxmlformats.org/drawingml/2006/main">
-              <a:ext uri="{FF2B5EF4-FFF2-40B4-BE49-F238E27FC236}">
-                <a16:creationId xmlns:a16="http://schemas.microsoft.com/office/drawing/2014/main" id="{1C0B3164-4A64-4D1A-B6A2-D20803563B08}"/>
-              </a:ext>
-            </a:extLst>
-          </p:cNvPr>
-          <p:cNvSpPr>
-            <a:spLocks xmlns:a="http://schemas.openxmlformats.org/drawingml/2006/main" noGrp="1"/>
-          </p:cNvSpPr>
-          <p:nvPr/>
-        </p:nvSpPr>
-        <p:spPr>
-          <a:xfrm xmlns:a="http://schemas.openxmlformats.org/drawingml/2006/main">
-            <a:off x="3543300" y="4972050"/>
-            <a:ext cx="7981950" cy="428625"/>
+              <a:t>Alerts can overwhelm</a:t>
+            </a:r>
+          </a:p>
+        </p:txBody>
+      </p:sp>
+      <p:sp>
+        <p:nvSpPr>
+          <p:cNvPr id="17445" name="risk-4-response">
+            <a:extLst xmlns:a="http://schemas.openxmlformats.org/drawingml/2006/main">
+              <a:ext uri="{FF2B5EF4-FFF2-40B4-BE49-F238E27FC236}">
+                <a16:creationId xmlns:a16="http://schemas.microsoft.com/office/drawing/2014/main" id="{FA4AB367-CA5D-4199-9D22-D4FB13FCB22A}"/>
+              </a:ext>
+            </a:extLst>
+          </p:cNvPr>
+          <p:cNvSpPr>
+            <a:spLocks xmlns:a="http://schemas.openxmlformats.org/drawingml/2006/main" noGrp="1"/>
+          </p:cNvSpPr>
+          <p:nvPr/>
+        </p:nvSpPr>
+        <p:spPr>
+          <a:xfrm xmlns:a="http://schemas.openxmlformats.org/drawingml/2006/main">
+            <a:off x="3619500" y="5448300"/>
+            <a:ext cx="7905750" cy="342900"/>
           </a:xfrm>
           <a:prstGeom xmlns:a="http://schemas.openxmlformats.org/drawingml/2006/main" prst="rect">
             <a:avLst/>
@@ -10313,7 +12526,7 @@
           <a:lstStyle xmlns:a="http://schemas.openxmlformats.org/drawingml/2006/main"/>
           <a:p xmlns:a="http://schemas.openxmlformats.org/drawingml/2006/main">
             <a:pPr algn="l">
-              <a:defRPr sz="1388">
+              <a:defRPr sz="1238">
                 <a:solidFill>
                   <a:srgbClr val="252525"/>
                 </a:solidFill>
@@ -10323,7 +12536,7 @@
               </a:defRPr>
             </a:pPr>
             <a:r>
-              <a:rPr sz="1388">
+              <a:rPr sz="1238">
                 <a:solidFill>
                   <a:srgbClr val="252525"/>
                 </a:solidFill>
@@ -10331,65 +12544,7 @@
                 <a:ea typeface="Arial"/>
                 <a:cs typeface="Arial"/>
               </a:rPr>
-              <a:t>Show source month and field evidence; an analyst confirms or dismisses before follow-up.</a:t>
-            </a:r>
-          </a:p>
-        </p:txBody>
-      </p:sp>
-      <p:sp>
-        <p:nvSpPr>
-          <p:cNvPr id="17433" name="pilot-measures">
-            <a:extLst xmlns:a="http://schemas.openxmlformats.org/drawingml/2006/main">
-              <a:ext uri="{FF2B5EF4-FFF2-40B4-BE49-F238E27FC236}">
-                <a16:creationId xmlns:a16="http://schemas.microsoft.com/office/drawing/2014/main" id="{7B87C703-7E68-4AA7-A937-838978FA3872}"/>
-              </a:ext>
-            </a:extLst>
-          </p:cNvPr>
-          <p:cNvSpPr>
-            <a:spLocks xmlns:a="http://schemas.openxmlformats.org/drawingml/2006/main" noGrp="1"/>
-          </p:cNvSpPr>
-          <p:nvPr/>
-        </p:nvSpPr>
-        <p:spPr>
-          <a:xfrm xmlns:a="http://schemas.openxmlformats.org/drawingml/2006/main">
-            <a:off x="666750" y="5572125"/>
-            <a:ext cx="10858500" cy="285750"/>
-          </a:xfrm>
-          <a:prstGeom xmlns:a="http://schemas.openxmlformats.org/drawingml/2006/main" prst="rect">
-            <a:avLst/>
-          </a:prstGeom>
-          <a:noFill xmlns:a="http://schemas.openxmlformats.org/drawingml/2006/main"/>
-          <a:ln xmlns:a="http://schemas.openxmlformats.org/drawingml/2006/main" w="0">
-            <a:noFill/>
-            <a:prstDash val="solid"/>
-          </a:ln>
-        </p:spPr>
-        <p:txBody>
-          <a:bodyPr xmlns:a="http://schemas.openxmlformats.org/drawingml/2006/main" wrap="square" lIns="0" tIns="0" rIns="0" bIns="0" anchor="t">
-            <a:normAutofit fontScale="100000"/>
-          </a:bodyPr>
-          <a:lstStyle xmlns:a="http://schemas.openxmlformats.org/drawingml/2006/main"/>
-          <a:p xmlns:a="http://schemas.openxmlformats.org/drawingml/2006/main">
-            <a:pPr algn="l">
-              <a:defRPr sz="1313" b="1">
-                <a:solidFill>
-                  <a:srgbClr val="1F497D"/>
-                </a:solidFill>
-                <a:latin typeface="Arial"/>
-                <a:ea typeface="Arial"/>
-                <a:cs typeface="Arial"/>
-              </a:defRPr>
-            </a:pPr>
-            <a:r>
-              <a:rPr sz="1313" b="1">
-                <a:solidFill>
-                  <a:srgbClr val="1F497D"/>
-                </a:solidFill>
-                <a:latin typeface="Arial"/>
-                <a:ea typeface="Arial"/>
-                <a:cs typeface="Arial"/>
-              </a:rPr>
-              <a:t>Pilot acceptance: reconciliation coverage • top-K warning precision • lead time • reviewer effort</a:t>
+              <a:t>Set top-K to reviewer capacity; measure precision, lead time and effort before notifications.</a:t>
             </a:r>
           </a:p>
         </p:txBody>
@@ -10493,7 +12648,7 @@
           <p:cNvPr id="17409" name="Title 1">
             <a:extLst xmlns:a="http://schemas.openxmlformats.org/drawingml/2006/main">
               <a:ext uri="{FF2B5EF4-FFF2-40B4-BE49-F238E27FC236}">
-                <a16:creationId xmlns:a16="http://schemas.microsoft.com/office/drawing/2014/main" id="{C80480B8-B547-43CF-A823-350D8FBCBE1E}"/>
+                <a16:creationId xmlns:a16="http://schemas.microsoft.com/office/drawing/2014/main" id="{E18185DA-3990-4FAD-B763-9BCA9B50E670}"/>
               </a:ext>
             </a:extLst>
           </p:cNvPr>
@@ -10528,7 +12683,7 @@
           <p:cNvPr id="17410" name="TextBox 8">
             <a:extLst xmlns:a="http://schemas.openxmlformats.org/drawingml/2006/main">
               <a:ext uri="{FF2B5EF4-FFF2-40B4-BE49-F238E27FC236}">
-                <a16:creationId xmlns:a16="http://schemas.microsoft.com/office/drawing/2014/main" id="{7A2B818F-E693-4905-9E59-19E1F55BAF72}"/>
+                <a16:creationId xmlns:a16="http://schemas.microsoft.com/office/drawing/2014/main" id="{6C374130-352E-4EA1-8863-499968B9F9F8}"/>
               </a:ext>
             </a:extLst>
           </p:cNvPr>
@@ -10594,7 +12749,7 @@
           <p:cNvPr id="6" name="Slide Number Placeholder 5">
             <a:extLst xmlns:a="http://schemas.openxmlformats.org/drawingml/2006/main">
               <a:ext uri="{FF2B5EF4-FFF2-40B4-BE49-F238E27FC236}">
-                <a16:creationId xmlns:a16="http://schemas.microsoft.com/office/drawing/2014/main" id="{78E43B4B-1A74-4CEB-AE8D-1F2852349FAA}"/>
+                <a16:creationId xmlns:a16="http://schemas.microsoft.com/office/drawing/2014/main" id="{B479C35F-F374-41DD-A4DE-303E2309313D}"/>
               </a:ext>
             </a:extLst>
           </p:cNvPr>
@@ -10658,7 +12813,7 @@
           <p:cNvPr id="7" name="Footer Placeholder 6">
             <a:extLst xmlns:a="http://schemas.openxmlformats.org/drawingml/2006/main">
               <a:ext uri="{FF2B5EF4-FFF2-40B4-BE49-F238E27FC236}">
-                <a16:creationId xmlns:a16="http://schemas.microsoft.com/office/drawing/2014/main" id="{776A7534-5A07-4495-B990-AEFC2ADC49DA}"/>
+                <a16:creationId xmlns:a16="http://schemas.microsoft.com/office/drawing/2014/main" id="{AF9A1A23-8B35-40E8-87F0-5DDCC8DAAEBA}"/>
               </a:ext>
             </a:extLst>
           </p:cNvPr>
@@ -10785,7 +12940,7 @@
                 <a:ea typeface="Arial"/>
                 <a:cs typeface="Arial"/>
               </a:rPr>
-              <a:t>[TEAM]</a:t>
+              <a:t>PARAKH</a:t>
             </a:r>
             <a:endParaRPr/>
           </a:p>
@@ -10793,14 +12948,14 @@
       </p:sp>
       <p:pic>
         <p:nvPicPr>
-          <p:cNvPr id="17433" name="Picture 10"/>
+          <p:cNvPr id="17438" name="Picture 10"/>
           <p:cNvPicPr>
             <a:picLocks xmlns:a="http://schemas.openxmlformats.org/drawingml/2006/main" noChangeAspect="1"/>
           </p:cNvPicPr>
           <p:nvPr/>
         </p:nvPicPr>
         <p:blipFill>
-          <a:blip xmlns:r="http://schemas.openxmlformats.org/officeDocument/2006/relationships" xmlns:a="http://schemas.openxmlformats.org/drawingml/2006/main" r:embed="R92bcfc1fe4254beb"/>
+          <a:blip xmlns:r="http://schemas.openxmlformats.org/officeDocument/2006/relationships" xmlns:a="http://schemas.openxmlformats.org/drawingml/2006/main" r:embed="R431785c2967c4dae"/>
           <a:stretch xmlns:a="http://schemas.openxmlformats.org/drawingml/2006/main">
             <a:fillRect l="0" t="0" r="0" b="0"/>
           </a:stretch>
@@ -10817,22 +12972,22 @@
       </p:pic>
       <p:sp>
         <p:nvSpPr>
-          <p:cNvPr id="17412" name="impact-date-label">
-            <a:extLst xmlns:a="http://schemas.openxmlformats.org/drawingml/2006/main">
-              <a:ext uri="{FF2B5EF4-FFF2-40B4-BE49-F238E27FC236}">
-                <a16:creationId xmlns:a16="http://schemas.microsoft.com/office/drawing/2014/main" id="{A4AA40A0-9C1A-4436-B163-58A6F0E9F37C}"/>
-              </a:ext>
-            </a:extLst>
-          </p:cNvPr>
-          <p:cNvSpPr>
-            <a:spLocks xmlns:a="http://schemas.openxmlformats.org/drawingml/2006/main" noGrp="1"/>
-          </p:cNvSpPr>
-          <p:nvPr/>
-        </p:nvSpPr>
-        <p:spPr>
-          <a:xfrm xmlns:a="http://schemas.openxmlformats.org/drawingml/2006/main">
-            <a:off x="609600" y="1323975"/>
-            <a:ext cx="10972800" cy="266700"/>
+          <p:cNvPr id="17412" name="impact-intro">
+            <a:extLst xmlns:a="http://schemas.openxmlformats.org/drawingml/2006/main">
+              <a:ext uri="{FF2B5EF4-FFF2-40B4-BE49-F238E27FC236}">
+                <a16:creationId xmlns:a16="http://schemas.microsoft.com/office/drawing/2014/main" id="{3F6EC125-A2E9-469B-8B0C-5B30F6048276}"/>
+              </a:ext>
+            </a:extLst>
+          </p:cNvPr>
+          <p:cNvSpPr>
+            <a:spLocks xmlns:a="http://schemas.openxmlformats.org/drawingml/2006/main" noGrp="1"/>
+          </p:cNvSpPr>
+          <p:nvPr/>
+        </p:nvSpPr>
+        <p:spPr>
+          <a:xfrm xmlns:a="http://schemas.openxmlformats.org/drawingml/2006/main">
+            <a:off x="609600" y="1285875"/>
+            <a:ext cx="10972800" cy="285750"/>
           </a:xfrm>
           <a:prstGeom xmlns:a="http://schemas.openxmlformats.org/drawingml/2006/main" prst="rect">
             <a:avLst/>
@@ -10850,7 +13005,7 @@
           <a:lstStyle xmlns:a="http://schemas.openxmlformats.org/drawingml/2006/main"/>
           <a:p xmlns:a="http://schemas.openxmlformats.org/drawingml/2006/main">
             <a:pPr algn="l">
-              <a:defRPr sz="1350" b="1">
+              <a:defRPr sz="1575" b="1">
                 <a:solidFill>
                   <a:srgbClr val="1F497D"/>
                 </a:solidFill>
@@ -10860,7 +13015,7 @@
               </a:defRPr>
             </a:pPr>
             <a:r>
-              <a:rPr sz="1350" b="1">
+              <a:rPr sz="1575" b="1">
                 <a:solidFill>
                   <a:srgbClr val="1F497D"/>
                 </a:solidFill>
@@ -10868,29 +13023,95 @@
                 <a:ea typeface="Arial"/>
                 <a:cs typeface="Arial"/>
               </a:rPr>
-              <a:t>OFFICIAL PAIMANA PORTFOLIO • APRIL 2026</a:t>
-            </a:r>
-          </a:p>
-        </p:txBody>
-      </p:sp>
-      <p:sp>
-        <p:nvSpPr>
-          <p:cNvPr id="17413" name="impact-metric-1">
-            <a:extLst xmlns:a="http://schemas.openxmlformats.org/drawingml/2006/main">
-              <a:ext uri="{FF2B5EF4-FFF2-40B4-BE49-F238E27FC236}">
-                <a16:creationId xmlns:a16="http://schemas.microsoft.com/office/drawing/2014/main" id="{4FA276A3-2A85-43A0-A18D-0DA6235F41E0}"/>
-              </a:ext>
-            </a:extLst>
-          </p:cNvPr>
-          <p:cNvSpPr>
-            <a:spLocks xmlns:a="http://schemas.openxmlformats.org/drawingml/2006/main" noGrp="1"/>
-          </p:cNvSpPr>
-          <p:nvPr/>
-        </p:nvSpPr>
-        <p:spPr>
-          <a:xfrm xmlns:a="http://schemas.openxmlformats.org/drawingml/2006/main">
-            <a:off x="609600" y="1685925"/>
-            <a:ext cx="3000375" cy="495300"/>
+              <a:t>The goal is better review attention—not an unmeasured savings claim.</a:t>
+            </a:r>
+          </a:p>
+        </p:txBody>
+      </p:sp>
+      <p:sp>
+        <p:nvSpPr>
+          <p:cNvPr id="17413" name="impact-today-surface">
+            <a:extLst xmlns:a="http://schemas.openxmlformats.org/drawingml/2006/main">
+              <a:ext uri="{FF2B5EF4-FFF2-40B4-BE49-F238E27FC236}">
+                <a16:creationId xmlns:a16="http://schemas.microsoft.com/office/drawing/2014/main" id="{11106DBC-1A71-4DF4-B29B-5801117E805E}"/>
+              </a:ext>
+            </a:extLst>
+          </p:cNvPr>
+          <p:cNvSpPr>
+            <a:spLocks xmlns:a="http://schemas.openxmlformats.org/drawingml/2006/main" noGrp="1"/>
+          </p:cNvSpPr>
+          <p:nvPr/>
+        </p:nvSpPr>
+        <p:spPr>
+          <a:xfrm xmlns:a="http://schemas.openxmlformats.org/drawingml/2006/main">
+            <a:off x="609600" y="1752600"/>
+            <a:ext cx="4953000" cy="1581150"/>
+          </a:xfrm>
+          <a:prstGeom xmlns:a="http://schemas.openxmlformats.org/drawingml/2006/main" prst="rect">
+            <a:avLst/>
+          </a:prstGeom>
+          <a:solidFill xmlns:a="http://schemas.openxmlformats.org/drawingml/2006/main">
+            <a:srgbClr val="F4F7FA"/>
+          </a:solidFill>
+          <a:ln xmlns:a="http://schemas.openxmlformats.org/drawingml/2006/main" w="9525">
+            <a:solidFill>
+              <a:srgbClr val="C4D2DD"/>
+            </a:solidFill>
+            <a:prstDash val="solid"/>
+          </a:ln>
+        </p:spPr>
+      </p:sp>
+      <p:sp>
+        <p:nvSpPr>
+          <p:cNvPr id="17414" name="impact-proposed-surface">
+            <a:extLst xmlns:a="http://schemas.openxmlformats.org/drawingml/2006/main">
+              <a:ext uri="{FF2B5EF4-FFF2-40B4-BE49-F238E27FC236}">
+                <a16:creationId xmlns:a16="http://schemas.microsoft.com/office/drawing/2014/main" id="{C9AB9FAB-5773-422D-864E-97E57E6FB960}"/>
+              </a:ext>
+            </a:extLst>
+          </p:cNvPr>
+          <p:cNvSpPr>
+            <a:spLocks xmlns:a="http://schemas.openxmlformats.org/drawingml/2006/main" noGrp="1"/>
+          </p:cNvSpPr>
+          <p:nvPr/>
+        </p:nvSpPr>
+        <p:spPr>
+          <a:xfrm xmlns:a="http://schemas.openxmlformats.org/drawingml/2006/main">
+            <a:off x="6629400" y="1752600"/>
+            <a:ext cx="4953000" cy="1581150"/>
+          </a:xfrm>
+          <a:prstGeom xmlns:a="http://schemas.openxmlformats.org/drawingml/2006/main" prst="rect">
+            <a:avLst/>
+          </a:prstGeom>
+          <a:solidFill xmlns:a="http://schemas.openxmlformats.org/drawingml/2006/main">
+            <a:srgbClr val="F4F7FA"/>
+          </a:solidFill>
+          <a:ln xmlns:a="http://schemas.openxmlformats.org/drawingml/2006/main" w="9525">
+            <a:solidFill>
+              <a:srgbClr val="AFC4D6"/>
+            </a:solidFill>
+            <a:prstDash val="solid"/>
+          </a:ln>
+        </p:spPr>
+      </p:sp>
+      <p:sp>
+        <p:nvSpPr>
+          <p:cNvPr id="17415" name="impact-today-title">
+            <a:extLst xmlns:a="http://schemas.openxmlformats.org/drawingml/2006/main">
+              <a:ext uri="{FF2B5EF4-FFF2-40B4-BE49-F238E27FC236}">
+                <a16:creationId xmlns:a16="http://schemas.microsoft.com/office/drawing/2014/main" id="{DF7CFEE9-9588-4668-B5A4-8B43300F8909}"/>
+              </a:ext>
+            </a:extLst>
+          </p:cNvPr>
+          <p:cNvSpPr>
+            <a:spLocks xmlns:a="http://schemas.openxmlformats.org/drawingml/2006/main" noGrp="1"/>
+          </p:cNvSpPr>
+          <p:nvPr/>
+        </p:nvSpPr>
+        <p:spPr>
+          <a:xfrm xmlns:a="http://schemas.openxmlformats.org/drawingml/2006/main">
+            <a:off x="819150" y="1914525"/>
+            <a:ext cx="4533900" cy="238125"/>
           </a:xfrm>
           <a:prstGeom xmlns:a="http://schemas.openxmlformats.org/drawingml/2006/main" prst="rect">
             <a:avLst/>
@@ -10908,7 +13129,7 @@
           <a:lstStyle xmlns:a="http://schemas.openxmlformats.org/drawingml/2006/main"/>
           <a:p xmlns:a="http://schemas.openxmlformats.org/drawingml/2006/main">
             <a:pPr algn="l">
-              <a:defRPr sz="2850" b="1">
+              <a:defRPr sz="1350" b="1">
                 <a:solidFill>
                   <a:srgbClr val="1F497D"/>
                 </a:solidFill>
@@ -10918,7 +13139,7 @@
               </a:defRPr>
             </a:pPr>
             <a:r>
-              <a:rPr sz="2850" b="1">
+              <a:rPr sz="1350" b="1">
                 <a:solidFill>
                   <a:srgbClr val="1F497D"/>
                 </a:solidFill>
@@ -10926,29 +13147,29 @@
                 <a:ea typeface="Arial"/>
                 <a:cs typeface="Arial"/>
               </a:rPr>
-              <a:t>1,981</a:t>
-            </a:r>
-          </a:p>
-        </p:txBody>
-      </p:sp>
-      <p:sp>
-        <p:nvSpPr>
-          <p:cNvPr id="17414" name="impact-label-1">
-            <a:extLst xmlns:a="http://schemas.openxmlformats.org/drawingml/2006/main">
-              <a:ext uri="{FF2B5EF4-FFF2-40B4-BE49-F238E27FC236}">
-                <a16:creationId xmlns:a16="http://schemas.microsoft.com/office/drawing/2014/main" id="{3698E7E0-C64B-4C85-A1ED-A2AAA1CCDA34}"/>
-              </a:ext>
-            </a:extLst>
-          </p:cNvPr>
-          <p:cNvSpPr>
-            <a:spLocks xmlns:a="http://schemas.openxmlformats.org/drawingml/2006/main" noGrp="1"/>
-          </p:cNvSpPr>
-          <p:nvPr/>
-        </p:nvSpPr>
-        <p:spPr>
-          <a:xfrm xmlns:a="http://schemas.openxmlformats.org/drawingml/2006/main">
-            <a:off x="609600" y="2200275"/>
-            <a:ext cx="3333750" cy="333375"/>
+              <a:t>TODAY • MONTHLY STATUS REPORTING</a:t>
+            </a:r>
+          </a:p>
+        </p:txBody>
+      </p:sp>
+      <p:sp>
+        <p:nvSpPr>
+          <p:cNvPr id="17416" name="impact-today-detail">
+            <a:extLst xmlns:a="http://schemas.openxmlformats.org/drawingml/2006/main">
+              <a:ext uri="{FF2B5EF4-FFF2-40B4-BE49-F238E27FC236}">
+                <a16:creationId xmlns:a16="http://schemas.microsoft.com/office/drawing/2014/main" id="{163D1637-E7EF-4A93-8F71-28BA9BCDBAD8}"/>
+              </a:ext>
+            </a:extLst>
+          </p:cNvPr>
+          <p:cNvSpPr>
+            <a:spLocks xmlns:a="http://schemas.openxmlformats.org/drawingml/2006/main" noGrp="1"/>
+          </p:cNvSpPr>
+          <p:nvPr/>
+        </p:nvSpPr>
+        <p:spPr>
+          <a:xfrm xmlns:a="http://schemas.openxmlformats.org/drawingml/2006/main">
+            <a:off x="819150" y="2266950"/>
+            <a:ext cx="4533900" cy="819150"/>
           </a:xfrm>
           <a:prstGeom xmlns:a="http://schemas.openxmlformats.org/drawingml/2006/main" prst="rect">
             <a:avLst/>
@@ -10966,9 +13187,9 @@
           <a:lstStyle xmlns:a="http://schemas.openxmlformats.org/drawingml/2006/main"/>
           <a:p xmlns:a="http://schemas.openxmlformats.org/drawingml/2006/main">
             <a:pPr algn="l">
-              <a:defRPr sz="1350">
-                <a:solidFill>
-                  <a:srgbClr val="202020"/>
+              <a:defRPr sz="1500">
+                <a:solidFill>
+                  <a:srgbClr val="252525"/>
                 </a:solidFill>
                 <a:latin typeface="Arial"/>
                 <a:ea typeface="Arial"/>
@@ -10976,37 +13197,37 @@
               </a:defRPr>
             </a:pPr>
             <a:r>
-              <a:rPr sz="1350">
-                <a:solidFill>
-                  <a:srgbClr val="202020"/>
+              <a:rPr sz="1500">
+                <a:solidFill>
+                  <a:srgbClr val="252525"/>
                 </a:solidFill>
                 <a:latin typeface="Arial"/>
                 <a:ea typeface="Arial"/>
                 <a:cs typeface="Arial"/>
               </a:rPr>
-              <a:t>projects • 17 ministries / departments</a:t>
-            </a:r>
-          </a:p>
-        </p:txBody>
-      </p:sp>
-      <p:sp>
-        <p:nvSpPr>
-          <p:cNvPr id="17415" name="impact-metric-2">
-            <a:extLst xmlns:a="http://schemas.openxmlformats.org/drawingml/2006/main">
-              <a:ext uri="{FF2B5EF4-FFF2-40B4-BE49-F238E27FC236}">
-                <a16:creationId xmlns:a16="http://schemas.microsoft.com/office/drawing/2014/main" id="{A0515DEB-0527-4153-BF44-94DB8623A5AB}"/>
-              </a:ext>
-            </a:extLst>
-          </p:cNvPr>
-          <p:cNvSpPr>
-            <a:spLocks xmlns:a="http://schemas.openxmlformats.org/drawingml/2006/main" noGrp="1"/>
-          </p:cNvSpPr>
-          <p:nvPr/>
-        </p:nvSpPr>
-        <p:spPr>
-          <a:xfrm xmlns:a="http://schemas.openxmlformats.org/drawingml/2006/main">
-            <a:off x="4191000" y="1685925"/>
-            <a:ext cx="3381375" cy="495300"/>
+              <a:t>Analysts can search current project records, but finding the next project worth reviewing still depends on evidence quality and reviewer attention.</a:t>
+            </a:r>
+          </a:p>
+        </p:txBody>
+      </p:sp>
+      <p:sp>
+        <p:nvSpPr>
+          <p:cNvPr id="17417" name="impact-proposed-title">
+            <a:extLst xmlns:a="http://schemas.openxmlformats.org/drawingml/2006/main">
+              <a:ext uri="{FF2B5EF4-FFF2-40B4-BE49-F238E27FC236}">
+                <a16:creationId xmlns:a16="http://schemas.microsoft.com/office/drawing/2014/main" id="{4385B480-A0F9-40E1-BFE0-093C56CA6A0F}"/>
+              </a:ext>
+            </a:extLst>
+          </p:cNvPr>
+          <p:cNvSpPr>
+            <a:spLocks xmlns:a="http://schemas.openxmlformats.org/drawingml/2006/main" noGrp="1"/>
+          </p:cNvSpPr>
+          <p:nvPr/>
+        </p:nvSpPr>
+        <p:spPr>
+          <a:xfrm xmlns:a="http://schemas.openxmlformats.org/drawingml/2006/main">
+            <a:off x="6838950" y="1914525"/>
+            <a:ext cx="4533900" cy="238125"/>
           </a:xfrm>
           <a:prstGeom xmlns:a="http://schemas.openxmlformats.org/drawingml/2006/main" prst="rect">
             <a:avLst/>
@@ -11024,7 +13245,7 @@
           <a:lstStyle xmlns:a="http://schemas.openxmlformats.org/drawingml/2006/main"/>
           <a:p xmlns:a="http://schemas.openxmlformats.org/drawingml/2006/main">
             <a:pPr algn="l">
-              <a:defRPr sz="2550" b="1">
+              <a:defRPr sz="1350" b="1">
                 <a:solidFill>
                   <a:srgbClr val="1F497D"/>
                 </a:solidFill>
@@ -11034,7 +13255,7 @@
               </a:defRPr>
             </a:pPr>
             <a:r>
-              <a:rPr sz="2550" b="1">
+              <a:rPr sz="1350" b="1">
                 <a:solidFill>
                   <a:srgbClr val="1F497D"/>
                 </a:solidFill>
@@ -11042,29 +13263,29 @@
                 <a:ea typeface="Arial"/>
                 <a:cs typeface="Arial"/>
               </a:rPr>
-              <a:t>₹42.78 lakh cr</a:t>
-            </a:r>
-          </a:p>
-        </p:txBody>
-      </p:sp>
-      <p:sp>
-        <p:nvSpPr>
-          <p:cNvPr id="17416" name="impact-label-2">
-            <a:extLst xmlns:a="http://schemas.openxmlformats.org/drawingml/2006/main">
-              <a:ext uri="{FF2B5EF4-FFF2-40B4-BE49-F238E27FC236}">
-                <a16:creationId xmlns:a16="http://schemas.microsoft.com/office/drawing/2014/main" id="{54195B39-C1F4-4135-978C-0C614FC97788}"/>
-              </a:ext>
-            </a:extLst>
-          </p:cNvPr>
-          <p:cNvSpPr>
-            <a:spLocks xmlns:a="http://schemas.openxmlformats.org/drawingml/2006/main" noGrp="1"/>
-          </p:cNvSpPr>
-          <p:nvPr/>
-        </p:nvSpPr>
-        <p:spPr>
-          <a:xfrm xmlns:a="http://schemas.openxmlformats.org/drawingml/2006/main">
-            <a:off x="4191000" y="2200275"/>
-            <a:ext cx="3381375" cy="333375"/>
+              <a:t>PROPOSED • EVIDENCE-GATED REVIEW</a:t>
+            </a:r>
+          </a:p>
+        </p:txBody>
+      </p:sp>
+      <p:sp>
+        <p:nvSpPr>
+          <p:cNvPr id="17418" name="impact-proposed-detail">
+            <a:extLst xmlns:a="http://schemas.openxmlformats.org/drawingml/2006/main">
+              <a:ext uri="{FF2B5EF4-FFF2-40B4-BE49-F238E27FC236}">
+                <a16:creationId xmlns:a16="http://schemas.microsoft.com/office/drawing/2014/main" id="{CBABE515-B93F-4980-A88C-CC68E1F4C048}"/>
+              </a:ext>
+            </a:extLst>
+          </p:cNvPr>
+          <p:cNvSpPr>
+            <a:spLocks xmlns:a="http://schemas.openxmlformats.org/drawingml/2006/main" noGrp="1"/>
+          </p:cNvSpPr>
+          <p:nvPr/>
+        </p:nvSpPr>
+        <p:spPr>
+          <a:xfrm xmlns:a="http://schemas.openxmlformats.org/drawingml/2006/main">
+            <a:off x="6838950" y="2266950"/>
+            <a:ext cx="4533900" cy="819150"/>
           </a:xfrm>
           <a:prstGeom xmlns:a="http://schemas.openxmlformats.org/drawingml/2006/main" prst="rect">
             <a:avLst/>
@@ -11082,9 +13303,9 @@
           <a:lstStyle xmlns:a="http://schemas.openxmlformats.org/drawingml/2006/main"/>
           <a:p xmlns:a="http://schemas.openxmlformats.org/drawingml/2006/main">
             <a:pPr algn="l">
-              <a:defRPr sz="1350">
-                <a:solidFill>
-                  <a:srgbClr val="202020"/>
+              <a:defRPr sz="1500">
+                <a:solidFill>
+                  <a:srgbClr val="252525"/>
                 </a:solidFill>
                 <a:latin typeface="Arial"/>
                 <a:ea typeface="Arial"/>
@@ -11092,37 +13313,37 @@
               </a:defRPr>
             </a:pPr>
             <a:r>
-              <a:rPr sz="1350">
-                <a:solidFill>
-                  <a:srgbClr val="202020"/>
+              <a:rPr sz="1500">
+                <a:solidFill>
+                  <a:srgbClr val="252525"/>
                 </a:solidFill>
                 <a:latin typeface="Arial"/>
                 <a:ea typeface="Arial"/>
                 <a:cs typeface="Arial"/>
               </a:rPr>
-              <a:t>revised project cost</a:t>
-            </a:r>
-          </a:p>
-        </p:txBody>
-      </p:sp>
-      <p:sp>
-        <p:nvSpPr>
-          <p:cNvPr id="17417" name="impact-metric-3">
-            <a:extLst xmlns:a="http://schemas.openxmlformats.org/drawingml/2006/main">
-              <a:ext uri="{FF2B5EF4-FFF2-40B4-BE49-F238E27FC236}">
-                <a16:creationId xmlns:a16="http://schemas.microsoft.com/office/drawing/2014/main" id="{A93F3B0B-B9B4-4161-BE5C-541EFBA4E8E9}"/>
-              </a:ext>
-            </a:extLst>
-          </p:cNvPr>
-          <p:cNvSpPr>
-            <a:spLocks xmlns:a="http://schemas.openxmlformats.org/drawingml/2006/main" noGrp="1"/>
-          </p:cNvSpPr>
-          <p:nvPr/>
-        </p:nvSpPr>
-        <p:spPr>
-          <a:xfrm xmlns:a="http://schemas.openxmlformats.org/drawingml/2006/main">
-            <a:off x="7953375" y="1685925"/>
-            <a:ext cx="3524250" cy="495300"/>
+              <a:t>A ranked, source-linked queue directs a reviewer to a change, the reason it was flagged, and any data limitation—then records the analyst’s disposition.</a:t>
+            </a:r>
+          </a:p>
+        </p:txBody>
+      </p:sp>
+      <p:sp>
+        <p:nvSpPr>
+          <p:cNvPr id="17419" name="impact-analogy-label">
+            <a:extLst xmlns:a="http://schemas.openxmlformats.org/drawingml/2006/main">
+              <a:ext uri="{FF2B5EF4-FFF2-40B4-BE49-F238E27FC236}">
+                <a16:creationId xmlns:a16="http://schemas.microsoft.com/office/drawing/2014/main" id="{916EB814-DAA3-4FD4-A01B-030BA13CB688}"/>
+              </a:ext>
+            </a:extLst>
+          </p:cNvPr>
+          <p:cNvSpPr>
+            <a:spLocks xmlns:a="http://schemas.openxmlformats.org/drawingml/2006/main" noGrp="1"/>
+          </p:cNvSpPr>
+          <p:nvPr/>
+        </p:nvSpPr>
+        <p:spPr>
+          <a:xfrm xmlns:a="http://schemas.openxmlformats.org/drawingml/2006/main">
+            <a:off x="609600" y="3600450"/>
+            <a:ext cx="1428750" cy="238125"/>
           </a:xfrm>
           <a:prstGeom xmlns:a="http://schemas.openxmlformats.org/drawingml/2006/main" prst="rect">
             <a:avLst/>
@@ -11140,7 +13361,7 @@
           <a:lstStyle xmlns:a="http://schemas.openxmlformats.org/drawingml/2006/main"/>
           <a:p xmlns:a="http://schemas.openxmlformats.org/drawingml/2006/main">
             <a:pPr algn="l">
-              <a:defRPr sz="2550" b="1">
+              <a:defRPr sz="1313" b="1">
                 <a:solidFill>
                   <a:srgbClr val="1F497D"/>
                 </a:solidFill>
@@ -11150,7 +13371,7 @@
               </a:defRPr>
             </a:pPr>
             <a:r>
-              <a:rPr sz="2550" b="1">
+              <a:rPr sz="1313" b="1">
                 <a:solidFill>
                   <a:srgbClr val="1F497D"/>
                 </a:solidFill>
@@ -11158,29 +13379,29 @@
                 <a:ea typeface="Arial"/>
                 <a:cs typeface="Arial"/>
               </a:rPr>
-              <a:t>₹20.36 lakh cr</a:t>
-            </a:r>
-          </a:p>
-        </p:txBody>
-      </p:sp>
-      <p:sp>
-        <p:nvSpPr>
-          <p:cNvPr id="17418" name="impact-label-3">
-            <a:extLst xmlns:a="http://schemas.openxmlformats.org/drawingml/2006/main">
-              <a:ext uri="{FF2B5EF4-FFF2-40B4-BE49-F238E27FC236}">
-                <a16:creationId xmlns:a16="http://schemas.microsoft.com/office/drawing/2014/main" id="{8E086F61-5B93-4930-A799-FEFC228B1EED}"/>
-              </a:ext>
-            </a:extLst>
-          </p:cNvPr>
-          <p:cNvSpPr>
-            <a:spLocks xmlns:a="http://schemas.openxmlformats.org/drawingml/2006/main" noGrp="1"/>
-          </p:cNvSpPr>
-          <p:nvPr/>
-        </p:nvSpPr>
-        <p:spPr>
-          <a:xfrm xmlns:a="http://schemas.openxmlformats.org/drawingml/2006/main">
-            <a:off x="7953375" y="2200275"/>
-            <a:ext cx="3524250" cy="333375"/>
+              <a:t>ANALOGY</a:t>
+            </a:r>
+          </a:p>
+        </p:txBody>
+      </p:sp>
+      <p:sp>
+        <p:nvSpPr>
+          <p:cNvPr id="17420" name="impact-analogy">
+            <a:extLst xmlns:a="http://schemas.openxmlformats.org/drawingml/2006/main">
+              <a:ext uri="{FF2B5EF4-FFF2-40B4-BE49-F238E27FC236}">
+                <a16:creationId xmlns:a16="http://schemas.microsoft.com/office/drawing/2014/main" id="{477D627A-38DD-40DA-B2DB-3F7FA4BF8C42}"/>
+              </a:ext>
+            </a:extLst>
+          </p:cNvPr>
+          <p:cNvSpPr>
+            <a:spLocks xmlns:a="http://schemas.openxmlformats.org/drawingml/2006/main" noGrp="1"/>
+          </p:cNvSpPr>
+          <p:nvPr/>
+        </p:nvSpPr>
+        <p:spPr>
+          <a:xfrm xmlns:a="http://schemas.openxmlformats.org/drawingml/2006/main">
+            <a:off x="609600" y="3886200"/>
+            <a:ext cx="10972800" cy="542925"/>
           </a:xfrm>
           <a:prstGeom xmlns:a="http://schemas.openxmlformats.org/drawingml/2006/main" prst="rect">
             <a:avLst/>
@@ -11198,9 +13419,9 @@
           <a:lstStyle xmlns:a="http://schemas.openxmlformats.org/drawingml/2006/main"/>
           <a:p xmlns:a="http://schemas.openxmlformats.org/drawingml/2006/main">
             <a:pPr algn="l">
-              <a:defRPr sz="1350">
-                <a:solidFill>
-                  <a:srgbClr val="202020"/>
+              <a:defRPr sz="1650" b="1">
+                <a:solidFill>
+                  <a:srgbClr val="252525"/>
                 </a:solidFill>
                 <a:latin typeface="Arial"/>
                 <a:ea typeface="Arial"/>
@@ -11208,68 +13429,37 @@
               </a:defRPr>
             </a:pPr>
             <a:r>
-              <a:rPr sz="1350">
-                <a:solidFill>
-                  <a:srgbClr val="202020"/>
+              <a:rPr sz="1650" b="1">
+                <a:solidFill>
+                  <a:srgbClr val="252525"/>
                 </a:solidFill>
                 <a:latin typeface="Arial"/>
                 <a:ea typeface="Arial"/>
                 <a:cs typeface="Arial"/>
               </a:rPr>
-              <a:t>spent • 47.59% of revised cost</a:t>
-            </a:r>
-          </a:p>
-        </p:txBody>
-      </p:sp>
-      <p:sp>
-        <p:nvSpPr>
-          <p:cNvPr id="17419" name="impact-divider">
-            <a:extLst xmlns:a="http://schemas.openxmlformats.org/drawingml/2006/main">
-              <a:ext uri="{FF2B5EF4-FFF2-40B4-BE49-F238E27FC236}">
-                <a16:creationId xmlns:a16="http://schemas.microsoft.com/office/drawing/2014/main" id="{AA7E403D-AC0D-4EED-83A3-005B6290C416}"/>
-              </a:ext>
-            </a:extLst>
-          </p:cNvPr>
-          <p:cNvSpPr>
-            <a:spLocks xmlns:a="http://schemas.openxmlformats.org/drawingml/2006/main" noGrp="1"/>
-          </p:cNvSpPr>
-          <p:nvPr/>
-        </p:nvSpPr>
-        <p:spPr>
-          <a:xfrm xmlns:a="http://schemas.openxmlformats.org/drawingml/2006/main">
-            <a:off x="609600" y="2667000"/>
-            <a:ext cx="10972800" cy="14288"/>
-          </a:xfrm>
-          <a:prstGeom xmlns:a="http://schemas.openxmlformats.org/drawingml/2006/main" prst="rect">
-            <a:avLst/>
-          </a:prstGeom>
-          <a:solidFill xmlns:a="http://schemas.openxmlformats.org/drawingml/2006/main">
-            <a:srgbClr val="9AB2C7"/>
-          </a:solidFill>
-          <a:ln xmlns:a="http://schemas.openxmlformats.org/drawingml/2006/main" w="0">
-            <a:noFill/>
-            <a:prstDash val="solid"/>
-          </a:ln>
-        </p:spPr>
-      </p:sp>
-      <p:sp>
-        <p:nvSpPr>
-          <p:cNvPr id="17420" name="impact-current-heading">
-            <a:extLst xmlns:a="http://schemas.openxmlformats.org/drawingml/2006/main">
-              <a:ext uri="{FF2B5EF4-FFF2-40B4-BE49-F238E27FC236}">
-                <a16:creationId xmlns:a16="http://schemas.microsoft.com/office/drawing/2014/main" id="{05ED0763-1B57-4754-A8AD-573BED2705A8}"/>
-              </a:ext>
-            </a:extLst>
-          </p:cNvPr>
-          <p:cNvSpPr>
-            <a:spLocks xmlns:a="http://schemas.openxmlformats.org/drawingml/2006/main" noGrp="1"/>
-          </p:cNvSpPr>
-          <p:nvPr/>
-        </p:nvSpPr>
-        <p:spPr>
-          <a:xfrm xmlns:a="http://schemas.openxmlformats.org/drawingml/2006/main">
-            <a:off x="609600" y="2838450"/>
-            <a:ext cx="10972800" cy="266700"/>
+              <a:t>Like an inspection triage board: it points to the project and evidence to check; the authorized official decides what to do.</a:t>
+            </a:r>
+          </a:p>
+        </p:txBody>
+      </p:sp>
+      <p:sp>
+        <p:nvSpPr>
+          <p:cNvPr id="17421" name="impact-measure-title">
+            <a:extLst xmlns:a="http://schemas.openxmlformats.org/drawingml/2006/main">
+              <a:ext uri="{FF2B5EF4-FFF2-40B4-BE49-F238E27FC236}">
+                <a16:creationId xmlns:a16="http://schemas.microsoft.com/office/drawing/2014/main" id="{A3F71183-7BC7-40B1-B7ED-B6E5AF2B14CD}"/>
+              </a:ext>
+            </a:extLst>
+          </p:cNvPr>
+          <p:cNvSpPr>
+            <a:spLocks xmlns:a="http://schemas.openxmlformats.org/drawingml/2006/main" noGrp="1"/>
+          </p:cNvSpPr>
+          <p:nvPr/>
+        </p:nvSpPr>
+        <p:spPr>
+          <a:xfrm xmlns:a="http://schemas.openxmlformats.org/drawingml/2006/main">
+            <a:off x="609600" y="4591050"/>
+            <a:ext cx="10972800" cy="257175"/>
           </a:xfrm>
           <a:prstGeom xmlns:a="http://schemas.openxmlformats.org/drawingml/2006/main" prst="rect">
             <a:avLst/>
@@ -11287,7 +13477,7 @@
           <a:lstStyle xmlns:a="http://schemas.openxmlformats.org/drawingml/2006/main"/>
           <a:p xmlns:a="http://schemas.openxmlformats.org/drawingml/2006/main">
             <a:pPr algn="l">
-              <a:defRPr sz="1500" b="1">
+              <a:defRPr sz="1388" b="1">
                 <a:solidFill>
                   <a:srgbClr val="1F497D"/>
                 </a:solidFill>
@@ -11297,7 +13487,7 @@
               </a:defRPr>
             </a:pPr>
             <a:r>
-              <a:rPr sz="1500" b="1">
+              <a:rPr sz="1388" b="1">
                 <a:solidFill>
                   <a:srgbClr val="1F497D"/>
                 </a:solidFill>
@@ -11305,29 +13495,62 @@
                 <a:ea typeface="Arial"/>
                 <a:cs typeface="Arial"/>
               </a:rPr>
-              <a:t>WHAT CHANGES FOR REVIEWERS</a:t>
-            </a:r>
-          </a:p>
-        </p:txBody>
-      </p:sp>
-      <p:sp>
-        <p:nvSpPr>
-          <p:cNvPr id="17421" name="impact-current">
-            <a:extLst xmlns:a="http://schemas.openxmlformats.org/drawingml/2006/main">
-              <a:ext uri="{FF2B5EF4-FFF2-40B4-BE49-F238E27FC236}">
-                <a16:creationId xmlns:a16="http://schemas.microsoft.com/office/drawing/2014/main" id="{02E8389E-31B0-4B45-9A16-2EE9EB71C9F8}"/>
-              </a:ext>
-            </a:extLst>
-          </p:cNvPr>
-          <p:cNvSpPr>
-            <a:spLocks xmlns:a="http://schemas.openxmlformats.org/drawingml/2006/main" noGrp="1"/>
-          </p:cNvSpPr>
-          <p:nvPr/>
-        </p:nvSpPr>
-        <p:spPr>
-          <a:xfrm xmlns:a="http://schemas.openxmlformats.org/drawingml/2006/main">
-            <a:off x="609600" y="3209925"/>
-            <a:ext cx="5191125" cy="876300"/>
+              <a:t>PILOT SCORECARD • COMPARE WITH THE CURRENT REVIEW BASELINE</a:t>
+            </a:r>
+          </a:p>
+        </p:txBody>
+      </p:sp>
+      <p:sp>
+        <p:nvSpPr>
+          <p:cNvPr id="17422" name="impact-measure-1-surface">
+            <a:extLst xmlns:a="http://schemas.openxmlformats.org/drawingml/2006/main">
+              <a:ext uri="{FF2B5EF4-FFF2-40B4-BE49-F238E27FC236}">
+                <a16:creationId xmlns:a16="http://schemas.microsoft.com/office/drawing/2014/main" id="{F097857D-B2DE-434A-9AB8-9996A9CEF4BE}"/>
+              </a:ext>
+            </a:extLst>
+          </p:cNvPr>
+          <p:cNvSpPr>
+            <a:spLocks xmlns:a="http://schemas.openxmlformats.org/drawingml/2006/main" noGrp="1"/>
+          </p:cNvSpPr>
+          <p:nvPr/>
+        </p:nvSpPr>
+        <p:spPr>
+          <a:xfrm xmlns:a="http://schemas.openxmlformats.org/drawingml/2006/main">
+            <a:off x="609600" y="4943475"/>
+            <a:ext cx="3429000" cy="638175"/>
+          </a:xfrm>
+          <a:prstGeom xmlns:a="http://schemas.openxmlformats.org/drawingml/2006/main" prst="rect">
+            <a:avLst/>
+          </a:prstGeom>
+          <a:solidFill xmlns:a="http://schemas.openxmlformats.org/drawingml/2006/main">
+            <a:srgbClr val="FFFFFF"/>
+          </a:solidFill>
+          <a:ln xmlns:a="http://schemas.openxmlformats.org/drawingml/2006/main" w="9525">
+            <a:solidFill>
+              <a:srgbClr val="C4D2DD"/>
+            </a:solidFill>
+            <a:prstDash val="solid"/>
+          </a:ln>
+        </p:spPr>
+      </p:sp>
+      <p:sp>
+        <p:nvSpPr>
+          <p:cNvPr id="17423" name="impact-measure-1-title">
+            <a:extLst xmlns:a="http://schemas.openxmlformats.org/drawingml/2006/main">
+              <a:ext uri="{FF2B5EF4-FFF2-40B4-BE49-F238E27FC236}">
+                <a16:creationId xmlns:a16="http://schemas.microsoft.com/office/drawing/2014/main" id="{806A0860-F764-43F7-9198-468DD6895D2F}"/>
+              </a:ext>
+            </a:extLst>
+          </p:cNvPr>
+          <p:cNvSpPr>
+            <a:spLocks xmlns:a="http://schemas.openxmlformats.org/drawingml/2006/main" noGrp="1"/>
+          </p:cNvSpPr>
+          <p:nvPr/>
+        </p:nvSpPr>
+        <p:spPr>
+          <a:xfrm xmlns:a="http://schemas.openxmlformats.org/drawingml/2006/main">
+            <a:off x="723900" y="5010150"/>
+            <a:ext cx="3200400" cy="209550"/>
           </a:xfrm>
           <a:prstGeom xmlns:a="http://schemas.openxmlformats.org/drawingml/2006/main" prst="rect">
             <a:avLst/>
@@ -11344,10 +13567,10 @@
           </a:bodyPr>
           <a:lstStyle xmlns:a="http://schemas.openxmlformats.org/drawingml/2006/main"/>
           <a:p xmlns:a="http://schemas.openxmlformats.org/drawingml/2006/main">
-            <a:pPr algn="l">
-              <a:defRPr sz="1500">
-                <a:solidFill>
-                  <a:srgbClr val="202020"/>
+            <a:pPr algn="ctr">
+              <a:defRPr sz="1238" b="1">
+                <a:solidFill>
+                  <a:srgbClr val="1F497D"/>
                 </a:solidFill>
                 <a:latin typeface="Arial"/>
                 <a:ea typeface="Arial"/>
@@ -11355,37 +13578,37 @@
               </a:defRPr>
             </a:pPr>
             <a:r>
-              <a:rPr sz="1500">
-                <a:solidFill>
-                  <a:srgbClr val="202020"/>
+              <a:rPr sz="1238" b="1">
+                <a:solidFill>
+                  <a:srgbClr val="1F497D"/>
                 </a:solidFill>
                 <a:latin typeface="Arial"/>
                 <a:ea typeface="Arial"/>
                 <a:cs typeface="Arial"/>
               </a:rPr>
-              <a:t>TODAY • The prototype turns the July 2026 snapshot (1,775 projects) into a searchable, filterable directory with a transparent rule score and project details.</a:t>
-            </a:r>
-          </a:p>
-        </p:txBody>
-      </p:sp>
-      <p:sp>
-        <p:nvSpPr>
-          <p:cNvPr id="17422" name="impact-intended">
-            <a:extLst xmlns:a="http://schemas.openxmlformats.org/drawingml/2006/main">
-              <a:ext uri="{FF2B5EF4-FFF2-40B4-BE49-F238E27FC236}">
-                <a16:creationId xmlns:a16="http://schemas.microsoft.com/office/drawing/2014/main" id="{35D90200-59F6-4661-9A81-E32E9DE1FAEA}"/>
-              </a:ext>
-            </a:extLst>
-          </p:cNvPr>
-          <p:cNvSpPr>
-            <a:spLocks xmlns:a="http://schemas.openxmlformats.org/drawingml/2006/main" noGrp="1"/>
-          </p:cNvSpPr>
-          <p:nvPr/>
-        </p:nvSpPr>
-        <p:spPr>
-          <a:xfrm xmlns:a="http://schemas.openxmlformats.org/drawingml/2006/main">
-            <a:off x="6381750" y="3209925"/>
-            <a:ext cx="5191125" cy="876300"/>
+              <a:t>PRECISION@K</a:t>
+            </a:r>
+          </a:p>
+        </p:txBody>
+      </p:sp>
+      <p:sp>
+        <p:nvSpPr>
+          <p:cNvPr id="17424" name="impact-measure-1-detail">
+            <a:extLst xmlns:a="http://schemas.openxmlformats.org/drawingml/2006/main">
+              <a:ext uri="{FF2B5EF4-FFF2-40B4-BE49-F238E27FC236}">
+                <a16:creationId xmlns:a16="http://schemas.microsoft.com/office/drawing/2014/main" id="{B7FF968D-BA88-43F2-B315-0D485A4AD274}"/>
+              </a:ext>
+            </a:extLst>
+          </p:cNvPr>
+          <p:cNvSpPr>
+            <a:spLocks xmlns:a="http://schemas.openxmlformats.org/drawingml/2006/main" noGrp="1"/>
+          </p:cNvSpPr>
+          <p:nvPr/>
+        </p:nvSpPr>
+        <p:spPr>
+          <a:xfrm xmlns:a="http://schemas.openxmlformats.org/drawingml/2006/main">
+            <a:off x="723900" y="5248275"/>
+            <a:ext cx="3200400" cy="247650"/>
           </a:xfrm>
           <a:prstGeom xmlns:a="http://schemas.openxmlformats.org/drawingml/2006/main" prst="rect">
             <a:avLst/>
@@ -11397,15 +13620,15 @@
           </a:ln>
         </p:spPr>
         <p:txBody>
-          <a:bodyPr xmlns:a="http://schemas.openxmlformats.org/drawingml/2006/main" wrap="square" lIns="0" tIns="0" rIns="0" bIns="0" anchor="t">
+          <a:bodyPr xmlns:a="http://schemas.openxmlformats.org/drawingml/2006/main" wrap="square" lIns="0" tIns="0" rIns="0" bIns="0" anchor="ctr">
             <a:normAutofit fontScale="100000"/>
           </a:bodyPr>
           <a:lstStyle xmlns:a="http://schemas.openxmlformats.org/drawingml/2006/main"/>
           <a:p xmlns:a="http://schemas.openxmlformats.org/drawingml/2006/main">
-            <a:pPr algn="l">
-              <a:defRPr sz="1500">
-                <a:solidFill>
-                  <a:srgbClr val="202020"/>
+            <a:pPr algn="ctr">
+              <a:defRPr sz="1163">
+                <a:solidFill>
+                  <a:srgbClr val="303030"/>
                 </a:solidFill>
                 <a:latin typeface="Arial"/>
                 <a:ea typeface="Arial"/>
@@ -11413,37 +13636,70 @@
               </a:defRPr>
             </a:pPr>
             <a:r>
-              <a:rPr sz="1500">
-                <a:solidFill>
-                  <a:srgbClr val="202020"/>
+              <a:rPr sz="1163">
+                <a:solidFill>
+                  <a:srgbClr val="303030"/>
                 </a:solidFill>
                 <a:latin typeface="Arial"/>
                 <a:ea typeface="Arial"/>
                 <a:cs typeface="Arial"/>
               </a:rPr>
-              <a:t>INTENDED • Surface candidates for earlier review and show why. Time saved, earlier detection and fewer delays have not been measured.</a:t>
-            </a:r>
-          </a:p>
-        </p:txBody>
-      </p:sp>
-      <p:sp>
-        <p:nvSpPr>
-          <p:cNvPr id="17423" name="impact-analogy-label">
-            <a:extLst xmlns:a="http://schemas.openxmlformats.org/drawingml/2006/main">
-              <a:ext uri="{FF2B5EF4-FFF2-40B4-BE49-F238E27FC236}">
-                <a16:creationId xmlns:a16="http://schemas.microsoft.com/office/drawing/2014/main" id="{B30FF685-5FF6-4E6F-8D68-821415FDADC0}"/>
-              </a:ext>
-            </a:extLst>
-          </p:cNvPr>
-          <p:cNvSpPr>
-            <a:spLocks xmlns:a="http://schemas.openxmlformats.org/drawingml/2006/main" noGrp="1"/>
-          </p:cNvSpPr>
-          <p:nvPr/>
-        </p:nvSpPr>
-        <p:spPr>
-          <a:xfrm xmlns:a="http://schemas.openxmlformats.org/drawingml/2006/main">
-            <a:off x="609600" y="4295775"/>
-            <a:ext cx="1428750" cy="247650"/>
+              <a:t>Useful flags within staff capacity</a:t>
+            </a:r>
+          </a:p>
+        </p:txBody>
+      </p:sp>
+      <p:sp>
+        <p:nvSpPr>
+          <p:cNvPr id="17425" name="impact-measure-2-surface">
+            <a:extLst xmlns:a="http://schemas.openxmlformats.org/drawingml/2006/main">
+              <a:ext uri="{FF2B5EF4-FFF2-40B4-BE49-F238E27FC236}">
+                <a16:creationId xmlns:a16="http://schemas.microsoft.com/office/drawing/2014/main" id="{352D494E-7520-4CAC-8E0C-3996BD7BA00B}"/>
+              </a:ext>
+            </a:extLst>
+          </p:cNvPr>
+          <p:cNvSpPr>
+            <a:spLocks xmlns:a="http://schemas.openxmlformats.org/drawingml/2006/main" noGrp="1"/>
+          </p:cNvSpPr>
+          <p:nvPr/>
+        </p:nvSpPr>
+        <p:spPr>
+          <a:xfrm xmlns:a="http://schemas.openxmlformats.org/drawingml/2006/main">
+            <a:off x="4305300" y="4943475"/>
+            <a:ext cx="3429000" cy="638175"/>
+          </a:xfrm>
+          <a:prstGeom xmlns:a="http://schemas.openxmlformats.org/drawingml/2006/main" prst="rect">
+            <a:avLst/>
+          </a:prstGeom>
+          <a:solidFill xmlns:a="http://schemas.openxmlformats.org/drawingml/2006/main">
+            <a:srgbClr val="FFFFFF"/>
+          </a:solidFill>
+          <a:ln xmlns:a="http://schemas.openxmlformats.org/drawingml/2006/main" w="9525">
+            <a:solidFill>
+              <a:srgbClr val="C4D2DD"/>
+            </a:solidFill>
+            <a:prstDash val="solid"/>
+          </a:ln>
+        </p:spPr>
+      </p:sp>
+      <p:sp>
+        <p:nvSpPr>
+          <p:cNvPr id="17426" name="impact-measure-2-title">
+            <a:extLst xmlns:a="http://schemas.openxmlformats.org/drawingml/2006/main">
+              <a:ext uri="{FF2B5EF4-FFF2-40B4-BE49-F238E27FC236}">
+                <a16:creationId xmlns:a16="http://schemas.microsoft.com/office/drawing/2014/main" id="{6442F47B-4BD1-46EB-9E04-0205592D0A3A}"/>
+              </a:ext>
+            </a:extLst>
+          </p:cNvPr>
+          <p:cNvSpPr>
+            <a:spLocks xmlns:a="http://schemas.openxmlformats.org/drawingml/2006/main" noGrp="1"/>
+          </p:cNvSpPr>
+          <p:nvPr/>
+        </p:nvSpPr>
+        <p:spPr>
+          <a:xfrm xmlns:a="http://schemas.openxmlformats.org/drawingml/2006/main">
+            <a:off x="4419600" y="5010150"/>
+            <a:ext cx="3200400" cy="209550"/>
           </a:xfrm>
           <a:prstGeom xmlns:a="http://schemas.openxmlformats.org/drawingml/2006/main" prst="rect">
             <a:avLst/>
@@ -11460,8 +13716,8 @@
           </a:bodyPr>
           <a:lstStyle xmlns:a="http://schemas.openxmlformats.org/drawingml/2006/main"/>
           <a:p xmlns:a="http://schemas.openxmlformats.org/drawingml/2006/main">
-            <a:pPr algn="l">
-              <a:defRPr sz="1350" b="1">
+            <a:pPr algn="ctr">
+              <a:defRPr sz="1238" b="1">
                 <a:solidFill>
                   <a:srgbClr val="1F497D"/>
                 </a:solidFill>
@@ -11471,7 +13727,7 @@
               </a:defRPr>
             </a:pPr>
             <a:r>
-              <a:rPr sz="1350" b="1">
+              <a:rPr sz="1238" b="1">
                 <a:solidFill>
                   <a:srgbClr val="1F497D"/>
                 </a:solidFill>
@@ -11479,29 +13735,29 @@
                 <a:ea typeface="Arial"/>
                 <a:cs typeface="Arial"/>
               </a:rPr>
-              <a:t>ANALOGY</a:t>
-            </a:r>
-          </a:p>
-        </p:txBody>
-      </p:sp>
-      <p:sp>
-        <p:nvSpPr>
-          <p:cNvPr id="17424" name="impact-analogy">
-            <a:extLst xmlns:a="http://schemas.openxmlformats.org/drawingml/2006/main">
-              <a:ext uri="{FF2B5EF4-FFF2-40B4-BE49-F238E27FC236}">
-                <a16:creationId xmlns:a16="http://schemas.microsoft.com/office/drawing/2014/main" id="{351098A5-23D3-42E3-AE55-61918AF257EB}"/>
-              </a:ext>
-            </a:extLst>
-          </p:cNvPr>
-          <p:cNvSpPr>
-            <a:spLocks xmlns:a="http://schemas.openxmlformats.org/drawingml/2006/main" noGrp="1"/>
-          </p:cNvSpPr>
-          <p:nvPr/>
-        </p:nvSpPr>
-        <p:spPr>
-          <a:xfrm xmlns:a="http://schemas.openxmlformats.org/drawingml/2006/main">
-            <a:off x="609600" y="4591050"/>
-            <a:ext cx="10972800" cy="600075"/>
+              <a:t>LEAD TIME</a:t>
+            </a:r>
+          </a:p>
+        </p:txBody>
+      </p:sp>
+      <p:sp>
+        <p:nvSpPr>
+          <p:cNvPr id="17427" name="impact-measure-2-detail">
+            <a:extLst xmlns:a="http://schemas.openxmlformats.org/drawingml/2006/main">
+              <a:ext uri="{FF2B5EF4-FFF2-40B4-BE49-F238E27FC236}">
+                <a16:creationId xmlns:a16="http://schemas.microsoft.com/office/drawing/2014/main" id="{355D3A79-AF9F-4F12-9674-2DD791C1ADF8}"/>
+              </a:ext>
+            </a:extLst>
+          </p:cNvPr>
+          <p:cNvSpPr>
+            <a:spLocks xmlns:a="http://schemas.openxmlformats.org/drawingml/2006/main" noGrp="1"/>
+          </p:cNvSpPr>
+          <p:nvPr/>
+        </p:nvSpPr>
+        <p:spPr>
+          <a:xfrm xmlns:a="http://schemas.openxmlformats.org/drawingml/2006/main">
+            <a:off x="4419600" y="5248275"/>
+            <a:ext cx="3200400" cy="247650"/>
           </a:xfrm>
           <a:prstGeom xmlns:a="http://schemas.openxmlformats.org/drawingml/2006/main" prst="rect">
             <a:avLst/>
@@ -11513,15 +13769,15 @@
           </a:ln>
         </p:spPr>
         <p:txBody>
-          <a:bodyPr xmlns:a="http://schemas.openxmlformats.org/drawingml/2006/main" wrap="square" lIns="0" tIns="0" rIns="0" bIns="0" anchor="t">
+          <a:bodyPr xmlns:a="http://schemas.openxmlformats.org/drawingml/2006/main" wrap="square" lIns="0" tIns="0" rIns="0" bIns="0" anchor="ctr">
             <a:normAutofit fontScale="100000"/>
           </a:bodyPr>
           <a:lstStyle xmlns:a="http://schemas.openxmlformats.org/drawingml/2006/main"/>
           <a:p xmlns:a="http://schemas.openxmlformats.org/drawingml/2006/main">
-            <a:pPr algn="l">
-              <a:defRPr sz="1725" b="1">
-                <a:solidFill>
-                  <a:srgbClr val="252525"/>
+            <a:pPr algn="ctr">
+              <a:defRPr sz="1163">
+                <a:solidFill>
+                  <a:srgbClr val="303030"/>
                 </a:solidFill>
                 <a:latin typeface="Arial"/>
                 <a:ea typeface="Arial"/>
@@ -11529,37 +13785,70 @@
               </a:defRPr>
             </a:pPr>
             <a:r>
-              <a:rPr sz="1725" b="1">
-                <a:solidFill>
-                  <a:srgbClr val="252525"/>
+              <a:rPr sz="1163">
+                <a:solidFill>
+                  <a:srgbClr val="303030"/>
                 </a:solidFill>
                 <a:latin typeface="Arial"/>
                 <a:ea typeface="Arial"/>
                 <a:cs typeface="Arial"/>
               </a:rPr>
-              <a:t>Like an inspection triage board: it points to the project and its evidence; the authorized official decides what to inspect next.</a:t>
-            </a:r>
-          </a:p>
-        </p:txBody>
-      </p:sp>
-      <p:sp>
-        <p:nvSpPr>
-          <p:cNvPr id="17425" name="impact-potential">
-            <a:extLst xmlns:a="http://schemas.openxmlformats.org/drawingml/2006/main">
-              <a:ext uri="{FF2B5EF4-FFF2-40B4-BE49-F238E27FC236}">
-                <a16:creationId xmlns:a16="http://schemas.microsoft.com/office/drawing/2014/main" id="{50DF04EA-59F7-45A6-B7C9-35DF432C410F}"/>
-              </a:ext>
-            </a:extLst>
-          </p:cNvPr>
-          <p:cNvSpPr>
-            <a:spLocks xmlns:a="http://schemas.openxmlformats.org/drawingml/2006/main" noGrp="1"/>
-          </p:cNvSpPr>
-          <p:nvPr/>
-        </p:nvSpPr>
-        <p:spPr>
-          <a:xfrm xmlns:a="http://schemas.openxmlformats.org/drawingml/2006/main">
-            <a:off x="609600" y="5353050"/>
-            <a:ext cx="10972800" cy="266700"/>
+              <a:t>How early before a reported change</a:t>
+            </a:r>
+          </a:p>
+        </p:txBody>
+      </p:sp>
+      <p:sp>
+        <p:nvSpPr>
+          <p:cNvPr id="17428" name="impact-measure-3-surface">
+            <a:extLst xmlns:a="http://schemas.openxmlformats.org/drawingml/2006/main">
+              <a:ext uri="{FF2B5EF4-FFF2-40B4-BE49-F238E27FC236}">
+                <a16:creationId xmlns:a16="http://schemas.microsoft.com/office/drawing/2014/main" id="{8DBCC597-DDFA-4B65-BC33-46DA0629A1D1}"/>
+              </a:ext>
+            </a:extLst>
+          </p:cNvPr>
+          <p:cNvSpPr>
+            <a:spLocks xmlns:a="http://schemas.openxmlformats.org/drawingml/2006/main" noGrp="1"/>
+          </p:cNvSpPr>
+          <p:nvPr/>
+        </p:nvSpPr>
+        <p:spPr>
+          <a:xfrm xmlns:a="http://schemas.openxmlformats.org/drawingml/2006/main">
+            <a:off x="8001000" y="4943475"/>
+            <a:ext cx="3429000" cy="638175"/>
+          </a:xfrm>
+          <a:prstGeom xmlns:a="http://schemas.openxmlformats.org/drawingml/2006/main" prst="rect">
+            <a:avLst/>
+          </a:prstGeom>
+          <a:solidFill xmlns:a="http://schemas.openxmlformats.org/drawingml/2006/main">
+            <a:srgbClr val="FFFFFF"/>
+          </a:solidFill>
+          <a:ln xmlns:a="http://schemas.openxmlformats.org/drawingml/2006/main" w="9525">
+            <a:solidFill>
+              <a:srgbClr val="C4D2DD"/>
+            </a:solidFill>
+            <a:prstDash val="solid"/>
+          </a:ln>
+        </p:spPr>
+      </p:sp>
+      <p:sp>
+        <p:nvSpPr>
+          <p:cNvPr id="17429" name="impact-measure-3-title">
+            <a:extLst xmlns:a="http://schemas.openxmlformats.org/drawingml/2006/main">
+              <a:ext uri="{FF2B5EF4-FFF2-40B4-BE49-F238E27FC236}">
+                <a16:creationId xmlns:a16="http://schemas.microsoft.com/office/drawing/2014/main" id="{64BE47B2-56B9-4718-936E-5407EE8CAE95}"/>
+              </a:ext>
+            </a:extLst>
+          </p:cNvPr>
+          <p:cNvSpPr>
+            <a:spLocks xmlns:a="http://schemas.openxmlformats.org/drawingml/2006/main" noGrp="1"/>
+          </p:cNvSpPr>
+          <p:nvPr/>
+        </p:nvSpPr>
+        <p:spPr>
+          <a:xfrm xmlns:a="http://schemas.openxmlformats.org/drawingml/2006/main">
+            <a:off x="8115300" y="5010150"/>
+            <a:ext cx="3200400" cy="209550"/>
           </a:xfrm>
           <a:prstGeom xmlns:a="http://schemas.openxmlformats.org/drawingml/2006/main" prst="rect">
             <a:avLst/>
@@ -11576,8 +13865,8 @@
           </a:bodyPr>
           <a:lstStyle xmlns:a="http://schemas.openxmlformats.org/drawingml/2006/main"/>
           <a:p xmlns:a="http://schemas.openxmlformats.org/drawingml/2006/main">
-            <a:pPr algn="l">
-              <a:defRPr sz="1388" b="1">
+            <a:pPr algn="ctr">
+              <a:defRPr sz="1238" b="1">
                 <a:solidFill>
                   <a:srgbClr val="1F497D"/>
                 </a:solidFill>
@@ -11587,7 +13876,7 @@
               </a:defRPr>
             </a:pPr>
             <a:r>
-              <a:rPr sz="1388" b="1">
+              <a:rPr sz="1238" b="1">
                 <a:solidFill>
                   <a:srgbClr val="1F497D"/>
                 </a:solidFill>
@@ -11595,29 +13884,29 @@
                 <a:ea typeface="Arial"/>
                 <a:cs typeface="Arial"/>
               </a:rPr>
-              <a:t>Potential value: prioritized follow-up • traceable reasoning • open-source reuse</a:t>
-            </a:r>
-          </a:p>
-        </p:txBody>
-      </p:sp>
-      <p:sp>
-        <p:nvSpPr>
-          <p:cNvPr id="17426" name="impact-caveat">
-            <a:extLst xmlns:a="http://schemas.openxmlformats.org/drawingml/2006/main">
-              <a:ext uri="{FF2B5EF4-FFF2-40B4-BE49-F238E27FC236}">
-                <a16:creationId xmlns:a16="http://schemas.microsoft.com/office/drawing/2014/main" id="{EEEE1B70-510A-4369-8E8C-5DB45F0ECD1B}"/>
-              </a:ext>
-            </a:extLst>
-          </p:cNvPr>
-          <p:cNvSpPr>
-            <a:spLocks xmlns:a="http://schemas.openxmlformats.org/drawingml/2006/main" noGrp="1"/>
-          </p:cNvSpPr>
-          <p:nvPr/>
-        </p:nvSpPr>
-        <p:spPr>
-          <a:xfrm xmlns:a="http://schemas.openxmlformats.org/drawingml/2006/main">
-            <a:off x="609600" y="5695950"/>
-            <a:ext cx="10972800" cy="238125"/>
+              <a:t>REVIEW EFFORT</a:t>
+            </a:r>
+          </a:p>
+        </p:txBody>
+      </p:sp>
+      <p:sp>
+        <p:nvSpPr>
+          <p:cNvPr id="17430" name="impact-measure-3-detail">
+            <a:extLst xmlns:a="http://schemas.openxmlformats.org/drawingml/2006/main">
+              <a:ext uri="{FF2B5EF4-FFF2-40B4-BE49-F238E27FC236}">
+                <a16:creationId xmlns:a16="http://schemas.microsoft.com/office/drawing/2014/main" id="{CB819F3F-92C5-406D-B819-ECD66077F419}"/>
+              </a:ext>
+            </a:extLst>
+          </p:cNvPr>
+          <p:cNvSpPr>
+            <a:spLocks xmlns:a="http://schemas.openxmlformats.org/drawingml/2006/main" noGrp="1"/>
+          </p:cNvSpPr>
+          <p:nvPr/>
+        </p:nvSpPr>
+        <p:spPr>
+          <a:xfrm xmlns:a="http://schemas.openxmlformats.org/drawingml/2006/main">
+            <a:off x="8115300" y="5248275"/>
+            <a:ext cx="3200400" cy="247650"/>
           </a:xfrm>
           <a:prstGeom xmlns:a="http://schemas.openxmlformats.org/drawingml/2006/main" prst="rect">
             <a:avLst/>
@@ -11629,6 +13918,64 @@
           </a:ln>
         </p:spPr>
         <p:txBody>
+          <a:bodyPr xmlns:a="http://schemas.openxmlformats.org/drawingml/2006/main" wrap="square" lIns="0" tIns="0" rIns="0" bIns="0" anchor="ctr">
+            <a:normAutofit fontScale="100000"/>
+          </a:bodyPr>
+          <a:lstStyle xmlns:a="http://schemas.openxmlformats.org/drawingml/2006/main"/>
+          <a:p xmlns:a="http://schemas.openxmlformats.org/drawingml/2006/main">
+            <a:pPr algn="ctr">
+              <a:defRPr sz="1163">
+                <a:solidFill>
+                  <a:srgbClr val="303030"/>
+                </a:solidFill>
+                <a:latin typeface="Arial"/>
+                <a:ea typeface="Arial"/>
+                <a:cs typeface="Arial"/>
+              </a:defRPr>
+            </a:pPr>
+            <a:r>
+              <a:rPr sz="1163">
+                <a:solidFill>
+                  <a:srgbClr val="303030"/>
+                </a:solidFill>
+                <a:latin typeface="Arial"/>
+                <a:ea typeface="Arial"/>
+                <a:cs typeface="Arial"/>
+              </a:rPr>
+              <a:t>Minutes and dispositions per case</a:t>
+            </a:r>
+          </a:p>
+        </p:txBody>
+      </p:sp>
+      <p:sp>
+        <p:nvSpPr>
+          <p:cNvPr id="17431" name="impact-no-claims">
+            <a:extLst xmlns:a="http://schemas.openxmlformats.org/drawingml/2006/main">
+              <a:ext uri="{FF2B5EF4-FFF2-40B4-BE49-F238E27FC236}">
+                <a16:creationId xmlns:a16="http://schemas.microsoft.com/office/drawing/2014/main" id="{6FAD3A12-9497-4395-915B-394D1C9B9DFC}"/>
+              </a:ext>
+            </a:extLst>
+          </p:cNvPr>
+          <p:cNvSpPr>
+            <a:spLocks xmlns:a="http://schemas.openxmlformats.org/drawingml/2006/main" noGrp="1"/>
+          </p:cNvSpPr>
+          <p:nvPr/>
+        </p:nvSpPr>
+        <p:spPr>
+          <a:xfrm xmlns:a="http://schemas.openxmlformats.org/drawingml/2006/main">
+            <a:off x="609600" y="5772150"/>
+            <a:ext cx="10972800" cy="247650"/>
+          </a:xfrm>
+          <a:prstGeom xmlns:a="http://schemas.openxmlformats.org/drawingml/2006/main" prst="rect">
+            <a:avLst/>
+          </a:prstGeom>
+          <a:noFill xmlns:a="http://schemas.openxmlformats.org/drawingml/2006/main"/>
+          <a:ln xmlns:a="http://schemas.openxmlformats.org/drawingml/2006/main" w="0">
+            <a:noFill/>
+            <a:prstDash val="solid"/>
+          </a:ln>
+        </p:spPr>
+        <p:txBody>
           <a:bodyPr xmlns:a="http://schemas.openxmlformats.org/drawingml/2006/main" wrap="square" lIns="0" tIns="0" rIns="0" bIns="0" anchor="t">
             <a:normAutofit fontScale="100000"/>
           </a:bodyPr>
@@ -11653,7 +14000,7 @@
                 <a:ea typeface="Arial"/>
                 <a:cs typeface="Arial"/>
               </a:rPr>
-              <a:t>No savings, delay reduction or avoided environmental impact has been measured.</a:t>
+              <a:t>No time saved, cost saved, delay reduction or environmental impact has yet been measured.</a:t>
             </a:r>
           </a:p>
         </p:txBody>
@@ -11757,7 +14104,7 @@
           <p:cNvPr id="17409" name="Title 1">
             <a:extLst xmlns:a="http://schemas.openxmlformats.org/drawingml/2006/main">
               <a:ext uri="{FF2B5EF4-FFF2-40B4-BE49-F238E27FC236}">
-                <a16:creationId xmlns:a16="http://schemas.microsoft.com/office/drawing/2014/main" id="{5FA6A683-A030-4751-AF33-35CF66C86293}"/>
+                <a16:creationId xmlns:a16="http://schemas.microsoft.com/office/drawing/2014/main" id="{976847F2-4217-4545-87A2-FB2C2ACD3EA9}"/>
               </a:ext>
             </a:extLst>
           </p:cNvPr>
@@ -11792,7 +14139,7 @@
           <p:cNvPr id="17410" name="TextBox 8">
             <a:extLst xmlns:a="http://schemas.openxmlformats.org/drawingml/2006/main">
               <a:ext uri="{FF2B5EF4-FFF2-40B4-BE49-F238E27FC236}">
-                <a16:creationId xmlns:a16="http://schemas.microsoft.com/office/drawing/2014/main" id="{A278B1F6-0AE7-40EA-8527-66751C14B14E}"/>
+                <a16:creationId xmlns:a16="http://schemas.microsoft.com/office/drawing/2014/main" id="{B07147C7-350B-4FD1-B606-488296269BEA}"/>
               </a:ext>
             </a:extLst>
           </p:cNvPr>
@@ -11866,7 +14213,7 @@
           <p:cNvPr id="6" name="Slide Number Placeholder 5">
             <a:extLst xmlns:a="http://schemas.openxmlformats.org/drawingml/2006/main">
               <a:ext uri="{FF2B5EF4-FFF2-40B4-BE49-F238E27FC236}">
-                <a16:creationId xmlns:a16="http://schemas.microsoft.com/office/drawing/2014/main" id="{B1B3189F-B577-4B4A-A5EA-3121E32CE9CD}"/>
+                <a16:creationId xmlns:a16="http://schemas.microsoft.com/office/drawing/2014/main" id="{127F80D8-2A4A-4AA9-9497-EC86C43F3E21}"/>
               </a:ext>
             </a:extLst>
           </p:cNvPr>
@@ -11930,7 +14277,7 @@
           <p:cNvPr id="7" name="Footer Placeholder 6">
             <a:extLst xmlns:a="http://schemas.openxmlformats.org/drawingml/2006/main">
               <a:ext uri="{FF2B5EF4-FFF2-40B4-BE49-F238E27FC236}">
-                <a16:creationId xmlns:a16="http://schemas.microsoft.com/office/drawing/2014/main" id="{B0058763-7B0F-492B-B0B3-44EDDA9BC354}"/>
+                <a16:creationId xmlns:a16="http://schemas.microsoft.com/office/drawing/2014/main" id="{2CFB94E4-2FC2-4C30-A103-8DDFF2A5DB79}"/>
               </a:ext>
             </a:extLst>
           </p:cNvPr>
@@ -12057,7 +14404,7 @@
                 <a:ea typeface="Arial"/>
                 <a:cs typeface="Arial"/>
               </a:rPr>
-              <a:t>[TEAM]</a:t>
+              <a:t>PARAKH</a:t>
             </a:r>
             <a:endParaRPr/>
           </a:p>
@@ -12065,14 +14412,14 @@
       </p:sp>
       <p:pic>
         <p:nvPicPr>
-          <p:cNvPr id="17431" name="Picture 11"/>
+          <p:cNvPr id="17434" name="Picture 11"/>
           <p:cNvPicPr>
             <a:picLocks xmlns:a="http://schemas.openxmlformats.org/drawingml/2006/main" noChangeAspect="1"/>
           </p:cNvPicPr>
           <p:nvPr/>
         </p:nvPicPr>
         <p:blipFill>
-          <a:blip xmlns:r="http://schemas.openxmlformats.org/officeDocument/2006/relationships" xmlns:a="http://schemas.openxmlformats.org/drawingml/2006/main" r:embed="Rc25aafa6370342a7"/>
+          <a:blip xmlns:r="http://schemas.openxmlformats.org/officeDocument/2006/relationships" xmlns:a="http://schemas.openxmlformats.org/drawingml/2006/main" r:embed="R87f587b11a5740e3"/>
           <a:stretch xmlns:a="http://schemas.openxmlformats.org/drawingml/2006/main">
             <a:fillRect l="0" t="0" r="0" b="0"/>
           </a:stretch>
@@ -12092,19 +14439,19 @@
           <p:cNvPr id="17412" name="references-intro">
             <a:extLst xmlns:a="http://schemas.openxmlformats.org/drawingml/2006/main">
               <a:ext uri="{FF2B5EF4-FFF2-40B4-BE49-F238E27FC236}">
-                <a16:creationId xmlns:a16="http://schemas.microsoft.com/office/drawing/2014/main" id="{425CFE9C-167D-48A2-978F-C7BCAE660BE7}"/>
-              </a:ext>
-            </a:extLst>
-          </p:cNvPr>
-          <p:cNvSpPr>
-            <a:spLocks xmlns:a="http://schemas.openxmlformats.org/drawingml/2006/main" noGrp="1"/>
-          </p:cNvSpPr>
-          <p:nvPr/>
-        </p:nvSpPr>
-        <p:spPr>
-          <a:xfrm xmlns:a="http://schemas.openxmlformats.org/drawingml/2006/main">
-            <a:off x="609600" y="1343025"/>
-            <a:ext cx="10972800" cy="304800"/>
+                <a16:creationId xmlns:a16="http://schemas.microsoft.com/office/drawing/2014/main" id="{125E73F4-DF82-47FE-AD73-0C29C37FA9C9}"/>
+              </a:ext>
+            </a:extLst>
+          </p:cNvPr>
+          <p:cNvSpPr>
+            <a:spLocks xmlns:a="http://schemas.openxmlformats.org/drawingml/2006/main" noGrp="1"/>
+          </p:cNvSpPr>
+          <p:nvPr/>
+        </p:nvSpPr>
+        <p:spPr>
+          <a:xfrm xmlns:a="http://schemas.openxmlformats.org/drawingml/2006/main">
+            <a:off x="609600" y="1304925"/>
+            <a:ext cx="10972800" cy="295275"/>
           </a:xfrm>
           <a:prstGeom xmlns:a="http://schemas.openxmlformats.org/drawingml/2006/main" prst="rect">
             <a:avLst/>
@@ -12140,7 +14487,7 @@
                 <a:ea typeface="Arial"/>
                 <a:cs typeface="Arial"/>
               </a:rPr>
-              <a:t>Evidence used in this proposal</a:t>
+              <a:t>Sources and prototype evidence</a:t>
             </a:r>
           </a:p>
         </p:txBody>
@@ -12150,19 +14497,19 @@
           <p:cNvPr id="17413" name="reference-1-title">
             <a:extLst xmlns:a="http://schemas.openxmlformats.org/drawingml/2006/main">
               <a:ext uri="{FF2B5EF4-FFF2-40B4-BE49-F238E27FC236}">
-                <a16:creationId xmlns:a16="http://schemas.microsoft.com/office/drawing/2014/main" id="{B0E1CCB8-F722-4BD3-AF99-A2533BECEF26}"/>
-              </a:ext>
-            </a:extLst>
-          </p:cNvPr>
-          <p:cNvSpPr>
-            <a:spLocks xmlns:a="http://schemas.openxmlformats.org/drawingml/2006/main" noGrp="1"/>
-          </p:cNvSpPr>
-          <p:nvPr/>
-        </p:nvSpPr>
-        <p:spPr>
-          <a:xfrm xmlns:a="http://schemas.openxmlformats.org/drawingml/2006/main">
-            <a:off x="609600" y="1781175"/>
-            <a:ext cx="10972800" cy="257175"/>
+                <a16:creationId xmlns:a16="http://schemas.microsoft.com/office/drawing/2014/main" id="{1D622760-F027-4571-801A-2FCBE3442361}"/>
+              </a:ext>
+            </a:extLst>
+          </p:cNvPr>
+          <p:cNvSpPr>
+            <a:spLocks xmlns:a="http://schemas.openxmlformats.org/drawingml/2006/main" noGrp="1"/>
+          </p:cNvSpPr>
+          <p:nvPr/>
+        </p:nvSpPr>
+        <p:spPr>
+          <a:xfrm xmlns:a="http://schemas.openxmlformats.org/drawingml/2006/main">
+            <a:off x="666750" y="1752600"/>
+            <a:ext cx="10858500" cy="238125"/>
           </a:xfrm>
           <a:prstGeom xmlns:a="http://schemas.openxmlformats.org/drawingml/2006/main" prst="rect">
             <a:avLst/>
@@ -12180,7 +14527,7 @@
           <a:lstStyle xmlns:a="http://schemas.openxmlformats.org/drawingml/2006/main"/>
           <a:p xmlns:a="http://schemas.openxmlformats.org/drawingml/2006/main">
             <a:pPr algn="l">
-              <a:defRPr sz="1463" b="1">
+              <a:defRPr sz="1388" b="1">
                 <a:solidFill>
                   <a:srgbClr val="1F497D"/>
                 </a:solidFill>
@@ -12190,14 +14537,14 @@
               </a:defRPr>
             </a:pPr>
             <a:r>
-              <a:rPr sz="1463" b="1" u="sng">
+              <a:rPr sz="1388" b="1" u="sng">
                 <a:solidFill>
                   <a:srgbClr val="1F497D"/>
                 </a:solidFill>
                 <a:latin typeface="Arial"/>
                 <a:ea typeface="Arial"/>
                 <a:cs typeface="Arial"/>
-                <a:hlinkClick xmlns:r="http://schemas.openxmlformats.org/officeDocument/2006/relationships" r:id="R98959422da584f67"/>
+                <a:hlinkClick xmlns:r="http://schemas.openxmlformats.org/officeDocument/2006/relationships" r:id="R0d2b44c668de4e9b"/>
               </a:rPr>
               <a:t>MoSPI • PAIMANA Flash Report • April 2026</a:t>
             </a:r>
@@ -12209,19 +14556,19 @@
           <p:cNvPr id="17414" name="reference-1-detail">
             <a:extLst xmlns:a="http://schemas.openxmlformats.org/drawingml/2006/main">
               <a:ext uri="{FF2B5EF4-FFF2-40B4-BE49-F238E27FC236}">
-                <a16:creationId xmlns:a16="http://schemas.microsoft.com/office/drawing/2014/main" id="{2AFC972A-E6DC-4986-918B-2EA477E6D59F}"/>
-              </a:ext>
-            </a:extLst>
-          </p:cNvPr>
-          <p:cNvSpPr>
-            <a:spLocks xmlns:a="http://schemas.openxmlformats.org/drawingml/2006/main" noGrp="1"/>
-          </p:cNvSpPr>
-          <p:nvPr/>
-        </p:nvSpPr>
-        <p:spPr>
-          <a:xfrm xmlns:a="http://schemas.openxmlformats.org/drawingml/2006/main">
-            <a:off x="838200" y="2057400"/>
-            <a:ext cx="10744200" cy="371475"/>
+                <a16:creationId xmlns:a16="http://schemas.microsoft.com/office/drawing/2014/main" id="{EAF587B1-1F4A-4B2B-B2EF-9CC49183F48E}"/>
+              </a:ext>
+            </a:extLst>
+          </p:cNvPr>
+          <p:cNvSpPr>
+            <a:spLocks xmlns:a="http://schemas.openxmlformats.org/drawingml/2006/main" noGrp="1"/>
+          </p:cNvSpPr>
+          <p:nvPr/>
+        </p:nvSpPr>
+        <p:spPr>
+          <a:xfrm xmlns:a="http://schemas.openxmlformats.org/drawingml/2006/main">
+            <a:off x="838200" y="2009775"/>
+            <a:ext cx="10687050" cy="342900"/>
           </a:xfrm>
           <a:prstGeom xmlns:a="http://schemas.openxmlformats.org/drawingml/2006/main" prst="rect">
             <a:avLst/>
@@ -12239,7 +14586,7 @@
           <a:lstStyle xmlns:a="http://schemas.openxmlformats.org/drawingml/2006/main"/>
           <a:p xmlns:a="http://schemas.openxmlformats.org/drawingml/2006/main">
             <a:pPr algn="l">
-              <a:defRPr sz="1313">
+              <a:defRPr sz="1238">
                 <a:solidFill>
                   <a:srgbClr val="303030"/>
                 </a:solidFill>
@@ -12249,7 +14596,7 @@
               </a:defRPr>
             </a:pPr>
             <a:r>
-              <a:rPr sz="1313">
+              <a:rPr sz="1238">
                 <a:solidFill>
                   <a:srgbClr val="303030"/>
                 </a:solidFill>
@@ -12257,7 +14604,7 @@
                 <a:ea typeface="Arial"/>
                 <a:cs typeface="Arial"/>
               </a:rPr>
-              <a:t>Pages 1–3 and Table 6: 1,981 projects; ₹37.13 lakh crore original cost; ₹42.78 lakh crore revised cost; ₹20.36 lakh crore expenditure.</a:t>
+              <a:t>Portfolio scale and Table 6: 1,981 projects, 17 ministries/departments, ₹42.78 lakh crore revised cost.</a:t>
             </a:r>
           </a:p>
         </p:txBody>
@@ -12267,25 +14614,25 @@
           <p:cNvPr id="17415" name="reference-1-divider">
             <a:extLst xmlns:a="http://schemas.openxmlformats.org/drawingml/2006/main">
               <a:ext uri="{FF2B5EF4-FFF2-40B4-BE49-F238E27FC236}">
-                <a16:creationId xmlns:a16="http://schemas.microsoft.com/office/drawing/2014/main" id="{04504C69-307F-470B-B3ED-B159BCDB4239}"/>
-              </a:ext>
-            </a:extLst>
-          </p:cNvPr>
-          <p:cNvSpPr>
-            <a:spLocks xmlns:a="http://schemas.openxmlformats.org/drawingml/2006/main" noGrp="1"/>
-          </p:cNvSpPr>
-          <p:nvPr/>
-        </p:nvSpPr>
-        <p:spPr>
-          <a:xfrm xmlns:a="http://schemas.openxmlformats.org/drawingml/2006/main">
-            <a:off x="609600" y="2466975"/>
-            <a:ext cx="10972800" cy="9525"/>
+                <a16:creationId xmlns:a16="http://schemas.microsoft.com/office/drawing/2014/main" id="{CC6C63AA-6450-4FF9-976F-71C82DAE8F95}"/>
+              </a:ext>
+            </a:extLst>
+          </p:cNvPr>
+          <p:cNvSpPr>
+            <a:spLocks xmlns:a="http://schemas.openxmlformats.org/drawingml/2006/main" noGrp="1"/>
+          </p:cNvSpPr>
+          <p:nvPr/>
+        </p:nvSpPr>
+        <p:spPr>
+          <a:xfrm xmlns:a="http://schemas.openxmlformats.org/drawingml/2006/main">
+            <a:off x="666750" y="2400300"/>
+            <a:ext cx="10858500" cy="9525"/>
           </a:xfrm>
           <a:prstGeom xmlns:a="http://schemas.openxmlformats.org/drawingml/2006/main" prst="rect">
             <a:avLst/>
           </a:prstGeom>
           <a:solidFill xmlns:a="http://schemas.openxmlformats.org/drawingml/2006/main">
-            <a:srgbClr val="D9E0E6"/>
+            <a:srgbClr val="D6DEE5"/>
           </a:solidFill>
           <a:ln xmlns:a="http://schemas.openxmlformats.org/drawingml/2006/main" w="0">
             <a:noFill/>
@@ -12298,19 +14645,19 @@
           <p:cNvPr id="17416" name="reference-2-title">
             <a:extLst xmlns:a="http://schemas.openxmlformats.org/drawingml/2006/main">
               <a:ext uri="{FF2B5EF4-FFF2-40B4-BE49-F238E27FC236}">
-                <a16:creationId xmlns:a16="http://schemas.microsoft.com/office/drawing/2014/main" id="{381C84E8-40D6-425F-B6F9-837F9D5A91F0}"/>
-              </a:ext>
-            </a:extLst>
-          </p:cNvPr>
-          <p:cNvSpPr>
-            <a:spLocks xmlns:a="http://schemas.openxmlformats.org/drawingml/2006/main" noGrp="1"/>
-          </p:cNvSpPr>
-          <p:nvPr/>
-        </p:nvSpPr>
-        <p:spPr>
-          <a:xfrm xmlns:a="http://schemas.openxmlformats.org/drawingml/2006/main">
-            <a:off x="609600" y="2619375"/>
-            <a:ext cx="10972800" cy="257175"/>
+                <a16:creationId xmlns:a16="http://schemas.microsoft.com/office/drawing/2014/main" id="{2ED49439-1F71-4BD7-929F-7A921EE1D0E4}"/>
+              </a:ext>
+            </a:extLst>
+          </p:cNvPr>
+          <p:cNvSpPr>
+            <a:spLocks xmlns:a="http://schemas.openxmlformats.org/drawingml/2006/main" noGrp="1"/>
+          </p:cNvSpPr>
+          <p:nvPr/>
+        </p:nvSpPr>
+        <p:spPr>
+          <a:xfrm xmlns:a="http://schemas.openxmlformats.org/drawingml/2006/main">
+            <a:off x="666750" y="2552700"/>
+            <a:ext cx="10858500" cy="238125"/>
           </a:xfrm>
           <a:prstGeom xmlns:a="http://schemas.openxmlformats.org/drawingml/2006/main" prst="rect">
             <a:avLst/>
@@ -12328,7 +14675,7 @@
           <a:lstStyle xmlns:a="http://schemas.openxmlformats.org/drawingml/2006/main"/>
           <a:p xmlns:a="http://schemas.openxmlformats.org/drawingml/2006/main">
             <a:pPr algn="l">
-              <a:defRPr sz="1463" b="1">
+              <a:defRPr sz="1388" b="1">
                 <a:solidFill>
                   <a:srgbClr val="1F497D"/>
                 </a:solidFill>
@@ -12338,16 +14685,16 @@
               </a:defRPr>
             </a:pPr>
             <a:r>
-              <a:rPr sz="1463" b="1" u="sng">
+              <a:rPr sz="1388" b="1" u="sng">
                 <a:solidFill>
                   <a:srgbClr val="1F497D"/>
                 </a:solidFill>
                 <a:latin typeface="Arial"/>
                 <a:ea typeface="Arial"/>
                 <a:cs typeface="Arial"/>
-                <a:hlinkClick xmlns:r="http://schemas.openxmlformats.org/officeDocument/2006/relationships" r:id="R5acdee25293f41a6"/>
+                <a:hlinkClick xmlns:r="http://schemas.openxmlformats.org/officeDocument/2006/relationships" r:id="R79031f6d0c0d4873"/>
               </a:rPr>
-              <a:t>MoSPI • PAIMANA project-monitoring portal</a:t>
+              <a:t>MoSPI • PAIMANA public dashboard</a:t>
             </a:r>
           </a:p>
         </p:txBody>
@@ -12357,19 +14704,19 @@
           <p:cNvPr id="17417" name="reference-2-detail">
             <a:extLst xmlns:a="http://schemas.openxmlformats.org/drawingml/2006/main">
               <a:ext uri="{FF2B5EF4-FFF2-40B4-BE49-F238E27FC236}">
-                <a16:creationId xmlns:a16="http://schemas.microsoft.com/office/drawing/2014/main" id="{A16766B8-1650-4421-8B0A-8BE04404BEF3}"/>
-              </a:ext>
-            </a:extLst>
-          </p:cNvPr>
-          <p:cNvSpPr>
-            <a:spLocks xmlns:a="http://schemas.openxmlformats.org/drawingml/2006/main" noGrp="1"/>
-          </p:cNvSpPr>
-          <p:nvPr/>
-        </p:nvSpPr>
-        <p:spPr>
-          <a:xfrm xmlns:a="http://schemas.openxmlformats.org/drawingml/2006/main">
-            <a:off x="838200" y="2895600"/>
-            <a:ext cx="10744200" cy="371475"/>
+                <a16:creationId xmlns:a16="http://schemas.microsoft.com/office/drawing/2014/main" id="{FA1700F3-D2BF-42E3-A736-7CF71797FD5A}"/>
+              </a:ext>
+            </a:extLst>
+          </p:cNvPr>
+          <p:cNvSpPr>
+            <a:spLocks xmlns:a="http://schemas.openxmlformats.org/drawingml/2006/main" noGrp="1"/>
+          </p:cNvSpPr>
+          <p:nvPr/>
+        </p:nvSpPr>
+        <p:spPr>
+          <a:xfrm xmlns:a="http://schemas.openxmlformats.org/drawingml/2006/main">
+            <a:off x="838200" y="2809875"/>
+            <a:ext cx="10687050" cy="342900"/>
           </a:xfrm>
           <a:prstGeom xmlns:a="http://schemas.openxmlformats.org/drawingml/2006/main" prst="rect">
             <a:avLst/>
@@ -12387,7 +14734,7 @@
           <a:lstStyle xmlns:a="http://schemas.openxmlformats.org/drawingml/2006/main"/>
           <a:p xmlns:a="http://schemas.openxmlformats.org/drawingml/2006/main">
             <a:pPr algn="l">
-              <a:defRPr sz="1313">
+              <a:defRPr sz="1238">
                 <a:solidFill>
                   <a:srgbClr val="303030"/>
                 </a:solidFill>
@@ -12397,7 +14744,7 @@
               </a:defRPr>
             </a:pPr>
             <a:r>
-              <a:rPr sz="1313">
+              <a:rPr sz="1238">
                 <a:solidFill>
                   <a:srgbClr val="303030"/>
                 </a:solidFill>
@@ -12405,7 +14752,7 @@
                 <a:ea typeface="Arial"/>
                 <a:cs typeface="Arial"/>
               </a:rPr>
-              <a:t>Official report page and public project dashboard used to understand report fields and the monthly reporting context.</a:t>
+              <a:t>Official project-monitoring context and public portfolio view.</a:t>
             </a:r>
           </a:p>
         </p:txBody>
@@ -12415,25 +14762,25 @@
           <p:cNvPr id="17418" name="reference-2-divider">
             <a:extLst xmlns:a="http://schemas.openxmlformats.org/drawingml/2006/main">
               <a:ext uri="{FF2B5EF4-FFF2-40B4-BE49-F238E27FC236}">
-                <a16:creationId xmlns:a16="http://schemas.microsoft.com/office/drawing/2014/main" id="{00268ED0-7A46-4D74-AC86-21EC2F5F8DC5}"/>
-              </a:ext>
-            </a:extLst>
-          </p:cNvPr>
-          <p:cNvSpPr>
-            <a:spLocks xmlns:a="http://schemas.openxmlformats.org/drawingml/2006/main" noGrp="1"/>
-          </p:cNvSpPr>
-          <p:nvPr/>
-        </p:nvSpPr>
-        <p:spPr>
-          <a:xfrm xmlns:a="http://schemas.openxmlformats.org/drawingml/2006/main">
-            <a:off x="609600" y="3305175"/>
-            <a:ext cx="10972800" cy="9525"/>
+                <a16:creationId xmlns:a16="http://schemas.microsoft.com/office/drawing/2014/main" id="{BA84A357-2B2D-441A-9A27-AB0C94183A6B}"/>
+              </a:ext>
+            </a:extLst>
+          </p:cNvPr>
+          <p:cNvSpPr>
+            <a:spLocks xmlns:a="http://schemas.openxmlformats.org/drawingml/2006/main" noGrp="1"/>
+          </p:cNvSpPr>
+          <p:nvPr/>
+        </p:nvSpPr>
+        <p:spPr>
+          <a:xfrm xmlns:a="http://schemas.openxmlformats.org/drawingml/2006/main">
+            <a:off x="666750" y="3200400"/>
+            <a:ext cx="10858500" cy="9525"/>
           </a:xfrm>
           <a:prstGeom xmlns:a="http://schemas.openxmlformats.org/drawingml/2006/main" prst="rect">
             <a:avLst/>
           </a:prstGeom>
           <a:solidFill xmlns:a="http://schemas.openxmlformats.org/drawingml/2006/main">
-            <a:srgbClr val="D9E0E6"/>
+            <a:srgbClr val="D6DEE5"/>
           </a:solidFill>
           <a:ln xmlns:a="http://schemas.openxmlformats.org/drawingml/2006/main" w="0">
             <a:noFill/>
@@ -12446,19 +14793,19 @@
           <p:cNvPr id="17419" name="reference-3-title">
             <a:extLst xmlns:a="http://schemas.openxmlformats.org/drawingml/2006/main">
               <a:ext uri="{FF2B5EF4-FFF2-40B4-BE49-F238E27FC236}">
-                <a16:creationId xmlns:a16="http://schemas.microsoft.com/office/drawing/2014/main" id="{3C18CDB5-FEFA-4B25-9435-729CBA78CF20}"/>
-              </a:ext>
-            </a:extLst>
-          </p:cNvPr>
-          <p:cNvSpPr>
-            <a:spLocks xmlns:a="http://schemas.openxmlformats.org/drawingml/2006/main" noGrp="1"/>
-          </p:cNvSpPr>
-          <p:nvPr/>
-        </p:nvSpPr>
-        <p:spPr>
-          <a:xfrm xmlns:a="http://schemas.openxmlformats.org/drawingml/2006/main">
-            <a:off x="609600" y="3457575"/>
-            <a:ext cx="10972800" cy="257175"/>
+                <a16:creationId xmlns:a16="http://schemas.microsoft.com/office/drawing/2014/main" id="{7E77E5D9-080A-427F-BD34-CD4968776DA4}"/>
+              </a:ext>
+            </a:extLst>
+          </p:cNvPr>
+          <p:cNvSpPr>
+            <a:spLocks xmlns:a="http://schemas.openxmlformats.org/drawingml/2006/main" noGrp="1"/>
+          </p:cNvSpPr>
+          <p:nvPr/>
+        </p:nvSpPr>
+        <p:spPr>
+          <a:xfrm xmlns:a="http://schemas.openxmlformats.org/drawingml/2006/main">
+            <a:off x="666750" y="3352800"/>
+            <a:ext cx="10858500" cy="238125"/>
           </a:xfrm>
           <a:prstGeom xmlns:a="http://schemas.openxmlformats.org/drawingml/2006/main" prst="rect">
             <a:avLst/>
@@ -12476,7 +14823,7 @@
           <a:lstStyle xmlns:a="http://schemas.openxmlformats.org/drawingml/2006/main"/>
           <a:p xmlns:a="http://schemas.openxmlformats.org/drawingml/2006/main">
             <a:pPr algn="l">
-              <a:defRPr sz="1463" b="1">
+              <a:defRPr sz="1388" b="1">
                 <a:solidFill>
                   <a:srgbClr val="1F497D"/>
                 </a:solidFill>
@@ -12486,7 +14833,7 @@
               </a:defRPr>
             </a:pPr>
             <a:r>
-              <a:rPr sz="1463" b="1">
+              <a:rPr sz="1388" b="1">
                 <a:solidFill>
                   <a:srgbClr val="1F497D"/>
                 </a:solidFill>
@@ -12504,19 +14851,19 @@
           <p:cNvPr id="17420" name="reference-3-detail">
             <a:extLst xmlns:a="http://schemas.openxmlformats.org/drawingml/2006/main">
               <a:ext uri="{FF2B5EF4-FFF2-40B4-BE49-F238E27FC236}">
-                <a16:creationId xmlns:a16="http://schemas.microsoft.com/office/drawing/2014/main" id="{1A5331A5-7698-47A1-8643-77EAB8FC5711}"/>
-              </a:ext>
-            </a:extLst>
-          </p:cNvPr>
-          <p:cNvSpPr>
-            <a:spLocks xmlns:a="http://schemas.openxmlformats.org/drawingml/2006/main" noGrp="1"/>
-          </p:cNvSpPr>
-          <p:nvPr/>
-        </p:nvSpPr>
-        <p:spPr>
-          <a:xfrm xmlns:a="http://schemas.openxmlformats.org/drawingml/2006/main">
-            <a:off x="838200" y="3733800"/>
-            <a:ext cx="10744200" cy="371475"/>
+                <a16:creationId xmlns:a16="http://schemas.microsoft.com/office/drawing/2014/main" id="{2DFAD8BD-05B0-4B88-9B95-4B8E790CEB08}"/>
+              </a:ext>
+            </a:extLst>
+          </p:cNvPr>
+          <p:cNvSpPr>
+            <a:spLocks xmlns:a="http://schemas.openxmlformats.org/drawingml/2006/main" noGrp="1"/>
+          </p:cNvSpPr>
+          <p:nvPr/>
+        </p:nvSpPr>
+        <p:spPr>
+          <a:xfrm xmlns:a="http://schemas.openxmlformats.org/drawingml/2006/main">
+            <a:off x="838200" y="3609975"/>
+            <a:ext cx="10687050" cy="342900"/>
           </a:xfrm>
           <a:prstGeom xmlns:a="http://schemas.openxmlformats.org/drawingml/2006/main" prst="rect">
             <a:avLst/>
@@ -12534,7 +14881,7 @@
           <a:lstStyle xmlns:a="http://schemas.openxmlformats.org/drawingml/2006/main"/>
           <a:p xmlns:a="http://schemas.openxmlformats.org/drawingml/2006/main">
             <a:pPr algn="l">
-              <a:defRPr sz="1313">
+              <a:defRPr sz="1238">
                 <a:solidFill>
                   <a:srgbClr val="303030"/>
                 </a:solidFill>
@@ -12544,7 +14891,7 @@
               </a:defRPr>
             </a:pPr>
             <a:r>
-              <a:rPr sz="1313">
+              <a:rPr sz="1238">
                 <a:solidFill>
                   <a:srgbClr val="303030"/>
                 </a:solidFill>
@@ -12552,7 +14899,7 @@
                 <a:ea typeface="Arial"/>
                 <a:cs typeface="Arial"/>
               </a:rPr>
-              <a:t>Official challenge scope supplied by the team: predictive analytics, model comparison, CUF-field assessment and decision support.</a:t>
+              <a:t>Team-provided challenge brief: prediction, baseline comparison, CUF assessment and early-warning decision support.</a:t>
             </a:r>
           </a:p>
         </p:txBody>
@@ -12562,25 +14909,25 @@
           <p:cNvPr id="17421" name="reference-3-divider">
             <a:extLst xmlns:a="http://schemas.openxmlformats.org/drawingml/2006/main">
               <a:ext uri="{FF2B5EF4-FFF2-40B4-BE49-F238E27FC236}">
-                <a16:creationId xmlns:a16="http://schemas.microsoft.com/office/drawing/2014/main" id="{04279C88-CE4F-4213-88D5-1F8C55E4073D}"/>
-              </a:ext>
-            </a:extLst>
-          </p:cNvPr>
-          <p:cNvSpPr>
-            <a:spLocks xmlns:a="http://schemas.openxmlformats.org/drawingml/2006/main" noGrp="1"/>
-          </p:cNvSpPr>
-          <p:nvPr/>
-        </p:nvSpPr>
-        <p:spPr>
-          <a:xfrm xmlns:a="http://schemas.openxmlformats.org/drawingml/2006/main">
-            <a:off x="609600" y="4143375"/>
-            <a:ext cx="10972800" cy="9525"/>
+                <a16:creationId xmlns:a16="http://schemas.microsoft.com/office/drawing/2014/main" id="{EC26DEC0-059C-4A24-A05B-3E27545C1E2F}"/>
+              </a:ext>
+            </a:extLst>
+          </p:cNvPr>
+          <p:cNvSpPr>
+            <a:spLocks xmlns:a="http://schemas.openxmlformats.org/drawingml/2006/main" noGrp="1"/>
+          </p:cNvSpPr>
+          <p:nvPr/>
+        </p:nvSpPr>
+        <p:spPr>
+          <a:xfrm xmlns:a="http://schemas.openxmlformats.org/drawingml/2006/main">
+            <a:off x="666750" y="4000500"/>
+            <a:ext cx="10858500" cy="9525"/>
           </a:xfrm>
           <a:prstGeom xmlns:a="http://schemas.openxmlformats.org/drawingml/2006/main" prst="rect">
             <a:avLst/>
           </a:prstGeom>
           <a:solidFill xmlns:a="http://schemas.openxmlformats.org/drawingml/2006/main">
-            <a:srgbClr val="D9E0E6"/>
+            <a:srgbClr val="D6DEE5"/>
           </a:solidFill>
           <a:ln xmlns:a="http://schemas.openxmlformats.org/drawingml/2006/main" w="0">
             <a:noFill/>
@@ -12593,19 +14940,19 @@
           <p:cNvPr id="17422" name="reference-4-title">
             <a:extLst xmlns:a="http://schemas.openxmlformats.org/drawingml/2006/main">
               <a:ext uri="{FF2B5EF4-FFF2-40B4-BE49-F238E27FC236}">
-                <a16:creationId xmlns:a16="http://schemas.microsoft.com/office/drawing/2014/main" id="{A9D50382-3B58-4134-9F04-D1673F0E9772}"/>
-              </a:ext>
-            </a:extLst>
-          </p:cNvPr>
-          <p:cNvSpPr>
-            <a:spLocks xmlns:a="http://schemas.openxmlformats.org/drawingml/2006/main" noGrp="1"/>
-          </p:cNvSpPr>
-          <p:nvPr/>
-        </p:nvSpPr>
-        <p:spPr>
-          <a:xfrm xmlns:a="http://schemas.openxmlformats.org/drawingml/2006/main">
-            <a:off x="609600" y="4295775"/>
-            <a:ext cx="10972800" cy="257175"/>
+                <a16:creationId xmlns:a16="http://schemas.microsoft.com/office/drawing/2014/main" id="{24C4F30A-CB01-4840-9B20-60806EBCE308}"/>
+              </a:ext>
+            </a:extLst>
+          </p:cNvPr>
+          <p:cNvSpPr>
+            <a:spLocks xmlns:a="http://schemas.openxmlformats.org/drawingml/2006/main" noGrp="1"/>
+          </p:cNvSpPr>
+          <p:nvPr/>
+        </p:nvSpPr>
+        <p:spPr>
+          <a:xfrm xmlns:a="http://schemas.openxmlformats.org/drawingml/2006/main">
+            <a:off x="666750" y="4152900"/>
+            <a:ext cx="10858500" cy="238125"/>
           </a:xfrm>
           <a:prstGeom xmlns:a="http://schemas.openxmlformats.org/drawingml/2006/main" prst="rect">
             <a:avLst/>
@@ -12623,7 +14970,7 @@
           <a:lstStyle xmlns:a="http://schemas.openxmlformats.org/drawingml/2006/main"/>
           <a:p xmlns:a="http://schemas.openxmlformats.org/drawingml/2006/main">
             <a:pPr algn="l">
-              <a:defRPr sz="1463" b="1">
+              <a:defRPr sz="1388" b="1">
                 <a:solidFill>
                   <a:srgbClr val="1F497D"/>
                 </a:solidFill>
@@ -12633,16 +14980,16 @@
               </a:defRPr>
             </a:pPr>
             <a:r>
-              <a:rPr sz="1463" b="1" u="sng">
+              <a:rPr sz="1388" b="1" u="sng">
                 <a:solidFill>
                   <a:srgbClr val="1F497D"/>
                 </a:solidFill>
                 <a:latin typeface="Arial"/>
                 <a:ea typeface="Arial"/>
                 <a:cs typeface="Arial"/>
-                <a:hlinkClick xmlns:r="http://schemas.openxmlformats.org/officeDocument/2006/relationships" r:id="Rcd39006b35d941da"/>
+                <a:hlinkClick xmlns:r="http://schemas.openxmlformats.org/officeDocument/2006/relationships" r:id="Ra4b72fa7ec0f4cbf"/>
               </a:rPr>
-              <a:t>PARAKH prototype • project source and evaluation artifacts</a:t>
+              <a:t>PARAKH • source and prototype artifacts</a:t>
             </a:r>
           </a:p>
         </p:txBody>
@@ -12652,19 +14999,19 @@
           <p:cNvPr id="17423" name="reference-4-detail">
             <a:extLst xmlns:a="http://schemas.openxmlformats.org/drawingml/2006/main">
               <a:ext uri="{FF2B5EF4-FFF2-40B4-BE49-F238E27FC236}">
-                <a16:creationId xmlns:a16="http://schemas.microsoft.com/office/drawing/2014/main" id="{783F0542-DF46-44A4-A011-38E452E3C123}"/>
-              </a:ext>
-            </a:extLst>
-          </p:cNvPr>
-          <p:cNvSpPr>
-            <a:spLocks xmlns:a="http://schemas.openxmlformats.org/drawingml/2006/main" noGrp="1"/>
-          </p:cNvSpPr>
-          <p:nvPr/>
-        </p:nvSpPr>
-        <p:spPr>
-          <a:xfrm xmlns:a="http://schemas.openxmlformats.org/drawingml/2006/main">
-            <a:off x="838200" y="4572000"/>
-            <a:ext cx="10744200" cy="371475"/>
+                <a16:creationId xmlns:a16="http://schemas.microsoft.com/office/drawing/2014/main" id="{83E17CE7-4B95-42F2-B37F-3A68E5B0841F}"/>
+              </a:ext>
+            </a:extLst>
+          </p:cNvPr>
+          <p:cNvSpPr>
+            <a:spLocks xmlns:a="http://schemas.openxmlformats.org/drawingml/2006/main" noGrp="1"/>
+          </p:cNvSpPr>
+          <p:nvPr/>
+        </p:nvSpPr>
+        <p:spPr>
+          <a:xfrm xmlns:a="http://schemas.openxmlformats.org/drawingml/2006/main">
+            <a:off x="838200" y="4410075"/>
+            <a:ext cx="10687050" cy="342900"/>
           </a:xfrm>
           <a:prstGeom xmlns:a="http://schemas.openxmlformats.org/drawingml/2006/main" prst="rect">
             <a:avLst/>
@@ -12682,7 +15029,7 @@
           <a:lstStyle xmlns:a="http://schemas.openxmlformats.org/drawingml/2006/main"/>
           <a:p xmlns:a="http://schemas.openxmlformats.org/drawingml/2006/main">
             <a:pPr algn="l">
-              <a:defRPr sz="1313">
+              <a:defRPr sz="1238">
                 <a:solidFill>
                   <a:srgbClr val="303030"/>
                 </a:solidFill>
@@ -12692,7 +15039,7 @@
               </a:defRPr>
             </a:pPr>
             <a:r>
-              <a:rPr sz="1313">
+              <a:rPr sz="1238">
                 <a:solidFill>
                   <a:srgbClr val="303030"/>
                 </a:solidFill>
@@ -12700,29 +15047,60 @@
                 <a:ea typeface="Arial"/>
                 <a:cs typeface="Arial"/>
               </a:rPr>
-              <a:t>Four monthly source PDFs (April–July 2026); src/checker.py; src/model_train.py; data/processed/model_metrics.json.</a:t>
-            </a:r>
-          </a:p>
-        </p:txBody>
-      </p:sp>
-      <p:sp>
-        <p:nvSpPr>
-          <p:cNvPr id="17424" name="references-caveat">
-            <a:extLst xmlns:a="http://schemas.openxmlformats.org/drawingml/2006/main">
-              <a:ext uri="{FF2B5EF4-FFF2-40B4-BE49-F238E27FC236}">
-                <a16:creationId xmlns:a16="http://schemas.microsoft.com/office/drawing/2014/main" id="{9DD34A93-E8F2-469E-964C-2697F25D261F}"/>
-              </a:ext>
-            </a:extLst>
-          </p:cNvPr>
-          <p:cNvSpPr>
-            <a:spLocks xmlns:a="http://schemas.openxmlformats.org/drawingml/2006/main" noGrp="1"/>
-          </p:cNvSpPr>
-          <p:nvPr/>
-        </p:nvSpPr>
-        <p:spPr>
-          <a:xfrm xmlns:a="http://schemas.openxmlformats.org/drawingml/2006/main">
-            <a:off x="609600" y="5286375"/>
-            <a:ext cx="10972800" cy="419100"/>
+              <a:t>17 monthly source PDFs; src/checker.py; src/model_train.py; data/processed/model_metrics.json and portfolio_kpis.json.</a:t>
+            </a:r>
+          </a:p>
+        </p:txBody>
+      </p:sp>
+      <p:sp>
+        <p:nvSpPr>
+          <p:cNvPr id="17424" name="reference-4-divider">
+            <a:extLst xmlns:a="http://schemas.openxmlformats.org/drawingml/2006/main">
+              <a:ext uri="{FF2B5EF4-FFF2-40B4-BE49-F238E27FC236}">
+                <a16:creationId xmlns:a16="http://schemas.microsoft.com/office/drawing/2014/main" id="{B67C28DE-A6A4-4BBC-B9E3-611DE8BEE510}"/>
+              </a:ext>
+            </a:extLst>
+          </p:cNvPr>
+          <p:cNvSpPr>
+            <a:spLocks xmlns:a="http://schemas.openxmlformats.org/drawingml/2006/main" noGrp="1"/>
+          </p:cNvSpPr>
+          <p:nvPr/>
+        </p:nvSpPr>
+        <p:spPr>
+          <a:xfrm xmlns:a="http://schemas.openxmlformats.org/drawingml/2006/main">
+            <a:off x="666750" y="4800600"/>
+            <a:ext cx="10858500" cy="9525"/>
+          </a:xfrm>
+          <a:prstGeom xmlns:a="http://schemas.openxmlformats.org/drawingml/2006/main" prst="rect">
+            <a:avLst/>
+          </a:prstGeom>
+          <a:solidFill xmlns:a="http://schemas.openxmlformats.org/drawingml/2006/main">
+            <a:srgbClr val="D6DEE5"/>
+          </a:solidFill>
+          <a:ln xmlns:a="http://schemas.openxmlformats.org/drawingml/2006/main" w="0">
+            <a:noFill/>
+            <a:prstDash val="solid"/>
+          </a:ln>
+        </p:spPr>
+      </p:sp>
+      <p:sp>
+        <p:nvSpPr>
+          <p:cNvPr id="17425" name="reference-5-title">
+            <a:extLst xmlns:a="http://schemas.openxmlformats.org/drawingml/2006/main">
+              <a:ext uri="{FF2B5EF4-FFF2-40B4-BE49-F238E27FC236}">
+                <a16:creationId xmlns:a16="http://schemas.microsoft.com/office/drawing/2014/main" id="{94D79ABC-986E-4135-B210-CE3D4E871683}"/>
+              </a:ext>
+            </a:extLst>
+          </p:cNvPr>
+          <p:cNvSpPr>
+            <a:spLocks xmlns:a="http://schemas.openxmlformats.org/drawingml/2006/main" noGrp="1"/>
+          </p:cNvSpPr>
+          <p:nvPr/>
+        </p:nvSpPr>
+        <p:spPr>
+          <a:xfrm xmlns:a="http://schemas.openxmlformats.org/drawingml/2006/main">
+            <a:off x="666750" y="4953000"/>
+            <a:ext cx="10858500" cy="238125"/>
           </a:xfrm>
           <a:prstGeom xmlns:a="http://schemas.openxmlformats.org/drawingml/2006/main" prst="rect">
             <a:avLst/>
@@ -12740,7 +15118,123 @@
           <a:lstStyle xmlns:a="http://schemas.openxmlformats.org/drawingml/2006/main"/>
           <a:p xmlns:a="http://schemas.openxmlformats.org/drawingml/2006/main">
             <a:pPr algn="l">
-              <a:defRPr sz="1275">
+              <a:defRPr sz="1388" b="1">
+                <a:solidFill>
+                  <a:srgbClr val="1F497D"/>
+                </a:solidFill>
+                <a:latin typeface="Arial"/>
+                <a:ea typeface="Arial"/>
+                <a:cs typeface="Arial"/>
+              </a:defRPr>
+            </a:pPr>
+            <a:r>
+              <a:rPr sz="1388" b="1">
+                <a:solidFill>
+                  <a:srgbClr val="1F497D"/>
+                </a:solidFill>
+                <a:latin typeface="Arial"/>
+                <a:ea typeface="Arial"/>
+                <a:cs typeface="Arial"/>
+              </a:rPr>
+              <a:t>Model evaluation • current saved run</a:t>
+            </a:r>
+          </a:p>
+        </p:txBody>
+      </p:sp>
+      <p:sp>
+        <p:nvSpPr>
+          <p:cNvPr id="17426" name="reference-5-detail">
+            <a:extLst xmlns:a="http://schemas.openxmlformats.org/drawingml/2006/main">
+              <a:ext uri="{FF2B5EF4-FFF2-40B4-BE49-F238E27FC236}">
+                <a16:creationId xmlns:a16="http://schemas.microsoft.com/office/drawing/2014/main" id="{E90302C0-98A2-4301-B68A-836EB399F725}"/>
+              </a:ext>
+            </a:extLst>
+          </p:cNvPr>
+          <p:cNvSpPr>
+            <a:spLocks xmlns:a="http://schemas.openxmlformats.org/drawingml/2006/main" noGrp="1"/>
+          </p:cNvSpPr>
+          <p:nvPr/>
+        </p:nvSpPr>
+        <p:spPr>
+          <a:xfrm xmlns:a="http://schemas.openxmlformats.org/drawingml/2006/main">
+            <a:off x="838200" y="5210175"/>
+            <a:ext cx="10687050" cy="342900"/>
+          </a:xfrm>
+          <a:prstGeom xmlns:a="http://schemas.openxmlformats.org/drawingml/2006/main" prst="rect">
+            <a:avLst/>
+          </a:prstGeom>
+          <a:noFill xmlns:a="http://schemas.openxmlformats.org/drawingml/2006/main"/>
+          <a:ln xmlns:a="http://schemas.openxmlformats.org/drawingml/2006/main" w="0">
+            <a:noFill/>
+            <a:prstDash val="solid"/>
+          </a:ln>
+        </p:spPr>
+        <p:txBody>
+          <a:bodyPr xmlns:a="http://schemas.openxmlformats.org/drawingml/2006/main" wrap="square" lIns="0" tIns="0" rIns="0" bIns="0" anchor="t">
+            <a:normAutofit fontScale="100000"/>
+          </a:bodyPr>
+          <a:lstStyle xmlns:a="http://schemas.openxmlformats.org/drawingml/2006/main"/>
+          <a:p xmlns:a="http://schemas.openxmlformats.org/drawingml/2006/main">
+            <a:pPr algn="l">
+              <a:defRPr sz="1238">
+                <a:solidFill>
+                  <a:srgbClr val="303030"/>
+                </a:solidFill>
+                <a:latin typeface="Arial"/>
+                <a:ea typeface="Arial"/>
+                <a:cs typeface="Arial"/>
+              </a:defRPr>
+            </a:pPr>
+            <a:r>
+              <a:rPr sz="1238">
+                <a:solidFill>
+                  <a:srgbClr val="303030"/>
+                </a:solidFill>
+                <a:latin typeface="Arial"/>
+                <a:ea typeface="Arial"/>
+                <a:cs typeface="Arial"/>
+              </a:rPr>
+              <a:t>17 ordered report months; latest evaluation through June 2026. Cost results have one ordered test month; probabilities are uncalibrated.</a:t>
+            </a:r>
+          </a:p>
+        </p:txBody>
+      </p:sp>
+      <p:sp>
+        <p:nvSpPr>
+          <p:cNvPr id="17427" name="references-repo-caveat">
+            <a:extLst xmlns:a="http://schemas.openxmlformats.org/drawingml/2006/main">
+              <a:ext uri="{FF2B5EF4-FFF2-40B4-BE49-F238E27FC236}">
+                <a16:creationId xmlns:a16="http://schemas.microsoft.com/office/drawing/2014/main" id="{D198A532-7604-4053-973E-F937A193CA5E}"/>
+              </a:ext>
+            </a:extLst>
+          </p:cNvPr>
+          <p:cNvSpPr>
+            <a:spLocks xmlns:a="http://schemas.openxmlformats.org/drawingml/2006/main" noGrp="1"/>
+          </p:cNvSpPr>
+          <p:nvPr/>
+        </p:nvSpPr>
+        <p:spPr>
+          <a:xfrm xmlns:a="http://schemas.openxmlformats.org/drawingml/2006/main">
+            <a:off x="609600" y="5829300"/>
+            <a:ext cx="10972800" cy="323850"/>
+          </a:xfrm>
+          <a:prstGeom xmlns:a="http://schemas.openxmlformats.org/drawingml/2006/main" prst="rect">
+            <a:avLst/>
+          </a:prstGeom>
+          <a:noFill xmlns:a="http://schemas.openxmlformats.org/drawingml/2006/main"/>
+          <a:ln xmlns:a="http://schemas.openxmlformats.org/drawingml/2006/main" w="0">
+            <a:noFill/>
+            <a:prstDash val="solid"/>
+          </a:ln>
+        </p:spPr>
+        <p:txBody>
+          <a:bodyPr xmlns:a="http://schemas.openxmlformats.org/drawingml/2006/main" wrap="square" lIns="0" tIns="0" rIns="0" bIns="0" anchor="t">
+            <a:normAutofit fontScale="93563"/>
+          </a:bodyPr>
+          <a:lstStyle xmlns:a="http://schemas.openxmlformats.org/drawingml/2006/main"/>
+          <a:p xmlns:a="http://schemas.openxmlformats.org/drawingml/2006/main">
+            <a:pPr algn="l">
+              <a:defRPr sz="1163">
                 <a:solidFill>
                   <a:srgbClr val="555555"/>
                 </a:solidFill>
@@ -12750,7 +15244,7 @@
               </a:defRPr>
             </a:pPr>
             <a:r>
-              <a:rPr sz="1275">
+              <a:rPr sz="1163">
                 <a:solidFill>
                   <a:srgbClr val="555555"/>
                 </a:solidFill>
@@ -12758,7 +15252,7 @@
                 <a:ea typeface="Arial"/>
                 <a:cs typeface="Arial"/>
               </a:rPr>
-              <a:t>The prototype uses four report months only. The current code repository link is configured from the team's Git remote; confirm public access before submission.</a:t>
+              <a:t>The repository URL is taken from the configured Git remote; confirm it is publicly accessible before submission. Team name, Team ID and demo URL remain for the team to provide.</a:t>
             </a:r>
           </a:p>
         </p:txBody>
